--- a/ai101/slides/week-06.pptx
+++ b/ai101/slides/week-06.pptx
@@ -12,6 +12,11 @@
     <p:sldId id="260" r:id="rId11"/>
     <p:sldId id="261" r:id="rId12"/>
     <p:sldId id="262" r:id="rId13"/>
+    <p:sldId id="263" r:id="rId14"/>
+    <p:sldId id="264" r:id="rId15"/>
+    <p:sldId id="265" r:id="rId16"/>
+    <p:sldId id="266" r:id="rId17"/>
+    <p:sldId id="267" r:id="rId18"/>
   </p:sldIdLst>
   <p:sldSz cx="12191695" cy="6858000" type="screen4x3"/>
   <p:notesSz cx="6858000" cy="9144000"/>
@@ -3166,6 +3171,747 @@
 </p:sld>
 </file>
 
+<file path=ppt/slides/slide10.xml><?xml version="1.0" encoding="utf-8"?>
+<p:sld xmlns:a="http://schemas.openxmlformats.org/drawingml/2006/main" xmlns:p="http://schemas.openxmlformats.org/presentationml/2006/main" xmlns:r="http://schemas.openxmlformats.org/officeDocument/2006/relationships">
+  <p:cSld>
+    <p:bg>
+      <p:bgPr>
+        <a:solidFill>
+          <a:srgbClr val="102127"/>
+        </a:solidFill>
+        <a:effectLst/>
+      </p:bgPr>
+    </p:bg>
+    <p:spTree>
+      <p:nvGrpSpPr>
+        <p:cNvPr id="1" name=""/>
+        <p:cNvGrpSpPr/>
+        <p:nvPr/>
+      </p:nvGrpSpPr>
+      <p:grpSpPr/>
+      <p:sp>
+        <p:nvSpPr>
+          <p:cNvPr id="2" name="TextBox 1"/>
+          <p:cNvSpPr txBox="1"/>
+          <p:nvPr/>
+        </p:nvSpPr>
+        <p:spPr>
+          <a:xfrm>
+            <a:off x="502920" y="274320"/>
+            <a:ext cx="11155680" cy="731520"/>
+          </a:xfrm>
+          <a:prstGeom prst="rect">
+            <a:avLst/>
+          </a:prstGeom>
+          <a:noFill/>
+        </p:spPr>
+        <p:txBody>
+          <a:bodyPr wrap="none">
+            <a:spAutoFit/>
+          </a:bodyPr>
+          <a:lstStyle/>
+          <a:p>
+            <a:r>
+              <a:rPr sz="2600" b="1">
+                <a:solidFill>
+                  <a:srgbClr val="01AEFD"/>
+                </a:solidFill>
+              </a:rPr>
+              <a:t>Type this into style.css  (2 of 3)</a:t>
+            </a:r>
+          </a:p>
+        </p:txBody>
+      </p:sp>
+      <p:sp>
+        <p:nvSpPr>
+          <p:cNvPr id="3" name="TextBox 2"/>
+          <p:cNvSpPr txBox="1"/>
+          <p:nvPr/>
+        </p:nvSpPr>
+        <p:spPr>
+          <a:xfrm>
+            <a:off x="502920" y="1051560"/>
+            <a:ext cx="11155680" cy="5394960"/>
+          </a:xfrm>
+          <a:prstGeom prst="rect">
+            <a:avLst/>
+          </a:prstGeom>
+          <a:noFill/>
+        </p:spPr>
+        <p:txBody>
+          <a:bodyPr wrap="none">
+            <a:spAutoFit/>
+          </a:bodyPr>
+          <a:lstStyle/>
+          <a:p>
+            <a:pPr>
+              <a:spcAft>
+                <a:spcPts val="0"/>
+              </a:spcAft>
+            </a:pPr>
+            <a:r>
+              <a:rPr sz="1700">
+                <a:solidFill>
+                  <a:srgbClr val="6D8C97"/>
+                </a:solidFill>
+                <a:latin typeface="Consolas"/>
+              </a:rPr>
+              <a:t>  21  </a:t>
+            </a:r>
+            <a:r>
+              <a:rPr sz="1700">
+                <a:solidFill>
+                  <a:srgbClr val="7FE0A0"/>
+                </a:solidFill>
+                <a:latin typeface="Consolas"/>
+              </a:rPr>
+              <a:t>.setup { margin-bottom: 12px; font-size: 14px; }</a:t>
+            </a:r>
+          </a:p>
+          <a:p>
+            <a:pPr>
+              <a:spcAft>
+                <a:spcPts val="0"/>
+              </a:spcAft>
+            </a:pPr>
+            <a:r>
+              <a:rPr sz="1700">
+                <a:solidFill>
+                  <a:srgbClr val="6D8C97"/>
+                </a:solidFill>
+                <a:latin typeface="Consolas"/>
+              </a:rPr>
+              <a:t>  22  </a:t>
+            </a:r>
+            <a:r>
+              <a:rPr sz="1700">
+                <a:solidFill>
+                  <a:srgbClr val="7FE0A0"/>
+                </a:solidFill>
+                <a:latin typeface="Consolas"/>
+              </a:rPr>
+              <a:t>.setup summary { cursor: pointer; color: #0a6299; font-weight: bold; }</a:t>
+            </a:r>
+          </a:p>
+          <a:p>
+            <a:pPr>
+              <a:spcAft>
+                <a:spcPts val="0"/>
+              </a:spcAft>
+            </a:pPr>
+            <a:r>
+              <a:rPr sz="1700">
+                <a:solidFill>
+                  <a:srgbClr val="6D8C97"/>
+                </a:solidFill>
+                <a:latin typeface="Consolas"/>
+              </a:rPr>
+              <a:t>  23  </a:t>
+            </a:r>
+            <a:r>
+              <a:rPr sz="1700">
+                <a:solidFill>
+                  <a:srgbClr val="7FE0A0"/>
+                </a:solidFill>
+                <a:latin typeface="Consolas"/>
+              </a:rPr>
+              <a:t>.setup textarea {</a:t>
+            </a:r>
+          </a:p>
+          <a:p>
+            <a:pPr>
+              <a:spcAft>
+                <a:spcPts val="0"/>
+              </a:spcAft>
+            </a:pPr>
+            <a:r>
+              <a:rPr sz="1700">
+                <a:solidFill>
+                  <a:srgbClr val="6D8C97"/>
+                </a:solidFill>
+                <a:latin typeface="Consolas"/>
+              </a:rPr>
+              <a:t>  24  </a:t>
+            </a:r>
+            <a:r>
+              <a:rPr sz="1700">
+                <a:solidFill>
+                  <a:srgbClr val="7FE0A0"/>
+                </a:solidFill>
+                <a:latin typeface="Consolas"/>
+              </a:rPr>
+              <a:t>  width: 100%;</a:t>
+            </a:r>
+          </a:p>
+          <a:p>
+            <a:pPr>
+              <a:spcAft>
+                <a:spcPts val="0"/>
+              </a:spcAft>
+            </a:pPr>
+            <a:r>
+              <a:rPr sz="1700">
+                <a:solidFill>
+                  <a:srgbClr val="6D8C97"/>
+                </a:solidFill>
+                <a:latin typeface="Consolas"/>
+              </a:rPr>
+              <a:t>  25  </a:t>
+            </a:r>
+            <a:r>
+              <a:rPr sz="1700">
+                <a:solidFill>
+                  <a:srgbClr val="7FE0A0"/>
+                </a:solidFill>
+                <a:latin typeface="Consolas"/>
+              </a:rPr>
+              <a:t>  margin-top: 8px;</a:t>
+            </a:r>
+          </a:p>
+          <a:p>
+            <a:pPr>
+              <a:spcAft>
+                <a:spcPts val="0"/>
+              </a:spcAft>
+            </a:pPr>
+            <a:r>
+              <a:rPr sz="1700">
+                <a:solidFill>
+                  <a:srgbClr val="6D8C97"/>
+                </a:solidFill>
+                <a:latin typeface="Consolas"/>
+              </a:rPr>
+              <a:t>  26  </a:t>
+            </a:r>
+            <a:r>
+              <a:rPr sz="1700">
+                <a:solidFill>
+                  <a:srgbClr val="7FE0A0"/>
+                </a:solidFill>
+                <a:latin typeface="Consolas"/>
+              </a:rPr>
+              <a:t>  padding: 9px;</a:t>
+            </a:r>
+          </a:p>
+          <a:p>
+            <a:pPr>
+              <a:spcAft>
+                <a:spcPts val="0"/>
+              </a:spcAft>
+            </a:pPr>
+            <a:r>
+              <a:rPr sz="1700">
+                <a:solidFill>
+                  <a:srgbClr val="6D8C97"/>
+                </a:solidFill>
+                <a:latin typeface="Consolas"/>
+              </a:rPr>
+              <a:t>  27  </a:t>
+            </a:r>
+            <a:r>
+              <a:rPr sz="1700">
+                <a:solidFill>
+                  <a:srgbClr val="7FE0A0"/>
+                </a:solidFill>
+                <a:latin typeface="Consolas"/>
+              </a:rPr>
+              <a:t>  border: 1px solid #dbe3ec;</a:t>
+            </a:r>
+          </a:p>
+          <a:p>
+            <a:pPr>
+              <a:spcAft>
+                <a:spcPts val="0"/>
+              </a:spcAft>
+            </a:pPr>
+            <a:r>
+              <a:rPr sz="1700">
+                <a:solidFill>
+                  <a:srgbClr val="6D8C97"/>
+                </a:solidFill>
+                <a:latin typeface="Consolas"/>
+              </a:rPr>
+              <a:t>  28  </a:t>
+            </a:r>
+            <a:r>
+              <a:rPr sz="1700">
+                <a:solidFill>
+                  <a:srgbClr val="7FE0A0"/>
+                </a:solidFill>
+                <a:latin typeface="Consolas"/>
+              </a:rPr>
+              <a:t>  border-radius: 6px;</a:t>
+            </a:r>
+          </a:p>
+          <a:p>
+            <a:pPr>
+              <a:spcAft>
+                <a:spcPts val="0"/>
+              </a:spcAft>
+            </a:pPr>
+            <a:r>
+              <a:rPr sz="1700">
+                <a:solidFill>
+                  <a:srgbClr val="6D8C97"/>
+                </a:solidFill>
+                <a:latin typeface="Consolas"/>
+              </a:rPr>
+              <a:t>  29  </a:t>
+            </a:r>
+            <a:r>
+              <a:rPr sz="1700">
+                <a:solidFill>
+                  <a:srgbClr val="7FE0A0"/>
+                </a:solidFill>
+                <a:latin typeface="Consolas"/>
+              </a:rPr>
+              <a:t>  font-family: inherit;</a:t>
+            </a:r>
+          </a:p>
+          <a:p>
+            <a:pPr>
+              <a:spcAft>
+                <a:spcPts val="0"/>
+              </a:spcAft>
+            </a:pPr>
+            <a:r>
+              <a:rPr sz="1700">
+                <a:solidFill>
+                  <a:srgbClr val="6D8C97"/>
+                </a:solidFill>
+                <a:latin typeface="Consolas"/>
+              </a:rPr>
+              <a:t>  30  </a:t>
+            </a:r>
+            <a:r>
+              <a:rPr sz="1700">
+                <a:solidFill>
+                  <a:srgbClr val="7FE0A0"/>
+                </a:solidFill>
+                <a:latin typeface="Consolas"/>
+              </a:rPr>
+              <a:t>  font-size: 14px;</a:t>
+            </a:r>
+          </a:p>
+          <a:p>
+            <a:pPr>
+              <a:spcAft>
+                <a:spcPts val="0"/>
+              </a:spcAft>
+            </a:pPr>
+            <a:r>
+              <a:rPr sz="1700">
+                <a:solidFill>
+                  <a:srgbClr val="6D8C97"/>
+                </a:solidFill>
+                <a:latin typeface="Consolas"/>
+              </a:rPr>
+              <a:t>  31  </a:t>
+            </a:r>
+            <a:r>
+              <a:rPr sz="1700">
+                <a:solidFill>
+                  <a:srgbClr val="7FE0A0"/>
+                </a:solidFill>
+                <a:latin typeface="Consolas"/>
+              </a:rPr>
+              <a:t>}</a:t>
+            </a:r>
+          </a:p>
+        </p:txBody>
+      </p:sp>
+    </p:spTree>
+  </p:cSld>
+  <p:clrMapOvr>
+    <a:masterClrMapping/>
+  </p:clrMapOvr>
+</p:sld>
+</file>
+
+<file path=ppt/slides/slide11.xml><?xml version="1.0" encoding="utf-8"?>
+<p:sld xmlns:a="http://schemas.openxmlformats.org/drawingml/2006/main" xmlns:p="http://schemas.openxmlformats.org/presentationml/2006/main" xmlns:r="http://schemas.openxmlformats.org/officeDocument/2006/relationships">
+  <p:cSld>
+    <p:bg>
+      <p:bgPr>
+        <a:solidFill>
+          <a:srgbClr val="102127"/>
+        </a:solidFill>
+        <a:effectLst/>
+      </p:bgPr>
+    </p:bg>
+    <p:spTree>
+      <p:nvGrpSpPr>
+        <p:cNvPr id="1" name=""/>
+        <p:cNvGrpSpPr/>
+        <p:nvPr/>
+      </p:nvGrpSpPr>
+      <p:grpSpPr/>
+      <p:sp>
+        <p:nvSpPr>
+          <p:cNvPr id="2" name="TextBox 1"/>
+          <p:cNvSpPr txBox="1"/>
+          <p:nvPr/>
+        </p:nvSpPr>
+        <p:spPr>
+          <a:xfrm>
+            <a:off x="502920" y="274320"/>
+            <a:ext cx="11155680" cy="731520"/>
+          </a:xfrm>
+          <a:prstGeom prst="rect">
+            <a:avLst/>
+          </a:prstGeom>
+          <a:noFill/>
+        </p:spPr>
+        <p:txBody>
+          <a:bodyPr wrap="none">
+            <a:spAutoFit/>
+          </a:bodyPr>
+          <a:lstStyle/>
+          <a:p>
+            <a:r>
+              <a:rPr sz="2600" b="1">
+                <a:solidFill>
+                  <a:srgbClr val="01AEFD"/>
+                </a:solidFill>
+              </a:rPr>
+              <a:t>Type this into script.js  (3 of 3)</a:t>
+            </a:r>
+          </a:p>
+        </p:txBody>
+      </p:sp>
+      <p:sp>
+        <p:nvSpPr>
+          <p:cNvPr id="3" name="TextBox 2"/>
+          <p:cNvSpPr txBox="1"/>
+          <p:nvPr/>
+        </p:nvSpPr>
+        <p:spPr>
+          <a:xfrm>
+            <a:off x="502920" y="1051560"/>
+            <a:ext cx="11155680" cy="5394960"/>
+          </a:xfrm>
+          <a:prstGeom prst="rect">
+            <a:avLst/>
+          </a:prstGeom>
+          <a:noFill/>
+        </p:spPr>
+        <p:txBody>
+          <a:bodyPr wrap="none">
+            <a:spAutoFit/>
+          </a:bodyPr>
+          <a:lstStyle/>
+          <a:p>
+            <a:pPr>
+              <a:spcAft>
+                <a:spcPts val="0"/>
+              </a:spcAft>
+            </a:pPr>
+            <a:r>
+              <a:rPr sz="1700">
+                <a:solidFill>
+                  <a:srgbClr val="6D8C97"/>
+                </a:solidFill>
+                <a:latin typeface="Consolas"/>
+              </a:rPr>
+              <a:t>   8  </a:t>
+            </a:r>
+            <a:r>
+              <a:rPr sz="1700">
+                <a:solidFill>
+                  <a:srgbClr val="DCECEF"/>
+                </a:solidFill>
+                <a:latin typeface="Consolas"/>
+              </a:rPr>
+              <a:t> </a:t>
+            </a:r>
+          </a:p>
+          <a:p>
+            <a:pPr>
+              <a:spcAft>
+                <a:spcPts val="0"/>
+              </a:spcAft>
+            </a:pPr>
+            <a:r>
+              <a:rPr sz="1700">
+                <a:solidFill>
+                  <a:srgbClr val="6D8C97"/>
+                </a:solidFill>
+                <a:latin typeface="Consolas"/>
+              </a:rPr>
+              <a:t>   9  </a:t>
+            </a:r>
+            <a:r>
+              <a:rPr sz="1700">
+                <a:solidFill>
+                  <a:srgbClr val="DCECEF"/>
+                </a:solidFill>
+                <a:latin typeface="Consolas"/>
+              </a:rPr>
+              <a:t>// Week 2: find the boxes we named in index.html.</a:t>
+            </a:r>
+          </a:p>
+          <a:p>
+            <a:pPr>
+              <a:spcAft>
+                <a:spcPts val="0"/>
+              </a:spcAft>
+            </a:pPr>
+            <a:r>
+              <a:rPr sz="1700">
+                <a:solidFill>
+                  <a:srgbClr val="6D8C97"/>
+                </a:solidFill>
+                <a:latin typeface="Consolas"/>
+              </a:rPr>
+              <a:t>  10  </a:t>
+            </a:r>
+            <a:r>
+              <a:rPr sz="1700">
+                <a:solidFill>
+                  <a:srgbClr val="DCECEF"/>
+                </a:solidFill>
+                <a:latin typeface="Consolas"/>
+              </a:rPr>
+              <a:t>// document.getElementById looks for the id= we wrote on each element.</a:t>
+            </a:r>
+          </a:p>
+          <a:p>
+            <a:pPr>
+              <a:spcAft>
+                <a:spcPts val="0"/>
+              </a:spcAft>
+            </a:pPr>
+            <a:r>
+              <a:rPr sz="1700">
+                <a:solidFill>
+                  <a:srgbClr val="6D8C97"/>
+                </a:solidFill>
+                <a:latin typeface="Consolas"/>
+              </a:rPr>
+              <a:t>  11  </a:t>
+            </a:r>
+            <a:r>
+              <a:rPr sz="1700">
+                <a:solidFill>
+                  <a:srgbClr val="DCECEF"/>
+                </a:solidFill>
+                <a:latin typeface="Consolas"/>
+              </a:rPr>
+              <a:t>const chat = document.getElementById('chat');</a:t>
+            </a:r>
+          </a:p>
+          <a:p>
+            <a:pPr>
+              <a:spcAft>
+                <a:spcPts val="0"/>
+              </a:spcAft>
+            </a:pPr>
+            <a:r>
+              <a:rPr sz="1700">
+                <a:solidFill>
+                  <a:srgbClr val="6D8C97"/>
+                </a:solidFill>
+                <a:latin typeface="Consolas"/>
+              </a:rPr>
+              <a:t>  12  </a:t>
+            </a:r>
+            <a:r>
+              <a:rPr sz="1700">
+                <a:solidFill>
+                  <a:srgbClr val="DCECEF"/>
+                </a:solidFill>
+                <a:latin typeface="Consolas"/>
+              </a:rPr>
+              <a:t>const composer = document.getElementById('composer');</a:t>
+            </a:r>
+          </a:p>
+          <a:p>
+            <a:pPr>
+              <a:spcAft>
+                <a:spcPts val="0"/>
+              </a:spcAft>
+            </a:pPr>
+            <a:r>
+              <a:rPr sz="1700">
+                <a:solidFill>
+                  <a:srgbClr val="6D8C97"/>
+                </a:solidFill>
+                <a:latin typeface="Consolas"/>
+              </a:rPr>
+              <a:t>  13  </a:t>
+            </a:r>
+            <a:r>
+              <a:rPr sz="1700">
+                <a:solidFill>
+                  <a:srgbClr val="DCECEF"/>
+                </a:solidFill>
+                <a:latin typeface="Consolas"/>
+              </a:rPr>
+              <a:t>const promptBox = document.getElementById('prompt');</a:t>
+            </a:r>
+          </a:p>
+          <a:p>
+            <a:pPr>
+              <a:spcAft>
+                <a:spcPts val="0"/>
+              </a:spcAft>
+            </a:pPr>
+            <a:r>
+              <a:rPr sz="1700">
+                <a:solidFill>
+                  <a:srgbClr val="6D8C97"/>
+                </a:solidFill>
+                <a:latin typeface="Consolas"/>
+              </a:rPr>
+              <a:t>  14  </a:t>
+            </a:r>
+            <a:r>
+              <a:rPr sz="1700">
+                <a:solidFill>
+                  <a:srgbClr val="7FE0A0"/>
+                </a:solidFill>
+                <a:latin typeface="Consolas"/>
+              </a:rPr>
+              <a:t>const personaBox = document.getElementById('persona');</a:t>
+            </a:r>
+          </a:p>
+        </p:txBody>
+      </p:sp>
+    </p:spTree>
+  </p:cSld>
+  <p:clrMapOvr>
+    <a:masterClrMapping/>
+  </p:clrMapOvr>
+</p:sld>
+</file>
+
+<file path=ppt/slides/slide12.xml><?xml version="1.0" encoding="utf-8"?>
+<p:sld xmlns:a="http://schemas.openxmlformats.org/drawingml/2006/main" xmlns:p="http://schemas.openxmlformats.org/presentationml/2006/main" xmlns:r="http://schemas.openxmlformats.org/officeDocument/2006/relationships">
+  <p:cSld>
+    <p:spTree>
+      <p:nvGrpSpPr>
+        <p:cNvPr id="1" name=""/>
+        <p:cNvGrpSpPr/>
+        <p:nvPr/>
+      </p:nvGrpSpPr>
+      <p:grpSpPr/>
+      <p:sp>
+        <p:nvSpPr>
+          <p:cNvPr id="2" name="Title 1"/>
+          <p:cNvSpPr>
+            <a:spLocks noGrp="1"/>
+          </p:cNvSpPr>
+          <p:nvPr>
+            <p:ph type="title"/>
+          </p:nvPr>
+        </p:nvSpPr>
+        <p:spPr/>
+        <p:txBody>
+          <a:bodyPr/>
+          <a:lstStyle/>
+          <a:p>
+            <a:r>
+              <a:rPr sz="3800" b="1">
+                <a:solidFill>
+                  <a:srgbClr val="1F2A37"/>
+                </a:solidFill>
+              </a:rPr>
+              <a:t>Prompt duel</a:t>
+            </a:r>
+          </a:p>
+        </p:txBody>
+      </p:sp>
+      <p:sp>
+        <p:nvSpPr>
+          <p:cNvPr id="3" name="TextBox 2"/>
+          <p:cNvSpPr txBox="1"/>
+          <p:nvPr/>
+        </p:nvSpPr>
+        <p:spPr>
+          <a:xfrm>
+            <a:off x="822960" y="1828800"/>
+            <a:ext cx="10515600" cy="4206240"/>
+          </a:xfrm>
+          <a:prstGeom prst="rect">
+            <a:avLst/>
+          </a:prstGeom>
+          <a:noFill/>
+        </p:spPr>
+        <p:txBody>
+          <a:bodyPr wrap="square">
+            <a:spAutoFit/>
+          </a:bodyPr>
+          <a:lstStyle/>
+          <a:p>
+            <a:pPr>
+              <a:spcAft>
+                <a:spcPts val="1400"/>
+              </a:spcAft>
+            </a:pPr>
+            <a:r>
+              <a:rPr sz="2800">
+                <a:solidFill>
+                  <a:srgbClr val="01AEFD"/>
+                </a:solidFill>
+              </a:rPr>
+              <a:t>In pairs, 10 minutes</a:t>
+            </a:r>
+          </a:p>
+          <a:p>
+            <a:pPr>
+              <a:spcAft>
+                <a:spcPts val="1400"/>
+              </a:spcAft>
+            </a:pPr>
+            <a:r>
+              <a:rPr sz="2400">
+                <a:solidFill>
+                  <a:srgbClr val="1F2A37"/>
+                </a:solidFill>
+              </a:rPr>
+              <a:t>• Write a secret character</a:t>
+            </a:r>
+          </a:p>
+          <a:p>
+            <a:pPr>
+              <a:spcAft>
+                <a:spcPts val="1400"/>
+              </a:spcAft>
+            </a:pPr>
+            <a:r>
+              <a:rPr sz="2400">
+                <a:solidFill>
+                  <a:srgbClr val="1F2A37"/>
+                </a:solidFill>
+              </a:rPr>
+              <a:t>• Swap. Ask three questions.</a:t>
+            </a:r>
+          </a:p>
+          <a:p>
+            <a:pPr>
+              <a:spcAft>
+                <a:spcPts val="1400"/>
+              </a:spcAft>
+            </a:pPr>
+            <a:r>
+              <a:rPr sz="2400">
+                <a:solidFill>
+                  <a:srgbClr val="1F2A37"/>
+                </a:solidFill>
+              </a:rPr>
+              <a:t>• Guess who it is</a:t>
+            </a:r>
+          </a:p>
+        </p:txBody>
+      </p:sp>
+    </p:spTree>
+  </p:cSld>
+  <p:clrMapOvr>
+    <a:masterClrMapping/>
+  </p:clrMapOvr>
+</p:sld>
+</file>
+
 <file path=ppt/slides/slide2.xml><?xml version="1.0" encoding="utf-8"?>
 <p:sld xmlns:a="http://schemas.openxmlformats.org/drawingml/2006/main" xmlns:p="http://schemas.openxmlformats.org/presentationml/2006/main" xmlns:r="http://schemas.openxmlformats.org/officeDocument/2006/relationships">
   <p:cSld>
@@ -3505,6 +4251,14 @@
 <file path=ppt/slides/slide5.xml><?xml version="1.0" encoding="utf-8"?>
 <p:sld xmlns:a="http://schemas.openxmlformats.org/drawingml/2006/main" xmlns:p="http://schemas.openxmlformats.org/presentationml/2006/main" xmlns:r="http://schemas.openxmlformats.org/officeDocument/2006/relationships">
   <p:cSld>
+    <p:bg>
+      <p:bgPr>
+        <a:solidFill>
+          <a:srgbClr val="102127"/>
+        </a:solidFill>
+        <a:effectLst/>
+      </p:bgPr>
+    </p:bg>
     <p:spTree>
       <p:nvGrpSpPr>
         <p:cNvPr id="1" name=""/>
@@ -3514,40 +4268,14 @@
       <p:grpSpPr/>
       <p:sp>
         <p:nvSpPr>
-          <p:cNvPr id="2" name="Title 1"/>
-          <p:cNvSpPr>
-            <a:spLocks noGrp="1"/>
-          </p:cNvSpPr>
-          <p:nvPr>
-            <p:ph type="title"/>
-          </p:nvPr>
-        </p:nvSpPr>
-        <p:spPr/>
-        <p:txBody>
-          <a:bodyPr/>
-          <a:lstStyle/>
-          <a:p>
-            <a:r>
-              <a:rPr sz="3800" b="1">
-                <a:solidFill>
-                  <a:srgbClr val="1F2A37"/>
-                </a:solidFill>
-              </a:rPr>
-              <a:t>Vague does nothing</a:t>
-            </a:r>
-          </a:p>
-        </p:txBody>
-      </p:sp>
-      <p:sp>
-        <p:nvSpPr>
-          <p:cNvPr id="3" name="TextBox 2"/>
+          <p:cNvPr id="2" name="TextBox 1"/>
           <p:cNvSpPr txBox="1"/>
           <p:nvPr/>
         </p:nvSpPr>
         <p:spPr>
           <a:xfrm>
-            <a:off x="822960" y="1828800"/>
-            <a:ext cx="10515600" cy="4206240"/>
+            <a:off x="502920" y="274320"/>
+            <a:ext cx="11155680" cy="731520"/>
           </a:xfrm>
           <a:prstGeom prst="rect">
             <a:avLst/>
@@ -3555,53 +4283,416 @@
           <a:noFill/>
         </p:spPr>
         <p:txBody>
-          <a:bodyPr wrap="square">
+          <a:bodyPr wrap="none">
             <a:spAutoFit/>
           </a:bodyPr>
           <a:lstStyle/>
           <a:p>
-            <a:pPr>
-              <a:spcAft>
-                <a:spcPts val="1400"/>
-              </a:spcAft>
-            </a:pPr>
-            <a:r>
-              <a:rPr sz="2400">
-                <a:solidFill>
-                  <a:srgbClr val="1F2A37"/>
-                </a:solidFill>
-              </a:rPr>
-              <a:t>• "Be helpful" - no visible change</a:t>
-            </a:r>
-          </a:p>
-          <a:p>
-            <a:pPr>
-              <a:spcAft>
-                <a:spcPts val="1400"/>
-              </a:spcAft>
-            </a:pPr>
-            <a:r>
-              <a:rPr sz="2400">
-                <a:solidFill>
-                  <a:srgbClr val="1F2A37"/>
-                </a:solidFill>
-              </a:rPr>
-              <a:t>• "Under 40 words, one example, no jargon" - obvious change</a:t>
-            </a:r>
-          </a:p>
-          <a:p>
-            <a:pPr>
-              <a:spcAft>
-                <a:spcPts val="1400"/>
-              </a:spcAft>
-            </a:pPr>
-            <a:r>
-              <a:rPr sz="2400">
-                <a:solidFill>
-                  <a:srgbClr val="1F2A37"/>
-                </a:solidFill>
-              </a:rPr>
-              <a:t>• Say exactly what you want</a:t>
+            <a:r>
+              <a:rPr sz="2600" b="1">
+                <a:solidFill>
+                  <a:srgbClr val="01AEFD"/>
+                </a:solidFill>
+              </a:rPr>
+              <a:t>Type this into script.js  (1 of 2)</a:t>
+            </a:r>
+          </a:p>
+        </p:txBody>
+      </p:sp>
+      <p:sp>
+        <p:nvSpPr>
+          <p:cNvPr id="3" name="TextBox 2"/>
+          <p:cNvSpPr txBox="1"/>
+          <p:nvPr/>
+        </p:nvSpPr>
+        <p:spPr>
+          <a:xfrm>
+            <a:off x="502920" y="1051560"/>
+            <a:ext cx="11155680" cy="5394960"/>
+          </a:xfrm>
+          <a:prstGeom prst="rect">
+            <a:avLst/>
+          </a:prstGeom>
+          <a:noFill/>
+        </p:spPr>
+        <p:txBody>
+          <a:bodyPr wrap="none">
+            <a:spAutoFit/>
+          </a:bodyPr>
+          <a:lstStyle/>
+          <a:p>
+            <a:pPr>
+              <a:spcAft>
+                <a:spcPts val="0"/>
+              </a:spcAft>
+            </a:pPr>
+            <a:r>
+              <a:rPr sz="1400">
+                <a:solidFill>
+                  <a:srgbClr val="6D8C97"/>
+                </a:solidFill>
+                <a:latin typeface="Consolas"/>
+              </a:rPr>
+              <a:t>  40  </a:t>
+            </a:r>
+            <a:r>
+              <a:rPr sz="1400">
+                <a:solidFill>
+                  <a:srgbClr val="DCECEF"/>
+                </a:solidFill>
+                <a:latin typeface="Consolas"/>
+              </a:rPr>
+              <a:t> </a:t>
+            </a:r>
+          </a:p>
+          <a:p>
+            <a:pPr>
+              <a:spcAft>
+                <a:spcPts val="0"/>
+              </a:spcAft>
+            </a:pPr>
+            <a:r>
+              <a:rPr sz="1400">
+                <a:solidFill>
+                  <a:srgbClr val="6D8C97"/>
+                </a:solidFill>
+                <a:latin typeface="Consolas"/>
+              </a:rPr>
+              <a:t>  41  </a:t>
+            </a:r>
+            <a:r>
+              <a:rPr sz="1400">
+                <a:solidFill>
+                  <a:srgbClr val="DCECEF"/>
+                </a:solidFill>
+                <a:latin typeface="Consolas"/>
+              </a:rPr>
+              <a:t>// Week 4: ask the AI a real question.</a:t>
+            </a:r>
+          </a:p>
+          <a:p>
+            <a:pPr>
+              <a:spcAft>
+                <a:spcPts val="0"/>
+              </a:spcAft>
+            </a:pPr>
+            <a:r>
+              <a:rPr sz="1400">
+                <a:solidFill>
+                  <a:srgbClr val="6D8C97"/>
+                </a:solidFill>
+                <a:latin typeface="Consolas"/>
+              </a:rPr>
+              <a:t>  42  </a:t>
+            </a:r>
+            <a:r>
+              <a:rPr sz="1400">
+                <a:solidFill>
+                  <a:srgbClr val="DCECEF"/>
+                </a:solidFill>
+                <a:latin typeface="Consolas"/>
+              </a:rPr>
+              <a:t>// A chat request is a LIST of messages. Each one says who said it.</a:t>
+            </a:r>
+          </a:p>
+          <a:p>
+            <a:pPr>
+              <a:spcAft>
+                <a:spcPts val="0"/>
+              </a:spcAft>
+            </a:pPr>
+            <a:r>
+              <a:rPr sz="1400">
+                <a:solidFill>
+                  <a:srgbClr val="6D8C97"/>
+                </a:solidFill>
+                <a:latin typeface="Consolas"/>
+              </a:rPr>
+              <a:t>  43  </a:t>
+            </a:r>
+            <a:r>
+              <a:rPr sz="1400">
+                <a:solidFill>
+                  <a:srgbClr val="DCECEF"/>
+                </a:solidFill>
+                <a:latin typeface="Consolas"/>
+              </a:rPr>
+              <a:t>async function askAI(question) {</a:t>
+            </a:r>
+          </a:p>
+          <a:p>
+            <a:pPr>
+              <a:spcAft>
+                <a:spcPts val="0"/>
+              </a:spcAft>
+            </a:pPr>
+            <a:r>
+              <a:rPr sz="1400">
+                <a:solidFill>
+                  <a:srgbClr val="6D8C97"/>
+                </a:solidFill>
+                <a:latin typeface="Consolas"/>
+              </a:rPr>
+              <a:t>  44  </a:t>
+            </a:r>
+            <a:r>
+              <a:rPr sz="1400">
+                <a:solidFill>
+                  <a:srgbClr val="DCECEF"/>
+                </a:solidFill>
+                <a:latin typeface="Consolas"/>
+              </a:rPr>
+              <a:t>  const res = await fetch(AI_BASE + '/v1/chat/completions', {</a:t>
+            </a:r>
+          </a:p>
+          <a:p>
+            <a:pPr>
+              <a:spcAft>
+                <a:spcPts val="0"/>
+              </a:spcAft>
+            </a:pPr>
+            <a:r>
+              <a:rPr sz="1400">
+                <a:solidFill>
+                  <a:srgbClr val="6D8C97"/>
+                </a:solidFill>
+                <a:latin typeface="Consolas"/>
+              </a:rPr>
+              <a:t>  45  </a:t>
+            </a:r>
+            <a:r>
+              <a:rPr sz="1400">
+                <a:solidFill>
+                  <a:srgbClr val="DCECEF"/>
+                </a:solidFill>
+                <a:latin typeface="Consolas"/>
+              </a:rPr>
+              <a:t>    method: 'POST',                       // POST = I am sending you something</a:t>
+            </a:r>
+          </a:p>
+          <a:p>
+            <a:pPr>
+              <a:spcAft>
+                <a:spcPts val="0"/>
+              </a:spcAft>
+            </a:pPr>
+            <a:r>
+              <a:rPr sz="1400">
+                <a:solidFill>
+                  <a:srgbClr val="6D8C97"/>
+                </a:solidFill>
+                <a:latin typeface="Consolas"/>
+              </a:rPr>
+              <a:t>  46  </a:t>
+            </a:r>
+            <a:r>
+              <a:rPr sz="1400">
+                <a:solidFill>
+                  <a:srgbClr val="DCECEF"/>
+                </a:solidFill>
+                <a:latin typeface="Consolas"/>
+              </a:rPr>
+              <a:t>    headers: {</a:t>
+            </a:r>
+          </a:p>
+          <a:p>
+            <a:pPr>
+              <a:spcAft>
+                <a:spcPts val="0"/>
+              </a:spcAft>
+            </a:pPr>
+            <a:r>
+              <a:rPr sz="1400">
+                <a:solidFill>
+                  <a:srgbClr val="6D8C97"/>
+                </a:solidFill>
+                <a:latin typeface="Consolas"/>
+              </a:rPr>
+              <a:t>  47  </a:t>
+            </a:r>
+            <a:r>
+              <a:rPr sz="1400">
+                <a:solidFill>
+                  <a:srgbClr val="DCECEF"/>
+                </a:solidFill>
+                <a:latin typeface="Consolas"/>
+              </a:rPr>
+              <a:t>      'Content-Type': 'application/json', // what I am sending is JSON</a:t>
+            </a:r>
+          </a:p>
+          <a:p>
+            <a:pPr>
+              <a:spcAft>
+                <a:spcPts val="0"/>
+              </a:spcAft>
+            </a:pPr>
+            <a:r>
+              <a:rPr sz="1400">
+                <a:solidFill>
+                  <a:srgbClr val="6D8C97"/>
+                </a:solidFill>
+                <a:latin typeface="Consolas"/>
+              </a:rPr>
+              <a:t>  48  </a:t>
+            </a:r>
+            <a:r>
+              <a:rPr sz="1400">
+                <a:solidFill>
+                  <a:srgbClr val="DCECEF"/>
+                </a:solidFill>
+                <a:latin typeface="Consolas"/>
+              </a:rPr>
+              <a:t>      'Authorization': 'Bearer ' + API_KEY</a:t>
+            </a:r>
+          </a:p>
+          <a:p>
+            <a:pPr>
+              <a:spcAft>
+                <a:spcPts val="0"/>
+              </a:spcAft>
+            </a:pPr>
+            <a:r>
+              <a:rPr sz="1400">
+                <a:solidFill>
+                  <a:srgbClr val="6D8C97"/>
+                </a:solidFill>
+                <a:latin typeface="Consolas"/>
+              </a:rPr>
+              <a:t>  49  </a:t>
+            </a:r>
+            <a:r>
+              <a:rPr sz="1400">
+                <a:solidFill>
+                  <a:srgbClr val="DCECEF"/>
+                </a:solidFill>
+                <a:latin typeface="Consolas"/>
+              </a:rPr>
+              <a:t>    },</a:t>
+            </a:r>
+          </a:p>
+          <a:p>
+            <a:pPr>
+              <a:spcAft>
+                <a:spcPts val="0"/>
+              </a:spcAft>
+            </a:pPr>
+            <a:r>
+              <a:rPr sz="1400">
+                <a:solidFill>
+                  <a:srgbClr val="6D8C97"/>
+                </a:solidFill>
+                <a:latin typeface="Consolas"/>
+              </a:rPr>
+              <a:t>  50  </a:t>
+            </a:r>
+            <a:r>
+              <a:rPr sz="1400">
+                <a:solidFill>
+                  <a:srgbClr val="DCECEF"/>
+                </a:solidFill>
+                <a:latin typeface="Consolas"/>
+              </a:rPr>
+              <a:t>    body: JSON.stringify({</a:t>
+            </a:r>
+          </a:p>
+          <a:p>
+            <a:pPr>
+              <a:spcAft>
+                <a:spcPts val="0"/>
+              </a:spcAft>
+            </a:pPr>
+            <a:r>
+              <a:rPr sz="1400">
+                <a:solidFill>
+                  <a:srgbClr val="6D8C97"/>
+                </a:solidFill>
+                <a:latin typeface="Consolas"/>
+              </a:rPr>
+              <a:t>  51  </a:t>
+            </a:r>
+            <a:r>
+              <a:rPr sz="1400">
+                <a:solidFill>
+                  <a:srgbClr val="DCECEF"/>
+                </a:solidFill>
+                <a:latin typeface="Consolas"/>
+              </a:rPr>
+              <a:t>      model: 'fast',</a:t>
+            </a:r>
+          </a:p>
+          <a:p>
+            <a:pPr>
+              <a:spcAft>
+                <a:spcPts val="0"/>
+              </a:spcAft>
+            </a:pPr>
+            <a:r>
+              <a:rPr sz="1400">
+                <a:solidFill>
+                  <a:srgbClr val="6D8C97"/>
+                </a:solidFill>
+                <a:latin typeface="Consolas"/>
+              </a:rPr>
+              <a:t>  52  </a:t>
+            </a:r>
+            <a:r>
+              <a:rPr sz="1400">
+                <a:solidFill>
+                  <a:srgbClr val="DCECEF"/>
+                </a:solidFill>
+                <a:latin typeface="Consolas"/>
+              </a:rPr>
+              <a:t>      messages: [</a:t>
+            </a:r>
+          </a:p>
+          <a:p>
+            <a:pPr>
+              <a:spcAft>
+                <a:spcPts val="0"/>
+              </a:spcAft>
+            </a:pPr>
+            <a:r>
+              <a:rPr sz="1400">
+                <a:solidFill>
+                  <a:srgbClr val="6D8C97"/>
+                </a:solidFill>
+                <a:latin typeface="Consolas"/>
+              </a:rPr>
+              <a:t>  53  </a:t>
+            </a:r>
+            <a:r>
+              <a:rPr sz="1400">
+                <a:solidFill>
+                  <a:srgbClr val="7FE0A0"/>
+                </a:solidFill>
+                <a:latin typeface="Consolas"/>
+              </a:rPr>
+              <a:t>        // Week 6: the standing instruction, read before every single reply.</a:t>
+            </a:r>
+          </a:p>
+          <a:p>
+            <a:pPr>
+              <a:spcAft>
+                <a:spcPts val="0"/>
+              </a:spcAft>
+            </a:pPr>
+            <a:r>
+              <a:rPr sz="1400">
+                <a:solidFill>
+                  <a:srgbClr val="6D8C97"/>
+                </a:solidFill>
+                <a:latin typeface="Consolas"/>
+              </a:rPr>
+              <a:t>  54  </a:t>
+            </a:r>
+            <a:r>
+              <a:rPr sz="1400">
+                <a:solidFill>
+                  <a:srgbClr val="7FE0A0"/>
+                </a:solidFill>
+                <a:latin typeface="Consolas"/>
+              </a:rPr>
+              <a:t>        { role: 'system', content: personaBox.value },</a:t>
             </a:r>
           </a:p>
         </p:txBody>
@@ -3617,6 +4708,14 @@
 <file path=ppt/slides/slide6.xml><?xml version="1.0" encoding="utf-8"?>
 <p:sld xmlns:a="http://schemas.openxmlformats.org/drawingml/2006/main" xmlns:p="http://schemas.openxmlformats.org/presentationml/2006/main" xmlns:r="http://schemas.openxmlformats.org/officeDocument/2006/relationships">
   <p:cSld>
+    <p:bg>
+      <p:bgPr>
+        <a:solidFill>
+          <a:srgbClr val="102127"/>
+        </a:solidFill>
+        <a:effectLst/>
+      </p:bgPr>
+    </p:bg>
     <p:spTree>
       <p:nvGrpSpPr>
         <p:cNvPr id="1" name=""/>
@@ -3626,40 +4725,14 @@
       <p:grpSpPr/>
       <p:sp>
         <p:nvSpPr>
-          <p:cNvPr id="2" name="Title 1"/>
-          <p:cNvSpPr>
-            <a:spLocks noGrp="1"/>
-          </p:cNvSpPr>
-          <p:nvPr>
-            <p:ph type="title"/>
-          </p:nvPr>
-        </p:nvSpPr>
-        <p:spPr/>
-        <p:txBody>
-          <a:bodyPr/>
-          <a:lstStyle/>
-          <a:p>
-            <a:r>
-              <a:rPr sz="3800" b="1">
-                <a:solidFill>
-                  <a:srgbClr val="1F2A37"/>
-                </a:solidFill>
-              </a:rPr>
-              <a:t>Behaviour became data</a:t>
-            </a:r>
-          </a:p>
-        </p:txBody>
-      </p:sp>
-      <p:sp>
-        <p:nvSpPr>
-          <p:cNvPr id="3" name="TextBox 2"/>
+          <p:cNvPr id="2" name="TextBox 1"/>
           <p:cNvSpPr txBox="1"/>
           <p:nvPr/>
         </p:nvSpPr>
         <p:spPr>
           <a:xfrm>
-            <a:off x="822960" y="1828800"/>
-            <a:ext cx="10515600" cy="4206240"/>
+            <a:off x="502920" y="274320"/>
+            <a:ext cx="11155680" cy="731520"/>
           </a:xfrm>
           <a:prstGeom prst="rect">
             <a:avLst/>
@@ -3667,53 +4740,416 @@
           <a:noFill/>
         </p:spPr>
         <p:txBody>
-          <a:bodyPr wrap="square">
+          <a:bodyPr wrap="none">
             <a:spAutoFit/>
           </a:bodyPr>
           <a:lstStyle/>
           <a:p>
-            <a:pPr>
-              <a:spcAft>
-                <a:spcPts val="1400"/>
-              </a:spcAft>
-            </a:pPr>
-            <a:r>
-              <a:rPr sz="2800">
+            <a:r>
+              <a:rPr sz="2600" b="1">
                 <a:solidFill>
                   <a:srgbClr val="01AEFD"/>
                 </a:solidFill>
               </a:rPr>
-              <a:t>The personality is in a textarea now</a:t>
-            </a:r>
-          </a:p>
-          <a:p>
-            <a:pPr>
-              <a:spcAft>
-                <a:spcPts val="1400"/>
-              </a:spcAft>
-            </a:pPr>
-            <a:r>
-              <a:rPr sz="2400">
-                <a:solidFill>
-                  <a:srgbClr val="1F2A37"/>
-                </a:solidFill>
-              </a:rPr>
-              <a:t>• Change it without touching code</a:t>
-            </a:r>
-          </a:p>
-          <a:p>
-            <a:pPr>
-              <a:spcAft>
-                <a:spcPts val="1400"/>
-              </a:spcAft>
-            </a:pPr>
-            <a:r>
-              <a:rPr sz="2400">
-                <a:solidFill>
-                  <a:srgbClr val="1F2A37"/>
-                </a:solidFill>
-              </a:rPr>
-              <a:t>• This idea shows up everywhere in software</a:t>
+              <a:t>Type this into script.js  (2 of 2)</a:t>
+            </a:r>
+          </a:p>
+        </p:txBody>
+      </p:sp>
+      <p:sp>
+        <p:nvSpPr>
+          <p:cNvPr id="3" name="TextBox 2"/>
+          <p:cNvSpPr txBox="1"/>
+          <p:nvPr/>
+        </p:nvSpPr>
+        <p:spPr>
+          <a:xfrm>
+            <a:off x="502920" y="1051560"/>
+            <a:ext cx="11155680" cy="5394960"/>
+          </a:xfrm>
+          <a:prstGeom prst="rect">
+            <a:avLst/>
+          </a:prstGeom>
+          <a:noFill/>
+        </p:spPr>
+        <p:txBody>
+          <a:bodyPr wrap="none">
+            <a:spAutoFit/>
+          </a:bodyPr>
+          <a:lstStyle/>
+          <a:p>
+            <a:pPr>
+              <a:spcAft>
+                <a:spcPts val="0"/>
+              </a:spcAft>
+            </a:pPr>
+            <a:r>
+              <a:rPr sz="1400">
+                <a:solidFill>
+                  <a:srgbClr val="6D8C97"/>
+                </a:solidFill>
+                <a:latin typeface="Consolas"/>
+              </a:rPr>
+              <a:t>  55  </a:t>
+            </a:r>
+            <a:r>
+              <a:rPr sz="1400">
+                <a:solidFill>
+                  <a:srgbClr val="DCECEF"/>
+                </a:solidFill>
+                <a:latin typeface="Consolas"/>
+              </a:rPr>
+              <a:t>        { role: 'user', content: question }</a:t>
+            </a:r>
+          </a:p>
+          <a:p>
+            <a:pPr>
+              <a:spcAft>
+                <a:spcPts val="0"/>
+              </a:spcAft>
+            </a:pPr>
+            <a:r>
+              <a:rPr sz="1400">
+                <a:solidFill>
+                  <a:srgbClr val="6D8C97"/>
+                </a:solidFill>
+                <a:latin typeface="Consolas"/>
+              </a:rPr>
+              <a:t>  56  </a:t>
+            </a:r>
+            <a:r>
+              <a:rPr sz="1400">
+                <a:solidFill>
+                  <a:srgbClr val="DCECEF"/>
+                </a:solidFill>
+                <a:latin typeface="Consolas"/>
+              </a:rPr>
+              <a:t>      ]</a:t>
+            </a:r>
+          </a:p>
+          <a:p>
+            <a:pPr>
+              <a:spcAft>
+                <a:spcPts val="0"/>
+              </a:spcAft>
+            </a:pPr>
+            <a:r>
+              <a:rPr sz="1400">
+                <a:solidFill>
+                  <a:srgbClr val="6D8C97"/>
+                </a:solidFill>
+                <a:latin typeface="Consolas"/>
+              </a:rPr>
+              <a:t>  57  </a:t>
+            </a:r>
+            <a:r>
+              <a:rPr sz="1400">
+                <a:solidFill>
+                  <a:srgbClr val="DCECEF"/>
+                </a:solidFill>
+                <a:latin typeface="Consolas"/>
+              </a:rPr>
+              <a:t>    })</a:t>
+            </a:r>
+          </a:p>
+          <a:p>
+            <a:pPr>
+              <a:spcAft>
+                <a:spcPts val="0"/>
+              </a:spcAft>
+            </a:pPr>
+            <a:r>
+              <a:rPr sz="1400">
+                <a:solidFill>
+                  <a:srgbClr val="6D8C97"/>
+                </a:solidFill>
+                <a:latin typeface="Consolas"/>
+              </a:rPr>
+              <a:t>  58  </a:t>
+            </a:r>
+            <a:r>
+              <a:rPr sz="1400">
+                <a:solidFill>
+                  <a:srgbClr val="DCECEF"/>
+                </a:solidFill>
+                <a:latin typeface="Consolas"/>
+              </a:rPr>
+              <a:t>  });</a:t>
+            </a:r>
+          </a:p>
+          <a:p>
+            <a:pPr>
+              <a:spcAft>
+                <a:spcPts val="0"/>
+              </a:spcAft>
+            </a:pPr>
+            <a:r>
+              <a:rPr sz="1400">
+                <a:solidFill>
+                  <a:srgbClr val="6D8C97"/>
+                </a:solidFill>
+                <a:latin typeface="Consolas"/>
+              </a:rPr>
+              <a:t>  59  </a:t>
+            </a:r>
+            <a:r>
+              <a:rPr sz="1400">
+                <a:solidFill>
+                  <a:srgbClr val="DCECEF"/>
+                </a:solidFill>
+                <a:latin typeface="Consolas"/>
+              </a:rPr>
+              <a:t> </a:t>
+            </a:r>
+          </a:p>
+          <a:p>
+            <a:pPr>
+              <a:spcAft>
+                <a:spcPts val="0"/>
+              </a:spcAft>
+            </a:pPr>
+            <a:r>
+              <a:rPr sz="1400">
+                <a:solidFill>
+                  <a:srgbClr val="6D8C97"/>
+                </a:solidFill>
+                <a:latin typeface="Consolas"/>
+              </a:rPr>
+              <a:t>  60  </a:t>
+            </a:r>
+            <a:r>
+              <a:rPr sz="1400">
+                <a:solidFill>
+                  <a:srgbClr val="DCECEF"/>
+                </a:solidFill>
+                <a:latin typeface="Consolas"/>
+              </a:rPr>
+              <a:t>  // Week 5: fetch does NOT throw when the server says no. A 429 arrives</a:t>
+            </a:r>
+          </a:p>
+          <a:p>
+            <a:pPr>
+              <a:spcAft>
+                <a:spcPts val="0"/>
+              </a:spcAft>
+            </a:pPr>
+            <a:r>
+              <a:rPr sz="1400">
+                <a:solidFill>
+                  <a:srgbClr val="6D8C97"/>
+                </a:solidFill>
+                <a:latin typeface="Consolas"/>
+              </a:rPr>
+              <a:t>  61  </a:t>
+            </a:r>
+            <a:r>
+              <a:rPr sz="1400">
+                <a:solidFill>
+                  <a:srgbClr val="DCECEF"/>
+                </a:solidFill>
+                <a:latin typeface="Consolas"/>
+              </a:rPr>
+              <a:t>  // looking just like a success until you actually check.</a:t>
+            </a:r>
+          </a:p>
+          <a:p>
+            <a:pPr>
+              <a:spcAft>
+                <a:spcPts val="0"/>
+              </a:spcAft>
+            </a:pPr>
+            <a:r>
+              <a:rPr sz="1400">
+                <a:solidFill>
+                  <a:srgbClr val="6D8C97"/>
+                </a:solidFill>
+                <a:latin typeface="Consolas"/>
+              </a:rPr>
+              <a:t>  62  </a:t>
+            </a:r>
+            <a:r>
+              <a:rPr sz="1400">
+                <a:solidFill>
+                  <a:srgbClr val="DCECEF"/>
+                </a:solidFill>
+                <a:latin typeface="Consolas"/>
+              </a:rPr>
+              <a:t>  if (!res.ok) {</a:t>
+            </a:r>
+          </a:p>
+          <a:p>
+            <a:pPr>
+              <a:spcAft>
+                <a:spcPts val="0"/>
+              </a:spcAft>
+            </a:pPr>
+            <a:r>
+              <a:rPr sz="1400">
+                <a:solidFill>
+                  <a:srgbClr val="6D8C97"/>
+                </a:solidFill>
+                <a:latin typeface="Consolas"/>
+              </a:rPr>
+              <a:t>  63  </a:t>
+            </a:r>
+            <a:r>
+              <a:rPr sz="1400">
+                <a:solidFill>
+                  <a:srgbClr val="DCECEF"/>
+                </a:solidFill>
+                <a:latin typeface="Consolas"/>
+              </a:rPr>
+              <a:t>    const problem = await res.json();</a:t>
+            </a:r>
+          </a:p>
+          <a:p>
+            <a:pPr>
+              <a:spcAft>
+                <a:spcPts val="0"/>
+              </a:spcAft>
+            </a:pPr>
+            <a:r>
+              <a:rPr sz="1400">
+                <a:solidFill>
+                  <a:srgbClr val="6D8C97"/>
+                </a:solidFill>
+                <a:latin typeface="Consolas"/>
+              </a:rPr>
+              <a:t>  64  </a:t>
+            </a:r>
+            <a:r>
+              <a:rPr sz="1400">
+                <a:solidFill>
+                  <a:srgbClr val="DCECEF"/>
+                </a:solidFill>
+                <a:latin typeface="Consolas"/>
+              </a:rPr>
+              <a:t>    throw new Error(explain(res.status, problem));</a:t>
+            </a:r>
+          </a:p>
+          <a:p>
+            <a:pPr>
+              <a:spcAft>
+                <a:spcPts val="0"/>
+              </a:spcAft>
+            </a:pPr>
+            <a:r>
+              <a:rPr sz="1400">
+                <a:solidFill>
+                  <a:srgbClr val="6D8C97"/>
+                </a:solidFill>
+                <a:latin typeface="Consolas"/>
+              </a:rPr>
+              <a:t>  65  </a:t>
+            </a:r>
+            <a:r>
+              <a:rPr sz="1400">
+                <a:solidFill>
+                  <a:srgbClr val="DCECEF"/>
+                </a:solidFill>
+                <a:latin typeface="Consolas"/>
+              </a:rPr>
+              <a:t>  }</a:t>
+            </a:r>
+          </a:p>
+          <a:p>
+            <a:pPr>
+              <a:spcAft>
+                <a:spcPts val="0"/>
+              </a:spcAft>
+            </a:pPr>
+            <a:r>
+              <a:rPr sz="1400">
+                <a:solidFill>
+                  <a:srgbClr val="6D8C97"/>
+                </a:solidFill>
+                <a:latin typeface="Consolas"/>
+              </a:rPr>
+              <a:t>  66  </a:t>
+            </a:r>
+            <a:r>
+              <a:rPr sz="1400">
+                <a:solidFill>
+                  <a:srgbClr val="DCECEF"/>
+                </a:solidFill>
+                <a:latin typeface="Consolas"/>
+              </a:rPr>
+              <a:t> </a:t>
+            </a:r>
+          </a:p>
+          <a:p>
+            <a:pPr>
+              <a:spcAft>
+                <a:spcPts val="0"/>
+              </a:spcAft>
+            </a:pPr>
+            <a:r>
+              <a:rPr sz="1400">
+                <a:solidFill>
+                  <a:srgbClr val="6D8C97"/>
+                </a:solidFill>
+                <a:latin typeface="Consolas"/>
+              </a:rPr>
+              <a:t>  67  </a:t>
+            </a:r>
+            <a:r>
+              <a:rPr sz="1400">
+                <a:solidFill>
+                  <a:srgbClr val="DCECEF"/>
+                </a:solidFill>
+                <a:latin typeface="Consolas"/>
+              </a:rPr>
+              <a:t>  const data = await res.json();</a:t>
+            </a:r>
+          </a:p>
+          <a:p>
+            <a:pPr>
+              <a:spcAft>
+                <a:spcPts val="0"/>
+              </a:spcAft>
+            </a:pPr>
+            <a:r>
+              <a:rPr sz="1400">
+                <a:solidFill>
+                  <a:srgbClr val="6D8C97"/>
+                </a:solidFill>
+                <a:latin typeface="Consolas"/>
+              </a:rPr>
+              <a:t>  68  </a:t>
+            </a:r>
+            <a:r>
+              <a:rPr sz="1400">
+                <a:solidFill>
+                  <a:srgbClr val="DCECEF"/>
+                </a:solidFill>
+                <a:latin typeface="Consolas"/>
+              </a:rPr>
+              <a:t>  return data.choices[0].message.content;</a:t>
+            </a:r>
+          </a:p>
+          <a:p>
+            <a:pPr>
+              <a:spcAft>
+                <a:spcPts val="0"/>
+              </a:spcAft>
+            </a:pPr>
+            <a:r>
+              <a:rPr sz="1400">
+                <a:solidFill>
+                  <a:srgbClr val="6D8C97"/>
+                </a:solidFill>
+                <a:latin typeface="Consolas"/>
+              </a:rPr>
+              <a:t>  69  </a:t>
+            </a:r>
+            <a:r>
+              <a:rPr sz="1400">
+                <a:solidFill>
+                  <a:srgbClr val="DCECEF"/>
+                </a:solidFill>
+                <a:latin typeface="Consolas"/>
+              </a:rPr>
+              <a:t>}</a:t>
             </a:r>
           </a:p>
         </p:txBody>
@@ -3757,7 +5193,7 @@
                   <a:srgbClr val="1F2A37"/>
                 </a:solidFill>
               </a:rPr>
-              <a:t>Prompt duel</a:t>
+              <a:t>Vague does nothing</a:t>
             </a:r>
           </a:p>
         </p:txBody>
@@ -3790,12 +5226,124 @@
               </a:spcAft>
             </a:pPr>
             <a:r>
+              <a:rPr sz="2400">
+                <a:solidFill>
+                  <a:srgbClr val="1F2A37"/>
+                </a:solidFill>
+              </a:rPr>
+              <a:t>• "Be helpful" - no visible change</a:t>
+            </a:r>
+          </a:p>
+          <a:p>
+            <a:pPr>
+              <a:spcAft>
+                <a:spcPts val="1400"/>
+              </a:spcAft>
+            </a:pPr>
+            <a:r>
+              <a:rPr sz="2400">
+                <a:solidFill>
+                  <a:srgbClr val="1F2A37"/>
+                </a:solidFill>
+              </a:rPr>
+              <a:t>• "Under 40 words, one example, no jargon" - obvious change</a:t>
+            </a:r>
+          </a:p>
+          <a:p>
+            <a:pPr>
+              <a:spcAft>
+                <a:spcPts val="1400"/>
+              </a:spcAft>
+            </a:pPr>
+            <a:r>
+              <a:rPr sz="2400">
+                <a:solidFill>
+                  <a:srgbClr val="1F2A37"/>
+                </a:solidFill>
+              </a:rPr>
+              <a:t>• Say exactly what you want</a:t>
+            </a:r>
+          </a:p>
+        </p:txBody>
+      </p:sp>
+    </p:spTree>
+  </p:cSld>
+  <p:clrMapOvr>
+    <a:masterClrMapping/>
+  </p:clrMapOvr>
+</p:sld>
+</file>
+
+<file path=ppt/slides/slide8.xml><?xml version="1.0" encoding="utf-8"?>
+<p:sld xmlns:a="http://schemas.openxmlformats.org/drawingml/2006/main" xmlns:p="http://schemas.openxmlformats.org/presentationml/2006/main" xmlns:r="http://schemas.openxmlformats.org/officeDocument/2006/relationships">
+  <p:cSld>
+    <p:spTree>
+      <p:nvGrpSpPr>
+        <p:cNvPr id="1" name=""/>
+        <p:cNvGrpSpPr/>
+        <p:nvPr/>
+      </p:nvGrpSpPr>
+      <p:grpSpPr/>
+      <p:sp>
+        <p:nvSpPr>
+          <p:cNvPr id="2" name="Title 1"/>
+          <p:cNvSpPr>
+            <a:spLocks noGrp="1"/>
+          </p:cNvSpPr>
+          <p:nvPr>
+            <p:ph type="title"/>
+          </p:nvPr>
+        </p:nvSpPr>
+        <p:spPr/>
+        <p:txBody>
+          <a:bodyPr/>
+          <a:lstStyle/>
+          <a:p>
+            <a:r>
+              <a:rPr sz="3800" b="1">
+                <a:solidFill>
+                  <a:srgbClr val="1F2A37"/>
+                </a:solidFill>
+              </a:rPr>
+              <a:t>Behaviour became data</a:t>
+            </a:r>
+          </a:p>
+        </p:txBody>
+      </p:sp>
+      <p:sp>
+        <p:nvSpPr>
+          <p:cNvPr id="3" name="TextBox 2"/>
+          <p:cNvSpPr txBox="1"/>
+          <p:nvPr/>
+        </p:nvSpPr>
+        <p:spPr>
+          <a:xfrm>
+            <a:off x="822960" y="1828800"/>
+            <a:ext cx="10515600" cy="4206240"/>
+          </a:xfrm>
+          <a:prstGeom prst="rect">
+            <a:avLst/>
+          </a:prstGeom>
+          <a:noFill/>
+        </p:spPr>
+        <p:txBody>
+          <a:bodyPr wrap="square">
+            <a:spAutoFit/>
+          </a:bodyPr>
+          <a:lstStyle/>
+          <a:p>
+            <a:pPr>
+              <a:spcAft>
+                <a:spcPts val="1400"/>
+              </a:spcAft>
+            </a:pPr>
+            <a:r>
               <a:rPr sz="2800">
                 <a:solidFill>
                   <a:srgbClr val="01AEFD"/>
                 </a:solidFill>
               </a:rPr>
-              <a:t>In pairs, 10 minutes</a:t>
+              <a:t>The personality is in a textarea now</a:t>
             </a:r>
           </a:p>
           <a:p>
@@ -3810,7 +5358,7 @@
                   <a:srgbClr val="1F2A37"/>
                 </a:solidFill>
               </a:rPr>
-              <a:t>• Write a secret character</a:t>
+              <a:t>• Change it without touching code</a:t>
             </a:r>
           </a:p>
           <a:p>
@@ -3825,22 +5373,189 @@
                   <a:srgbClr val="1F2A37"/>
                 </a:solidFill>
               </a:rPr>
-              <a:t>• Swap. Ask three questions.</a:t>
-            </a:r>
-          </a:p>
-          <a:p>
-            <a:pPr>
-              <a:spcAft>
-                <a:spcPts val="1400"/>
-              </a:spcAft>
-            </a:pPr>
-            <a:r>
-              <a:rPr sz="2400">
-                <a:solidFill>
-                  <a:srgbClr val="1F2A37"/>
-                </a:solidFill>
-              </a:rPr>
-              <a:t>• Guess who it is</a:t>
+              <a:t>• This idea shows up everywhere in software</a:t>
+            </a:r>
+          </a:p>
+        </p:txBody>
+      </p:sp>
+    </p:spTree>
+  </p:cSld>
+  <p:clrMapOvr>
+    <a:masterClrMapping/>
+  </p:clrMapOvr>
+</p:sld>
+</file>
+
+<file path=ppt/slides/slide9.xml><?xml version="1.0" encoding="utf-8"?>
+<p:sld xmlns:a="http://schemas.openxmlformats.org/drawingml/2006/main" xmlns:p="http://schemas.openxmlformats.org/presentationml/2006/main" xmlns:r="http://schemas.openxmlformats.org/officeDocument/2006/relationships">
+  <p:cSld>
+    <p:bg>
+      <p:bgPr>
+        <a:solidFill>
+          <a:srgbClr val="102127"/>
+        </a:solidFill>
+        <a:effectLst/>
+      </p:bgPr>
+    </p:bg>
+    <p:spTree>
+      <p:nvGrpSpPr>
+        <p:cNvPr id="1" name=""/>
+        <p:cNvGrpSpPr/>
+        <p:nvPr/>
+      </p:nvGrpSpPr>
+      <p:grpSpPr/>
+      <p:sp>
+        <p:nvSpPr>
+          <p:cNvPr id="2" name="TextBox 1"/>
+          <p:cNvSpPr txBox="1"/>
+          <p:nvPr/>
+        </p:nvSpPr>
+        <p:spPr>
+          <a:xfrm>
+            <a:off x="502920" y="274320"/>
+            <a:ext cx="11155680" cy="731520"/>
+          </a:xfrm>
+          <a:prstGeom prst="rect">
+            <a:avLst/>
+          </a:prstGeom>
+          <a:noFill/>
+        </p:spPr>
+        <p:txBody>
+          <a:bodyPr wrap="none">
+            <a:spAutoFit/>
+          </a:bodyPr>
+          <a:lstStyle/>
+          <a:p>
+            <a:r>
+              <a:rPr sz="2600" b="1">
+                <a:solidFill>
+                  <a:srgbClr val="01AEFD"/>
+                </a:solidFill>
+              </a:rPr>
+              <a:t>Type this into index.html  (1 of 3)</a:t>
+            </a:r>
+          </a:p>
+        </p:txBody>
+      </p:sp>
+      <p:sp>
+        <p:nvSpPr>
+          <p:cNvPr id="3" name="TextBox 2"/>
+          <p:cNvSpPr txBox="1"/>
+          <p:nvPr/>
+        </p:nvSpPr>
+        <p:spPr>
+          <a:xfrm>
+            <a:off x="502920" y="1051560"/>
+            <a:ext cx="11155680" cy="5394960"/>
+          </a:xfrm>
+          <a:prstGeom prst="rect">
+            <a:avLst/>
+          </a:prstGeom>
+          <a:noFill/>
+        </p:spPr>
+        <p:txBody>
+          <a:bodyPr wrap="none">
+            <a:spAutoFit/>
+          </a:bodyPr>
+          <a:lstStyle/>
+          <a:p>
+            <a:pPr>
+              <a:spcAft>
+                <a:spcPts val="0"/>
+              </a:spcAft>
+            </a:pPr>
+            <a:r>
+              <a:rPr sz="1700">
+                <a:solidFill>
+                  <a:srgbClr val="6D8C97"/>
+                </a:solidFill>
+                <a:latin typeface="Consolas"/>
+              </a:rPr>
+              <a:t>   6  </a:t>
+            </a:r>
+            <a:r>
+              <a:rPr sz="1700">
+                <a:solidFill>
+                  <a:srgbClr val="7FE0A0"/>
+                </a:solidFill>
+                <a:latin typeface="Consolas"/>
+              </a:rPr>
+              <a:t>  &lt;details class="setup"&gt;</a:t>
+            </a:r>
+          </a:p>
+          <a:p>
+            <a:pPr>
+              <a:spcAft>
+                <a:spcPts val="0"/>
+              </a:spcAft>
+            </a:pPr>
+            <a:r>
+              <a:rPr sz="1700">
+                <a:solidFill>
+                  <a:srgbClr val="6D8C97"/>
+                </a:solidFill>
+                <a:latin typeface="Consolas"/>
+              </a:rPr>
+              <a:t>   7  </a:t>
+            </a:r>
+            <a:r>
+              <a:rPr sz="1700">
+                <a:solidFill>
+                  <a:srgbClr val="7FE0A0"/>
+                </a:solidFill>
+                <a:latin typeface="Consolas"/>
+              </a:rPr>
+              <a:t>    &lt;summary&gt;Personality&lt;/summary&gt;</a:t>
+            </a:r>
+          </a:p>
+          <a:p>
+            <a:pPr>
+              <a:spcAft>
+                <a:spcPts val="0"/>
+              </a:spcAft>
+            </a:pPr>
+            <a:r>
+              <a:rPr sz="1700">
+                <a:solidFill>
+                  <a:srgbClr val="6D8C97"/>
+                </a:solidFill>
+                <a:latin typeface="Consolas"/>
+              </a:rPr>
+              <a:t>   8  </a:t>
+            </a:r>
+            <a:r>
+              <a:rPr sz="1700">
+                <a:solidFill>
+                  <a:srgbClr val="7FE0A0"/>
+                </a:solidFill>
+                <a:latin typeface="Consolas"/>
+              </a:rPr>
+              <a:t>    &lt;textarea id="persona" rows="3"&gt;You are a friendly, patient helper for a 13-year-old. Keep answers under 60 words. If you are not sure, say so.&lt;/textarea&gt;</a:t>
+            </a:r>
+          </a:p>
+          <a:p>
+            <a:pPr>
+              <a:spcAft>
+                <a:spcPts val="0"/>
+              </a:spcAft>
+            </a:pPr>
+            <a:r>
+              <a:rPr sz="1700">
+                <a:solidFill>
+                  <a:srgbClr val="6D8C97"/>
+                </a:solidFill>
+                <a:latin typeface="Consolas"/>
+              </a:rPr>
+              <a:t>   9  </a:t>
+            </a:r>
+            <a:r>
+              <a:rPr sz="1700">
+                <a:solidFill>
+                  <a:srgbClr val="7FE0A0"/>
+                </a:solidFill>
+                <a:latin typeface="Consolas"/>
+              </a:rPr>
+              <a:t>  &lt;/details&gt;</a:t>
             </a:r>
           </a:p>
         </p:txBody>

--- a/ai101/slides/week-06.pptx
+++ b/ai101/slides/week-06.pptx
@@ -3613,7 +3613,7 @@
                 </a:solidFill>
                 <a:latin typeface="Consolas"/>
               </a:rPr>
-              <a:t>   8  </a:t>
+              <a:t>  11  </a:t>
             </a:r>
             <a:r>
               <a:rPr sz="1700">
@@ -3638,7 +3638,7 @@
                 </a:solidFill>
                 <a:latin typeface="Consolas"/>
               </a:rPr>
-              <a:t>   9  </a:t>
+              <a:t>  12  </a:t>
             </a:r>
             <a:r>
               <a:rPr sz="1700">
@@ -3663,7 +3663,7 @@
                 </a:solidFill>
                 <a:latin typeface="Consolas"/>
               </a:rPr>
-              <a:t>  10  </a:t>
+              <a:t>  13  </a:t>
             </a:r>
             <a:r>
               <a:rPr sz="1700">
@@ -3688,7 +3688,7 @@
                 </a:solidFill>
                 <a:latin typeface="Consolas"/>
               </a:rPr>
-              <a:t>  11  </a:t>
+              <a:t>  14  </a:t>
             </a:r>
             <a:r>
               <a:rPr sz="1700">
@@ -3713,7 +3713,7 @@
                 </a:solidFill>
                 <a:latin typeface="Consolas"/>
               </a:rPr>
-              <a:t>  12  </a:t>
+              <a:t>  15  </a:t>
             </a:r>
             <a:r>
               <a:rPr sz="1700">
@@ -3738,7 +3738,7 @@
                 </a:solidFill>
                 <a:latin typeface="Consolas"/>
               </a:rPr>
-              <a:t>  13  </a:t>
+              <a:t>  16  </a:t>
             </a:r>
             <a:r>
               <a:rPr sz="1700">
@@ -3763,7 +3763,7 @@
                 </a:solidFill>
                 <a:latin typeface="Consolas"/>
               </a:rPr>
-              <a:t>  14  </a:t>
+              <a:t>  17  </a:t>
             </a:r>
             <a:r>
               <a:rPr sz="1700">
@@ -4333,7 +4333,7 @@
                 </a:solidFill>
                 <a:latin typeface="Consolas"/>
               </a:rPr>
-              <a:t>  40  </a:t>
+              <a:t>  43  </a:t>
             </a:r>
             <a:r>
               <a:rPr sz="1400">
@@ -4358,7 +4358,7 @@
                 </a:solidFill>
                 <a:latin typeface="Consolas"/>
               </a:rPr>
-              <a:t>  41  </a:t>
+              <a:t>  44  </a:t>
             </a:r>
             <a:r>
               <a:rPr sz="1400">
@@ -4383,7 +4383,7 @@
                 </a:solidFill>
                 <a:latin typeface="Consolas"/>
               </a:rPr>
-              <a:t>  42  </a:t>
+              <a:t>  45  </a:t>
             </a:r>
             <a:r>
               <a:rPr sz="1400">
@@ -4408,7 +4408,7 @@
                 </a:solidFill>
                 <a:latin typeface="Consolas"/>
               </a:rPr>
-              <a:t>  43  </a:t>
+              <a:t>  46  </a:t>
             </a:r>
             <a:r>
               <a:rPr sz="1400">
@@ -4433,7 +4433,7 @@
                 </a:solidFill>
                 <a:latin typeface="Consolas"/>
               </a:rPr>
-              <a:t>  44  </a:t>
+              <a:t>  47  </a:t>
             </a:r>
             <a:r>
               <a:rPr sz="1400">
@@ -4458,7 +4458,7 @@
                 </a:solidFill>
                 <a:latin typeface="Consolas"/>
               </a:rPr>
-              <a:t>  45  </a:t>
+              <a:t>  48  </a:t>
             </a:r>
             <a:r>
               <a:rPr sz="1400">
@@ -4483,7 +4483,7 @@
                 </a:solidFill>
                 <a:latin typeface="Consolas"/>
               </a:rPr>
-              <a:t>  46  </a:t>
+              <a:t>  49  </a:t>
             </a:r>
             <a:r>
               <a:rPr sz="1400">
@@ -4508,7 +4508,7 @@
                 </a:solidFill>
                 <a:latin typeface="Consolas"/>
               </a:rPr>
-              <a:t>  47  </a:t>
+              <a:t>  50  </a:t>
             </a:r>
             <a:r>
               <a:rPr sz="1400">
@@ -4533,7 +4533,7 @@
                 </a:solidFill>
                 <a:latin typeface="Consolas"/>
               </a:rPr>
-              <a:t>  48  </a:t>
+              <a:t>  51  </a:t>
             </a:r>
             <a:r>
               <a:rPr sz="1400">
@@ -4558,7 +4558,7 @@
                 </a:solidFill>
                 <a:latin typeface="Consolas"/>
               </a:rPr>
-              <a:t>  49  </a:t>
+              <a:t>  52  </a:t>
             </a:r>
             <a:r>
               <a:rPr sz="1400">
@@ -4583,7 +4583,7 @@
                 </a:solidFill>
                 <a:latin typeface="Consolas"/>
               </a:rPr>
-              <a:t>  50  </a:t>
+              <a:t>  53  </a:t>
             </a:r>
             <a:r>
               <a:rPr sz="1400">
@@ -4608,7 +4608,7 @@
                 </a:solidFill>
                 <a:latin typeface="Consolas"/>
               </a:rPr>
-              <a:t>  51  </a:t>
+              <a:t>  54  </a:t>
             </a:r>
             <a:r>
               <a:rPr sz="1400">
@@ -4633,7 +4633,7 @@
                 </a:solidFill>
                 <a:latin typeface="Consolas"/>
               </a:rPr>
-              <a:t>  52  </a:t>
+              <a:t>  55  </a:t>
             </a:r>
             <a:r>
               <a:rPr sz="1400">
@@ -4658,7 +4658,7 @@
                 </a:solidFill>
                 <a:latin typeface="Consolas"/>
               </a:rPr>
-              <a:t>  53  </a:t>
+              <a:t>  56  </a:t>
             </a:r>
             <a:r>
               <a:rPr sz="1400">
@@ -4683,7 +4683,7 @@
                 </a:solidFill>
                 <a:latin typeface="Consolas"/>
               </a:rPr>
-              <a:t>  54  </a:t>
+              <a:t>  57  </a:t>
             </a:r>
             <a:r>
               <a:rPr sz="1400">
@@ -4790,7 +4790,7 @@
                 </a:solidFill>
                 <a:latin typeface="Consolas"/>
               </a:rPr>
-              <a:t>  55  </a:t>
+              <a:t>  58  </a:t>
             </a:r>
             <a:r>
               <a:rPr sz="1400">
@@ -4815,7 +4815,7 @@
                 </a:solidFill>
                 <a:latin typeface="Consolas"/>
               </a:rPr>
-              <a:t>  56  </a:t>
+              <a:t>  59  </a:t>
             </a:r>
             <a:r>
               <a:rPr sz="1400">
@@ -4840,7 +4840,7 @@
                 </a:solidFill>
                 <a:latin typeface="Consolas"/>
               </a:rPr>
-              <a:t>  57  </a:t>
+              <a:t>  60  </a:t>
             </a:r>
             <a:r>
               <a:rPr sz="1400">
@@ -4865,7 +4865,7 @@
                 </a:solidFill>
                 <a:latin typeface="Consolas"/>
               </a:rPr>
-              <a:t>  58  </a:t>
+              <a:t>  61  </a:t>
             </a:r>
             <a:r>
               <a:rPr sz="1400">
@@ -4890,7 +4890,7 @@
                 </a:solidFill>
                 <a:latin typeface="Consolas"/>
               </a:rPr>
-              <a:t>  59  </a:t>
+              <a:t>  62  </a:t>
             </a:r>
             <a:r>
               <a:rPr sz="1400">
@@ -4915,7 +4915,7 @@
                 </a:solidFill>
                 <a:latin typeface="Consolas"/>
               </a:rPr>
-              <a:t>  60  </a:t>
+              <a:t>  63  </a:t>
             </a:r>
             <a:r>
               <a:rPr sz="1400">
@@ -4940,7 +4940,7 @@
                 </a:solidFill>
                 <a:latin typeface="Consolas"/>
               </a:rPr>
-              <a:t>  61  </a:t>
+              <a:t>  64  </a:t>
             </a:r>
             <a:r>
               <a:rPr sz="1400">
@@ -4965,7 +4965,7 @@
                 </a:solidFill>
                 <a:latin typeface="Consolas"/>
               </a:rPr>
-              <a:t>  62  </a:t>
+              <a:t>  65  </a:t>
             </a:r>
             <a:r>
               <a:rPr sz="1400">
@@ -4990,7 +4990,7 @@
                 </a:solidFill>
                 <a:latin typeface="Consolas"/>
               </a:rPr>
-              <a:t>  63  </a:t>
+              <a:t>  66  </a:t>
             </a:r>
             <a:r>
               <a:rPr sz="1400">
@@ -5015,7 +5015,7 @@
                 </a:solidFill>
                 <a:latin typeface="Consolas"/>
               </a:rPr>
-              <a:t>  64  </a:t>
+              <a:t>  67  </a:t>
             </a:r>
             <a:r>
               <a:rPr sz="1400">
@@ -5040,7 +5040,7 @@
                 </a:solidFill>
                 <a:latin typeface="Consolas"/>
               </a:rPr>
-              <a:t>  65  </a:t>
+              <a:t>  68  </a:t>
             </a:r>
             <a:r>
               <a:rPr sz="1400">
@@ -5065,7 +5065,7 @@
                 </a:solidFill>
                 <a:latin typeface="Consolas"/>
               </a:rPr>
-              <a:t>  66  </a:t>
+              <a:t>  69  </a:t>
             </a:r>
             <a:r>
               <a:rPr sz="1400">
@@ -5090,7 +5090,7 @@
                 </a:solidFill>
                 <a:latin typeface="Consolas"/>
               </a:rPr>
-              <a:t>  67  </a:t>
+              <a:t>  70  </a:t>
             </a:r>
             <a:r>
               <a:rPr sz="1400">
@@ -5115,7 +5115,7 @@
                 </a:solidFill>
                 <a:latin typeface="Consolas"/>
               </a:rPr>
-              <a:t>  68  </a:t>
+              <a:t>  71  </a:t>
             </a:r>
             <a:r>
               <a:rPr sz="1400">
@@ -5140,7 +5140,7 @@
                 </a:solidFill>
                 <a:latin typeface="Consolas"/>
               </a:rPr>
-              <a:t>  69  </a:t>
+              <a:t>  72  </a:t>
             </a:r>
             <a:r>
               <a:rPr sz="1400">
@@ -5471,7 +5471,7 @@
                 </a:solidFill>
                 <a:latin typeface="Consolas"/>
               </a:rPr>
-              <a:t>   6  </a:t>
+              <a:t>   8  </a:t>
             </a:r>
             <a:r>
               <a:rPr sz="1700">
@@ -5496,7 +5496,7 @@
                 </a:solidFill>
                 <a:latin typeface="Consolas"/>
               </a:rPr>
-              <a:t>   7  </a:t>
+              <a:t>   9  </a:t>
             </a:r>
             <a:r>
               <a:rPr sz="1700">
@@ -5521,7 +5521,7 @@
                 </a:solidFill>
                 <a:latin typeface="Consolas"/>
               </a:rPr>
-              <a:t>   8  </a:t>
+              <a:t>  10  </a:t>
             </a:r>
             <a:r>
               <a:rPr sz="1700">
@@ -5546,7 +5546,7 @@
                 </a:solidFill>
                 <a:latin typeface="Consolas"/>
               </a:rPr>
-              <a:t>   9  </a:t>
+              <a:t>  11  </a:t>
             </a:r>
             <a:r>
               <a:rPr sz="1700">

--- a/ai101/slides/week-06.pptx
+++ b/ai101/slides/week-06.pptx
@@ -3613,7 +3613,7 @@
                 </a:solidFill>
                 <a:latin typeface="Consolas"/>
               </a:rPr>
-              <a:t>  11  </a:t>
+              <a:t>  16  </a:t>
             </a:r>
             <a:r>
               <a:rPr sz="1700">
@@ -3638,7 +3638,7 @@
                 </a:solidFill>
                 <a:latin typeface="Consolas"/>
               </a:rPr>
-              <a:t>  12  </a:t>
+              <a:t>  17  </a:t>
             </a:r>
             <a:r>
               <a:rPr sz="1700">
@@ -3663,7 +3663,7 @@
                 </a:solidFill>
                 <a:latin typeface="Consolas"/>
               </a:rPr>
-              <a:t>  13  </a:t>
+              <a:t>  18  </a:t>
             </a:r>
             <a:r>
               <a:rPr sz="1700">
@@ -3688,7 +3688,7 @@
                 </a:solidFill>
                 <a:latin typeface="Consolas"/>
               </a:rPr>
-              <a:t>  14  </a:t>
+              <a:t>  19  </a:t>
             </a:r>
             <a:r>
               <a:rPr sz="1700">
@@ -3713,7 +3713,7 @@
                 </a:solidFill>
                 <a:latin typeface="Consolas"/>
               </a:rPr>
-              <a:t>  15  </a:t>
+              <a:t>  20  </a:t>
             </a:r>
             <a:r>
               <a:rPr sz="1700">
@@ -3738,7 +3738,7 @@
                 </a:solidFill>
                 <a:latin typeface="Consolas"/>
               </a:rPr>
-              <a:t>  16  </a:t>
+              <a:t>  21  </a:t>
             </a:r>
             <a:r>
               <a:rPr sz="1700">
@@ -3763,7 +3763,7 @@
                 </a:solidFill>
                 <a:latin typeface="Consolas"/>
               </a:rPr>
-              <a:t>  17  </a:t>
+              <a:t>  22  </a:t>
             </a:r>
             <a:r>
               <a:rPr sz="1700">
@@ -4333,7 +4333,7 @@
                 </a:solidFill>
                 <a:latin typeface="Consolas"/>
               </a:rPr>
-              <a:t>  43  </a:t>
+              <a:t>  51  </a:t>
             </a:r>
             <a:r>
               <a:rPr sz="1400">
@@ -4358,7 +4358,7 @@
                 </a:solidFill>
                 <a:latin typeface="Consolas"/>
               </a:rPr>
-              <a:t>  44  </a:t>
+              <a:t>  52  </a:t>
             </a:r>
             <a:r>
               <a:rPr sz="1400">
@@ -4383,7 +4383,7 @@
                 </a:solidFill>
                 <a:latin typeface="Consolas"/>
               </a:rPr>
-              <a:t>  45  </a:t>
+              <a:t>  53  </a:t>
             </a:r>
             <a:r>
               <a:rPr sz="1400">
@@ -4408,7 +4408,7 @@
                 </a:solidFill>
                 <a:latin typeface="Consolas"/>
               </a:rPr>
-              <a:t>  46  </a:t>
+              <a:t>  54  </a:t>
             </a:r>
             <a:r>
               <a:rPr sz="1400">
@@ -4433,7 +4433,7 @@
                 </a:solidFill>
                 <a:latin typeface="Consolas"/>
               </a:rPr>
-              <a:t>  47  </a:t>
+              <a:t>  55  </a:t>
             </a:r>
             <a:r>
               <a:rPr sz="1400">
@@ -4458,7 +4458,7 @@
                 </a:solidFill>
                 <a:latin typeface="Consolas"/>
               </a:rPr>
-              <a:t>  48  </a:t>
+              <a:t>  56  </a:t>
             </a:r>
             <a:r>
               <a:rPr sz="1400">
@@ -4483,7 +4483,7 @@
                 </a:solidFill>
                 <a:latin typeface="Consolas"/>
               </a:rPr>
-              <a:t>  49  </a:t>
+              <a:t>  57  </a:t>
             </a:r>
             <a:r>
               <a:rPr sz="1400">
@@ -4508,7 +4508,7 @@
                 </a:solidFill>
                 <a:latin typeface="Consolas"/>
               </a:rPr>
-              <a:t>  50  </a:t>
+              <a:t>  58  </a:t>
             </a:r>
             <a:r>
               <a:rPr sz="1400">
@@ -4533,7 +4533,7 @@
                 </a:solidFill>
                 <a:latin typeface="Consolas"/>
               </a:rPr>
-              <a:t>  51  </a:t>
+              <a:t>  59  </a:t>
             </a:r>
             <a:r>
               <a:rPr sz="1400">
@@ -4558,7 +4558,7 @@
                 </a:solidFill>
                 <a:latin typeface="Consolas"/>
               </a:rPr>
-              <a:t>  52  </a:t>
+              <a:t>  60  </a:t>
             </a:r>
             <a:r>
               <a:rPr sz="1400">
@@ -4583,7 +4583,7 @@
                 </a:solidFill>
                 <a:latin typeface="Consolas"/>
               </a:rPr>
-              <a:t>  53  </a:t>
+              <a:t>  61  </a:t>
             </a:r>
             <a:r>
               <a:rPr sz="1400">
@@ -4608,7 +4608,7 @@
                 </a:solidFill>
                 <a:latin typeface="Consolas"/>
               </a:rPr>
-              <a:t>  54  </a:t>
+              <a:t>  62  </a:t>
             </a:r>
             <a:r>
               <a:rPr sz="1400">
@@ -4633,7 +4633,7 @@
                 </a:solidFill>
                 <a:latin typeface="Consolas"/>
               </a:rPr>
-              <a:t>  55  </a:t>
+              <a:t>  63  </a:t>
             </a:r>
             <a:r>
               <a:rPr sz="1400">
@@ -4658,7 +4658,7 @@
                 </a:solidFill>
                 <a:latin typeface="Consolas"/>
               </a:rPr>
-              <a:t>  56  </a:t>
+              <a:t>  64  </a:t>
             </a:r>
             <a:r>
               <a:rPr sz="1400">
@@ -4683,7 +4683,7 @@
                 </a:solidFill>
                 <a:latin typeface="Consolas"/>
               </a:rPr>
-              <a:t>  57  </a:t>
+              <a:t>  65  </a:t>
             </a:r>
             <a:r>
               <a:rPr sz="1400">
@@ -4790,7 +4790,7 @@
                 </a:solidFill>
                 <a:latin typeface="Consolas"/>
               </a:rPr>
-              <a:t>  58  </a:t>
+              <a:t>  66  </a:t>
             </a:r>
             <a:r>
               <a:rPr sz="1400">
@@ -4815,7 +4815,7 @@
                 </a:solidFill>
                 <a:latin typeface="Consolas"/>
               </a:rPr>
-              <a:t>  59  </a:t>
+              <a:t>  67  </a:t>
             </a:r>
             <a:r>
               <a:rPr sz="1400">
@@ -4840,7 +4840,7 @@
                 </a:solidFill>
                 <a:latin typeface="Consolas"/>
               </a:rPr>
-              <a:t>  60  </a:t>
+              <a:t>  68  </a:t>
             </a:r>
             <a:r>
               <a:rPr sz="1400">
@@ -4865,7 +4865,7 @@
                 </a:solidFill>
                 <a:latin typeface="Consolas"/>
               </a:rPr>
-              <a:t>  61  </a:t>
+              <a:t>  69  </a:t>
             </a:r>
             <a:r>
               <a:rPr sz="1400">
@@ -4890,7 +4890,7 @@
                 </a:solidFill>
                 <a:latin typeface="Consolas"/>
               </a:rPr>
-              <a:t>  62  </a:t>
+              <a:t>  70  </a:t>
             </a:r>
             <a:r>
               <a:rPr sz="1400">
@@ -4915,7 +4915,7 @@
                 </a:solidFill>
                 <a:latin typeface="Consolas"/>
               </a:rPr>
-              <a:t>  63  </a:t>
+              <a:t>  71  </a:t>
             </a:r>
             <a:r>
               <a:rPr sz="1400">
@@ -4940,7 +4940,7 @@
                 </a:solidFill>
                 <a:latin typeface="Consolas"/>
               </a:rPr>
-              <a:t>  64  </a:t>
+              <a:t>  72  </a:t>
             </a:r>
             <a:r>
               <a:rPr sz="1400">
@@ -4965,7 +4965,7 @@
                 </a:solidFill>
                 <a:latin typeface="Consolas"/>
               </a:rPr>
-              <a:t>  65  </a:t>
+              <a:t>  73  </a:t>
             </a:r>
             <a:r>
               <a:rPr sz="1400">
@@ -4990,7 +4990,7 @@
                 </a:solidFill>
                 <a:latin typeface="Consolas"/>
               </a:rPr>
-              <a:t>  66  </a:t>
+              <a:t>  74  </a:t>
             </a:r>
             <a:r>
               <a:rPr sz="1400">
@@ -5015,7 +5015,7 @@
                 </a:solidFill>
                 <a:latin typeface="Consolas"/>
               </a:rPr>
-              <a:t>  67  </a:t>
+              <a:t>  75  </a:t>
             </a:r>
             <a:r>
               <a:rPr sz="1400">
@@ -5040,7 +5040,7 @@
                 </a:solidFill>
                 <a:latin typeface="Consolas"/>
               </a:rPr>
-              <a:t>  68  </a:t>
+              <a:t>  76  </a:t>
             </a:r>
             <a:r>
               <a:rPr sz="1400">
@@ -5065,7 +5065,7 @@
                 </a:solidFill>
                 <a:latin typeface="Consolas"/>
               </a:rPr>
-              <a:t>  69  </a:t>
+              <a:t>  77  </a:t>
             </a:r>
             <a:r>
               <a:rPr sz="1400">
@@ -5090,7 +5090,7 @@
                 </a:solidFill>
                 <a:latin typeface="Consolas"/>
               </a:rPr>
-              <a:t>  70  </a:t>
+              <a:t>  78  </a:t>
             </a:r>
             <a:r>
               <a:rPr sz="1400">
@@ -5115,7 +5115,7 @@
                 </a:solidFill>
                 <a:latin typeface="Consolas"/>
               </a:rPr>
-              <a:t>  71  </a:t>
+              <a:t>  79  </a:t>
             </a:r>
             <a:r>
               <a:rPr sz="1400">
@@ -5140,7 +5140,7 @@
                 </a:solidFill>
                 <a:latin typeface="Consolas"/>
               </a:rPr>
-              <a:t>  72  </a:t>
+              <a:t>  80  </a:t>
             </a:r>
             <a:r>
               <a:rPr sz="1400">

--- a/ai101/slides/week-06.pptx
+++ b/ai101/slides/week-06.pptx
@@ -17,6 +17,27 @@
     <p:sldId id="265" r:id="rId16"/>
     <p:sldId id="266" r:id="rId17"/>
     <p:sldId id="267" r:id="rId18"/>
+    <p:sldId id="268" r:id="rId19"/>
+    <p:sldId id="269" r:id="rId20"/>
+    <p:sldId id="270" r:id="rId21"/>
+    <p:sldId id="271" r:id="rId22"/>
+    <p:sldId id="272" r:id="rId23"/>
+    <p:sldId id="273" r:id="rId24"/>
+    <p:sldId id="274" r:id="rId25"/>
+    <p:sldId id="275" r:id="rId26"/>
+    <p:sldId id="276" r:id="rId27"/>
+    <p:sldId id="277" r:id="rId28"/>
+    <p:sldId id="278" r:id="rId29"/>
+    <p:sldId id="279" r:id="rId30"/>
+    <p:sldId id="280" r:id="rId31"/>
+    <p:sldId id="281" r:id="rId32"/>
+    <p:sldId id="282" r:id="rId33"/>
+    <p:sldId id="283" r:id="rId34"/>
+    <p:sldId id="284" r:id="rId35"/>
+    <p:sldId id="285" r:id="rId36"/>
+    <p:sldId id="286" r:id="rId37"/>
+    <p:sldId id="287" r:id="rId38"/>
+    <p:sldId id="288" r:id="rId39"/>
   </p:sldIdLst>
   <p:sldSz cx="12191695" cy="6858000" type="screen4x3"/>
   <p:notesSz cx="6858000" cy="9144000"/>
@@ -3174,14 +3195,6 @@
 <file path=ppt/slides/slide10.xml><?xml version="1.0" encoding="utf-8"?>
 <p:sld xmlns:a="http://schemas.openxmlformats.org/drawingml/2006/main" xmlns:p="http://schemas.openxmlformats.org/presentationml/2006/main" xmlns:r="http://schemas.openxmlformats.org/officeDocument/2006/relationships">
   <p:cSld>
-    <p:bg>
-      <p:bgPr>
-        <a:solidFill>
-          <a:srgbClr val="102127"/>
-        </a:solidFill>
-        <a:effectLst/>
-      </p:bgPr>
-    </p:bg>
     <p:spTree>
       <p:nvGrpSpPr>
         <p:cNvPr id="1" name=""/>
@@ -3191,14 +3204,40 @@
       <p:grpSpPr/>
       <p:sp>
         <p:nvSpPr>
-          <p:cNvPr id="2" name="TextBox 1"/>
+          <p:cNvPr id="2" name="Title 1"/>
+          <p:cNvSpPr>
+            <a:spLocks noGrp="1"/>
+          </p:cNvSpPr>
+          <p:nvPr>
+            <p:ph type="title"/>
+          </p:nvPr>
+        </p:nvSpPr>
+        <p:spPr/>
+        <p:txBody>
+          <a:bodyPr/>
+          <a:lstStyle/>
+          <a:p>
+            <a:r>
+              <a:rPr sz="3800" b="1">
+                <a:solidFill>
+                  <a:srgbClr val="1F2A37"/>
+                </a:solidFill>
+              </a:rPr>
+              <a:t>The &lt;textarea&gt; tag</a:t>
+            </a:r>
+          </a:p>
+        </p:txBody>
+      </p:sp>
+      <p:sp>
+        <p:nvSpPr>
+          <p:cNvPr id="3" name="TextBox 2"/>
           <p:cNvSpPr txBox="1"/>
           <p:nvPr/>
         </p:nvSpPr>
         <p:spPr>
           <a:xfrm>
-            <a:off x="502920" y="274320"/>
-            <a:ext cx="11155680" cy="731520"/>
+            <a:off x="868680" y="502920"/>
+            <a:ext cx="5486400" cy="457200"/>
           </a:xfrm>
           <a:prstGeom prst="rect">
             <a:avLst/>
@@ -3212,26 +3251,26 @@
           <a:lstStyle/>
           <a:p>
             <a:r>
-              <a:rPr sz="2600" b="1">
+              <a:rPr sz="1500" b="1">
                 <a:solidFill>
                   <a:srgbClr val="01AEFD"/>
                 </a:solidFill>
               </a:rPr>
-              <a:t>Type this into style.css  (2 of 3)</a:t>
-            </a:r>
-          </a:p>
-        </p:txBody>
-      </p:sp>
-      <p:sp>
-        <p:nvSpPr>
-          <p:cNvPr id="3" name="TextBox 2"/>
+              <a:t>HTML</a:t>
+            </a:r>
+          </a:p>
+        </p:txBody>
+      </p:sp>
+      <p:sp>
+        <p:nvSpPr>
+          <p:cNvPr id="4" name="TextBox 3"/>
           <p:cNvSpPr txBox="1"/>
           <p:nvPr/>
         </p:nvSpPr>
         <p:spPr>
           <a:xfrm>
-            <a:off x="502920" y="1051560"/>
-            <a:ext cx="11155680" cy="5394960"/>
+            <a:off x="822960" y="1828800"/>
+            <a:ext cx="10515600" cy="4206240"/>
           </a:xfrm>
           <a:prstGeom prst="rect">
             <a:avLst/>
@@ -3239,283 +3278,38 @@
           <a:noFill/>
         </p:spPr>
         <p:txBody>
-          <a:bodyPr wrap="none">
+          <a:bodyPr wrap="square">
             <a:spAutoFit/>
           </a:bodyPr>
           <a:lstStyle/>
           <a:p>
             <a:pPr>
               <a:spcAft>
-                <a:spcPts val="0"/>
-              </a:spcAft>
-            </a:pPr>
-            <a:r>
-              <a:rPr sz="1700">
-                <a:solidFill>
-                  <a:srgbClr val="6D8C97"/>
-                </a:solidFill>
-                <a:latin typeface="Consolas"/>
-              </a:rPr>
-              <a:t>  21  </a:t>
-            </a:r>
-            <a:r>
-              <a:rPr sz="1700">
-                <a:solidFill>
-                  <a:srgbClr val="7FE0A0"/>
-                </a:solidFill>
-                <a:latin typeface="Consolas"/>
-              </a:rPr>
-              <a:t>.setup { margin-bottom: 12px; font-size: 14px; }</a:t>
-            </a:r>
-          </a:p>
-          <a:p>
-            <a:pPr>
-              <a:spcAft>
-                <a:spcPts val="0"/>
-              </a:spcAft>
-            </a:pPr>
-            <a:r>
-              <a:rPr sz="1700">
-                <a:solidFill>
-                  <a:srgbClr val="6D8C97"/>
-                </a:solidFill>
-                <a:latin typeface="Consolas"/>
-              </a:rPr>
-              <a:t>  22  </a:t>
-            </a:r>
-            <a:r>
-              <a:rPr sz="1700">
-                <a:solidFill>
-                  <a:srgbClr val="7FE0A0"/>
-                </a:solidFill>
-                <a:latin typeface="Consolas"/>
-              </a:rPr>
-              <a:t>.setup summary { cursor: pointer; color: #0a6299; font-weight: bold; }</a:t>
-            </a:r>
-          </a:p>
-          <a:p>
-            <a:pPr>
-              <a:spcAft>
-                <a:spcPts val="0"/>
-              </a:spcAft>
-            </a:pPr>
-            <a:r>
-              <a:rPr sz="1700">
-                <a:solidFill>
-                  <a:srgbClr val="6D8C97"/>
-                </a:solidFill>
-                <a:latin typeface="Consolas"/>
-              </a:rPr>
-              <a:t>  23  </a:t>
-            </a:r>
-            <a:r>
-              <a:rPr sz="1700">
-                <a:solidFill>
-                  <a:srgbClr val="7FE0A0"/>
-                </a:solidFill>
-                <a:latin typeface="Consolas"/>
-              </a:rPr>
-              <a:t>.setup textarea {</a:t>
-            </a:r>
-          </a:p>
-          <a:p>
-            <a:pPr>
-              <a:spcAft>
-                <a:spcPts val="0"/>
-              </a:spcAft>
-            </a:pPr>
-            <a:r>
-              <a:rPr sz="1700">
-                <a:solidFill>
-                  <a:srgbClr val="6D8C97"/>
-                </a:solidFill>
-                <a:latin typeface="Consolas"/>
-              </a:rPr>
-              <a:t>  24  </a:t>
-            </a:r>
-            <a:r>
-              <a:rPr sz="1700">
-                <a:solidFill>
-                  <a:srgbClr val="7FE0A0"/>
-                </a:solidFill>
-                <a:latin typeface="Consolas"/>
-              </a:rPr>
-              <a:t>  width: 100%;</a:t>
-            </a:r>
-          </a:p>
-          <a:p>
-            <a:pPr>
-              <a:spcAft>
-                <a:spcPts val="0"/>
-              </a:spcAft>
-            </a:pPr>
-            <a:r>
-              <a:rPr sz="1700">
-                <a:solidFill>
-                  <a:srgbClr val="6D8C97"/>
-                </a:solidFill>
-                <a:latin typeface="Consolas"/>
-              </a:rPr>
-              <a:t>  25  </a:t>
-            </a:r>
-            <a:r>
-              <a:rPr sz="1700">
-                <a:solidFill>
-                  <a:srgbClr val="7FE0A0"/>
-                </a:solidFill>
-                <a:latin typeface="Consolas"/>
-              </a:rPr>
-              <a:t>  margin-top: 8px;</a:t>
-            </a:r>
-          </a:p>
-          <a:p>
-            <a:pPr>
-              <a:spcAft>
-                <a:spcPts val="0"/>
-              </a:spcAft>
-            </a:pPr>
-            <a:r>
-              <a:rPr sz="1700">
-                <a:solidFill>
-                  <a:srgbClr val="6D8C97"/>
-                </a:solidFill>
-                <a:latin typeface="Consolas"/>
-              </a:rPr>
-              <a:t>  26  </a:t>
-            </a:r>
-            <a:r>
-              <a:rPr sz="1700">
-                <a:solidFill>
-                  <a:srgbClr val="7FE0A0"/>
-                </a:solidFill>
-                <a:latin typeface="Consolas"/>
-              </a:rPr>
-              <a:t>  padding: 9px;</a:t>
-            </a:r>
-          </a:p>
-          <a:p>
-            <a:pPr>
-              <a:spcAft>
-                <a:spcPts val="0"/>
-              </a:spcAft>
-            </a:pPr>
-            <a:r>
-              <a:rPr sz="1700">
-                <a:solidFill>
-                  <a:srgbClr val="6D8C97"/>
-                </a:solidFill>
-                <a:latin typeface="Consolas"/>
-              </a:rPr>
-              <a:t>  27  </a:t>
-            </a:r>
-            <a:r>
-              <a:rPr sz="1700">
-                <a:solidFill>
-                  <a:srgbClr val="7FE0A0"/>
-                </a:solidFill>
-                <a:latin typeface="Consolas"/>
-              </a:rPr>
-              <a:t>  border: 1px solid #dbe3ec;</a:t>
-            </a:r>
-          </a:p>
-          <a:p>
-            <a:pPr>
-              <a:spcAft>
-                <a:spcPts val="0"/>
-              </a:spcAft>
-            </a:pPr>
-            <a:r>
-              <a:rPr sz="1700">
-                <a:solidFill>
-                  <a:srgbClr val="6D8C97"/>
-                </a:solidFill>
-                <a:latin typeface="Consolas"/>
-              </a:rPr>
-              <a:t>  28  </a:t>
-            </a:r>
-            <a:r>
-              <a:rPr sz="1700">
-                <a:solidFill>
-                  <a:srgbClr val="7FE0A0"/>
-                </a:solidFill>
-                <a:latin typeface="Consolas"/>
-              </a:rPr>
-              <a:t>  border-radius: 6px;</a:t>
-            </a:r>
-          </a:p>
-          <a:p>
-            <a:pPr>
-              <a:spcAft>
-                <a:spcPts val="0"/>
-              </a:spcAft>
-            </a:pPr>
-            <a:r>
-              <a:rPr sz="1700">
-                <a:solidFill>
-                  <a:srgbClr val="6D8C97"/>
-                </a:solidFill>
-                <a:latin typeface="Consolas"/>
-              </a:rPr>
-              <a:t>  29  </a:t>
-            </a:r>
-            <a:r>
-              <a:rPr sz="1700">
-                <a:solidFill>
-                  <a:srgbClr val="7FE0A0"/>
-                </a:solidFill>
-                <a:latin typeface="Consolas"/>
-              </a:rPr>
-              <a:t>  font-family: inherit;</a:t>
-            </a:r>
-          </a:p>
-          <a:p>
-            <a:pPr>
-              <a:spcAft>
-                <a:spcPts val="0"/>
-              </a:spcAft>
-            </a:pPr>
-            <a:r>
-              <a:rPr sz="1700">
-                <a:solidFill>
-                  <a:srgbClr val="6D8C97"/>
-                </a:solidFill>
-                <a:latin typeface="Consolas"/>
-              </a:rPr>
-              <a:t>  30  </a:t>
-            </a:r>
-            <a:r>
-              <a:rPr sz="1700">
-                <a:solidFill>
-                  <a:srgbClr val="7FE0A0"/>
-                </a:solidFill>
-                <a:latin typeface="Consolas"/>
-              </a:rPr>
-              <a:t>  font-size: 14px;</a:t>
-            </a:r>
-          </a:p>
-          <a:p>
-            <a:pPr>
-              <a:spcAft>
-                <a:spcPts val="0"/>
-              </a:spcAft>
-            </a:pPr>
-            <a:r>
-              <a:rPr sz="1700">
-                <a:solidFill>
-                  <a:srgbClr val="6D8C97"/>
-                </a:solidFill>
-                <a:latin typeface="Consolas"/>
-              </a:rPr>
-              <a:t>  31  </a:t>
-            </a:r>
-            <a:r>
-              <a:rPr sz="1700">
-                <a:solidFill>
-                  <a:srgbClr val="7FE0A0"/>
-                </a:solidFill>
-                <a:latin typeface="Consolas"/>
-              </a:rPr>
-              <a:t>}</a:t>
+                <a:spcPts val="1400"/>
+              </a:spcAft>
+            </a:pPr>
+            <a:r>
+              <a:rPr sz="2400">
+                <a:solidFill>
+                  <a:srgbClr val="1F2A37"/>
+                </a:solidFill>
+              </a:rPr>
+              <a:t>• A text box for SEVERAL lines, unlike &lt;input&gt; which is one line.</a:t>
+            </a:r>
+          </a:p>
+          <a:p>
+            <a:pPr>
+              <a:spcAft>
+                <a:spcPts val="1400"/>
+              </a:spcAft>
+            </a:pPr>
+            <a:r>
+              <a:rPr sz="2400">
+                <a:solidFill>
+                  <a:srgbClr val="1F2A37"/>
+                </a:solidFill>
+              </a:rPr>
+              <a:t>• rows sets how tall it starts.</a:t>
             </a:r>
           </a:p>
         </p:txBody>
@@ -3555,7 +3349,7 @@
         <p:spPr>
           <a:xfrm>
             <a:off x="502920" y="274320"/>
-            <a:ext cx="11155680" cy="731520"/>
+            <a:ext cx="11155680" cy="548640"/>
           </a:xfrm>
           <a:prstGeom prst="rect">
             <a:avLst/>
@@ -3569,12 +3363,12 @@
           <a:lstStyle/>
           <a:p>
             <a:r>
-              <a:rPr sz="2600" b="1">
+              <a:rPr sz="2200" b="1">
                 <a:solidFill>
                   <a:srgbClr val="01AEFD"/>
                 </a:solidFill>
               </a:rPr>
-              <a:t>Type this into script.js  (3 of 3)</a:t>
+              <a:t>Type this into index.html   -   line 10</a:t>
             </a:r>
           </a:p>
         </p:txBody>
@@ -3587,8 +3381,8 @@
         </p:nvSpPr>
         <p:spPr>
           <a:xfrm>
-            <a:off x="502920" y="1051560"/>
-            <a:ext cx="11155680" cy="5394960"/>
+            <a:off x="502920" y="960120"/>
+            <a:ext cx="11155680" cy="4297680"/>
           </a:xfrm>
           <a:prstGeom prst="rect">
             <a:avLst/>
@@ -3607,172 +3401,105 @@
               </a:spcAft>
             </a:pPr>
             <a:r>
-              <a:rPr sz="1700">
-                <a:solidFill>
-                  <a:srgbClr val="6D8C97"/>
-                </a:solidFill>
-                <a:latin typeface="Consolas"/>
-              </a:rPr>
-              <a:t>  16  </a:t>
-            </a:r>
-            <a:r>
-              <a:rPr sz="1700">
+              <a:rPr sz="1800">
+                <a:solidFill>
+                  <a:srgbClr val="6D8C97"/>
+                </a:solidFill>
+                <a:latin typeface="Consolas"/>
+              </a:rPr>
+              <a:t>   8  </a:t>
+            </a:r>
+            <a:r>
+              <a:rPr sz="1800">
+                <a:solidFill>
+                  <a:srgbClr val="6D8C97"/>
+                </a:solidFill>
+                <a:latin typeface="Consolas"/>
+              </a:rPr>
+              <a:t>  &lt;details class="setup"&gt;</a:t>
+            </a:r>
+          </a:p>
+          <a:p>
+            <a:pPr>
+              <a:spcAft>
+                <a:spcPts val="0"/>
+              </a:spcAft>
+            </a:pPr>
+            <a:r>
+              <a:rPr sz="1800">
+                <a:solidFill>
+                  <a:srgbClr val="6D8C97"/>
+                </a:solidFill>
+                <a:latin typeface="Consolas"/>
+              </a:rPr>
+              <a:t>   9  </a:t>
+            </a:r>
+            <a:r>
+              <a:rPr sz="1800">
+                <a:solidFill>
+                  <a:srgbClr val="6D8C97"/>
+                </a:solidFill>
+                <a:latin typeface="Consolas"/>
+              </a:rPr>
+              <a:t>    &lt;summary&gt;Personality&lt;/summary&gt;</a:t>
+            </a:r>
+          </a:p>
+          <a:p>
+            <a:pPr>
+              <a:spcAft>
+                <a:spcPts val="0"/>
+              </a:spcAft>
+            </a:pPr>
+            <a:r>
+              <a:rPr sz="1800">
+                <a:solidFill>
+                  <a:srgbClr val="6D8C97"/>
+                </a:solidFill>
+                <a:latin typeface="Consolas"/>
+              </a:rPr>
+              <a:t>  10  </a:t>
+            </a:r>
+            <a:r>
+              <a:rPr sz="1800">
+                <a:solidFill>
+                  <a:srgbClr val="7FE0A0"/>
+                </a:solidFill>
+                <a:latin typeface="Consolas"/>
+              </a:rPr>
+              <a:t>    &lt;textarea id="persona" rows="3"&gt;You are a friendly, patient helper for a 13-year-old. Keep answers under 60 words. If you are not sure, say so.&lt;/textarea&gt;</a:t>
+            </a:r>
+          </a:p>
+        </p:txBody>
+      </p:sp>
+      <p:sp>
+        <p:nvSpPr>
+          <p:cNvPr id="4" name="TextBox 3"/>
+          <p:cNvSpPr txBox="1"/>
+          <p:nvPr/>
+        </p:nvSpPr>
+        <p:spPr>
+          <a:xfrm>
+            <a:off x="548640" y="5623560"/>
+            <a:ext cx="11064240" cy="1051560"/>
+          </a:xfrm>
+          <a:prstGeom prst="rect">
+            <a:avLst/>
+          </a:prstGeom>
+          <a:noFill/>
+        </p:spPr>
+        <p:txBody>
+          <a:bodyPr wrap="square">
+            <a:spAutoFit/>
+          </a:bodyPr>
+          <a:lstStyle/>
+          <a:p>
+            <a:r>
+              <a:rPr sz="2000">
                 <a:solidFill>
                   <a:srgbClr val="DCECEF"/>
                 </a:solidFill>
-                <a:latin typeface="Consolas"/>
-              </a:rPr>
-              <a:t> </a:t>
-            </a:r>
-          </a:p>
-          <a:p>
-            <a:pPr>
-              <a:spcAft>
-                <a:spcPts val="0"/>
-              </a:spcAft>
-            </a:pPr>
-            <a:r>
-              <a:rPr sz="1700">
-                <a:solidFill>
-                  <a:srgbClr val="6D8C97"/>
-                </a:solidFill>
-                <a:latin typeface="Consolas"/>
-              </a:rPr>
-              <a:t>  17  </a:t>
-            </a:r>
-            <a:r>
-              <a:rPr sz="1700">
-                <a:solidFill>
-                  <a:srgbClr val="DCECEF"/>
-                </a:solidFill>
-                <a:latin typeface="Consolas"/>
-              </a:rPr>
-              <a:t>// Week 2: find the boxes we named in index.html.</a:t>
-            </a:r>
-          </a:p>
-          <a:p>
-            <a:pPr>
-              <a:spcAft>
-                <a:spcPts val="0"/>
-              </a:spcAft>
-            </a:pPr>
-            <a:r>
-              <a:rPr sz="1700">
-                <a:solidFill>
-                  <a:srgbClr val="6D8C97"/>
-                </a:solidFill>
-                <a:latin typeface="Consolas"/>
-              </a:rPr>
-              <a:t>  18  </a:t>
-            </a:r>
-            <a:r>
-              <a:rPr sz="1700">
-                <a:solidFill>
-                  <a:srgbClr val="DCECEF"/>
-                </a:solidFill>
-                <a:latin typeface="Consolas"/>
-              </a:rPr>
-              <a:t>// document.getElementById looks for the id= we wrote on each element.</a:t>
-            </a:r>
-          </a:p>
-          <a:p>
-            <a:pPr>
-              <a:spcAft>
-                <a:spcPts val="0"/>
-              </a:spcAft>
-            </a:pPr>
-            <a:r>
-              <a:rPr sz="1700">
-                <a:solidFill>
-                  <a:srgbClr val="6D8C97"/>
-                </a:solidFill>
-                <a:latin typeface="Consolas"/>
-              </a:rPr>
-              <a:t>  19  </a:t>
-            </a:r>
-            <a:r>
-              <a:rPr sz="1700">
-                <a:solidFill>
-                  <a:srgbClr val="DCECEF"/>
-                </a:solidFill>
-                <a:latin typeface="Consolas"/>
-              </a:rPr>
-              <a:t>const chat = document.getElementById('chat');</a:t>
-            </a:r>
-          </a:p>
-          <a:p>
-            <a:pPr>
-              <a:spcAft>
-                <a:spcPts val="0"/>
-              </a:spcAft>
-            </a:pPr>
-            <a:r>
-              <a:rPr sz="1700">
-                <a:solidFill>
-                  <a:srgbClr val="6D8C97"/>
-                </a:solidFill>
-                <a:latin typeface="Consolas"/>
-              </a:rPr>
-              <a:t>  20  </a:t>
-            </a:r>
-            <a:r>
-              <a:rPr sz="1700">
-                <a:solidFill>
-                  <a:srgbClr val="DCECEF"/>
-                </a:solidFill>
-                <a:latin typeface="Consolas"/>
-              </a:rPr>
-              <a:t>const composer = document.getElementById('composer');</a:t>
-            </a:r>
-          </a:p>
-          <a:p>
-            <a:pPr>
-              <a:spcAft>
-                <a:spcPts val="0"/>
-              </a:spcAft>
-            </a:pPr>
-            <a:r>
-              <a:rPr sz="1700">
-                <a:solidFill>
-                  <a:srgbClr val="6D8C97"/>
-                </a:solidFill>
-                <a:latin typeface="Consolas"/>
-              </a:rPr>
-              <a:t>  21  </a:t>
-            </a:r>
-            <a:r>
-              <a:rPr sz="1700">
-                <a:solidFill>
-                  <a:srgbClr val="DCECEF"/>
-                </a:solidFill>
-                <a:latin typeface="Consolas"/>
-              </a:rPr>
-              <a:t>const promptBox = document.getElementById('prompt');</a:t>
-            </a:r>
-          </a:p>
-          <a:p>
-            <a:pPr>
-              <a:spcAft>
-                <a:spcPts val="0"/>
-              </a:spcAft>
-            </a:pPr>
-            <a:r>
-              <a:rPr sz="1700">
-                <a:solidFill>
-                  <a:srgbClr val="6D8C97"/>
-                </a:solidFill>
-                <a:latin typeface="Consolas"/>
-              </a:rPr>
-              <a:t>  22  </a:t>
-            </a:r>
-            <a:r>
-              <a:rPr sz="1700">
-                <a:solidFill>
-                  <a:srgbClr val="7FE0A0"/>
-                </a:solidFill>
-                <a:latin typeface="Consolas"/>
-              </a:rPr>
-              <a:t>const personaBox = document.getElementById('persona');</a:t>
+              </a:rPr>
+              <a:t>A &lt;textarea&gt; for a few lines of instruction. id="persona" lets the code read it; the text inside is the starting personality.</a:t>
             </a:r>
           </a:p>
         </p:txBody>
@@ -3788,6 +3515,14 @@
 <file path=ppt/slides/slide12.xml><?xml version="1.0" encoding="utf-8"?>
 <p:sld xmlns:a="http://schemas.openxmlformats.org/drawingml/2006/main" xmlns:p="http://schemas.openxmlformats.org/presentationml/2006/main" xmlns:r="http://schemas.openxmlformats.org/officeDocument/2006/relationships">
   <p:cSld>
+    <p:bg>
+      <p:bgPr>
+        <a:solidFill>
+          <a:srgbClr val="102127"/>
+        </a:solidFill>
+        <a:effectLst/>
+      </p:bgPr>
+    </p:bg>
     <p:spTree>
       <p:nvGrpSpPr>
         <p:cNvPr id="1" name=""/>
@@ -3797,6 +3532,428 @@
       <p:grpSpPr/>
       <p:sp>
         <p:nvSpPr>
+          <p:cNvPr id="2" name="TextBox 1"/>
+          <p:cNvSpPr txBox="1"/>
+          <p:nvPr/>
+        </p:nvSpPr>
+        <p:spPr>
+          <a:xfrm>
+            <a:off x="502920" y="274320"/>
+            <a:ext cx="11155680" cy="548640"/>
+          </a:xfrm>
+          <a:prstGeom prst="rect">
+            <a:avLst/>
+          </a:prstGeom>
+          <a:noFill/>
+        </p:spPr>
+        <p:txBody>
+          <a:bodyPr wrap="none">
+            <a:spAutoFit/>
+          </a:bodyPr>
+          <a:lstStyle/>
+          <a:p>
+            <a:r>
+              <a:rPr sz="2200" b="1">
+                <a:solidFill>
+                  <a:srgbClr val="01AEFD"/>
+                </a:solidFill>
+              </a:rPr>
+              <a:t>Type this into index.html   -   line 11</a:t>
+            </a:r>
+          </a:p>
+        </p:txBody>
+      </p:sp>
+      <p:sp>
+        <p:nvSpPr>
+          <p:cNvPr id="3" name="TextBox 2"/>
+          <p:cNvSpPr txBox="1"/>
+          <p:nvPr/>
+        </p:nvSpPr>
+        <p:spPr>
+          <a:xfrm>
+            <a:off x="502920" y="960120"/>
+            <a:ext cx="11155680" cy="4297680"/>
+          </a:xfrm>
+          <a:prstGeom prst="rect">
+            <a:avLst/>
+          </a:prstGeom>
+          <a:noFill/>
+        </p:spPr>
+        <p:txBody>
+          <a:bodyPr wrap="none">
+            <a:spAutoFit/>
+          </a:bodyPr>
+          <a:lstStyle/>
+          <a:p>
+            <a:pPr>
+              <a:spcAft>
+                <a:spcPts val="0"/>
+              </a:spcAft>
+            </a:pPr>
+            <a:r>
+              <a:rPr sz="1800">
+                <a:solidFill>
+                  <a:srgbClr val="6D8C97"/>
+                </a:solidFill>
+                <a:latin typeface="Consolas"/>
+              </a:rPr>
+              <a:t>   8  </a:t>
+            </a:r>
+            <a:r>
+              <a:rPr sz="1800">
+                <a:solidFill>
+                  <a:srgbClr val="6D8C97"/>
+                </a:solidFill>
+                <a:latin typeface="Consolas"/>
+              </a:rPr>
+              <a:t>  &lt;details class="setup"&gt;</a:t>
+            </a:r>
+          </a:p>
+          <a:p>
+            <a:pPr>
+              <a:spcAft>
+                <a:spcPts val="0"/>
+              </a:spcAft>
+            </a:pPr>
+            <a:r>
+              <a:rPr sz="1800">
+                <a:solidFill>
+                  <a:srgbClr val="6D8C97"/>
+                </a:solidFill>
+                <a:latin typeface="Consolas"/>
+              </a:rPr>
+              <a:t>   9  </a:t>
+            </a:r>
+            <a:r>
+              <a:rPr sz="1800">
+                <a:solidFill>
+                  <a:srgbClr val="6D8C97"/>
+                </a:solidFill>
+                <a:latin typeface="Consolas"/>
+              </a:rPr>
+              <a:t>    &lt;summary&gt;Personality&lt;/summary&gt;</a:t>
+            </a:r>
+          </a:p>
+          <a:p>
+            <a:pPr>
+              <a:spcAft>
+                <a:spcPts val="0"/>
+              </a:spcAft>
+            </a:pPr>
+            <a:r>
+              <a:rPr sz="1800">
+                <a:solidFill>
+                  <a:srgbClr val="6D8C97"/>
+                </a:solidFill>
+                <a:latin typeface="Consolas"/>
+              </a:rPr>
+              <a:t>  10  </a:t>
+            </a:r>
+            <a:r>
+              <a:rPr sz="1800">
+                <a:solidFill>
+                  <a:srgbClr val="6D8C97"/>
+                </a:solidFill>
+                <a:latin typeface="Consolas"/>
+              </a:rPr>
+              <a:t>    &lt;textarea id="persona" rows="3"&gt;You are a friendly, patient helper for a 13-year-old. Keep answers under 60 words. If you are not sure, say so.&lt;/textarea&gt;</a:t>
+            </a:r>
+          </a:p>
+          <a:p>
+            <a:pPr>
+              <a:spcAft>
+                <a:spcPts val="0"/>
+              </a:spcAft>
+            </a:pPr>
+            <a:r>
+              <a:rPr sz="1800">
+                <a:solidFill>
+                  <a:srgbClr val="6D8C97"/>
+                </a:solidFill>
+                <a:latin typeface="Consolas"/>
+              </a:rPr>
+              <a:t>  11  </a:t>
+            </a:r>
+            <a:r>
+              <a:rPr sz="1800">
+                <a:solidFill>
+                  <a:srgbClr val="7FE0A0"/>
+                </a:solidFill>
+                <a:latin typeface="Consolas"/>
+              </a:rPr>
+              <a:t>  &lt;/details&gt;</a:t>
+            </a:r>
+          </a:p>
+        </p:txBody>
+      </p:sp>
+      <p:sp>
+        <p:nvSpPr>
+          <p:cNvPr id="4" name="TextBox 3"/>
+          <p:cNvSpPr txBox="1"/>
+          <p:nvPr/>
+        </p:nvSpPr>
+        <p:spPr>
+          <a:xfrm>
+            <a:off x="548640" y="5623560"/>
+            <a:ext cx="11064240" cy="1051560"/>
+          </a:xfrm>
+          <a:prstGeom prst="rect">
+            <a:avLst/>
+          </a:prstGeom>
+          <a:noFill/>
+        </p:spPr>
+        <p:txBody>
+          <a:bodyPr wrap="square">
+            <a:spAutoFit/>
+          </a:bodyPr>
+          <a:lstStyle/>
+          <a:p>
+            <a:r>
+              <a:rPr sz="2000">
+                <a:solidFill>
+                  <a:srgbClr val="DCECEF"/>
+                </a:solidFill>
+              </a:rPr>
+              <a:t>Close the &lt;/details&gt; box.</a:t>
+            </a:r>
+          </a:p>
+        </p:txBody>
+      </p:sp>
+    </p:spTree>
+  </p:cSld>
+  <p:clrMapOvr>
+    <a:masterClrMapping/>
+  </p:clrMapOvr>
+</p:sld>
+</file>
+
+<file path=ppt/slides/slide13.xml><?xml version="1.0" encoding="utf-8"?>
+<p:sld xmlns:a="http://schemas.openxmlformats.org/drawingml/2006/main" xmlns:p="http://schemas.openxmlformats.org/presentationml/2006/main" xmlns:r="http://schemas.openxmlformats.org/officeDocument/2006/relationships">
+  <p:cSld>
+    <p:bg>
+      <p:bgPr>
+        <a:solidFill>
+          <a:srgbClr val="102127"/>
+        </a:solidFill>
+        <a:effectLst/>
+      </p:bgPr>
+    </p:bg>
+    <p:spTree>
+      <p:nvGrpSpPr>
+        <p:cNvPr id="1" name=""/>
+        <p:cNvGrpSpPr/>
+        <p:nvPr/>
+      </p:nvGrpSpPr>
+      <p:grpSpPr/>
+      <p:sp>
+        <p:nvSpPr>
+          <p:cNvPr id="2" name="TextBox 1"/>
+          <p:cNvSpPr txBox="1"/>
+          <p:nvPr/>
+        </p:nvSpPr>
+        <p:spPr>
+          <a:xfrm>
+            <a:off x="502920" y="274320"/>
+            <a:ext cx="11155680" cy="548640"/>
+          </a:xfrm>
+          <a:prstGeom prst="rect">
+            <a:avLst/>
+          </a:prstGeom>
+          <a:noFill/>
+        </p:spPr>
+        <p:txBody>
+          <a:bodyPr wrap="none">
+            <a:spAutoFit/>
+          </a:bodyPr>
+          <a:lstStyle/>
+          <a:p>
+            <a:r>
+              <a:rPr sz="2200" b="1">
+                <a:solidFill>
+                  <a:srgbClr val="01AEFD"/>
+                </a:solidFill>
+              </a:rPr>
+              <a:t>All together in index.html</a:t>
+            </a:r>
+          </a:p>
+        </p:txBody>
+      </p:sp>
+      <p:sp>
+        <p:nvSpPr>
+          <p:cNvPr id="3" name="TextBox 2"/>
+          <p:cNvSpPr txBox="1"/>
+          <p:nvPr/>
+        </p:nvSpPr>
+        <p:spPr>
+          <a:xfrm>
+            <a:off x="502920" y="960120"/>
+            <a:ext cx="11155680" cy="4297680"/>
+          </a:xfrm>
+          <a:prstGeom prst="rect">
+            <a:avLst/>
+          </a:prstGeom>
+          <a:noFill/>
+        </p:spPr>
+        <p:txBody>
+          <a:bodyPr wrap="none">
+            <a:spAutoFit/>
+          </a:bodyPr>
+          <a:lstStyle/>
+          <a:p>
+            <a:pPr>
+              <a:spcAft>
+                <a:spcPts val="0"/>
+              </a:spcAft>
+            </a:pPr>
+            <a:r>
+              <a:rPr sz="1800">
+                <a:solidFill>
+                  <a:srgbClr val="6D8C97"/>
+                </a:solidFill>
+                <a:latin typeface="Consolas"/>
+              </a:rPr>
+              <a:t>   8  </a:t>
+            </a:r>
+            <a:r>
+              <a:rPr sz="1800">
+                <a:solidFill>
+                  <a:srgbClr val="7FE0A0"/>
+                </a:solidFill>
+                <a:latin typeface="Consolas"/>
+              </a:rPr>
+              <a:t>  &lt;details class="setup"&gt;</a:t>
+            </a:r>
+          </a:p>
+          <a:p>
+            <a:pPr>
+              <a:spcAft>
+                <a:spcPts val="0"/>
+              </a:spcAft>
+            </a:pPr>
+            <a:r>
+              <a:rPr sz="1800">
+                <a:solidFill>
+                  <a:srgbClr val="6D8C97"/>
+                </a:solidFill>
+                <a:latin typeface="Consolas"/>
+              </a:rPr>
+              <a:t>   9  </a:t>
+            </a:r>
+            <a:r>
+              <a:rPr sz="1800">
+                <a:solidFill>
+                  <a:srgbClr val="7FE0A0"/>
+                </a:solidFill>
+                <a:latin typeface="Consolas"/>
+              </a:rPr>
+              <a:t>    &lt;summary&gt;Personality&lt;/summary&gt;</a:t>
+            </a:r>
+          </a:p>
+          <a:p>
+            <a:pPr>
+              <a:spcAft>
+                <a:spcPts val="0"/>
+              </a:spcAft>
+            </a:pPr>
+            <a:r>
+              <a:rPr sz="1800">
+                <a:solidFill>
+                  <a:srgbClr val="6D8C97"/>
+                </a:solidFill>
+                <a:latin typeface="Consolas"/>
+              </a:rPr>
+              <a:t>  10  </a:t>
+            </a:r>
+            <a:r>
+              <a:rPr sz="1800">
+                <a:solidFill>
+                  <a:srgbClr val="7FE0A0"/>
+                </a:solidFill>
+                <a:latin typeface="Consolas"/>
+              </a:rPr>
+              <a:t>    &lt;textarea id="persona" rows="3"&gt;You are a friendly, patient helper for a 13-year-old. Keep answers under 60 words. If you are not sure, say so.&lt;/textarea&gt;</a:t>
+            </a:r>
+          </a:p>
+          <a:p>
+            <a:pPr>
+              <a:spcAft>
+                <a:spcPts val="0"/>
+              </a:spcAft>
+            </a:pPr>
+            <a:r>
+              <a:rPr sz="1800">
+                <a:solidFill>
+                  <a:srgbClr val="6D8C97"/>
+                </a:solidFill>
+                <a:latin typeface="Consolas"/>
+              </a:rPr>
+              <a:t>  11  </a:t>
+            </a:r>
+            <a:r>
+              <a:rPr sz="1800">
+                <a:solidFill>
+                  <a:srgbClr val="7FE0A0"/>
+                </a:solidFill>
+                <a:latin typeface="Consolas"/>
+              </a:rPr>
+              <a:t>  &lt;/details&gt;</a:t>
+            </a:r>
+          </a:p>
+        </p:txBody>
+      </p:sp>
+      <p:sp>
+        <p:nvSpPr>
+          <p:cNvPr id="4" name="TextBox 3"/>
+          <p:cNvSpPr txBox="1"/>
+          <p:nvPr/>
+        </p:nvSpPr>
+        <p:spPr>
+          <a:xfrm>
+            <a:off x="548640" y="5623560"/>
+            <a:ext cx="11064240" cy="1051560"/>
+          </a:xfrm>
+          <a:prstGeom prst="rect">
+            <a:avLst/>
+          </a:prstGeom>
+          <a:noFill/>
+        </p:spPr>
+        <p:txBody>
+          <a:bodyPr wrap="square">
+            <a:spAutoFit/>
+          </a:bodyPr>
+          <a:lstStyle/>
+          <a:p>
+            <a:r>
+              <a:rPr sz="2000">
+                <a:solidFill>
+                  <a:srgbClr val="DCECEF"/>
+                </a:solidFill>
+              </a:rPr>
+              <a:t>That is the whole piece. Check yours looks the same before moving on.</a:t>
+            </a:r>
+          </a:p>
+        </p:txBody>
+      </p:sp>
+    </p:spTree>
+  </p:cSld>
+  <p:clrMapOvr>
+    <a:masterClrMapping/>
+  </p:clrMapOvr>
+</p:sld>
+</file>
+
+<file path=ppt/slides/slide14.xml><?xml version="1.0" encoding="utf-8"?>
+<p:sld xmlns:a="http://schemas.openxmlformats.org/drawingml/2006/main" xmlns:p="http://schemas.openxmlformats.org/presentationml/2006/main" xmlns:r="http://schemas.openxmlformats.org/officeDocument/2006/relationships">
+  <p:cSld>
+    <p:spTree>
+      <p:nvGrpSpPr>
+        <p:cNvPr id="1" name=""/>
+        <p:cNvGrpSpPr/>
+        <p:nvPr/>
+      </p:nvGrpSpPr>
+      <p:grpSpPr/>
+      <p:sp>
+        <p:nvSpPr>
           <p:cNvPr id="2" name="Title 1"/>
           <p:cNvSpPr>
             <a:spLocks noGrp="1"/>
@@ -3816,7 +3973,7 @@
                   <a:srgbClr val="1F2A37"/>
                 </a:solidFill>
               </a:rPr>
-              <a:t>Prompt duel</a:t>
+              <a:t>margin-bottom</a:t>
             </a:r>
           </a:p>
         </p:txBody>
@@ -3824,6 +3981,39 @@
       <p:sp>
         <p:nvSpPr>
           <p:cNvPr id="3" name="TextBox 2"/>
+          <p:cNvSpPr txBox="1"/>
+          <p:nvPr/>
+        </p:nvSpPr>
+        <p:spPr>
+          <a:xfrm>
+            <a:off x="868680" y="502920"/>
+            <a:ext cx="5486400" cy="457200"/>
+          </a:xfrm>
+          <a:prstGeom prst="rect">
+            <a:avLst/>
+          </a:prstGeom>
+          <a:noFill/>
+        </p:spPr>
+        <p:txBody>
+          <a:bodyPr wrap="none">
+            <a:spAutoFit/>
+          </a:bodyPr>
+          <a:lstStyle/>
+          <a:p>
+            <a:r>
+              <a:rPr sz="1500" b="1">
+                <a:solidFill>
+                  <a:srgbClr val="01AEFD"/>
+                </a:solidFill>
+              </a:rPr>
+              <a:t>CSS</a:t>
+            </a:r>
+          </a:p>
+        </p:txBody>
+      </p:sp>
+      <p:sp>
+        <p:nvSpPr>
+          <p:cNvPr id="4" name="TextBox 3"/>
           <p:cNvSpPr txBox="1"/>
           <p:nvPr/>
         </p:nvSpPr>
@@ -3849,14 +4039,254 @@
               </a:spcAft>
             </a:pPr>
             <a:r>
-              <a:rPr sz="2800">
+              <a:rPr sz="2400">
+                <a:solidFill>
+                  <a:srgbClr val="1F2A37"/>
+                </a:solidFill>
+              </a:rPr>
+              <a:t>• Space below the box, pushing whatever is next further down.</a:t>
+            </a:r>
+          </a:p>
+        </p:txBody>
+      </p:sp>
+    </p:spTree>
+  </p:cSld>
+  <p:clrMapOvr>
+    <a:masterClrMapping/>
+  </p:clrMapOvr>
+</p:sld>
+</file>
+
+<file path=ppt/slides/slide15.xml><?xml version="1.0" encoding="utf-8"?>
+<p:sld xmlns:a="http://schemas.openxmlformats.org/drawingml/2006/main" xmlns:p="http://schemas.openxmlformats.org/presentationml/2006/main" xmlns:r="http://schemas.openxmlformats.org/officeDocument/2006/relationships">
+  <p:cSld>
+    <p:bg>
+      <p:bgPr>
+        <a:solidFill>
+          <a:srgbClr val="102127"/>
+        </a:solidFill>
+        <a:effectLst/>
+      </p:bgPr>
+    </p:bg>
+    <p:spTree>
+      <p:nvGrpSpPr>
+        <p:cNvPr id="1" name=""/>
+        <p:cNvGrpSpPr/>
+        <p:nvPr/>
+      </p:nvGrpSpPr>
+      <p:grpSpPr/>
+      <p:sp>
+        <p:nvSpPr>
+          <p:cNvPr id="2" name="TextBox 1"/>
+          <p:cNvSpPr txBox="1"/>
+          <p:nvPr/>
+        </p:nvSpPr>
+        <p:spPr>
+          <a:xfrm>
+            <a:off x="502920" y="274320"/>
+            <a:ext cx="11155680" cy="548640"/>
+          </a:xfrm>
+          <a:prstGeom prst="rect">
+            <a:avLst/>
+          </a:prstGeom>
+          <a:noFill/>
+        </p:spPr>
+        <p:txBody>
+          <a:bodyPr wrap="none">
+            <a:spAutoFit/>
+          </a:bodyPr>
+          <a:lstStyle/>
+          <a:p>
+            <a:r>
+              <a:rPr sz="2200" b="1">
                 <a:solidFill>
                   <a:srgbClr val="01AEFD"/>
                 </a:solidFill>
               </a:rPr>
-              <a:t>In pairs, 10 minutes</a:t>
-            </a:r>
-          </a:p>
+              <a:t>Type this into style.css   -   line 21</a:t>
+            </a:r>
+          </a:p>
+        </p:txBody>
+      </p:sp>
+      <p:sp>
+        <p:nvSpPr>
+          <p:cNvPr id="3" name="TextBox 2"/>
+          <p:cNvSpPr txBox="1"/>
+          <p:nvPr/>
+        </p:nvSpPr>
+        <p:spPr>
+          <a:xfrm>
+            <a:off x="502920" y="960120"/>
+            <a:ext cx="11155680" cy="4297680"/>
+          </a:xfrm>
+          <a:prstGeom prst="rect">
+            <a:avLst/>
+          </a:prstGeom>
+          <a:noFill/>
+        </p:spPr>
+        <p:txBody>
+          <a:bodyPr wrap="none">
+            <a:spAutoFit/>
+          </a:bodyPr>
+          <a:lstStyle/>
+          <a:p>
+            <a:pPr>
+              <a:spcAft>
+                <a:spcPts val="0"/>
+              </a:spcAft>
+            </a:pPr>
+            <a:r>
+              <a:rPr sz="1800">
+                <a:solidFill>
+                  <a:srgbClr val="6D8C97"/>
+                </a:solidFill>
+                <a:latin typeface="Consolas"/>
+              </a:rPr>
+              <a:t>  21  </a:t>
+            </a:r>
+            <a:r>
+              <a:rPr sz="1800">
+                <a:solidFill>
+                  <a:srgbClr val="7FE0A0"/>
+                </a:solidFill>
+                <a:latin typeface="Consolas"/>
+              </a:rPr>
+              <a:t>.setup { margin-bottom: 12px; font-size: 14px; }</a:t>
+            </a:r>
+          </a:p>
+        </p:txBody>
+      </p:sp>
+      <p:sp>
+        <p:nvSpPr>
+          <p:cNvPr id="4" name="TextBox 3"/>
+          <p:cNvSpPr txBox="1"/>
+          <p:nvPr/>
+        </p:nvSpPr>
+        <p:spPr>
+          <a:xfrm>
+            <a:off x="548640" y="5623560"/>
+            <a:ext cx="11064240" cy="1051560"/>
+          </a:xfrm>
+          <a:prstGeom prst="rect">
+            <a:avLst/>
+          </a:prstGeom>
+          <a:noFill/>
+        </p:spPr>
+        <p:txBody>
+          <a:bodyPr wrap="square">
+            <a:spAutoFit/>
+          </a:bodyPr>
+          <a:lstStyle/>
+          <a:p>
+            <a:r>
+              <a:rPr sz="2000">
+                <a:solidFill>
+                  <a:srgbClr val="DCECEF"/>
+                </a:solidFill>
+              </a:rPr>
+              <a:t>Style the whole panel: a gap below it, and slightly smaller text.</a:t>
+            </a:r>
+          </a:p>
+        </p:txBody>
+      </p:sp>
+    </p:spTree>
+  </p:cSld>
+  <p:clrMapOvr>
+    <a:masterClrMapping/>
+  </p:clrMapOvr>
+</p:sld>
+</file>
+
+<file path=ppt/slides/slide16.xml><?xml version="1.0" encoding="utf-8"?>
+<p:sld xmlns:a="http://schemas.openxmlformats.org/drawingml/2006/main" xmlns:p="http://schemas.openxmlformats.org/presentationml/2006/main" xmlns:r="http://schemas.openxmlformats.org/officeDocument/2006/relationships">
+  <p:cSld>
+    <p:spTree>
+      <p:nvGrpSpPr>
+        <p:cNvPr id="1" name=""/>
+        <p:cNvGrpSpPr/>
+        <p:nvPr/>
+      </p:nvGrpSpPr>
+      <p:grpSpPr/>
+      <p:sp>
+        <p:nvSpPr>
+          <p:cNvPr id="2" name="Title 1"/>
+          <p:cNvSpPr>
+            <a:spLocks noGrp="1"/>
+          </p:cNvSpPr>
+          <p:nvPr>
+            <p:ph type="title"/>
+          </p:nvPr>
+        </p:nvSpPr>
+        <p:spPr/>
+        <p:txBody>
+          <a:bodyPr/>
+          <a:lstStyle/>
+          <a:p>
+            <a:r>
+              <a:rPr sz="3800" b="1">
+                <a:solidFill>
+                  <a:srgbClr val="1F2A37"/>
+                </a:solidFill>
+              </a:rPr>
+              <a:t>font-weight</a:t>
+            </a:r>
+          </a:p>
+        </p:txBody>
+      </p:sp>
+      <p:sp>
+        <p:nvSpPr>
+          <p:cNvPr id="3" name="TextBox 2"/>
+          <p:cNvSpPr txBox="1"/>
+          <p:nvPr/>
+        </p:nvSpPr>
+        <p:spPr>
+          <a:xfrm>
+            <a:off x="868680" y="502920"/>
+            <a:ext cx="5486400" cy="457200"/>
+          </a:xfrm>
+          <a:prstGeom prst="rect">
+            <a:avLst/>
+          </a:prstGeom>
+          <a:noFill/>
+        </p:spPr>
+        <p:txBody>
+          <a:bodyPr wrap="none">
+            <a:spAutoFit/>
+          </a:bodyPr>
+          <a:lstStyle/>
+          <a:p>
+            <a:r>
+              <a:rPr sz="1500" b="1">
+                <a:solidFill>
+                  <a:srgbClr val="01AEFD"/>
+                </a:solidFill>
+              </a:rPr>
+              <a:t>CSS</a:t>
+            </a:r>
+          </a:p>
+        </p:txBody>
+      </p:sp>
+      <p:sp>
+        <p:nvSpPr>
+          <p:cNvPr id="4" name="TextBox 3"/>
+          <p:cNvSpPr txBox="1"/>
+          <p:nvPr/>
+        </p:nvSpPr>
+        <p:spPr>
+          <a:xfrm>
+            <a:off x="822960" y="1828800"/>
+            <a:ext cx="10515600" cy="4206240"/>
+          </a:xfrm>
+          <a:prstGeom prst="rect">
+            <a:avLst/>
+          </a:prstGeom>
+          <a:noFill/>
+        </p:spPr>
+        <p:txBody>
+          <a:bodyPr wrap="square">
+            <a:spAutoFit/>
+          </a:bodyPr>
+          <a:lstStyle/>
           <a:p>
             <a:pPr>
               <a:spcAft>
@@ -3869,9 +4299,464 @@
                   <a:srgbClr val="1F2A37"/>
                 </a:solidFill>
               </a:rPr>
-              <a:t>• Write a secret character</a:t>
-            </a:r>
-          </a:p>
+              <a:t>• How heavy the text is. bold stands out; normal is regular.</a:t>
+            </a:r>
+          </a:p>
+        </p:txBody>
+      </p:sp>
+    </p:spTree>
+  </p:cSld>
+  <p:clrMapOvr>
+    <a:masterClrMapping/>
+  </p:clrMapOvr>
+</p:sld>
+</file>
+
+<file path=ppt/slides/slide17.xml><?xml version="1.0" encoding="utf-8"?>
+<p:sld xmlns:a="http://schemas.openxmlformats.org/drawingml/2006/main" xmlns:p="http://schemas.openxmlformats.org/presentationml/2006/main" xmlns:r="http://schemas.openxmlformats.org/officeDocument/2006/relationships">
+  <p:cSld>
+    <p:bg>
+      <p:bgPr>
+        <a:solidFill>
+          <a:srgbClr val="102127"/>
+        </a:solidFill>
+        <a:effectLst/>
+      </p:bgPr>
+    </p:bg>
+    <p:spTree>
+      <p:nvGrpSpPr>
+        <p:cNvPr id="1" name=""/>
+        <p:cNvGrpSpPr/>
+        <p:nvPr/>
+      </p:nvGrpSpPr>
+      <p:grpSpPr/>
+      <p:sp>
+        <p:nvSpPr>
+          <p:cNvPr id="2" name="TextBox 1"/>
+          <p:cNvSpPr txBox="1"/>
+          <p:nvPr/>
+        </p:nvSpPr>
+        <p:spPr>
+          <a:xfrm>
+            <a:off x="502920" y="274320"/>
+            <a:ext cx="11155680" cy="548640"/>
+          </a:xfrm>
+          <a:prstGeom prst="rect">
+            <a:avLst/>
+          </a:prstGeom>
+          <a:noFill/>
+        </p:spPr>
+        <p:txBody>
+          <a:bodyPr wrap="none">
+            <a:spAutoFit/>
+          </a:bodyPr>
+          <a:lstStyle/>
+          <a:p>
+            <a:r>
+              <a:rPr sz="2200" b="1">
+                <a:solidFill>
+                  <a:srgbClr val="01AEFD"/>
+                </a:solidFill>
+              </a:rPr>
+              <a:t>Type this into style.css   -   line 22</a:t>
+            </a:r>
+          </a:p>
+        </p:txBody>
+      </p:sp>
+      <p:sp>
+        <p:nvSpPr>
+          <p:cNvPr id="3" name="TextBox 2"/>
+          <p:cNvSpPr txBox="1"/>
+          <p:nvPr/>
+        </p:nvSpPr>
+        <p:spPr>
+          <a:xfrm>
+            <a:off x="502920" y="960120"/>
+            <a:ext cx="11155680" cy="4297680"/>
+          </a:xfrm>
+          <a:prstGeom prst="rect">
+            <a:avLst/>
+          </a:prstGeom>
+          <a:noFill/>
+        </p:spPr>
+        <p:txBody>
+          <a:bodyPr wrap="none">
+            <a:spAutoFit/>
+          </a:bodyPr>
+          <a:lstStyle/>
+          <a:p>
+            <a:pPr>
+              <a:spcAft>
+                <a:spcPts val="0"/>
+              </a:spcAft>
+            </a:pPr>
+            <a:r>
+              <a:rPr sz="1800">
+                <a:solidFill>
+                  <a:srgbClr val="6D8C97"/>
+                </a:solidFill>
+                <a:latin typeface="Consolas"/>
+              </a:rPr>
+              <a:t>  21  </a:t>
+            </a:r>
+            <a:r>
+              <a:rPr sz="1800">
+                <a:solidFill>
+                  <a:srgbClr val="6D8C97"/>
+                </a:solidFill>
+                <a:latin typeface="Consolas"/>
+              </a:rPr>
+              <a:t>.setup { margin-bottom: 12px; font-size: 14px; }</a:t>
+            </a:r>
+          </a:p>
+          <a:p>
+            <a:pPr>
+              <a:spcAft>
+                <a:spcPts val="0"/>
+              </a:spcAft>
+            </a:pPr>
+            <a:r>
+              <a:rPr sz="1800">
+                <a:solidFill>
+                  <a:srgbClr val="6D8C97"/>
+                </a:solidFill>
+                <a:latin typeface="Consolas"/>
+              </a:rPr>
+              <a:t>  22  </a:t>
+            </a:r>
+            <a:r>
+              <a:rPr sz="1800">
+                <a:solidFill>
+                  <a:srgbClr val="7FE0A0"/>
+                </a:solidFill>
+                <a:latin typeface="Consolas"/>
+              </a:rPr>
+              <a:t>.setup summary { cursor: pointer; color: #0a6299; font-weight: bold; }</a:t>
+            </a:r>
+          </a:p>
+        </p:txBody>
+      </p:sp>
+      <p:sp>
+        <p:nvSpPr>
+          <p:cNvPr id="4" name="TextBox 3"/>
+          <p:cNvSpPr txBox="1"/>
+          <p:nvPr/>
+        </p:nvSpPr>
+        <p:spPr>
+          <a:xfrm>
+            <a:off x="548640" y="5623560"/>
+            <a:ext cx="11064240" cy="1051560"/>
+          </a:xfrm>
+          <a:prstGeom prst="rect">
+            <a:avLst/>
+          </a:prstGeom>
+          <a:noFill/>
+        </p:spPr>
+        <p:txBody>
+          <a:bodyPr wrap="square">
+            <a:spAutoFit/>
+          </a:bodyPr>
+          <a:lstStyle/>
+          <a:p>
+            <a:r>
+              <a:rPr sz="2000">
+                <a:solidFill>
+                  <a:srgbClr val="DCECEF"/>
+                </a:solidFill>
+              </a:rPr>
+              <a:t>Style the clickable label: a hand pointer, a blue colour, and bold so it reads as a button.</a:t>
+            </a:r>
+          </a:p>
+        </p:txBody>
+      </p:sp>
+    </p:spTree>
+  </p:cSld>
+  <p:clrMapOvr>
+    <a:masterClrMapping/>
+  </p:clrMapOvr>
+</p:sld>
+</file>
+
+<file path=ppt/slides/slide18.xml><?xml version="1.0" encoding="utf-8"?>
+<p:sld xmlns:a="http://schemas.openxmlformats.org/drawingml/2006/main" xmlns:p="http://schemas.openxmlformats.org/presentationml/2006/main" xmlns:r="http://schemas.openxmlformats.org/officeDocument/2006/relationships">
+  <p:cSld>
+    <p:bg>
+      <p:bgPr>
+        <a:solidFill>
+          <a:srgbClr val="102127"/>
+        </a:solidFill>
+        <a:effectLst/>
+      </p:bgPr>
+    </p:bg>
+    <p:spTree>
+      <p:nvGrpSpPr>
+        <p:cNvPr id="1" name=""/>
+        <p:cNvGrpSpPr/>
+        <p:nvPr/>
+      </p:nvGrpSpPr>
+      <p:grpSpPr/>
+      <p:sp>
+        <p:nvSpPr>
+          <p:cNvPr id="2" name="TextBox 1"/>
+          <p:cNvSpPr txBox="1"/>
+          <p:nvPr/>
+        </p:nvSpPr>
+        <p:spPr>
+          <a:xfrm>
+            <a:off x="502920" y="274320"/>
+            <a:ext cx="11155680" cy="548640"/>
+          </a:xfrm>
+          <a:prstGeom prst="rect">
+            <a:avLst/>
+          </a:prstGeom>
+          <a:noFill/>
+        </p:spPr>
+        <p:txBody>
+          <a:bodyPr wrap="none">
+            <a:spAutoFit/>
+          </a:bodyPr>
+          <a:lstStyle/>
+          <a:p>
+            <a:r>
+              <a:rPr sz="2200" b="1">
+                <a:solidFill>
+                  <a:srgbClr val="01AEFD"/>
+                </a:solidFill>
+              </a:rPr>
+              <a:t>Type this into style.css   -   line 23</a:t>
+            </a:r>
+          </a:p>
+        </p:txBody>
+      </p:sp>
+      <p:sp>
+        <p:nvSpPr>
+          <p:cNvPr id="3" name="TextBox 2"/>
+          <p:cNvSpPr txBox="1"/>
+          <p:nvPr/>
+        </p:nvSpPr>
+        <p:spPr>
+          <a:xfrm>
+            <a:off x="502920" y="960120"/>
+            <a:ext cx="11155680" cy="4297680"/>
+          </a:xfrm>
+          <a:prstGeom prst="rect">
+            <a:avLst/>
+          </a:prstGeom>
+          <a:noFill/>
+        </p:spPr>
+        <p:txBody>
+          <a:bodyPr wrap="none">
+            <a:spAutoFit/>
+          </a:bodyPr>
+          <a:lstStyle/>
+          <a:p>
+            <a:pPr>
+              <a:spcAft>
+                <a:spcPts val="0"/>
+              </a:spcAft>
+            </a:pPr>
+            <a:r>
+              <a:rPr sz="1800">
+                <a:solidFill>
+                  <a:srgbClr val="6D8C97"/>
+                </a:solidFill>
+                <a:latin typeface="Consolas"/>
+              </a:rPr>
+              <a:t>  21  </a:t>
+            </a:r>
+            <a:r>
+              <a:rPr sz="1800">
+                <a:solidFill>
+                  <a:srgbClr val="6D8C97"/>
+                </a:solidFill>
+                <a:latin typeface="Consolas"/>
+              </a:rPr>
+              <a:t>.setup { margin-bottom: 12px; font-size: 14px; }</a:t>
+            </a:r>
+          </a:p>
+          <a:p>
+            <a:pPr>
+              <a:spcAft>
+                <a:spcPts val="0"/>
+              </a:spcAft>
+            </a:pPr>
+            <a:r>
+              <a:rPr sz="1800">
+                <a:solidFill>
+                  <a:srgbClr val="6D8C97"/>
+                </a:solidFill>
+                <a:latin typeface="Consolas"/>
+              </a:rPr>
+              <a:t>  22  </a:t>
+            </a:r>
+            <a:r>
+              <a:rPr sz="1800">
+                <a:solidFill>
+                  <a:srgbClr val="6D8C97"/>
+                </a:solidFill>
+                <a:latin typeface="Consolas"/>
+              </a:rPr>
+              <a:t>.setup summary { cursor: pointer; color: #0a6299; font-weight: bold; }</a:t>
+            </a:r>
+          </a:p>
+          <a:p>
+            <a:pPr>
+              <a:spcAft>
+                <a:spcPts val="0"/>
+              </a:spcAft>
+            </a:pPr>
+            <a:r>
+              <a:rPr sz="1800">
+                <a:solidFill>
+                  <a:srgbClr val="6D8C97"/>
+                </a:solidFill>
+                <a:latin typeface="Consolas"/>
+              </a:rPr>
+              <a:t>  23  </a:t>
+            </a:r>
+            <a:r>
+              <a:rPr sz="1800">
+                <a:solidFill>
+                  <a:srgbClr val="7FE0A0"/>
+                </a:solidFill>
+                <a:latin typeface="Consolas"/>
+              </a:rPr>
+              <a:t>.setup textarea {</a:t>
+            </a:r>
+          </a:p>
+        </p:txBody>
+      </p:sp>
+      <p:sp>
+        <p:nvSpPr>
+          <p:cNvPr id="4" name="TextBox 3"/>
+          <p:cNvSpPr txBox="1"/>
+          <p:nvPr/>
+        </p:nvSpPr>
+        <p:spPr>
+          <a:xfrm>
+            <a:off x="548640" y="5623560"/>
+            <a:ext cx="11064240" cy="1051560"/>
+          </a:xfrm>
+          <a:prstGeom prst="rect">
+            <a:avLst/>
+          </a:prstGeom>
+          <a:noFill/>
+        </p:spPr>
+        <p:txBody>
+          <a:bodyPr wrap="square">
+            <a:spAutoFit/>
+          </a:bodyPr>
+          <a:lstStyle/>
+          <a:p>
+            <a:r>
+              <a:rPr sz="2000">
+                <a:solidFill>
+                  <a:srgbClr val="DCECEF"/>
+                </a:solidFill>
+              </a:rPr>
+              <a:t>Start a rule for the text box inside the panel.</a:t>
+            </a:r>
+          </a:p>
+        </p:txBody>
+      </p:sp>
+    </p:spTree>
+  </p:cSld>
+  <p:clrMapOvr>
+    <a:masterClrMapping/>
+  </p:clrMapOvr>
+</p:sld>
+</file>
+
+<file path=ppt/slides/slide19.xml><?xml version="1.0" encoding="utf-8"?>
+<p:sld xmlns:a="http://schemas.openxmlformats.org/drawingml/2006/main" xmlns:p="http://schemas.openxmlformats.org/presentationml/2006/main" xmlns:r="http://schemas.openxmlformats.org/officeDocument/2006/relationships">
+  <p:cSld>
+    <p:spTree>
+      <p:nvGrpSpPr>
+        <p:cNvPr id="1" name=""/>
+        <p:cNvGrpSpPr/>
+        <p:nvPr/>
+      </p:nvGrpSpPr>
+      <p:grpSpPr/>
+      <p:sp>
+        <p:nvSpPr>
+          <p:cNvPr id="2" name="Title 1"/>
+          <p:cNvSpPr>
+            <a:spLocks noGrp="1"/>
+          </p:cNvSpPr>
+          <p:nvPr>
+            <p:ph type="title"/>
+          </p:nvPr>
+        </p:nvSpPr>
+        <p:spPr/>
+        <p:txBody>
+          <a:bodyPr/>
+          <a:lstStyle/>
+          <a:p>
+            <a:r>
+              <a:rPr sz="3800" b="1">
+                <a:solidFill>
+                  <a:srgbClr val="1F2A37"/>
+                </a:solidFill>
+              </a:rPr>
+              <a:t>width</a:t>
+            </a:r>
+          </a:p>
+        </p:txBody>
+      </p:sp>
+      <p:sp>
+        <p:nvSpPr>
+          <p:cNvPr id="3" name="TextBox 2"/>
+          <p:cNvSpPr txBox="1"/>
+          <p:nvPr/>
+        </p:nvSpPr>
+        <p:spPr>
+          <a:xfrm>
+            <a:off x="868680" y="502920"/>
+            <a:ext cx="5486400" cy="457200"/>
+          </a:xfrm>
+          <a:prstGeom prst="rect">
+            <a:avLst/>
+          </a:prstGeom>
+          <a:noFill/>
+        </p:spPr>
+        <p:txBody>
+          <a:bodyPr wrap="none">
+            <a:spAutoFit/>
+          </a:bodyPr>
+          <a:lstStyle/>
+          <a:p>
+            <a:r>
+              <a:rPr sz="1500" b="1">
+                <a:solidFill>
+                  <a:srgbClr val="01AEFD"/>
+                </a:solidFill>
+              </a:rPr>
+              <a:t>CSS</a:t>
+            </a:r>
+          </a:p>
+        </p:txBody>
+      </p:sp>
+      <p:sp>
+        <p:nvSpPr>
+          <p:cNvPr id="4" name="TextBox 3"/>
+          <p:cNvSpPr txBox="1"/>
+          <p:nvPr/>
+        </p:nvSpPr>
+        <p:spPr>
+          <a:xfrm>
+            <a:off x="822960" y="1828800"/>
+            <a:ext cx="10515600" cy="4206240"/>
+          </a:xfrm>
+          <a:prstGeom prst="rect">
+            <a:avLst/>
+          </a:prstGeom>
+          <a:noFill/>
+        </p:spPr>
+        <p:txBody>
+          <a:bodyPr wrap="square">
+            <a:spAutoFit/>
+          </a:bodyPr>
+          <a:lstStyle/>
           <a:p>
             <a:pPr>
               <a:spcAft>
@@ -3884,22 +4769,7 @@
                   <a:srgbClr val="1F2A37"/>
                 </a:solidFill>
               </a:rPr>
-              <a:t>• Swap. Ask three questions.</a:t>
-            </a:r>
-          </a:p>
-          <a:p>
-            <a:pPr>
-              <a:spcAft>
-                <a:spcPts val="1400"/>
-              </a:spcAft>
-            </a:pPr>
-            <a:r>
-              <a:rPr sz="2400">
-                <a:solidFill>
-                  <a:srgbClr val="1F2A37"/>
-                </a:solidFill>
-              </a:rPr>
-              <a:t>• Guess who it is</a:t>
+              <a:t>• How wide the box is. 100% means as wide as its container.</a:t>
             </a:r>
           </a:p>
         </p:txBody>
@@ -4024,6 +4894,3106 @@
 </p:sld>
 </file>
 
+<file path=ppt/slides/slide20.xml><?xml version="1.0" encoding="utf-8"?>
+<p:sld xmlns:a="http://schemas.openxmlformats.org/drawingml/2006/main" xmlns:p="http://schemas.openxmlformats.org/presentationml/2006/main" xmlns:r="http://schemas.openxmlformats.org/officeDocument/2006/relationships">
+  <p:cSld>
+    <p:bg>
+      <p:bgPr>
+        <a:solidFill>
+          <a:srgbClr val="102127"/>
+        </a:solidFill>
+        <a:effectLst/>
+      </p:bgPr>
+    </p:bg>
+    <p:spTree>
+      <p:nvGrpSpPr>
+        <p:cNvPr id="1" name=""/>
+        <p:cNvGrpSpPr/>
+        <p:nvPr/>
+      </p:nvGrpSpPr>
+      <p:grpSpPr/>
+      <p:sp>
+        <p:nvSpPr>
+          <p:cNvPr id="2" name="TextBox 1"/>
+          <p:cNvSpPr txBox="1"/>
+          <p:nvPr/>
+        </p:nvSpPr>
+        <p:spPr>
+          <a:xfrm>
+            <a:off x="502920" y="274320"/>
+            <a:ext cx="11155680" cy="548640"/>
+          </a:xfrm>
+          <a:prstGeom prst="rect">
+            <a:avLst/>
+          </a:prstGeom>
+          <a:noFill/>
+        </p:spPr>
+        <p:txBody>
+          <a:bodyPr wrap="none">
+            <a:spAutoFit/>
+          </a:bodyPr>
+          <a:lstStyle/>
+          <a:p>
+            <a:r>
+              <a:rPr sz="2200" b="1">
+                <a:solidFill>
+                  <a:srgbClr val="01AEFD"/>
+                </a:solidFill>
+              </a:rPr>
+              <a:t>Type this into style.css   -   line 24</a:t>
+            </a:r>
+          </a:p>
+        </p:txBody>
+      </p:sp>
+      <p:sp>
+        <p:nvSpPr>
+          <p:cNvPr id="3" name="TextBox 2"/>
+          <p:cNvSpPr txBox="1"/>
+          <p:nvPr/>
+        </p:nvSpPr>
+        <p:spPr>
+          <a:xfrm>
+            <a:off x="502920" y="960120"/>
+            <a:ext cx="11155680" cy="4297680"/>
+          </a:xfrm>
+          <a:prstGeom prst="rect">
+            <a:avLst/>
+          </a:prstGeom>
+          <a:noFill/>
+        </p:spPr>
+        <p:txBody>
+          <a:bodyPr wrap="none">
+            <a:spAutoFit/>
+          </a:bodyPr>
+          <a:lstStyle/>
+          <a:p>
+            <a:pPr>
+              <a:spcAft>
+                <a:spcPts val="0"/>
+              </a:spcAft>
+            </a:pPr>
+            <a:r>
+              <a:rPr sz="1800">
+                <a:solidFill>
+                  <a:srgbClr val="6D8C97"/>
+                </a:solidFill>
+                <a:latin typeface="Consolas"/>
+              </a:rPr>
+              <a:t>  21  </a:t>
+            </a:r>
+            <a:r>
+              <a:rPr sz="1800">
+                <a:solidFill>
+                  <a:srgbClr val="6D8C97"/>
+                </a:solidFill>
+                <a:latin typeface="Consolas"/>
+              </a:rPr>
+              <a:t>.setup { margin-bottom: 12px; font-size: 14px; }</a:t>
+            </a:r>
+          </a:p>
+          <a:p>
+            <a:pPr>
+              <a:spcAft>
+                <a:spcPts val="0"/>
+              </a:spcAft>
+            </a:pPr>
+            <a:r>
+              <a:rPr sz="1800">
+                <a:solidFill>
+                  <a:srgbClr val="6D8C97"/>
+                </a:solidFill>
+                <a:latin typeface="Consolas"/>
+              </a:rPr>
+              <a:t>  22  </a:t>
+            </a:r>
+            <a:r>
+              <a:rPr sz="1800">
+                <a:solidFill>
+                  <a:srgbClr val="6D8C97"/>
+                </a:solidFill>
+                <a:latin typeface="Consolas"/>
+              </a:rPr>
+              <a:t>.setup summary { cursor: pointer; color: #0a6299; font-weight: bold; }</a:t>
+            </a:r>
+          </a:p>
+          <a:p>
+            <a:pPr>
+              <a:spcAft>
+                <a:spcPts val="0"/>
+              </a:spcAft>
+            </a:pPr>
+            <a:r>
+              <a:rPr sz="1800">
+                <a:solidFill>
+                  <a:srgbClr val="6D8C97"/>
+                </a:solidFill>
+                <a:latin typeface="Consolas"/>
+              </a:rPr>
+              <a:t>  23  </a:t>
+            </a:r>
+            <a:r>
+              <a:rPr sz="1800">
+                <a:solidFill>
+                  <a:srgbClr val="6D8C97"/>
+                </a:solidFill>
+                <a:latin typeface="Consolas"/>
+              </a:rPr>
+              <a:t>.setup textarea {</a:t>
+            </a:r>
+          </a:p>
+          <a:p>
+            <a:pPr>
+              <a:spcAft>
+                <a:spcPts val="0"/>
+              </a:spcAft>
+            </a:pPr>
+            <a:r>
+              <a:rPr sz="1800">
+                <a:solidFill>
+                  <a:srgbClr val="6D8C97"/>
+                </a:solidFill>
+                <a:latin typeface="Consolas"/>
+              </a:rPr>
+              <a:t>  24  </a:t>
+            </a:r>
+            <a:r>
+              <a:rPr sz="1800">
+                <a:solidFill>
+                  <a:srgbClr val="7FE0A0"/>
+                </a:solidFill>
+                <a:latin typeface="Consolas"/>
+              </a:rPr>
+              <a:t>  width: 100%;</a:t>
+            </a:r>
+          </a:p>
+        </p:txBody>
+      </p:sp>
+      <p:sp>
+        <p:nvSpPr>
+          <p:cNvPr id="4" name="TextBox 3"/>
+          <p:cNvSpPr txBox="1"/>
+          <p:nvPr/>
+        </p:nvSpPr>
+        <p:spPr>
+          <a:xfrm>
+            <a:off x="548640" y="5623560"/>
+            <a:ext cx="11064240" cy="1051560"/>
+          </a:xfrm>
+          <a:prstGeom prst="rect">
+            <a:avLst/>
+          </a:prstGeom>
+          <a:noFill/>
+        </p:spPr>
+        <p:txBody>
+          <a:bodyPr wrap="square">
+            <a:spAutoFit/>
+          </a:bodyPr>
+          <a:lstStyle/>
+          <a:p>
+            <a:r>
+              <a:rPr sz="2000">
+                <a:solidFill>
+                  <a:srgbClr val="DCECEF"/>
+                </a:solidFill>
+              </a:rPr>
+              <a:t>Make it as wide as the panel.</a:t>
+            </a:r>
+          </a:p>
+        </p:txBody>
+      </p:sp>
+    </p:spTree>
+  </p:cSld>
+  <p:clrMapOvr>
+    <a:masterClrMapping/>
+  </p:clrMapOvr>
+</p:sld>
+</file>
+
+<file path=ppt/slides/slide21.xml><?xml version="1.0" encoding="utf-8"?>
+<p:sld xmlns:a="http://schemas.openxmlformats.org/drawingml/2006/main" xmlns:p="http://schemas.openxmlformats.org/presentationml/2006/main" xmlns:r="http://schemas.openxmlformats.org/officeDocument/2006/relationships">
+  <p:cSld>
+    <p:bg>
+      <p:bgPr>
+        <a:solidFill>
+          <a:srgbClr val="102127"/>
+        </a:solidFill>
+        <a:effectLst/>
+      </p:bgPr>
+    </p:bg>
+    <p:spTree>
+      <p:nvGrpSpPr>
+        <p:cNvPr id="1" name=""/>
+        <p:cNvGrpSpPr/>
+        <p:nvPr/>
+      </p:nvGrpSpPr>
+      <p:grpSpPr/>
+      <p:sp>
+        <p:nvSpPr>
+          <p:cNvPr id="2" name="TextBox 1"/>
+          <p:cNvSpPr txBox="1"/>
+          <p:nvPr/>
+        </p:nvSpPr>
+        <p:spPr>
+          <a:xfrm>
+            <a:off x="502920" y="274320"/>
+            <a:ext cx="11155680" cy="548640"/>
+          </a:xfrm>
+          <a:prstGeom prst="rect">
+            <a:avLst/>
+          </a:prstGeom>
+          <a:noFill/>
+        </p:spPr>
+        <p:txBody>
+          <a:bodyPr wrap="none">
+            <a:spAutoFit/>
+          </a:bodyPr>
+          <a:lstStyle/>
+          <a:p>
+            <a:r>
+              <a:rPr sz="2200" b="1">
+                <a:solidFill>
+                  <a:srgbClr val="01AEFD"/>
+                </a:solidFill>
+              </a:rPr>
+              <a:t>Type this into style.css   -   line 25</a:t>
+            </a:r>
+          </a:p>
+        </p:txBody>
+      </p:sp>
+      <p:sp>
+        <p:nvSpPr>
+          <p:cNvPr id="3" name="TextBox 2"/>
+          <p:cNvSpPr txBox="1"/>
+          <p:nvPr/>
+        </p:nvSpPr>
+        <p:spPr>
+          <a:xfrm>
+            <a:off x="502920" y="960120"/>
+            <a:ext cx="11155680" cy="4297680"/>
+          </a:xfrm>
+          <a:prstGeom prst="rect">
+            <a:avLst/>
+          </a:prstGeom>
+          <a:noFill/>
+        </p:spPr>
+        <p:txBody>
+          <a:bodyPr wrap="none">
+            <a:spAutoFit/>
+          </a:bodyPr>
+          <a:lstStyle/>
+          <a:p>
+            <a:pPr>
+              <a:spcAft>
+                <a:spcPts val="0"/>
+              </a:spcAft>
+            </a:pPr>
+            <a:r>
+              <a:rPr sz="1800">
+                <a:solidFill>
+                  <a:srgbClr val="6D8C97"/>
+                </a:solidFill>
+                <a:latin typeface="Consolas"/>
+              </a:rPr>
+              <a:t>  21  </a:t>
+            </a:r>
+            <a:r>
+              <a:rPr sz="1800">
+                <a:solidFill>
+                  <a:srgbClr val="6D8C97"/>
+                </a:solidFill>
+                <a:latin typeface="Consolas"/>
+              </a:rPr>
+              <a:t>.setup { margin-bottom: 12px; font-size: 14px; }</a:t>
+            </a:r>
+          </a:p>
+          <a:p>
+            <a:pPr>
+              <a:spcAft>
+                <a:spcPts val="0"/>
+              </a:spcAft>
+            </a:pPr>
+            <a:r>
+              <a:rPr sz="1800">
+                <a:solidFill>
+                  <a:srgbClr val="6D8C97"/>
+                </a:solidFill>
+                <a:latin typeface="Consolas"/>
+              </a:rPr>
+              <a:t>  22  </a:t>
+            </a:r>
+            <a:r>
+              <a:rPr sz="1800">
+                <a:solidFill>
+                  <a:srgbClr val="6D8C97"/>
+                </a:solidFill>
+                <a:latin typeface="Consolas"/>
+              </a:rPr>
+              <a:t>.setup summary { cursor: pointer; color: #0a6299; font-weight: bold; }</a:t>
+            </a:r>
+          </a:p>
+          <a:p>
+            <a:pPr>
+              <a:spcAft>
+                <a:spcPts val="0"/>
+              </a:spcAft>
+            </a:pPr>
+            <a:r>
+              <a:rPr sz="1800">
+                <a:solidFill>
+                  <a:srgbClr val="6D8C97"/>
+                </a:solidFill>
+                <a:latin typeface="Consolas"/>
+              </a:rPr>
+              <a:t>  23  </a:t>
+            </a:r>
+            <a:r>
+              <a:rPr sz="1800">
+                <a:solidFill>
+                  <a:srgbClr val="6D8C97"/>
+                </a:solidFill>
+                <a:latin typeface="Consolas"/>
+              </a:rPr>
+              <a:t>.setup textarea {</a:t>
+            </a:r>
+          </a:p>
+          <a:p>
+            <a:pPr>
+              <a:spcAft>
+                <a:spcPts val="0"/>
+              </a:spcAft>
+            </a:pPr>
+            <a:r>
+              <a:rPr sz="1800">
+                <a:solidFill>
+                  <a:srgbClr val="6D8C97"/>
+                </a:solidFill>
+                <a:latin typeface="Consolas"/>
+              </a:rPr>
+              <a:t>  24  </a:t>
+            </a:r>
+            <a:r>
+              <a:rPr sz="1800">
+                <a:solidFill>
+                  <a:srgbClr val="6D8C97"/>
+                </a:solidFill>
+                <a:latin typeface="Consolas"/>
+              </a:rPr>
+              <a:t>  width: 100%;</a:t>
+            </a:r>
+          </a:p>
+          <a:p>
+            <a:pPr>
+              <a:spcAft>
+                <a:spcPts val="0"/>
+              </a:spcAft>
+            </a:pPr>
+            <a:r>
+              <a:rPr sz="1800">
+                <a:solidFill>
+                  <a:srgbClr val="6D8C97"/>
+                </a:solidFill>
+                <a:latin typeface="Consolas"/>
+              </a:rPr>
+              <a:t>  25  </a:t>
+            </a:r>
+            <a:r>
+              <a:rPr sz="1800">
+                <a:solidFill>
+                  <a:srgbClr val="7FE0A0"/>
+                </a:solidFill>
+                <a:latin typeface="Consolas"/>
+              </a:rPr>
+              <a:t>  margin-top: 8px;</a:t>
+            </a:r>
+          </a:p>
+        </p:txBody>
+      </p:sp>
+      <p:sp>
+        <p:nvSpPr>
+          <p:cNvPr id="4" name="TextBox 3"/>
+          <p:cNvSpPr txBox="1"/>
+          <p:nvPr/>
+        </p:nvSpPr>
+        <p:spPr>
+          <a:xfrm>
+            <a:off x="548640" y="5623560"/>
+            <a:ext cx="11064240" cy="1051560"/>
+          </a:xfrm>
+          <a:prstGeom prst="rect">
+            <a:avLst/>
+          </a:prstGeom>
+          <a:noFill/>
+        </p:spPr>
+        <p:txBody>
+          <a:bodyPr wrap="square">
+            <a:spAutoFit/>
+          </a:bodyPr>
+          <a:lstStyle/>
+          <a:p>
+            <a:r>
+              <a:rPr sz="2000">
+                <a:solidFill>
+                  <a:srgbClr val="DCECEF"/>
+                </a:solidFill>
+              </a:rPr>
+              <a:t>A little space above it, under the label.</a:t>
+            </a:r>
+          </a:p>
+        </p:txBody>
+      </p:sp>
+    </p:spTree>
+  </p:cSld>
+  <p:clrMapOvr>
+    <a:masterClrMapping/>
+  </p:clrMapOvr>
+</p:sld>
+</file>
+
+<file path=ppt/slides/slide22.xml><?xml version="1.0" encoding="utf-8"?>
+<p:sld xmlns:a="http://schemas.openxmlformats.org/drawingml/2006/main" xmlns:p="http://schemas.openxmlformats.org/presentationml/2006/main" xmlns:r="http://schemas.openxmlformats.org/officeDocument/2006/relationships">
+  <p:cSld>
+    <p:bg>
+      <p:bgPr>
+        <a:solidFill>
+          <a:srgbClr val="102127"/>
+        </a:solidFill>
+        <a:effectLst/>
+      </p:bgPr>
+    </p:bg>
+    <p:spTree>
+      <p:nvGrpSpPr>
+        <p:cNvPr id="1" name=""/>
+        <p:cNvGrpSpPr/>
+        <p:nvPr/>
+      </p:nvGrpSpPr>
+      <p:grpSpPr/>
+      <p:sp>
+        <p:nvSpPr>
+          <p:cNvPr id="2" name="TextBox 1"/>
+          <p:cNvSpPr txBox="1"/>
+          <p:nvPr/>
+        </p:nvSpPr>
+        <p:spPr>
+          <a:xfrm>
+            <a:off x="502920" y="274320"/>
+            <a:ext cx="11155680" cy="548640"/>
+          </a:xfrm>
+          <a:prstGeom prst="rect">
+            <a:avLst/>
+          </a:prstGeom>
+          <a:noFill/>
+        </p:spPr>
+        <p:txBody>
+          <a:bodyPr wrap="none">
+            <a:spAutoFit/>
+          </a:bodyPr>
+          <a:lstStyle/>
+          <a:p>
+            <a:r>
+              <a:rPr sz="2200" b="1">
+                <a:solidFill>
+                  <a:srgbClr val="01AEFD"/>
+                </a:solidFill>
+              </a:rPr>
+              <a:t>Type this into style.css   -   line 26</a:t>
+            </a:r>
+          </a:p>
+        </p:txBody>
+      </p:sp>
+      <p:sp>
+        <p:nvSpPr>
+          <p:cNvPr id="3" name="TextBox 2"/>
+          <p:cNvSpPr txBox="1"/>
+          <p:nvPr/>
+        </p:nvSpPr>
+        <p:spPr>
+          <a:xfrm>
+            <a:off x="502920" y="960120"/>
+            <a:ext cx="11155680" cy="4297680"/>
+          </a:xfrm>
+          <a:prstGeom prst="rect">
+            <a:avLst/>
+          </a:prstGeom>
+          <a:noFill/>
+        </p:spPr>
+        <p:txBody>
+          <a:bodyPr wrap="none">
+            <a:spAutoFit/>
+          </a:bodyPr>
+          <a:lstStyle/>
+          <a:p>
+            <a:pPr>
+              <a:spcAft>
+                <a:spcPts val="0"/>
+              </a:spcAft>
+            </a:pPr>
+            <a:r>
+              <a:rPr sz="1800">
+                <a:solidFill>
+                  <a:srgbClr val="6D8C97"/>
+                </a:solidFill>
+                <a:latin typeface="Consolas"/>
+              </a:rPr>
+              <a:t>  21  </a:t>
+            </a:r>
+            <a:r>
+              <a:rPr sz="1800">
+                <a:solidFill>
+                  <a:srgbClr val="6D8C97"/>
+                </a:solidFill>
+                <a:latin typeface="Consolas"/>
+              </a:rPr>
+              <a:t>.setup { margin-bottom: 12px; font-size: 14px; }</a:t>
+            </a:r>
+          </a:p>
+          <a:p>
+            <a:pPr>
+              <a:spcAft>
+                <a:spcPts val="0"/>
+              </a:spcAft>
+            </a:pPr>
+            <a:r>
+              <a:rPr sz="1800">
+                <a:solidFill>
+                  <a:srgbClr val="6D8C97"/>
+                </a:solidFill>
+                <a:latin typeface="Consolas"/>
+              </a:rPr>
+              <a:t>  22  </a:t>
+            </a:r>
+            <a:r>
+              <a:rPr sz="1800">
+                <a:solidFill>
+                  <a:srgbClr val="6D8C97"/>
+                </a:solidFill>
+                <a:latin typeface="Consolas"/>
+              </a:rPr>
+              <a:t>.setup summary { cursor: pointer; color: #0a6299; font-weight: bold; }</a:t>
+            </a:r>
+          </a:p>
+          <a:p>
+            <a:pPr>
+              <a:spcAft>
+                <a:spcPts val="0"/>
+              </a:spcAft>
+            </a:pPr>
+            <a:r>
+              <a:rPr sz="1800">
+                <a:solidFill>
+                  <a:srgbClr val="6D8C97"/>
+                </a:solidFill>
+                <a:latin typeface="Consolas"/>
+              </a:rPr>
+              <a:t>  23  </a:t>
+            </a:r>
+            <a:r>
+              <a:rPr sz="1800">
+                <a:solidFill>
+                  <a:srgbClr val="6D8C97"/>
+                </a:solidFill>
+                <a:latin typeface="Consolas"/>
+              </a:rPr>
+              <a:t>.setup textarea {</a:t>
+            </a:r>
+          </a:p>
+          <a:p>
+            <a:pPr>
+              <a:spcAft>
+                <a:spcPts val="0"/>
+              </a:spcAft>
+            </a:pPr>
+            <a:r>
+              <a:rPr sz="1800">
+                <a:solidFill>
+                  <a:srgbClr val="6D8C97"/>
+                </a:solidFill>
+                <a:latin typeface="Consolas"/>
+              </a:rPr>
+              <a:t>  24  </a:t>
+            </a:r>
+            <a:r>
+              <a:rPr sz="1800">
+                <a:solidFill>
+                  <a:srgbClr val="6D8C97"/>
+                </a:solidFill>
+                <a:latin typeface="Consolas"/>
+              </a:rPr>
+              <a:t>  width: 100%;</a:t>
+            </a:r>
+          </a:p>
+          <a:p>
+            <a:pPr>
+              <a:spcAft>
+                <a:spcPts val="0"/>
+              </a:spcAft>
+            </a:pPr>
+            <a:r>
+              <a:rPr sz="1800">
+                <a:solidFill>
+                  <a:srgbClr val="6D8C97"/>
+                </a:solidFill>
+                <a:latin typeface="Consolas"/>
+              </a:rPr>
+              <a:t>  25  </a:t>
+            </a:r>
+            <a:r>
+              <a:rPr sz="1800">
+                <a:solidFill>
+                  <a:srgbClr val="6D8C97"/>
+                </a:solidFill>
+                <a:latin typeface="Consolas"/>
+              </a:rPr>
+              <a:t>  margin-top: 8px;</a:t>
+            </a:r>
+          </a:p>
+          <a:p>
+            <a:pPr>
+              <a:spcAft>
+                <a:spcPts val="0"/>
+              </a:spcAft>
+            </a:pPr>
+            <a:r>
+              <a:rPr sz="1800">
+                <a:solidFill>
+                  <a:srgbClr val="6D8C97"/>
+                </a:solidFill>
+                <a:latin typeface="Consolas"/>
+              </a:rPr>
+              <a:t>  26  </a:t>
+            </a:r>
+            <a:r>
+              <a:rPr sz="1800">
+                <a:solidFill>
+                  <a:srgbClr val="7FE0A0"/>
+                </a:solidFill>
+                <a:latin typeface="Consolas"/>
+              </a:rPr>
+              <a:t>  padding: 9px;</a:t>
+            </a:r>
+          </a:p>
+        </p:txBody>
+      </p:sp>
+      <p:sp>
+        <p:nvSpPr>
+          <p:cNvPr id="4" name="TextBox 3"/>
+          <p:cNvSpPr txBox="1"/>
+          <p:nvPr/>
+        </p:nvSpPr>
+        <p:spPr>
+          <a:xfrm>
+            <a:off x="548640" y="5623560"/>
+            <a:ext cx="11064240" cy="1051560"/>
+          </a:xfrm>
+          <a:prstGeom prst="rect">
+            <a:avLst/>
+          </a:prstGeom>
+          <a:noFill/>
+        </p:spPr>
+        <p:txBody>
+          <a:bodyPr wrap="square">
+            <a:spAutoFit/>
+          </a:bodyPr>
+          <a:lstStyle/>
+          <a:p>
+            <a:r>
+              <a:rPr sz="2000">
+                <a:solidFill>
+                  <a:srgbClr val="DCECEF"/>
+                </a:solidFill>
+              </a:rPr>
+              <a:t>Padding so the text is not jammed against the edge.</a:t>
+            </a:r>
+          </a:p>
+        </p:txBody>
+      </p:sp>
+    </p:spTree>
+  </p:cSld>
+  <p:clrMapOvr>
+    <a:masterClrMapping/>
+  </p:clrMapOvr>
+</p:sld>
+</file>
+
+<file path=ppt/slides/slide23.xml><?xml version="1.0" encoding="utf-8"?>
+<p:sld xmlns:a="http://schemas.openxmlformats.org/drawingml/2006/main" xmlns:p="http://schemas.openxmlformats.org/presentationml/2006/main" xmlns:r="http://schemas.openxmlformats.org/officeDocument/2006/relationships">
+  <p:cSld>
+    <p:bg>
+      <p:bgPr>
+        <a:solidFill>
+          <a:srgbClr val="102127"/>
+        </a:solidFill>
+        <a:effectLst/>
+      </p:bgPr>
+    </p:bg>
+    <p:spTree>
+      <p:nvGrpSpPr>
+        <p:cNvPr id="1" name=""/>
+        <p:cNvGrpSpPr/>
+        <p:nvPr/>
+      </p:nvGrpSpPr>
+      <p:grpSpPr/>
+      <p:sp>
+        <p:nvSpPr>
+          <p:cNvPr id="2" name="TextBox 1"/>
+          <p:cNvSpPr txBox="1"/>
+          <p:nvPr/>
+        </p:nvSpPr>
+        <p:spPr>
+          <a:xfrm>
+            <a:off x="502920" y="274320"/>
+            <a:ext cx="11155680" cy="548640"/>
+          </a:xfrm>
+          <a:prstGeom prst="rect">
+            <a:avLst/>
+          </a:prstGeom>
+          <a:noFill/>
+        </p:spPr>
+        <p:txBody>
+          <a:bodyPr wrap="none">
+            <a:spAutoFit/>
+          </a:bodyPr>
+          <a:lstStyle/>
+          <a:p>
+            <a:r>
+              <a:rPr sz="2200" b="1">
+                <a:solidFill>
+                  <a:srgbClr val="01AEFD"/>
+                </a:solidFill>
+              </a:rPr>
+              <a:t>Type this into style.css   -   line 27</a:t>
+            </a:r>
+          </a:p>
+        </p:txBody>
+      </p:sp>
+      <p:sp>
+        <p:nvSpPr>
+          <p:cNvPr id="3" name="TextBox 2"/>
+          <p:cNvSpPr txBox="1"/>
+          <p:nvPr/>
+        </p:nvSpPr>
+        <p:spPr>
+          <a:xfrm>
+            <a:off x="502920" y="960120"/>
+            <a:ext cx="11155680" cy="4297680"/>
+          </a:xfrm>
+          <a:prstGeom prst="rect">
+            <a:avLst/>
+          </a:prstGeom>
+          <a:noFill/>
+        </p:spPr>
+        <p:txBody>
+          <a:bodyPr wrap="none">
+            <a:spAutoFit/>
+          </a:bodyPr>
+          <a:lstStyle/>
+          <a:p>
+            <a:pPr>
+              <a:spcAft>
+                <a:spcPts val="0"/>
+              </a:spcAft>
+            </a:pPr>
+            <a:r>
+              <a:rPr sz="1800">
+                <a:solidFill>
+                  <a:srgbClr val="6D8C97"/>
+                </a:solidFill>
+                <a:latin typeface="Consolas"/>
+              </a:rPr>
+              <a:t>  21  </a:t>
+            </a:r>
+            <a:r>
+              <a:rPr sz="1800">
+                <a:solidFill>
+                  <a:srgbClr val="6D8C97"/>
+                </a:solidFill>
+                <a:latin typeface="Consolas"/>
+              </a:rPr>
+              <a:t>.setup { margin-bottom: 12px; font-size: 14px; }</a:t>
+            </a:r>
+          </a:p>
+          <a:p>
+            <a:pPr>
+              <a:spcAft>
+                <a:spcPts val="0"/>
+              </a:spcAft>
+            </a:pPr>
+            <a:r>
+              <a:rPr sz="1800">
+                <a:solidFill>
+                  <a:srgbClr val="6D8C97"/>
+                </a:solidFill>
+                <a:latin typeface="Consolas"/>
+              </a:rPr>
+              <a:t>  22  </a:t>
+            </a:r>
+            <a:r>
+              <a:rPr sz="1800">
+                <a:solidFill>
+                  <a:srgbClr val="6D8C97"/>
+                </a:solidFill>
+                <a:latin typeface="Consolas"/>
+              </a:rPr>
+              <a:t>.setup summary { cursor: pointer; color: #0a6299; font-weight: bold; }</a:t>
+            </a:r>
+          </a:p>
+          <a:p>
+            <a:pPr>
+              <a:spcAft>
+                <a:spcPts val="0"/>
+              </a:spcAft>
+            </a:pPr>
+            <a:r>
+              <a:rPr sz="1800">
+                <a:solidFill>
+                  <a:srgbClr val="6D8C97"/>
+                </a:solidFill>
+                <a:latin typeface="Consolas"/>
+              </a:rPr>
+              <a:t>  23  </a:t>
+            </a:r>
+            <a:r>
+              <a:rPr sz="1800">
+                <a:solidFill>
+                  <a:srgbClr val="6D8C97"/>
+                </a:solidFill>
+                <a:latin typeface="Consolas"/>
+              </a:rPr>
+              <a:t>.setup textarea {</a:t>
+            </a:r>
+          </a:p>
+          <a:p>
+            <a:pPr>
+              <a:spcAft>
+                <a:spcPts val="0"/>
+              </a:spcAft>
+            </a:pPr>
+            <a:r>
+              <a:rPr sz="1800">
+                <a:solidFill>
+                  <a:srgbClr val="6D8C97"/>
+                </a:solidFill>
+                <a:latin typeface="Consolas"/>
+              </a:rPr>
+              <a:t>  24  </a:t>
+            </a:r>
+            <a:r>
+              <a:rPr sz="1800">
+                <a:solidFill>
+                  <a:srgbClr val="6D8C97"/>
+                </a:solidFill>
+                <a:latin typeface="Consolas"/>
+              </a:rPr>
+              <a:t>  width: 100%;</a:t>
+            </a:r>
+          </a:p>
+          <a:p>
+            <a:pPr>
+              <a:spcAft>
+                <a:spcPts val="0"/>
+              </a:spcAft>
+            </a:pPr>
+            <a:r>
+              <a:rPr sz="1800">
+                <a:solidFill>
+                  <a:srgbClr val="6D8C97"/>
+                </a:solidFill>
+                <a:latin typeface="Consolas"/>
+              </a:rPr>
+              <a:t>  25  </a:t>
+            </a:r>
+            <a:r>
+              <a:rPr sz="1800">
+                <a:solidFill>
+                  <a:srgbClr val="6D8C97"/>
+                </a:solidFill>
+                <a:latin typeface="Consolas"/>
+              </a:rPr>
+              <a:t>  margin-top: 8px;</a:t>
+            </a:r>
+          </a:p>
+          <a:p>
+            <a:pPr>
+              <a:spcAft>
+                <a:spcPts val="0"/>
+              </a:spcAft>
+            </a:pPr>
+            <a:r>
+              <a:rPr sz="1800">
+                <a:solidFill>
+                  <a:srgbClr val="6D8C97"/>
+                </a:solidFill>
+                <a:latin typeface="Consolas"/>
+              </a:rPr>
+              <a:t>  26  </a:t>
+            </a:r>
+            <a:r>
+              <a:rPr sz="1800">
+                <a:solidFill>
+                  <a:srgbClr val="6D8C97"/>
+                </a:solidFill>
+                <a:latin typeface="Consolas"/>
+              </a:rPr>
+              <a:t>  padding: 9px;</a:t>
+            </a:r>
+          </a:p>
+          <a:p>
+            <a:pPr>
+              <a:spcAft>
+                <a:spcPts val="0"/>
+              </a:spcAft>
+            </a:pPr>
+            <a:r>
+              <a:rPr sz="1800">
+                <a:solidFill>
+                  <a:srgbClr val="6D8C97"/>
+                </a:solidFill>
+                <a:latin typeface="Consolas"/>
+              </a:rPr>
+              <a:t>  27  </a:t>
+            </a:r>
+            <a:r>
+              <a:rPr sz="1800">
+                <a:solidFill>
+                  <a:srgbClr val="7FE0A0"/>
+                </a:solidFill>
+                <a:latin typeface="Consolas"/>
+              </a:rPr>
+              <a:t>  border: 1px solid #dbe3ec;</a:t>
+            </a:r>
+          </a:p>
+        </p:txBody>
+      </p:sp>
+      <p:sp>
+        <p:nvSpPr>
+          <p:cNvPr id="4" name="TextBox 3"/>
+          <p:cNvSpPr txBox="1"/>
+          <p:nvPr/>
+        </p:nvSpPr>
+        <p:spPr>
+          <a:xfrm>
+            <a:off x="548640" y="5623560"/>
+            <a:ext cx="11064240" cy="1051560"/>
+          </a:xfrm>
+          <a:prstGeom prst="rect">
+            <a:avLst/>
+          </a:prstGeom>
+          <a:noFill/>
+        </p:spPr>
+        <p:txBody>
+          <a:bodyPr wrap="square">
+            <a:spAutoFit/>
+          </a:bodyPr>
+          <a:lstStyle/>
+          <a:p>
+            <a:r>
+              <a:rPr sz="2000">
+                <a:solidFill>
+                  <a:srgbClr val="DCECEF"/>
+                </a:solidFill>
+              </a:rPr>
+              <a:t>A thin grey border.</a:t>
+            </a:r>
+          </a:p>
+        </p:txBody>
+      </p:sp>
+    </p:spTree>
+  </p:cSld>
+  <p:clrMapOvr>
+    <a:masterClrMapping/>
+  </p:clrMapOvr>
+</p:sld>
+</file>
+
+<file path=ppt/slides/slide24.xml><?xml version="1.0" encoding="utf-8"?>
+<p:sld xmlns:a="http://schemas.openxmlformats.org/drawingml/2006/main" xmlns:p="http://schemas.openxmlformats.org/presentationml/2006/main" xmlns:r="http://schemas.openxmlformats.org/officeDocument/2006/relationships">
+  <p:cSld>
+    <p:bg>
+      <p:bgPr>
+        <a:solidFill>
+          <a:srgbClr val="102127"/>
+        </a:solidFill>
+        <a:effectLst/>
+      </p:bgPr>
+    </p:bg>
+    <p:spTree>
+      <p:nvGrpSpPr>
+        <p:cNvPr id="1" name=""/>
+        <p:cNvGrpSpPr/>
+        <p:nvPr/>
+      </p:nvGrpSpPr>
+      <p:grpSpPr/>
+      <p:sp>
+        <p:nvSpPr>
+          <p:cNvPr id="2" name="TextBox 1"/>
+          <p:cNvSpPr txBox="1"/>
+          <p:nvPr/>
+        </p:nvSpPr>
+        <p:spPr>
+          <a:xfrm>
+            <a:off x="502920" y="274320"/>
+            <a:ext cx="11155680" cy="548640"/>
+          </a:xfrm>
+          <a:prstGeom prst="rect">
+            <a:avLst/>
+          </a:prstGeom>
+          <a:noFill/>
+        </p:spPr>
+        <p:txBody>
+          <a:bodyPr wrap="none">
+            <a:spAutoFit/>
+          </a:bodyPr>
+          <a:lstStyle/>
+          <a:p>
+            <a:r>
+              <a:rPr sz="2200" b="1">
+                <a:solidFill>
+                  <a:srgbClr val="01AEFD"/>
+                </a:solidFill>
+              </a:rPr>
+              <a:t>Type this into style.css   -   line 28</a:t>
+            </a:r>
+          </a:p>
+        </p:txBody>
+      </p:sp>
+      <p:sp>
+        <p:nvSpPr>
+          <p:cNvPr id="3" name="TextBox 2"/>
+          <p:cNvSpPr txBox="1"/>
+          <p:nvPr/>
+        </p:nvSpPr>
+        <p:spPr>
+          <a:xfrm>
+            <a:off x="502920" y="960120"/>
+            <a:ext cx="11155680" cy="4297680"/>
+          </a:xfrm>
+          <a:prstGeom prst="rect">
+            <a:avLst/>
+          </a:prstGeom>
+          <a:noFill/>
+        </p:spPr>
+        <p:txBody>
+          <a:bodyPr wrap="none">
+            <a:spAutoFit/>
+          </a:bodyPr>
+          <a:lstStyle/>
+          <a:p>
+            <a:pPr>
+              <a:spcAft>
+                <a:spcPts val="0"/>
+              </a:spcAft>
+            </a:pPr>
+            <a:r>
+              <a:rPr sz="1800">
+                <a:solidFill>
+                  <a:srgbClr val="6D8C97"/>
+                </a:solidFill>
+                <a:latin typeface="Consolas"/>
+              </a:rPr>
+              <a:t>  21  </a:t>
+            </a:r>
+            <a:r>
+              <a:rPr sz="1800">
+                <a:solidFill>
+                  <a:srgbClr val="6D8C97"/>
+                </a:solidFill>
+                <a:latin typeface="Consolas"/>
+              </a:rPr>
+              <a:t>.setup { margin-bottom: 12px; font-size: 14px; }</a:t>
+            </a:r>
+          </a:p>
+          <a:p>
+            <a:pPr>
+              <a:spcAft>
+                <a:spcPts val="0"/>
+              </a:spcAft>
+            </a:pPr>
+            <a:r>
+              <a:rPr sz="1800">
+                <a:solidFill>
+                  <a:srgbClr val="6D8C97"/>
+                </a:solidFill>
+                <a:latin typeface="Consolas"/>
+              </a:rPr>
+              <a:t>  22  </a:t>
+            </a:r>
+            <a:r>
+              <a:rPr sz="1800">
+                <a:solidFill>
+                  <a:srgbClr val="6D8C97"/>
+                </a:solidFill>
+                <a:latin typeface="Consolas"/>
+              </a:rPr>
+              <a:t>.setup summary { cursor: pointer; color: #0a6299; font-weight: bold; }</a:t>
+            </a:r>
+          </a:p>
+          <a:p>
+            <a:pPr>
+              <a:spcAft>
+                <a:spcPts val="0"/>
+              </a:spcAft>
+            </a:pPr>
+            <a:r>
+              <a:rPr sz="1800">
+                <a:solidFill>
+                  <a:srgbClr val="6D8C97"/>
+                </a:solidFill>
+                <a:latin typeface="Consolas"/>
+              </a:rPr>
+              <a:t>  23  </a:t>
+            </a:r>
+            <a:r>
+              <a:rPr sz="1800">
+                <a:solidFill>
+                  <a:srgbClr val="6D8C97"/>
+                </a:solidFill>
+                <a:latin typeface="Consolas"/>
+              </a:rPr>
+              <a:t>.setup textarea {</a:t>
+            </a:r>
+          </a:p>
+          <a:p>
+            <a:pPr>
+              <a:spcAft>
+                <a:spcPts val="0"/>
+              </a:spcAft>
+            </a:pPr>
+            <a:r>
+              <a:rPr sz="1800">
+                <a:solidFill>
+                  <a:srgbClr val="6D8C97"/>
+                </a:solidFill>
+                <a:latin typeface="Consolas"/>
+              </a:rPr>
+              <a:t>  24  </a:t>
+            </a:r>
+            <a:r>
+              <a:rPr sz="1800">
+                <a:solidFill>
+                  <a:srgbClr val="6D8C97"/>
+                </a:solidFill>
+                <a:latin typeface="Consolas"/>
+              </a:rPr>
+              <a:t>  width: 100%;</a:t>
+            </a:r>
+          </a:p>
+          <a:p>
+            <a:pPr>
+              <a:spcAft>
+                <a:spcPts val="0"/>
+              </a:spcAft>
+            </a:pPr>
+            <a:r>
+              <a:rPr sz="1800">
+                <a:solidFill>
+                  <a:srgbClr val="6D8C97"/>
+                </a:solidFill>
+                <a:latin typeface="Consolas"/>
+              </a:rPr>
+              <a:t>  25  </a:t>
+            </a:r>
+            <a:r>
+              <a:rPr sz="1800">
+                <a:solidFill>
+                  <a:srgbClr val="6D8C97"/>
+                </a:solidFill>
+                <a:latin typeface="Consolas"/>
+              </a:rPr>
+              <a:t>  margin-top: 8px;</a:t>
+            </a:r>
+          </a:p>
+          <a:p>
+            <a:pPr>
+              <a:spcAft>
+                <a:spcPts val="0"/>
+              </a:spcAft>
+            </a:pPr>
+            <a:r>
+              <a:rPr sz="1800">
+                <a:solidFill>
+                  <a:srgbClr val="6D8C97"/>
+                </a:solidFill>
+                <a:latin typeface="Consolas"/>
+              </a:rPr>
+              <a:t>  26  </a:t>
+            </a:r>
+            <a:r>
+              <a:rPr sz="1800">
+                <a:solidFill>
+                  <a:srgbClr val="6D8C97"/>
+                </a:solidFill>
+                <a:latin typeface="Consolas"/>
+              </a:rPr>
+              <a:t>  padding: 9px;</a:t>
+            </a:r>
+          </a:p>
+          <a:p>
+            <a:pPr>
+              <a:spcAft>
+                <a:spcPts val="0"/>
+              </a:spcAft>
+            </a:pPr>
+            <a:r>
+              <a:rPr sz="1800">
+                <a:solidFill>
+                  <a:srgbClr val="6D8C97"/>
+                </a:solidFill>
+                <a:latin typeface="Consolas"/>
+              </a:rPr>
+              <a:t>  27  </a:t>
+            </a:r>
+            <a:r>
+              <a:rPr sz="1800">
+                <a:solidFill>
+                  <a:srgbClr val="6D8C97"/>
+                </a:solidFill>
+                <a:latin typeface="Consolas"/>
+              </a:rPr>
+              <a:t>  border: 1px solid #dbe3ec;</a:t>
+            </a:r>
+          </a:p>
+          <a:p>
+            <a:pPr>
+              <a:spcAft>
+                <a:spcPts val="0"/>
+              </a:spcAft>
+            </a:pPr>
+            <a:r>
+              <a:rPr sz="1800">
+                <a:solidFill>
+                  <a:srgbClr val="6D8C97"/>
+                </a:solidFill>
+                <a:latin typeface="Consolas"/>
+              </a:rPr>
+              <a:t>  28  </a:t>
+            </a:r>
+            <a:r>
+              <a:rPr sz="1800">
+                <a:solidFill>
+                  <a:srgbClr val="7FE0A0"/>
+                </a:solidFill>
+                <a:latin typeface="Consolas"/>
+              </a:rPr>
+              <a:t>  border-radius: 6px;</a:t>
+            </a:r>
+          </a:p>
+        </p:txBody>
+      </p:sp>
+      <p:sp>
+        <p:nvSpPr>
+          <p:cNvPr id="4" name="TextBox 3"/>
+          <p:cNvSpPr txBox="1"/>
+          <p:nvPr/>
+        </p:nvSpPr>
+        <p:spPr>
+          <a:xfrm>
+            <a:off x="548640" y="5623560"/>
+            <a:ext cx="11064240" cy="1051560"/>
+          </a:xfrm>
+          <a:prstGeom prst="rect">
+            <a:avLst/>
+          </a:prstGeom>
+          <a:noFill/>
+        </p:spPr>
+        <p:txBody>
+          <a:bodyPr wrap="square">
+            <a:spAutoFit/>
+          </a:bodyPr>
+          <a:lstStyle/>
+          <a:p>
+            <a:r>
+              <a:rPr sz="2000">
+                <a:solidFill>
+                  <a:srgbClr val="DCECEF"/>
+                </a:solidFill>
+              </a:rPr>
+              <a:t>Slightly rounded corners.</a:t>
+            </a:r>
+          </a:p>
+        </p:txBody>
+      </p:sp>
+    </p:spTree>
+  </p:cSld>
+  <p:clrMapOvr>
+    <a:masterClrMapping/>
+  </p:clrMapOvr>
+</p:sld>
+</file>
+
+<file path=ppt/slides/slide25.xml><?xml version="1.0" encoding="utf-8"?>
+<p:sld xmlns:a="http://schemas.openxmlformats.org/drawingml/2006/main" xmlns:p="http://schemas.openxmlformats.org/presentationml/2006/main" xmlns:r="http://schemas.openxmlformats.org/officeDocument/2006/relationships">
+  <p:cSld>
+    <p:bg>
+      <p:bgPr>
+        <a:solidFill>
+          <a:srgbClr val="102127"/>
+        </a:solidFill>
+        <a:effectLst/>
+      </p:bgPr>
+    </p:bg>
+    <p:spTree>
+      <p:nvGrpSpPr>
+        <p:cNvPr id="1" name=""/>
+        <p:cNvGrpSpPr/>
+        <p:nvPr/>
+      </p:nvGrpSpPr>
+      <p:grpSpPr/>
+      <p:sp>
+        <p:nvSpPr>
+          <p:cNvPr id="2" name="TextBox 1"/>
+          <p:cNvSpPr txBox="1"/>
+          <p:nvPr/>
+        </p:nvSpPr>
+        <p:spPr>
+          <a:xfrm>
+            <a:off x="502920" y="274320"/>
+            <a:ext cx="11155680" cy="548640"/>
+          </a:xfrm>
+          <a:prstGeom prst="rect">
+            <a:avLst/>
+          </a:prstGeom>
+          <a:noFill/>
+        </p:spPr>
+        <p:txBody>
+          <a:bodyPr wrap="none">
+            <a:spAutoFit/>
+          </a:bodyPr>
+          <a:lstStyle/>
+          <a:p>
+            <a:r>
+              <a:rPr sz="2200" b="1">
+                <a:solidFill>
+                  <a:srgbClr val="01AEFD"/>
+                </a:solidFill>
+              </a:rPr>
+              <a:t>Type this into style.css   -   line 29</a:t>
+            </a:r>
+          </a:p>
+        </p:txBody>
+      </p:sp>
+      <p:sp>
+        <p:nvSpPr>
+          <p:cNvPr id="3" name="TextBox 2"/>
+          <p:cNvSpPr txBox="1"/>
+          <p:nvPr/>
+        </p:nvSpPr>
+        <p:spPr>
+          <a:xfrm>
+            <a:off x="502920" y="960120"/>
+            <a:ext cx="11155680" cy="4297680"/>
+          </a:xfrm>
+          <a:prstGeom prst="rect">
+            <a:avLst/>
+          </a:prstGeom>
+          <a:noFill/>
+        </p:spPr>
+        <p:txBody>
+          <a:bodyPr wrap="none">
+            <a:spAutoFit/>
+          </a:bodyPr>
+          <a:lstStyle/>
+          <a:p>
+            <a:pPr>
+              <a:spcAft>
+                <a:spcPts val="0"/>
+              </a:spcAft>
+            </a:pPr>
+            <a:r>
+              <a:rPr sz="1800">
+                <a:solidFill>
+                  <a:srgbClr val="6D8C97"/>
+                </a:solidFill>
+                <a:latin typeface="Consolas"/>
+              </a:rPr>
+              <a:t>  21  </a:t>
+            </a:r>
+            <a:r>
+              <a:rPr sz="1800">
+                <a:solidFill>
+                  <a:srgbClr val="6D8C97"/>
+                </a:solidFill>
+                <a:latin typeface="Consolas"/>
+              </a:rPr>
+              <a:t>.setup { margin-bottom: 12px; font-size: 14px; }</a:t>
+            </a:r>
+          </a:p>
+          <a:p>
+            <a:pPr>
+              <a:spcAft>
+                <a:spcPts val="0"/>
+              </a:spcAft>
+            </a:pPr>
+            <a:r>
+              <a:rPr sz="1800">
+                <a:solidFill>
+                  <a:srgbClr val="6D8C97"/>
+                </a:solidFill>
+                <a:latin typeface="Consolas"/>
+              </a:rPr>
+              <a:t>  22  </a:t>
+            </a:r>
+            <a:r>
+              <a:rPr sz="1800">
+                <a:solidFill>
+                  <a:srgbClr val="6D8C97"/>
+                </a:solidFill>
+                <a:latin typeface="Consolas"/>
+              </a:rPr>
+              <a:t>.setup summary { cursor: pointer; color: #0a6299; font-weight: bold; }</a:t>
+            </a:r>
+          </a:p>
+          <a:p>
+            <a:pPr>
+              <a:spcAft>
+                <a:spcPts val="0"/>
+              </a:spcAft>
+            </a:pPr>
+            <a:r>
+              <a:rPr sz="1800">
+                <a:solidFill>
+                  <a:srgbClr val="6D8C97"/>
+                </a:solidFill>
+                <a:latin typeface="Consolas"/>
+              </a:rPr>
+              <a:t>  23  </a:t>
+            </a:r>
+            <a:r>
+              <a:rPr sz="1800">
+                <a:solidFill>
+                  <a:srgbClr val="6D8C97"/>
+                </a:solidFill>
+                <a:latin typeface="Consolas"/>
+              </a:rPr>
+              <a:t>.setup textarea {</a:t>
+            </a:r>
+          </a:p>
+          <a:p>
+            <a:pPr>
+              <a:spcAft>
+                <a:spcPts val="0"/>
+              </a:spcAft>
+            </a:pPr>
+            <a:r>
+              <a:rPr sz="1800">
+                <a:solidFill>
+                  <a:srgbClr val="6D8C97"/>
+                </a:solidFill>
+                <a:latin typeface="Consolas"/>
+              </a:rPr>
+              <a:t>  24  </a:t>
+            </a:r>
+            <a:r>
+              <a:rPr sz="1800">
+                <a:solidFill>
+                  <a:srgbClr val="6D8C97"/>
+                </a:solidFill>
+                <a:latin typeface="Consolas"/>
+              </a:rPr>
+              <a:t>  width: 100%;</a:t>
+            </a:r>
+          </a:p>
+          <a:p>
+            <a:pPr>
+              <a:spcAft>
+                <a:spcPts val="0"/>
+              </a:spcAft>
+            </a:pPr>
+            <a:r>
+              <a:rPr sz="1800">
+                <a:solidFill>
+                  <a:srgbClr val="6D8C97"/>
+                </a:solidFill>
+                <a:latin typeface="Consolas"/>
+              </a:rPr>
+              <a:t>  25  </a:t>
+            </a:r>
+            <a:r>
+              <a:rPr sz="1800">
+                <a:solidFill>
+                  <a:srgbClr val="6D8C97"/>
+                </a:solidFill>
+                <a:latin typeface="Consolas"/>
+              </a:rPr>
+              <a:t>  margin-top: 8px;</a:t>
+            </a:r>
+          </a:p>
+          <a:p>
+            <a:pPr>
+              <a:spcAft>
+                <a:spcPts val="0"/>
+              </a:spcAft>
+            </a:pPr>
+            <a:r>
+              <a:rPr sz="1800">
+                <a:solidFill>
+                  <a:srgbClr val="6D8C97"/>
+                </a:solidFill>
+                <a:latin typeface="Consolas"/>
+              </a:rPr>
+              <a:t>  26  </a:t>
+            </a:r>
+            <a:r>
+              <a:rPr sz="1800">
+                <a:solidFill>
+                  <a:srgbClr val="6D8C97"/>
+                </a:solidFill>
+                <a:latin typeface="Consolas"/>
+              </a:rPr>
+              <a:t>  padding: 9px;</a:t>
+            </a:r>
+          </a:p>
+          <a:p>
+            <a:pPr>
+              <a:spcAft>
+                <a:spcPts val="0"/>
+              </a:spcAft>
+            </a:pPr>
+            <a:r>
+              <a:rPr sz="1800">
+                <a:solidFill>
+                  <a:srgbClr val="6D8C97"/>
+                </a:solidFill>
+                <a:latin typeface="Consolas"/>
+              </a:rPr>
+              <a:t>  27  </a:t>
+            </a:r>
+            <a:r>
+              <a:rPr sz="1800">
+                <a:solidFill>
+                  <a:srgbClr val="6D8C97"/>
+                </a:solidFill>
+                <a:latin typeface="Consolas"/>
+              </a:rPr>
+              <a:t>  border: 1px solid #dbe3ec;</a:t>
+            </a:r>
+          </a:p>
+          <a:p>
+            <a:pPr>
+              <a:spcAft>
+                <a:spcPts val="0"/>
+              </a:spcAft>
+            </a:pPr>
+            <a:r>
+              <a:rPr sz="1800">
+                <a:solidFill>
+                  <a:srgbClr val="6D8C97"/>
+                </a:solidFill>
+                <a:latin typeface="Consolas"/>
+              </a:rPr>
+              <a:t>  28  </a:t>
+            </a:r>
+            <a:r>
+              <a:rPr sz="1800">
+                <a:solidFill>
+                  <a:srgbClr val="6D8C97"/>
+                </a:solidFill>
+                <a:latin typeface="Consolas"/>
+              </a:rPr>
+              <a:t>  border-radius: 6px;</a:t>
+            </a:r>
+          </a:p>
+          <a:p>
+            <a:pPr>
+              <a:spcAft>
+                <a:spcPts val="0"/>
+              </a:spcAft>
+            </a:pPr>
+            <a:r>
+              <a:rPr sz="1800">
+                <a:solidFill>
+                  <a:srgbClr val="6D8C97"/>
+                </a:solidFill>
+                <a:latin typeface="Consolas"/>
+              </a:rPr>
+              <a:t>  29  </a:t>
+            </a:r>
+            <a:r>
+              <a:rPr sz="1800">
+                <a:solidFill>
+                  <a:srgbClr val="7FE0A0"/>
+                </a:solidFill>
+                <a:latin typeface="Consolas"/>
+              </a:rPr>
+              <a:t>  font-family: inherit;</a:t>
+            </a:r>
+          </a:p>
+        </p:txBody>
+      </p:sp>
+      <p:sp>
+        <p:nvSpPr>
+          <p:cNvPr id="4" name="TextBox 3"/>
+          <p:cNvSpPr txBox="1"/>
+          <p:nvPr/>
+        </p:nvSpPr>
+        <p:spPr>
+          <a:xfrm>
+            <a:off x="548640" y="5623560"/>
+            <a:ext cx="11064240" cy="1051560"/>
+          </a:xfrm>
+          <a:prstGeom prst="rect">
+            <a:avLst/>
+          </a:prstGeom>
+          <a:noFill/>
+        </p:spPr>
+        <p:txBody>
+          <a:bodyPr wrap="square">
+            <a:spAutoFit/>
+          </a:bodyPr>
+          <a:lstStyle/>
+          <a:p>
+            <a:r>
+              <a:rPr sz="2000">
+                <a:solidFill>
+                  <a:srgbClr val="DCECEF"/>
+                </a:solidFill>
+              </a:rPr>
+              <a:t>Use the same font as the rest of the page, not the browser default.</a:t>
+            </a:r>
+          </a:p>
+        </p:txBody>
+      </p:sp>
+    </p:spTree>
+  </p:cSld>
+  <p:clrMapOvr>
+    <a:masterClrMapping/>
+  </p:clrMapOvr>
+</p:sld>
+</file>
+
+<file path=ppt/slides/slide26.xml><?xml version="1.0" encoding="utf-8"?>
+<p:sld xmlns:a="http://schemas.openxmlformats.org/drawingml/2006/main" xmlns:p="http://schemas.openxmlformats.org/presentationml/2006/main" xmlns:r="http://schemas.openxmlformats.org/officeDocument/2006/relationships">
+  <p:cSld>
+    <p:bg>
+      <p:bgPr>
+        <a:solidFill>
+          <a:srgbClr val="102127"/>
+        </a:solidFill>
+        <a:effectLst/>
+      </p:bgPr>
+    </p:bg>
+    <p:spTree>
+      <p:nvGrpSpPr>
+        <p:cNvPr id="1" name=""/>
+        <p:cNvGrpSpPr/>
+        <p:nvPr/>
+      </p:nvGrpSpPr>
+      <p:grpSpPr/>
+      <p:sp>
+        <p:nvSpPr>
+          <p:cNvPr id="2" name="TextBox 1"/>
+          <p:cNvSpPr txBox="1"/>
+          <p:nvPr/>
+        </p:nvSpPr>
+        <p:spPr>
+          <a:xfrm>
+            <a:off x="502920" y="274320"/>
+            <a:ext cx="11155680" cy="548640"/>
+          </a:xfrm>
+          <a:prstGeom prst="rect">
+            <a:avLst/>
+          </a:prstGeom>
+          <a:noFill/>
+        </p:spPr>
+        <p:txBody>
+          <a:bodyPr wrap="none">
+            <a:spAutoFit/>
+          </a:bodyPr>
+          <a:lstStyle/>
+          <a:p>
+            <a:r>
+              <a:rPr sz="2200" b="1">
+                <a:solidFill>
+                  <a:srgbClr val="01AEFD"/>
+                </a:solidFill>
+              </a:rPr>
+              <a:t>Type this into style.css   -   line 30</a:t>
+            </a:r>
+          </a:p>
+        </p:txBody>
+      </p:sp>
+      <p:sp>
+        <p:nvSpPr>
+          <p:cNvPr id="3" name="TextBox 2"/>
+          <p:cNvSpPr txBox="1"/>
+          <p:nvPr/>
+        </p:nvSpPr>
+        <p:spPr>
+          <a:xfrm>
+            <a:off x="502920" y="960120"/>
+            <a:ext cx="11155680" cy="4297680"/>
+          </a:xfrm>
+          <a:prstGeom prst="rect">
+            <a:avLst/>
+          </a:prstGeom>
+          <a:noFill/>
+        </p:spPr>
+        <p:txBody>
+          <a:bodyPr wrap="none">
+            <a:spAutoFit/>
+          </a:bodyPr>
+          <a:lstStyle/>
+          <a:p>
+            <a:pPr>
+              <a:spcAft>
+                <a:spcPts val="0"/>
+              </a:spcAft>
+            </a:pPr>
+            <a:r>
+              <a:rPr sz="1800">
+                <a:solidFill>
+                  <a:srgbClr val="6D8C97"/>
+                </a:solidFill>
+                <a:latin typeface="Consolas"/>
+              </a:rPr>
+              <a:t>  21  </a:t>
+            </a:r>
+            <a:r>
+              <a:rPr sz="1800">
+                <a:solidFill>
+                  <a:srgbClr val="6D8C97"/>
+                </a:solidFill>
+                <a:latin typeface="Consolas"/>
+              </a:rPr>
+              <a:t>.setup { margin-bottom: 12px; font-size: 14px; }</a:t>
+            </a:r>
+          </a:p>
+          <a:p>
+            <a:pPr>
+              <a:spcAft>
+                <a:spcPts val="0"/>
+              </a:spcAft>
+            </a:pPr>
+            <a:r>
+              <a:rPr sz="1800">
+                <a:solidFill>
+                  <a:srgbClr val="6D8C97"/>
+                </a:solidFill>
+                <a:latin typeface="Consolas"/>
+              </a:rPr>
+              <a:t>  22  </a:t>
+            </a:r>
+            <a:r>
+              <a:rPr sz="1800">
+                <a:solidFill>
+                  <a:srgbClr val="6D8C97"/>
+                </a:solidFill>
+                <a:latin typeface="Consolas"/>
+              </a:rPr>
+              <a:t>.setup summary { cursor: pointer; color: #0a6299; font-weight: bold; }</a:t>
+            </a:r>
+          </a:p>
+          <a:p>
+            <a:pPr>
+              <a:spcAft>
+                <a:spcPts val="0"/>
+              </a:spcAft>
+            </a:pPr>
+            <a:r>
+              <a:rPr sz="1800">
+                <a:solidFill>
+                  <a:srgbClr val="6D8C97"/>
+                </a:solidFill>
+                <a:latin typeface="Consolas"/>
+              </a:rPr>
+              <a:t>  23  </a:t>
+            </a:r>
+            <a:r>
+              <a:rPr sz="1800">
+                <a:solidFill>
+                  <a:srgbClr val="6D8C97"/>
+                </a:solidFill>
+                <a:latin typeface="Consolas"/>
+              </a:rPr>
+              <a:t>.setup textarea {</a:t>
+            </a:r>
+          </a:p>
+          <a:p>
+            <a:pPr>
+              <a:spcAft>
+                <a:spcPts val="0"/>
+              </a:spcAft>
+            </a:pPr>
+            <a:r>
+              <a:rPr sz="1800">
+                <a:solidFill>
+                  <a:srgbClr val="6D8C97"/>
+                </a:solidFill>
+                <a:latin typeface="Consolas"/>
+              </a:rPr>
+              <a:t>  24  </a:t>
+            </a:r>
+            <a:r>
+              <a:rPr sz="1800">
+                <a:solidFill>
+                  <a:srgbClr val="6D8C97"/>
+                </a:solidFill>
+                <a:latin typeface="Consolas"/>
+              </a:rPr>
+              <a:t>  width: 100%;</a:t>
+            </a:r>
+          </a:p>
+          <a:p>
+            <a:pPr>
+              <a:spcAft>
+                <a:spcPts val="0"/>
+              </a:spcAft>
+            </a:pPr>
+            <a:r>
+              <a:rPr sz="1800">
+                <a:solidFill>
+                  <a:srgbClr val="6D8C97"/>
+                </a:solidFill>
+                <a:latin typeface="Consolas"/>
+              </a:rPr>
+              <a:t>  25  </a:t>
+            </a:r>
+            <a:r>
+              <a:rPr sz="1800">
+                <a:solidFill>
+                  <a:srgbClr val="6D8C97"/>
+                </a:solidFill>
+                <a:latin typeface="Consolas"/>
+              </a:rPr>
+              <a:t>  margin-top: 8px;</a:t>
+            </a:r>
+          </a:p>
+          <a:p>
+            <a:pPr>
+              <a:spcAft>
+                <a:spcPts val="0"/>
+              </a:spcAft>
+            </a:pPr>
+            <a:r>
+              <a:rPr sz="1800">
+                <a:solidFill>
+                  <a:srgbClr val="6D8C97"/>
+                </a:solidFill>
+                <a:latin typeface="Consolas"/>
+              </a:rPr>
+              <a:t>  26  </a:t>
+            </a:r>
+            <a:r>
+              <a:rPr sz="1800">
+                <a:solidFill>
+                  <a:srgbClr val="6D8C97"/>
+                </a:solidFill>
+                <a:latin typeface="Consolas"/>
+              </a:rPr>
+              <a:t>  padding: 9px;</a:t>
+            </a:r>
+          </a:p>
+          <a:p>
+            <a:pPr>
+              <a:spcAft>
+                <a:spcPts val="0"/>
+              </a:spcAft>
+            </a:pPr>
+            <a:r>
+              <a:rPr sz="1800">
+                <a:solidFill>
+                  <a:srgbClr val="6D8C97"/>
+                </a:solidFill>
+                <a:latin typeface="Consolas"/>
+              </a:rPr>
+              <a:t>  27  </a:t>
+            </a:r>
+            <a:r>
+              <a:rPr sz="1800">
+                <a:solidFill>
+                  <a:srgbClr val="6D8C97"/>
+                </a:solidFill>
+                <a:latin typeface="Consolas"/>
+              </a:rPr>
+              <a:t>  border: 1px solid #dbe3ec;</a:t>
+            </a:r>
+          </a:p>
+          <a:p>
+            <a:pPr>
+              <a:spcAft>
+                <a:spcPts val="0"/>
+              </a:spcAft>
+            </a:pPr>
+            <a:r>
+              <a:rPr sz="1800">
+                <a:solidFill>
+                  <a:srgbClr val="6D8C97"/>
+                </a:solidFill>
+                <a:latin typeface="Consolas"/>
+              </a:rPr>
+              <a:t>  28  </a:t>
+            </a:r>
+            <a:r>
+              <a:rPr sz="1800">
+                <a:solidFill>
+                  <a:srgbClr val="6D8C97"/>
+                </a:solidFill>
+                <a:latin typeface="Consolas"/>
+              </a:rPr>
+              <a:t>  border-radius: 6px;</a:t>
+            </a:r>
+          </a:p>
+          <a:p>
+            <a:pPr>
+              <a:spcAft>
+                <a:spcPts val="0"/>
+              </a:spcAft>
+            </a:pPr>
+            <a:r>
+              <a:rPr sz="1800">
+                <a:solidFill>
+                  <a:srgbClr val="6D8C97"/>
+                </a:solidFill>
+                <a:latin typeface="Consolas"/>
+              </a:rPr>
+              <a:t>  29  </a:t>
+            </a:r>
+            <a:r>
+              <a:rPr sz="1800">
+                <a:solidFill>
+                  <a:srgbClr val="6D8C97"/>
+                </a:solidFill>
+                <a:latin typeface="Consolas"/>
+              </a:rPr>
+              <a:t>  font-family: inherit;</a:t>
+            </a:r>
+          </a:p>
+          <a:p>
+            <a:pPr>
+              <a:spcAft>
+                <a:spcPts val="0"/>
+              </a:spcAft>
+            </a:pPr>
+            <a:r>
+              <a:rPr sz="1800">
+                <a:solidFill>
+                  <a:srgbClr val="6D8C97"/>
+                </a:solidFill>
+                <a:latin typeface="Consolas"/>
+              </a:rPr>
+              <a:t>  30  </a:t>
+            </a:r>
+            <a:r>
+              <a:rPr sz="1800">
+                <a:solidFill>
+                  <a:srgbClr val="7FE0A0"/>
+                </a:solidFill>
+                <a:latin typeface="Consolas"/>
+              </a:rPr>
+              <a:t>  font-size: 14px;</a:t>
+            </a:r>
+          </a:p>
+        </p:txBody>
+      </p:sp>
+      <p:sp>
+        <p:nvSpPr>
+          <p:cNvPr id="4" name="TextBox 3"/>
+          <p:cNvSpPr txBox="1"/>
+          <p:nvPr/>
+        </p:nvSpPr>
+        <p:spPr>
+          <a:xfrm>
+            <a:off x="548640" y="5623560"/>
+            <a:ext cx="11064240" cy="1051560"/>
+          </a:xfrm>
+          <a:prstGeom prst="rect">
+            <a:avLst/>
+          </a:prstGeom>
+          <a:noFill/>
+        </p:spPr>
+        <p:txBody>
+          <a:bodyPr wrap="square">
+            <a:spAutoFit/>
+          </a:bodyPr>
+          <a:lstStyle/>
+          <a:p>
+            <a:r>
+              <a:rPr sz="2000">
+                <a:solidFill>
+                  <a:srgbClr val="DCECEF"/>
+                </a:solidFill>
+              </a:rPr>
+              <a:t>Set the text size.</a:t>
+            </a:r>
+          </a:p>
+        </p:txBody>
+      </p:sp>
+    </p:spTree>
+  </p:cSld>
+  <p:clrMapOvr>
+    <a:masterClrMapping/>
+  </p:clrMapOvr>
+</p:sld>
+</file>
+
+<file path=ppt/slides/slide27.xml><?xml version="1.0" encoding="utf-8"?>
+<p:sld xmlns:a="http://schemas.openxmlformats.org/drawingml/2006/main" xmlns:p="http://schemas.openxmlformats.org/presentationml/2006/main" xmlns:r="http://schemas.openxmlformats.org/officeDocument/2006/relationships">
+  <p:cSld>
+    <p:bg>
+      <p:bgPr>
+        <a:solidFill>
+          <a:srgbClr val="102127"/>
+        </a:solidFill>
+        <a:effectLst/>
+      </p:bgPr>
+    </p:bg>
+    <p:spTree>
+      <p:nvGrpSpPr>
+        <p:cNvPr id="1" name=""/>
+        <p:cNvGrpSpPr/>
+        <p:nvPr/>
+      </p:nvGrpSpPr>
+      <p:grpSpPr/>
+      <p:sp>
+        <p:nvSpPr>
+          <p:cNvPr id="2" name="TextBox 1"/>
+          <p:cNvSpPr txBox="1"/>
+          <p:nvPr/>
+        </p:nvSpPr>
+        <p:spPr>
+          <a:xfrm>
+            <a:off x="502920" y="274320"/>
+            <a:ext cx="11155680" cy="548640"/>
+          </a:xfrm>
+          <a:prstGeom prst="rect">
+            <a:avLst/>
+          </a:prstGeom>
+          <a:noFill/>
+        </p:spPr>
+        <p:txBody>
+          <a:bodyPr wrap="none">
+            <a:spAutoFit/>
+          </a:bodyPr>
+          <a:lstStyle/>
+          <a:p>
+            <a:r>
+              <a:rPr sz="2200" b="1">
+                <a:solidFill>
+                  <a:srgbClr val="01AEFD"/>
+                </a:solidFill>
+              </a:rPr>
+              <a:t>Type this into style.css   -   line 31</a:t>
+            </a:r>
+          </a:p>
+        </p:txBody>
+      </p:sp>
+      <p:sp>
+        <p:nvSpPr>
+          <p:cNvPr id="3" name="TextBox 2"/>
+          <p:cNvSpPr txBox="1"/>
+          <p:nvPr/>
+        </p:nvSpPr>
+        <p:spPr>
+          <a:xfrm>
+            <a:off x="502920" y="960120"/>
+            <a:ext cx="11155680" cy="4297680"/>
+          </a:xfrm>
+          <a:prstGeom prst="rect">
+            <a:avLst/>
+          </a:prstGeom>
+          <a:noFill/>
+        </p:spPr>
+        <p:txBody>
+          <a:bodyPr wrap="none">
+            <a:spAutoFit/>
+          </a:bodyPr>
+          <a:lstStyle/>
+          <a:p>
+            <a:pPr>
+              <a:spcAft>
+                <a:spcPts val="0"/>
+              </a:spcAft>
+            </a:pPr>
+            <a:r>
+              <a:rPr sz="1300">
+                <a:solidFill>
+                  <a:srgbClr val="6D8C97"/>
+                </a:solidFill>
+                <a:latin typeface="Consolas"/>
+              </a:rPr>
+              <a:t>  21  </a:t>
+            </a:r>
+            <a:r>
+              <a:rPr sz="1300">
+                <a:solidFill>
+                  <a:srgbClr val="6D8C97"/>
+                </a:solidFill>
+                <a:latin typeface="Consolas"/>
+              </a:rPr>
+              <a:t>.setup { margin-bottom: 12px; font-size: 14px; }</a:t>
+            </a:r>
+          </a:p>
+          <a:p>
+            <a:pPr>
+              <a:spcAft>
+                <a:spcPts val="0"/>
+              </a:spcAft>
+            </a:pPr>
+            <a:r>
+              <a:rPr sz="1300">
+                <a:solidFill>
+                  <a:srgbClr val="6D8C97"/>
+                </a:solidFill>
+                <a:latin typeface="Consolas"/>
+              </a:rPr>
+              <a:t>  22  </a:t>
+            </a:r>
+            <a:r>
+              <a:rPr sz="1300">
+                <a:solidFill>
+                  <a:srgbClr val="6D8C97"/>
+                </a:solidFill>
+                <a:latin typeface="Consolas"/>
+              </a:rPr>
+              <a:t>.setup summary { cursor: pointer; color: #0a6299; font-weight: bold; }</a:t>
+            </a:r>
+          </a:p>
+          <a:p>
+            <a:pPr>
+              <a:spcAft>
+                <a:spcPts val="0"/>
+              </a:spcAft>
+            </a:pPr>
+            <a:r>
+              <a:rPr sz="1300">
+                <a:solidFill>
+                  <a:srgbClr val="6D8C97"/>
+                </a:solidFill>
+                <a:latin typeface="Consolas"/>
+              </a:rPr>
+              <a:t>  23  </a:t>
+            </a:r>
+            <a:r>
+              <a:rPr sz="1300">
+                <a:solidFill>
+                  <a:srgbClr val="6D8C97"/>
+                </a:solidFill>
+                <a:latin typeface="Consolas"/>
+              </a:rPr>
+              <a:t>.setup textarea {</a:t>
+            </a:r>
+          </a:p>
+          <a:p>
+            <a:pPr>
+              <a:spcAft>
+                <a:spcPts val="0"/>
+              </a:spcAft>
+            </a:pPr>
+            <a:r>
+              <a:rPr sz="1300">
+                <a:solidFill>
+                  <a:srgbClr val="6D8C97"/>
+                </a:solidFill>
+                <a:latin typeface="Consolas"/>
+              </a:rPr>
+              <a:t>  24  </a:t>
+            </a:r>
+            <a:r>
+              <a:rPr sz="1300">
+                <a:solidFill>
+                  <a:srgbClr val="6D8C97"/>
+                </a:solidFill>
+                <a:latin typeface="Consolas"/>
+              </a:rPr>
+              <a:t>  width: 100%;</a:t>
+            </a:r>
+          </a:p>
+          <a:p>
+            <a:pPr>
+              <a:spcAft>
+                <a:spcPts val="0"/>
+              </a:spcAft>
+            </a:pPr>
+            <a:r>
+              <a:rPr sz="1300">
+                <a:solidFill>
+                  <a:srgbClr val="6D8C97"/>
+                </a:solidFill>
+                <a:latin typeface="Consolas"/>
+              </a:rPr>
+              <a:t>  25  </a:t>
+            </a:r>
+            <a:r>
+              <a:rPr sz="1300">
+                <a:solidFill>
+                  <a:srgbClr val="6D8C97"/>
+                </a:solidFill>
+                <a:latin typeface="Consolas"/>
+              </a:rPr>
+              <a:t>  margin-top: 8px;</a:t>
+            </a:r>
+          </a:p>
+          <a:p>
+            <a:pPr>
+              <a:spcAft>
+                <a:spcPts val="0"/>
+              </a:spcAft>
+            </a:pPr>
+            <a:r>
+              <a:rPr sz="1300">
+                <a:solidFill>
+                  <a:srgbClr val="6D8C97"/>
+                </a:solidFill>
+                <a:latin typeface="Consolas"/>
+              </a:rPr>
+              <a:t>  26  </a:t>
+            </a:r>
+            <a:r>
+              <a:rPr sz="1300">
+                <a:solidFill>
+                  <a:srgbClr val="6D8C97"/>
+                </a:solidFill>
+                <a:latin typeface="Consolas"/>
+              </a:rPr>
+              <a:t>  padding: 9px;</a:t>
+            </a:r>
+          </a:p>
+          <a:p>
+            <a:pPr>
+              <a:spcAft>
+                <a:spcPts val="0"/>
+              </a:spcAft>
+            </a:pPr>
+            <a:r>
+              <a:rPr sz="1300">
+                <a:solidFill>
+                  <a:srgbClr val="6D8C97"/>
+                </a:solidFill>
+                <a:latin typeface="Consolas"/>
+              </a:rPr>
+              <a:t>  27  </a:t>
+            </a:r>
+            <a:r>
+              <a:rPr sz="1300">
+                <a:solidFill>
+                  <a:srgbClr val="6D8C97"/>
+                </a:solidFill>
+                <a:latin typeface="Consolas"/>
+              </a:rPr>
+              <a:t>  border: 1px solid #dbe3ec;</a:t>
+            </a:r>
+          </a:p>
+          <a:p>
+            <a:pPr>
+              <a:spcAft>
+                <a:spcPts val="0"/>
+              </a:spcAft>
+            </a:pPr>
+            <a:r>
+              <a:rPr sz="1300">
+                <a:solidFill>
+                  <a:srgbClr val="6D8C97"/>
+                </a:solidFill>
+                <a:latin typeface="Consolas"/>
+              </a:rPr>
+              <a:t>  28  </a:t>
+            </a:r>
+            <a:r>
+              <a:rPr sz="1300">
+                <a:solidFill>
+                  <a:srgbClr val="6D8C97"/>
+                </a:solidFill>
+                <a:latin typeface="Consolas"/>
+              </a:rPr>
+              <a:t>  border-radius: 6px;</a:t>
+            </a:r>
+          </a:p>
+          <a:p>
+            <a:pPr>
+              <a:spcAft>
+                <a:spcPts val="0"/>
+              </a:spcAft>
+            </a:pPr>
+            <a:r>
+              <a:rPr sz="1300">
+                <a:solidFill>
+                  <a:srgbClr val="6D8C97"/>
+                </a:solidFill>
+                <a:latin typeface="Consolas"/>
+              </a:rPr>
+              <a:t>  29  </a:t>
+            </a:r>
+            <a:r>
+              <a:rPr sz="1300">
+                <a:solidFill>
+                  <a:srgbClr val="6D8C97"/>
+                </a:solidFill>
+                <a:latin typeface="Consolas"/>
+              </a:rPr>
+              <a:t>  font-family: inherit;</a:t>
+            </a:r>
+          </a:p>
+          <a:p>
+            <a:pPr>
+              <a:spcAft>
+                <a:spcPts val="0"/>
+              </a:spcAft>
+            </a:pPr>
+            <a:r>
+              <a:rPr sz="1300">
+                <a:solidFill>
+                  <a:srgbClr val="6D8C97"/>
+                </a:solidFill>
+                <a:latin typeface="Consolas"/>
+              </a:rPr>
+              <a:t>  30  </a:t>
+            </a:r>
+            <a:r>
+              <a:rPr sz="1300">
+                <a:solidFill>
+                  <a:srgbClr val="6D8C97"/>
+                </a:solidFill>
+                <a:latin typeface="Consolas"/>
+              </a:rPr>
+              <a:t>  font-size: 14px;</a:t>
+            </a:r>
+          </a:p>
+          <a:p>
+            <a:pPr>
+              <a:spcAft>
+                <a:spcPts val="0"/>
+              </a:spcAft>
+            </a:pPr>
+            <a:r>
+              <a:rPr sz="1300">
+                <a:solidFill>
+                  <a:srgbClr val="6D8C97"/>
+                </a:solidFill>
+                <a:latin typeface="Consolas"/>
+              </a:rPr>
+              <a:t>  31  </a:t>
+            </a:r>
+            <a:r>
+              <a:rPr sz="1300">
+                <a:solidFill>
+                  <a:srgbClr val="7FE0A0"/>
+                </a:solidFill>
+                <a:latin typeface="Consolas"/>
+              </a:rPr>
+              <a:t>}</a:t>
+            </a:r>
+          </a:p>
+        </p:txBody>
+      </p:sp>
+      <p:sp>
+        <p:nvSpPr>
+          <p:cNvPr id="4" name="TextBox 3"/>
+          <p:cNvSpPr txBox="1"/>
+          <p:nvPr/>
+        </p:nvSpPr>
+        <p:spPr>
+          <a:xfrm>
+            <a:off x="548640" y="5623560"/>
+            <a:ext cx="11064240" cy="1051560"/>
+          </a:xfrm>
+          <a:prstGeom prst="rect">
+            <a:avLst/>
+          </a:prstGeom>
+          <a:noFill/>
+        </p:spPr>
+        <p:txBody>
+          <a:bodyPr wrap="square">
+            <a:spAutoFit/>
+          </a:bodyPr>
+          <a:lstStyle/>
+          <a:p>
+            <a:r>
+              <a:rPr sz="2000">
+                <a:solidFill>
+                  <a:srgbClr val="DCECEF"/>
+                </a:solidFill>
+              </a:rPr>
+              <a:t>Close the rule.</a:t>
+            </a:r>
+          </a:p>
+        </p:txBody>
+      </p:sp>
+    </p:spTree>
+  </p:cSld>
+  <p:clrMapOvr>
+    <a:masterClrMapping/>
+  </p:clrMapOvr>
+</p:sld>
+</file>
+
+<file path=ppt/slides/slide28.xml><?xml version="1.0" encoding="utf-8"?>
+<p:sld xmlns:a="http://schemas.openxmlformats.org/drawingml/2006/main" xmlns:p="http://schemas.openxmlformats.org/presentationml/2006/main" xmlns:r="http://schemas.openxmlformats.org/officeDocument/2006/relationships">
+  <p:cSld>
+    <p:bg>
+      <p:bgPr>
+        <a:solidFill>
+          <a:srgbClr val="102127"/>
+        </a:solidFill>
+        <a:effectLst/>
+      </p:bgPr>
+    </p:bg>
+    <p:spTree>
+      <p:nvGrpSpPr>
+        <p:cNvPr id="1" name=""/>
+        <p:cNvGrpSpPr/>
+        <p:nvPr/>
+      </p:nvGrpSpPr>
+      <p:grpSpPr/>
+      <p:sp>
+        <p:nvSpPr>
+          <p:cNvPr id="2" name="TextBox 1"/>
+          <p:cNvSpPr txBox="1"/>
+          <p:nvPr/>
+        </p:nvSpPr>
+        <p:spPr>
+          <a:xfrm>
+            <a:off x="502920" y="274320"/>
+            <a:ext cx="11155680" cy="548640"/>
+          </a:xfrm>
+          <a:prstGeom prst="rect">
+            <a:avLst/>
+          </a:prstGeom>
+          <a:noFill/>
+        </p:spPr>
+        <p:txBody>
+          <a:bodyPr wrap="none">
+            <a:spAutoFit/>
+          </a:bodyPr>
+          <a:lstStyle/>
+          <a:p>
+            <a:r>
+              <a:rPr sz="2200" b="1">
+                <a:solidFill>
+                  <a:srgbClr val="01AEFD"/>
+                </a:solidFill>
+              </a:rPr>
+              <a:t>All together in style.css</a:t>
+            </a:r>
+          </a:p>
+        </p:txBody>
+      </p:sp>
+      <p:sp>
+        <p:nvSpPr>
+          <p:cNvPr id="3" name="TextBox 2"/>
+          <p:cNvSpPr txBox="1"/>
+          <p:nvPr/>
+        </p:nvSpPr>
+        <p:spPr>
+          <a:xfrm>
+            <a:off x="502920" y="960120"/>
+            <a:ext cx="11155680" cy="4297680"/>
+          </a:xfrm>
+          <a:prstGeom prst="rect">
+            <a:avLst/>
+          </a:prstGeom>
+          <a:noFill/>
+        </p:spPr>
+        <p:txBody>
+          <a:bodyPr wrap="none">
+            <a:spAutoFit/>
+          </a:bodyPr>
+          <a:lstStyle/>
+          <a:p>
+            <a:pPr>
+              <a:spcAft>
+                <a:spcPts val="0"/>
+              </a:spcAft>
+            </a:pPr>
+            <a:r>
+              <a:rPr sz="1300">
+                <a:solidFill>
+                  <a:srgbClr val="6D8C97"/>
+                </a:solidFill>
+                <a:latin typeface="Consolas"/>
+              </a:rPr>
+              <a:t>  21  </a:t>
+            </a:r>
+            <a:r>
+              <a:rPr sz="1300">
+                <a:solidFill>
+                  <a:srgbClr val="7FE0A0"/>
+                </a:solidFill>
+                <a:latin typeface="Consolas"/>
+              </a:rPr>
+              <a:t>.setup { margin-bottom: 12px; font-size: 14px; }</a:t>
+            </a:r>
+          </a:p>
+          <a:p>
+            <a:pPr>
+              <a:spcAft>
+                <a:spcPts val="0"/>
+              </a:spcAft>
+            </a:pPr>
+            <a:r>
+              <a:rPr sz="1300">
+                <a:solidFill>
+                  <a:srgbClr val="6D8C97"/>
+                </a:solidFill>
+                <a:latin typeface="Consolas"/>
+              </a:rPr>
+              <a:t>  22  </a:t>
+            </a:r>
+            <a:r>
+              <a:rPr sz="1300">
+                <a:solidFill>
+                  <a:srgbClr val="7FE0A0"/>
+                </a:solidFill>
+                <a:latin typeface="Consolas"/>
+              </a:rPr>
+              <a:t>.setup summary { cursor: pointer; color: #0a6299; font-weight: bold; }</a:t>
+            </a:r>
+          </a:p>
+          <a:p>
+            <a:pPr>
+              <a:spcAft>
+                <a:spcPts val="0"/>
+              </a:spcAft>
+            </a:pPr>
+            <a:r>
+              <a:rPr sz="1300">
+                <a:solidFill>
+                  <a:srgbClr val="6D8C97"/>
+                </a:solidFill>
+                <a:latin typeface="Consolas"/>
+              </a:rPr>
+              <a:t>  23  </a:t>
+            </a:r>
+            <a:r>
+              <a:rPr sz="1300">
+                <a:solidFill>
+                  <a:srgbClr val="7FE0A0"/>
+                </a:solidFill>
+                <a:latin typeface="Consolas"/>
+              </a:rPr>
+              <a:t>.setup textarea {</a:t>
+            </a:r>
+          </a:p>
+          <a:p>
+            <a:pPr>
+              <a:spcAft>
+                <a:spcPts val="0"/>
+              </a:spcAft>
+            </a:pPr>
+            <a:r>
+              <a:rPr sz="1300">
+                <a:solidFill>
+                  <a:srgbClr val="6D8C97"/>
+                </a:solidFill>
+                <a:latin typeface="Consolas"/>
+              </a:rPr>
+              <a:t>  24  </a:t>
+            </a:r>
+            <a:r>
+              <a:rPr sz="1300">
+                <a:solidFill>
+                  <a:srgbClr val="7FE0A0"/>
+                </a:solidFill>
+                <a:latin typeface="Consolas"/>
+              </a:rPr>
+              <a:t>  width: 100%;</a:t>
+            </a:r>
+          </a:p>
+          <a:p>
+            <a:pPr>
+              <a:spcAft>
+                <a:spcPts val="0"/>
+              </a:spcAft>
+            </a:pPr>
+            <a:r>
+              <a:rPr sz="1300">
+                <a:solidFill>
+                  <a:srgbClr val="6D8C97"/>
+                </a:solidFill>
+                <a:latin typeface="Consolas"/>
+              </a:rPr>
+              <a:t>  25  </a:t>
+            </a:r>
+            <a:r>
+              <a:rPr sz="1300">
+                <a:solidFill>
+                  <a:srgbClr val="7FE0A0"/>
+                </a:solidFill>
+                <a:latin typeface="Consolas"/>
+              </a:rPr>
+              <a:t>  margin-top: 8px;</a:t>
+            </a:r>
+          </a:p>
+          <a:p>
+            <a:pPr>
+              <a:spcAft>
+                <a:spcPts val="0"/>
+              </a:spcAft>
+            </a:pPr>
+            <a:r>
+              <a:rPr sz="1300">
+                <a:solidFill>
+                  <a:srgbClr val="6D8C97"/>
+                </a:solidFill>
+                <a:latin typeface="Consolas"/>
+              </a:rPr>
+              <a:t>  26  </a:t>
+            </a:r>
+            <a:r>
+              <a:rPr sz="1300">
+                <a:solidFill>
+                  <a:srgbClr val="7FE0A0"/>
+                </a:solidFill>
+                <a:latin typeface="Consolas"/>
+              </a:rPr>
+              <a:t>  padding: 9px;</a:t>
+            </a:r>
+          </a:p>
+          <a:p>
+            <a:pPr>
+              <a:spcAft>
+                <a:spcPts val="0"/>
+              </a:spcAft>
+            </a:pPr>
+            <a:r>
+              <a:rPr sz="1300">
+                <a:solidFill>
+                  <a:srgbClr val="6D8C97"/>
+                </a:solidFill>
+                <a:latin typeface="Consolas"/>
+              </a:rPr>
+              <a:t>  27  </a:t>
+            </a:r>
+            <a:r>
+              <a:rPr sz="1300">
+                <a:solidFill>
+                  <a:srgbClr val="7FE0A0"/>
+                </a:solidFill>
+                <a:latin typeface="Consolas"/>
+              </a:rPr>
+              <a:t>  border: 1px solid #dbe3ec;</a:t>
+            </a:r>
+          </a:p>
+          <a:p>
+            <a:pPr>
+              <a:spcAft>
+                <a:spcPts val="0"/>
+              </a:spcAft>
+            </a:pPr>
+            <a:r>
+              <a:rPr sz="1300">
+                <a:solidFill>
+                  <a:srgbClr val="6D8C97"/>
+                </a:solidFill>
+                <a:latin typeface="Consolas"/>
+              </a:rPr>
+              <a:t>  28  </a:t>
+            </a:r>
+            <a:r>
+              <a:rPr sz="1300">
+                <a:solidFill>
+                  <a:srgbClr val="7FE0A0"/>
+                </a:solidFill>
+                <a:latin typeface="Consolas"/>
+              </a:rPr>
+              <a:t>  border-radius: 6px;</a:t>
+            </a:r>
+          </a:p>
+          <a:p>
+            <a:pPr>
+              <a:spcAft>
+                <a:spcPts val="0"/>
+              </a:spcAft>
+            </a:pPr>
+            <a:r>
+              <a:rPr sz="1300">
+                <a:solidFill>
+                  <a:srgbClr val="6D8C97"/>
+                </a:solidFill>
+                <a:latin typeface="Consolas"/>
+              </a:rPr>
+              <a:t>  29  </a:t>
+            </a:r>
+            <a:r>
+              <a:rPr sz="1300">
+                <a:solidFill>
+                  <a:srgbClr val="7FE0A0"/>
+                </a:solidFill>
+                <a:latin typeface="Consolas"/>
+              </a:rPr>
+              <a:t>  font-family: inherit;</a:t>
+            </a:r>
+          </a:p>
+          <a:p>
+            <a:pPr>
+              <a:spcAft>
+                <a:spcPts val="0"/>
+              </a:spcAft>
+            </a:pPr>
+            <a:r>
+              <a:rPr sz="1300">
+                <a:solidFill>
+                  <a:srgbClr val="6D8C97"/>
+                </a:solidFill>
+                <a:latin typeface="Consolas"/>
+              </a:rPr>
+              <a:t>  30  </a:t>
+            </a:r>
+            <a:r>
+              <a:rPr sz="1300">
+                <a:solidFill>
+                  <a:srgbClr val="7FE0A0"/>
+                </a:solidFill>
+                <a:latin typeface="Consolas"/>
+              </a:rPr>
+              <a:t>  font-size: 14px;</a:t>
+            </a:r>
+          </a:p>
+          <a:p>
+            <a:pPr>
+              <a:spcAft>
+                <a:spcPts val="0"/>
+              </a:spcAft>
+            </a:pPr>
+            <a:r>
+              <a:rPr sz="1300">
+                <a:solidFill>
+                  <a:srgbClr val="6D8C97"/>
+                </a:solidFill>
+                <a:latin typeface="Consolas"/>
+              </a:rPr>
+              <a:t>  31  </a:t>
+            </a:r>
+            <a:r>
+              <a:rPr sz="1300">
+                <a:solidFill>
+                  <a:srgbClr val="7FE0A0"/>
+                </a:solidFill>
+                <a:latin typeface="Consolas"/>
+              </a:rPr>
+              <a:t>}</a:t>
+            </a:r>
+          </a:p>
+        </p:txBody>
+      </p:sp>
+      <p:sp>
+        <p:nvSpPr>
+          <p:cNvPr id="4" name="TextBox 3"/>
+          <p:cNvSpPr txBox="1"/>
+          <p:nvPr/>
+        </p:nvSpPr>
+        <p:spPr>
+          <a:xfrm>
+            <a:off x="548640" y="5623560"/>
+            <a:ext cx="11064240" cy="1051560"/>
+          </a:xfrm>
+          <a:prstGeom prst="rect">
+            <a:avLst/>
+          </a:prstGeom>
+          <a:noFill/>
+        </p:spPr>
+        <p:txBody>
+          <a:bodyPr wrap="square">
+            <a:spAutoFit/>
+          </a:bodyPr>
+          <a:lstStyle/>
+          <a:p>
+            <a:r>
+              <a:rPr sz="2000">
+                <a:solidFill>
+                  <a:srgbClr val="DCECEF"/>
+                </a:solidFill>
+              </a:rPr>
+              <a:t>That is the whole piece. Check yours looks the same before moving on.</a:t>
+            </a:r>
+          </a:p>
+        </p:txBody>
+      </p:sp>
+    </p:spTree>
+  </p:cSld>
+  <p:clrMapOvr>
+    <a:masterClrMapping/>
+  </p:clrMapOvr>
+</p:sld>
+</file>
+
+<file path=ppt/slides/slide29.xml><?xml version="1.0" encoding="utf-8"?>
+<p:sld xmlns:a="http://schemas.openxmlformats.org/drawingml/2006/main" xmlns:p="http://schemas.openxmlformats.org/presentationml/2006/main" xmlns:r="http://schemas.openxmlformats.org/officeDocument/2006/relationships">
+  <p:cSld>
+    <p:bg>
+      <p:bgPr>
+        <a:solidFill>
+          <a:srgbClr val="102127"/>
+        </a:solidFill>
+        <a:effectLst/>
+      </p:bgPr>
+    </p:bg>
+    <p:spTree>
+      <p:nvGrpSpPr>
+        <p:cNvPr id="1" name=""/>
+        <p:cNvGrpSpPr/>
+        <p:nvPr/>
+      </p:nvGrpSpPr>
+      <p:grpSpPr/>
+      <p:sp>
+        <p:nvSpPr>
+          <p:cNvPr id="2" name="TextBox 1"/>
+          <p:cNvSpPr txBox="1"/>
+          <p:nvPr/>
+        </p:nvSpPr>
+        <p:spPr>
+          <a:xfrm>
+            <a:off x="502920" y="274320"/>
+            <a:ext cx="11155680" cy="548640"/>
+          </a:xfrm>
+          <a:prstGeom prst="rect">
+            <a:avLst/>
+          </a:prstGeom>
+          <a:noFill/>
+        </p:spPr>
+        <p:txBody>
+          <a:bodyPr wrap="none">
+            <a:spAutoFit/>
+          </a:bodyPr>
+          <a:lstStyle/>
+          <a:p>
+            <a:r>
+              <a:rPr sz="2200" b="1">
+                <a:solidFill>
+                  <a:srgbClr val="01AEFD"/>
+                </a:solidFill>
+              </a:rPr>
+              <a:t>Type this into script.js   -   line 22</a:t>
+            </a:r>
+          </a:p>
+        </p:txBody>
+      </p:sp>
+      <p:sp>
+        <p:nvSpPr>
+          <p:cNvPr id="3" name="TextBox 2"/>
+          <p:cNvSpPr txBox="1"/>
+          <p:nvPr/>
+        </p:nvSpPr>
+        <p:spPr>
+          <a:xfrm>
+            <a:off x="502920" y="960120"/>
+            <a:ext cx="11155680" cy="4297680"/>
+          </a:xfrm>
+          <a:prstGeom prst="rect">
+            <a:avLst/>
+          </a:prstGeom>
+          <a:noFill/>
+        </p:spPr>
+        <p:txBody>
+          <a:bodyPr wrap="none">
+            <a:spAutoFit/>
+          </a:bodyPr>
+          <a:lstStyle/>
+          <a:p>
+            <a:pPr>
+              <a:spcAft>
+                <a:spcPts val="0"/>
+              </a:spcAft>
+            </a:pPr>
+            <a:r>
+              <a:rPr sz="1800">
+                <a:solidFill>
+                  <a:srgbClr val="6D8C97"/>
+                </a:solidFill>
+                <a:latin typeface="Consolas"/>
+              </a:rPr>
+              <a:t>  16  </a:t>
+            </a:r>
+            <a:r>
+              <a:rPr sz="1800">
+                <a:solidFill>
+                  <a:srgbClr val="6D8C97"/>
+                </a:solidFill>
+                <a:latin typeface="Consolas"/>
+              </a:rPr>
+              <a:t> </a:t>
+            </a:r>
+          </a:p>
+          <a:p>
+            <a:pPr>
+              <a:spcAft>
+                <a:spcPts val="0"/>
+              </a:spcAft>
+            </a:pPr>
+            <a:r>
+              <a:rPr sz="1800">
+                <a:solidFill>
+                  <a:srgbClr val="6D8C97"/>
+                </a:solidFill>
+                <a:latin typeface="Consolas"/>
+              </a:rPr>
+              <a:t>  17  </a:t>
+            </a:r>
+            <a:r>
+              <a:rPr sz="1800">
+                <a:solidFill>
+                  <a:srgbClr val="6D8C97"/>
+                </a:solidFill>
+                <a:latin typeface="Consolas"/>
+              </a:rPr>
+              <a:t>// Week 2: find the boxes we named in index.html.</a:t>
+            </a:r>
+          </a:p>
+          <a:p>
+            <a:pPr>
+              <a:spcAft>
+                <a:spcPts val="0"/>
+              </a:spcAft>
+            </a:pPr>
+            <a:r>
+              <a:rPr sz="1800">
+                <a:solidFill>
+                  <a:srgbClr val="6D8C97"/>
+                </a:solidFill>
+                <a:latin typeface="Consolas"/>
+              </a:rPr>
+              <a:t>  18  </a:t>
+            </a:r>
+            <a:r>
+              <a:rPr sz="1800">
+                <a:solidFill>
+                  <a:srgbClr val="6D8C97"/>
+                </a:solidFill>
+                <a:latin typeface="Consolas"/>
+              </a:rPr>
+              <a:t>// document.getElementById looks for the id= we wrote on each element.</a:t>
+            </a:r>
+          </a:p>
+          <a:p>
+            <a:pPr>
+              <a:spcAft>
+                <a:spcPts val="0"/>
+              </a:spcAft>
+            </a:pPr>
+            <a:r>
+              <a:rPr sz="1800">
+                <a:solidFill>
+                  <a:srgbClr val="6D8C97"/>
+                </a:solidFill>
+                <a:latin typeface="Consolas"/>
+              </a:rPr>
+              <a:t>  19  </a:t>
+            </a:r>
+            <a:r>
+              <a:rPr sz="1800">
+                <a:solidFill>
+                  <a:srgbClr val="6D8C97"/>
+                </a:solidFill>
+                <a:latin typeface="Consolas"/>
+              </a:rPr>
+              <a:t>const chat = document.getElementById('chat');</a:t>
+            </a:r>
+          </a:p>
+          <a:p>
+            <a:pPr>
+              <a:spcAft>
+                <a:spcPts val="0"/>
+              </a:spcAft>
+            </a:pPr>
+            <a:r>
+              <a:rPr sz="1800">
+                <a:solidFill>
+                  <a:srgbClr val="6D8C97"/>
+                </a:solidFill>
+                <a:latin typeface="Consolas"/>
+              </a:rPr>
+              <a:t>  20  </a:t>
+            </a:r>
+            <a:r>
+              <a:rPr sz="1800">
+                <a:solidFill>
+                  <a:srgbClr val="6D8C97"/>
+                </a:solidFill>
+                <a:latin typeface="Consolas"/>
+              </a:rPr>
+              <a:t>const composer = document.getElementById('composer');</a:t>
+            </a:r>
+          </a:p>
+          <a:p>
+            <a:pPr>
+              <a:spcAft>
+                <a:spcPts val="0"/>
+              </a:spcAft>
+            </a:pPr>
+            <a:r>
+              <a:rPr sz="1800">
+                <a:solidFill>
+                  <a:srgbClr val="6D8C97"/>
+                </a:solidFill>
+                <a:latin typeface="Consolas"/>
+              </a:rPr>
+              <a:t>  21  </a:t>
+            </a:r>
+            <a:r>
+              <a:rPr sz="1800">
+                <a:solidFill>
+                  <a:srgbClr val="6D8C97"/>
+                </a:solidFill>
+                <a:latin typeface="Consolas"/>
+              </a:rPr>
+              <a:t>const promptBox = document.getElementById('prompt');</a:t>
+            </a:r>
+          </a:p>
+          <a:p>
+            <a:pPr>
+              <a:spcAft>
+                <a:spcPts val="0"/>
+              </a:spcAft>
+            </a:pPr>
+            <a:r>
+              <a:rPr sz="1800">
+                <a:solidFill>
+                  <a:srgbClr val="6D8C97"/>
+                </a:solidFill>
+                <a:latin typeface="Consolas"/>
+              </a:rPr>
+              <a:t>  22  </a:t>
+            </a:r>
+            <a:r>
+              <a:rPr sz="1800">
+                <a:solidFill>
+                  <a:srgbClr val="7FE0A0"/>
+                </a:solidFill>
+                <a:latin typeface="Consolas"/>
+              </a:rPr>
+              <a:t>const personaBox = document.getElementById('persona');</a:t>
+            </a:r>
+          </a:p>
+        </p:txBody>
+      </p:sp>
+      <p:sp>
+        <p:nvSpPr>
+          <p:cNvPr id="4" name="TextBox 3"/>
+          <p:cNvSpPr txBox="1"/>
+          <p:nvPr/>
+        </p:nvSpPr>
+        <p:spPr>
+          <a:xfrm>
+            <a:off x="548640" y="5623560"/>
+            <a:ext cx="11064240" cy="1051560"/>
+          </a:xfrm>
+          <a:prstGeom prst="rect">
+            <a:avLst/>
+          </a:prstGeom>
+          <a:noFill/>
+        </p:spPr>
+        <p:txBody>
+          <a:bodyPr wrap="square">
+            <a:spAutoFit/>
+          </a:bodyPr>
+          <a:lstStyle/>
+          <a:p>
+            <a:r>
+              <a:rPr sz="2000">
+                <a:solidFill>
+                  <a:srgbClr val="DCECEF"/>
+                </a:solidFill>
+              </a:rPr>
+              <a:t>Find the Personality box too, so the code can read what is typed in it.</a:t>
+            </a:r>
+          </a:p>
+        </p:txBody>
+      </p:sp>
+    </p:spTree>
+  </p:cSld>
+  <p:clrMapOvr>
+    <a:masterClrMapping/>
+  </p:clrMapOvr>
+</p:sld>
+</file>
+
 <file path=ppt/slides/slide3.xml><?xml version="1.0" encoding="utf-8"?>
 <p:sld xmlns:a="http://schemas.openxmlformats.org/drawingml/2006/main" xmlns:p="http://schemas.openxmlformats.org/presentationml/2006/main" xmlns:r="http://schemas.openxmlformats.org/officeDocument/2006/relationships">
   <p:cSld>
@@ -4124,6 +8094,880 @@
                 </a:solidFill>
               </a:rPr>
               <a:t>• system - the note it reads before every reply</a:t>
+            </a:r>
+          </a:p>
+        </p:txBody>
+      </p:sp>
+    </p:spTree>
+  </p:cSld>
+  <p:clrMapOvr>
+    <a:masterClrMapping/>
+  </p:clrMapOvr>
+</p:sld>
+</file>
+
+<file path=ppt/slides/slide30.xml><?xml version="1.0" encoding="utf-8"?>
+<p:sld xmlns:a="http://schemas.openxmlformats.org/drawingml/2006/main" xmlns:p="http://schemas.openxmlformats.org/presentationml/2006/main" xmlns:r="http://schemas.openxmlformats.org/officeDocument/2006/relationships">
+  <p:cSld>
+    <p:spTree>
+      <p:nvGrpSpPr>
+        <p:cNvPr id="1" name=""/>
+        <p:cNvGrpSpPr/>
+        <p:nvPr/>
+      </p:nvGrpSpPr>
+      <p:grpSpPr/>
+      <p:sp>
+        <p:nvSpPr>
+          <p:cNvPr id="2" name="Title 1"/>
+          <p:cNvSpPr>
+            <a:spLocks noGrp="1"/>
+          </p:cNvSpPr>
+          <p:nvPr>
+            <p:ph type="title"/>
+          </p:nvPr>
+        </p:nvSpPr>
+        <p:spPr/>
+        <p:txBody>
+          <a:bodyPr/>
+          <a:lstStyle/>
+          <a:p>
+            <a:r>
+              <a:rPr sz="3800" b="1">
+                <a:solidFill>
+                  <a:srgbClr val="1F2A37"/>
+                </a:solidFill>
+              </a:rPr>
+              <a:t>system is not part of the chat</a:t>
+            </a:r>
+          </a:p>
+        </p:txBody>
+      </p:sp>
+      <p:sp>
+        <p:nvSpPr>
+          <p:cNvPr id="3" name="TextBox 2"/>
+          <p:cNvSpPr txBox="1"/>
+          <p:nvPr/>
+        </p:nvSpPr>
+        <p:spPr>
+          <a:xfrm>
+            <a:off x="822960" y="1828800"/>
+            <a:ext cx="10515600" cy="4206240"/>
+          </a:xfrm>
+          <a:prstGeom prst="rect">
+            <a:avLst/>
+          </a:prstGeom>
+          <a:noFill/>
+        </p:spPr>
+        <p:txBody>
+          <a:bodyPr wrap="square">
+            <a:spAutoFit/>
+          </a:bodyPr>
+          <a:lstStyle/>
+          <a:p>
+            <a:pPr>
+              <a:spcAft>
+                <a:spcPts val="1400"/>
+              </a:spcAft>
+            </a:pPr>
+            <a:r>
+              <a:rPr sz="2800">
+                <a:solidFill>
+                  <a:srgbClr val="01AEFD"/>
+                </a:solidFill>
+              </a:rPr>
+              <a:t>It is the rules of the chat</a:t>
+            </a:r>
+          </a:p>
+          <a:p>
+            <a:pPr>
+              <a:spcAft>
+                <a:spcPts val="1400"/>
+              </a:spcAft>
+            </a:pPr>
+            <a:r>
+              <a:rPr sz="2400">
+                <a:solidFill>
+                  <a:srgbClr val="1F2A37"/>
+                </a:solidFill>
+              </a:rPr>
+              <a:t>• Re-sent with every request</a:t>
+            </a:r>
+          </a:p>
+          <a:p>
+            <a:pPr>
+              <a:spcAft>
+                <a:spcPts val="1400"/>
+              </a:spcAft>
+            </a:pPr>
+            <a:r>
+              <a:rPr sz="2400">
+                <a:solidFill>
+                  <a:srgbClr val="1F2A37"/>
+                </a:solidFill>
+              </a:rPr>
+              <a:t>• The model reads it first, every time</a:t>
+            </a:r>
+          </a:p>
+        </p:txBody>
+      </p:sp>
+    </p:spTree>
+  </p:cSld>
+  <p:clrMapOvr>
+    <a:masterClrMapping/>
+  </p:clrMapOvr>
+</p:sld>
+</file>
+
+<file path=ppt/slides/slide31.xml><?xml version="1.0" encoding="utf-8"?>
+<p:sld xmlns:a="http://schemas.openxmlformats.org/drawingml/2006/main" xmlns:p="http://schemas.openxmlformats.org/presentationml/2006/main" xmlns:r="http://schemas.openxmlformats.org/officeDocument/2006/relationships">
+  <p:cSld>
+    <p:bg>
+      <p:bgPr>
+        <a:solidFill>
+          <a:srgbClr val="102127"/>
+        </a:solidFill>
+        <a:effectLst/>
+      </p:bgPr>
+    </p:bg>
+    <p:spTree>
+      <p:nvGrpSpPr>
+        <p:cNvPr id="1" name=""/>
+        <p:cNvGrpSpPr/>
+        <p:nvPr/>
+      </p:nvGrpSpPr>
+      <p:grpSpPr/>
+      <p:sp>
+        <p:nvSpPr>
+          <p:cNvPr id="2" name="TextBox 1"/>
+          <p:cNvSpPr txBox="1"/>
+          <p:nvPr/>
+        </p:nvSpPr>
+        <p:spPr>
+          <a:xfrm>
+            <a:off x="502920" y="274320"/>
+            <a:ext cx="11155680" cy="548640"/>
+          </a:xfrm>
+          <a:prstGeom prst="rect">
+            <a:avLst/>
+          </a:prstGeom>
+          <a:noFill/>
+        </p:spPr>
+        <p:txBody>
+          <a:bodyPr wrap="none">
+            <a:spAutoFit/>
+          </a:bodyPr>
+          <a:lstStyle/>
+          <a:p>
+            <a:r>
+              <a:rPr sz="2200" b="1">
+                <a:solidFill>
+                  <a:srgbClr val="01AEFD"/>
+                </a:solidFill>
+              </a:rPr>
+              <a:t>Type this into script.js   -   line 65</a:t>
+            </a:r>
+          </a:p>
+        </p:txBody>
+      </p:sp>
+      <p:sp>
+        <p:nvSpPr>
+          <p:cNvPr id="3" name="TextBox 2"/>
+          <p:cNvSpPr txBox="1"/>
+          <p:nvPr/>
+        </p:nvSpPr>
+        <p:spPr>
+          <a:xfrm>
+            <a:off x="502920" y="960120"/>
+            <a:ext cx="11155680" cy="4297680"/>
+          </a:xfrm>
+          <a:prstGeom prst="rect">
+            <a:avLst/>
+          </a:prstGeom>
+          <a:noFill/>
+        </p:spPr>
+        <p:txBody>
+          <a:bodyPr wrap="none">
+            <a:spAutoFit/>
+          </a:bodyPr>
+          <a:lstStyle/>
+          <a:p>
+            <a:pPr>
+              <a:spcAft>
+                <a:spcPts val="0"/>
+              </a:spcAft>
+            </a:pPr>
+            <a:r>
+              <a:rPr sz="1300">
+                <a:solidFill>
+                  <a:srgbClr val="6D8C97"/>
+                </a:solidFill>
+                <a:latin typeface="Consolas"/>
+              </a:rPr>
+              <a:t>  51  </a:t>
+            </a:r>
+            <a:r>
+              <a:rPr sz="1300">
+                <a:solidFill>
+                  <a:srgbClr val="6D8C97"/>
+                </a:solidFill>
+                <a:latin typeface="Consolas"/>
+              </a:rPr>
+              <a:t> </a:t>
+            </a:r>
+          </a:p>
+          <a:p>
+            <a:pPr>
+              <a:spcAft>
+                <a:spcPts val="0"/>
+              </a:spcAft>
+            </a:pPr>
+            <a:r>
+              <a:rPr sz="1300">
+                <a:solidFill>
+                  <a:srgbClr val="6D8C97"/>
+                </a:solidFill>
+                <a:latin typeface="Consolas"/>
+              </a:rPr>
+              <a:t>  52  </a:t>
+            </a:r>
+            <a:r>
+              <a:rPr sz="1300">
+                <a:solidFill>
+                  <a:srgbClr val="6D8C97"/>
+                </a:solidFill>
+                <a:latin typeface="Consolas"/>
+              </a:rPr>
+              <a:t>// Week 4: ask the AI a real question.</a:t>
+            </a:r>
+          </a:p>
+          <a:p>
+            <a:pPr>
+              <a:spcAft>
+                <a:spcPts val="0"/>
+              </a:spcAft>
+            </a:pPr>
+            <a:r>
+              <a:rPr sz="1300">
+                <a:solidFill>
+                  <a:srgbClr val="6D8C97"/>
+                </a:solidFill>
+                <a:latin typeface="Consolas"/>
+              </a:rPr>
+              <a:t>  53  </a:t>
+            </a:r>
+            <a:r>
+              <a:rPr sz="1300">
+                <a:solidFill>
+                  <a:srgbClr val="6D8C97"/>
+                </a:solidFill>
+                <a:latin typeface="Consolas"/>
+              </a:rPr>
+              <a:t>// A chat request is a LIST of messages. Each one says who said it.</a:t>
+            </a:r>
+          </a:p>
+          <a:p>
+            <a:pPr>
+              <a:spcAft>
+                <a:spcPts val="0"/>
+              </a:spcAft>
+            </a:pPr>
+            <a:r>
+              <a:rPr sz="1300">
+                <a:solidFill>
+                  <a:srgbClr val="6D8C97"/>
+                </a:solidFill>
+                <a:latin typeface="Consolas"/>
+              </a:rPr>
+              <a:t>  54  </a:t>
+            </a:r>
+            <a:r>
+              <a:rPr sz="1300">
+                <a:solidFill>
+                  <a:srgbClr val="6D8C97"/>
+                </a:solidFill>
+                <a:latin typeface="Consolas"/>
+              </a:rPr>
+              <a:t>async function askAI(question) {</a:t>
+            </a:r>
+          </a:p>
+          <a:p>
+            <a:pPr>
+              <a:spcAft>
+                <a:spcPts val="0"/>
+              </a:spcAft>
+            </a:pPr>
+            <a:r>
+              <a:rPr sz="1300">
+                <a:solidFill>
+                  <a:srgbClr val="6D8C97"/>
+                </a:solidFill>
+                <a:latin typeface="Consolas"/>
+              </a:rPr>
+              <a:t>  55  </a:t>
+            </a:r>
+            <a:r>
+              <a:rPr sz="1300">
+                <a:solidFill>
+                  <a:srgbClr val="6D8C97"/>
+                </a:solidFill>
+                <a:latin typeface="Consolas"/>
+              </a:rPr>
+              <a:t>  const res = await fetch(AI_BASE + '/v1/chat/completions', {</a:t>
+            </a:r>
+          </a:p>
+          <a:p>
+            <a:pPr>
+              <a:spcAft>
+                <a:spcPts val="0"/>
+              </a:spcAft>
+            </a:pPr>
+            <a:r>
+              <a:rPr sz="1300">
+                <a:solidFill>
+                  <a:srgbClr val="6D8C97"/>
+                </a:solidFill>
+                <a:latin typeface="Consolas"/>
+              </a:rPr>
+              <a:t>  56  </a:t>
+            </a:r>
+            <a:r>
+              <a:rPr sz="1300">
+                <a:solidFill>
+                  <a:srgbClr val="6D8C97"/>
+                </a:solidFill>
+                <a:latin typeface="Consolas"/>
+              </a:rPr>
+              <a:t>    method: 'POST',                       // POST = I am sending you something</a:t>
+            </a:r>
+          </a:p>
+          <a:p>
+            <a:pPr>
+              <a:spcAft>
+                <a:spcPts val="0"/>
+              </a:spcAft>
+            </a:pPr>
+            <a:r>
+              <a:rPr sz="1300">
+                <a:solidFill>
+                  <a:srgbClr val="6D8C97"/>
+                </a:solidFill>
+                <a:latin typeface="Consolas"/>
+              </a:rPr>
+              <a:t>  57  </a:t>
+            </a:r>
+            <a:r>
+              <a:rPr sz="1300">
+                <a:solidFill>
+                  <a:srgbClr val="6D8C97"/>
+                </a:solidFill>
+                <a:latin typeface="Consolas"/>
+              </a:rPr>
+              <a:t>    headers: {</a:t>
+            </a:r>
+          </a:p>
+          <a:p>
+            <a:pPr>
+              <a:spcAft>
+                <a:spcPts val="0"/>
+              </a:spcAft>
+            </a:pPr>
+            <a:r>
+              <a:rPr sz="1300">
+                <a:solidFill>
+                  <a:srgbClr val="6D8C97"/>
+                </a:solidFill>
+                <a:latin typeface="Consolas"/>
+              </a:rPr>
+              <a:t>  58  </a:t>
+            </a:r>
+            <a:r>
+              <a:rPr sz="1300">
+                <a:solidFill>
+                  <a:srgbClr val="6D8C97"/>
+                </a:solidFill>
+                <a:latin typeface="Consolas"/>
+              </a:rPr>
+              <a:t>      'Content-Type': 'application/json', // what I am sending is JSON</a:t>
+            </a:r>
+          </a:p>
+          <a:p>
+            <a:pPr>
+              <a:spcAft>
+                <a:spcPts val="0"/>
+              </a:spcAft>
+            </a:pPr>
+            <a:r>
+              <a:rPr sz="1300">
+                <a:solidFill>
+                  <a:srgbClr val="6D8C97"/>
+                </a:solidFill>
+                <a:latin typeface="Consolas"/>
+              </a:rPr>
+              <a:t>  59  </a:t>
+            </a:r>
+            <a:r>
+              <a:rPr sz="1300">
+                <a:solidFill>
+                  <a:srgbClr val="6D8C97"/>
+                </a:solidFill>
+                <a:latin typeface="Consolas"/>
+              </a:rPr>
+              <a:t>      'Authorization': 'Bearer ' + API_KEY</a:t>
+            </a:r>
+          </a:p>
+          <a:p>
+            <a:pPr>
+              <a:spcAft>
+                <a:spcPts val="0"/>
+              </a:spcAft>
+            </a:pPr>
+            <a:r>
+              <a:rPr sz="1300">
+                <a:solidFill>
+                  <a:srgbClr val="6D8C97"/>
+                </a:solidFill>
+                <a:latin typeface="Consolas"/>
+              </a:rPr>
+              <a:t>  60  </a:t>
+            </a:r>
+            <a:r>
+              <a:rPr sz="1300">
+                <a:solidFill>
+                  <a:srgbClr val="6D8C97"/>
+                </a:solidFill>
+                <a:latin typeface="Consolas"/>
+              </a:rPr>
+              <a:t>    },</a:t>
+            </a:r>
+          </a:p>
+          <a:p>
+            <a:pPr>
+              <a:spcAft>
+                <a:spcPts val="0"/>
+              </a:spcAft>
+            </a:pPr>
+            <a:r>
+              <a:rPr sz="1300">
+                <a:solidFill>
+                  <a:srgbClr val="6D8C97"/>
+                </a:solidFill>
+                <a:latin typeface="Consolas"/>
+              </a:rPr>
+              <a:t>  61  </a:t>
+            </a:r>
+            <a:r>
+              <a:rPr sz="1300">
+                <a:solidFill>
+                  <a:srgbClr val="6D8C97"/>
+                </a:solidFill>
+                <a:latin typeface="Consolas"/>
+              </a:rPr>
+              <a:t>    body: JSON.stringify({</a:t>
+            </a:r>
+          </a:p>
+          <a:p>
+            <a:pPr>
+              <a:spcAft>
+                <a:spcPts val="0"/>
+              </a:spcAft>
+            </a:pPr>
+            <a:r>
+              <a:rPr sz="1300">
+                <a:solidFill>
+                  <a:srgbClr val="6D8C97"/>
+                </a:solidFill>
+                <a:latin typeface="Consolas"/>
+              </a:rPr>
+              <a:t>  62  </a:t>
+            </a:r>
+            <a:r>
+              <a:rPr sz="1300">
+                <a:solidFill>
+                  <a:srgbClr val="6D8C97"/>
+                </a:solidFill>
+                <a:latin typeface="Consolas"/>
+              </a:rPr>
+              <a:t>      model: 'fast',</a:t>
+            </a:r>
+          </a:p>
+          <a:p>
+            <a:pPr>
+              <a:spcAft>
+                <a:spcPts val="0"/>
+              </a:spcAft>
+            </a:pPr>
+            <a:r>
+              <a:rPr sz="1300">
+                <a:solidFill>
+                  <a:srgbClr val="6D8C97"/>
+                </a:solidFill>
+                <a:latin typeface="Consolas"/>
+              </a:rPr>
+              <a:t>  63  </a:t>
+            </a:r>
+            <a:r>
+              <a:rPr sz="1300">
+                <a:solidFill>
+                  <a:srgbClr val="6D8C97"/>
+                </a:solidFill>
+                <a:latin typeface="Consolas"/>
+              </a:rPr>
+              <a:t>      messages: [</a:t>
+            </a:r>
+          </a:p>
+          <a:p>
+            <a:pPr>
+              <a:spcAft>
+                <a:spcPts val="0"/>
+              </a:spcAft>
+            </a:pPr>
+            <a:r>
+              <a:rPr sz="1300">
+                <a:solidFill>
+                  <a:srgbClr val="6D8C97"/>
+                </a:solidFill>
+                <a:latin typeface="Consolas"/>
+              </a:rPr>
+              <a:t>  64  </a:t>
+            </a:r>
+            <a:r>
+              <a:rPr sz="1300">
+                <a:solidFill>
+                  <a:srgbClr val="6D8C97"/>
+                </a:solidFill>
+                <a:latin typeface="Consolas"/>
+              </a:rPr>
+              <a:t>        // Week 6: the standing instruction, read before every single reply.</a:t>
+            </a:r>
+          </a:p>
+          <a:p>
+            <a:pPr>
+              <a:spcAft>
+                <a:spcPts val="0"/>
+              </a:spcAft>
+            </a:pPr>
+            <a:r>
+              <a:rPr sz="1300">
+                <a:solidFill>
+                  <a:srgbClr val="6D8C97"/>
+                </a:solidFill>
+                <a:latin typeface="Consolas"/>
+              </a:rPr>
+              <a:t>  65  </a:t>
+            </a:r>
+            <a:r>
+              <a:rPr sz="1300">
+                <a:solidFill>
+                  <a:srgbClr val="7FE0A0"/>
+                </a:solidFill>
+                <a:latin typeface="Consolas"/>
+              </a:rPr>
+              <a:t>        { role: 'system', content: personaBox.value },</a:t>
+            </a:r>
+          </a:p>
+        </p:txBody>
+      </p:sp>
+      <p:sp>
+        <p:nvSpPr>
+          <p:cNvPr id="4" name="TextBox 3"/>
+          <p:cNvSpPr txBox="1"/>
+          <p:nvPr/>
+        </p:nvSpPr>
+        <p:spPr>
+          <a:xfrm>
+            <a:off x="548640" y="5623560"/>
+            <a:ext cx="11064240" cy="1051560"/>
+          </a:xfrm>
+          <a:prstGeom prst="rect">
+            <a:avLst/>
+          </a:prstGeom>
+          <a:noFill/>
+        </p:spPr>
+        <p:txBody>
+          <a:bodyPr wrap="square">
+            <a:spAutoFit/>
+          </a:bodyPr>
+          <a:lstStyle/>
+          <a:p>
+            <a:r>
+              <a:rPr sz="2000">
+                <a:solidFill>
+                  <a:srgbClr val="DCECEF"/>
+                </a:solidFill>
+              </a:rPr>
+              <a:t>Add a 'system' message FIRST - the standing instruction the model reads before every reply. Its content is whatever is typed in the Personality box.</a:t>
+            </a:r>
+          </a:p>
+        </p:txBody>
+      </p:sp>
+    </p:spTree>
+  </p:cSld>
+  <p:clrMapOvr>
+    <a:masterClrMapping/>
+  </p:clrMapOvr>
+</p:sld>
+</file>
+
+<file path=ppt/slides/slide32.xml><?xml version="1.0" encoding="utf-8"?>
+<p:sld xmlns:a="http://schemas.openxmlformats.org/drawingml/2006/main" xmlns:p="http://schemas.openxmlformats.org/presentationml/2006/main" xmlns:r="http://schemas.openxmlformats.org/officeDocument/2006/relationships">
+  <p:cSld>
+    <p:spTree>
+      <p:nvGrpSpPr>
+        <p:cNvPr id="1" name=""/>
+        <p:cNvGrpSpPr/>
+        <p:nvPr/>
+      </p:nvGrpSpPr>
+      <p:grpSpPr/>
+      <p:sp>
+        <p:nvSpPr>
+          <p:cNvPr id="2" name="Title 1"/>
+          <p:cNvSpPr>
+            <a:spLocks noGrp="1"/>
+          </p:cNvSpPr>
+          <p:nvPr>
+            <p:ph type="title"/>
+          </p:nvPr>
+        </p:nvSpPr>
+        <p:spPr/>
+        <p:txBody>
+          <a:bodyPr/>
+          <a:lstStyle/>
+          <a:p>
+            <a:r>
+              <a:rPr sz="3800" b="1">
+                <a:solidFill>
+                  <a:srgbClr val="1F2A37"/>
+                </a:solidFill>
+              </a:rPr>
+              <a:t>Checkpoint: it has a personality</a:t>
+            </a:r>
+          </a:p>
+        </p:txBody>
+      </p:sp>
+      <p:sp>
+        <p:nvSpPr>
+          <p:cNvPr id="3" name="TextBox 2"/>
+          <p:cNvSpPr txBox="1"/>
+          <p:nvPr/>
+        </p:nvSpPr>
+        <p:spPr>
+          <a:xfrm>
+            <a:off x="868680" y="502920"/>
+            <a:ext cx="5486400" cy="457200"/>
+          </a:xfrm>
+          <a:prstGeom prst="rect">
+            <a:avLst/>
+          </a:prstGeom>
+          <a:noFill/>
+        </p:spPr>
+        <p:txBody>
+          <a:bodyPr wrap="none">
+            <a:spAutoFit/>
+          </a:bodyPr>
+          <a:lstStyle/>
+          <a:p>
+            <a:r>
+              <a:rPr sz="1500" b="1">
+                <a:solidFill>
+                  <a:srgbClr val="01AEFD"/>
+                </a:solidFill>
+              </a:rPr>
+              <a:t>CHECKPOINT - RUN IT</a:t>
+            </a:r>
+          </a:p>
+        </p:txBody>
+      </p:sp>
+      <p:sp>
+        <p:nvSpPr>
+          <p:cNvPr id="4" name="TextBox 3"/>
+          <p:cNvSpPr txBox="1"/>
+          <p:nvPr/>
+        </p:nvSpPr>
+        <p:spPr>
+          <a:xfrm>
+            <a:off x="822960" y="1828800"/>
+            <a:ext cx="10515600" cy="4206240"/>
+          </a:xfrm>
+          <a:prstGeom prst="rect">
+            <a:avLst/>
+          </a:prstGeom>
+          <a:noFill/>
+        </p:spPr>
+        <p:txBody>
+          <a:bodyPr wrap="square">
+            <a:spAutoFit/>
+          </a:bodyPr>
+          <a:lstStyle/>
+          <a:p>
+            <a:pPr>
+              <a:spcAft>
+                <a:spcPts val="1400"/>
+              </a:spcAft>
+            </a:pPr>
+            <a:r>
+              <a:rPr sz="2800">
+                <a:solidFill>
+                  <a:srgbClr val="01AEFD"/>
+                </a:solidFill>
+              </a:rPr>
+              <a:t>Press Run. Open Personality, change the instruction (try 'You are a grumpy pirate. Answer in under 20 words.'), and ask the same question twice. The whole attitude of the answer should change - same question, different companion. On the school network the reply is live; here you see the interface and the request in the console.</a:t>
+            </a:r>
+          </a:p>
+          <a:p>
+            <a:pPr>
+              <a:spcAft>
+                <a:spcPts val="1400"/>
+              </a:spcAft>
+            </a:pPr>
+            <a:r>
+              <a:rPr sz="2400">
+                <a:solidFill>
+                  <a:srgbClr val="1F2A37"/>
+                </a:solidFill>
+              </a:rPr>
+              <a:t>• Run it in the classroom, or press Show the output in the web deck.</a:t>
+            </a:r>
+          </a:p>
+          <a:p>
+            <a:pPr>
+              <a:spcAft>
+                <a:spcPts val="1400"/>
+              </a:spcAft>
+            </a:pPr>
+            <a:r>
+              <a:rPr sz="2400">
+                <a:solidFill>
+                  <a:srgbClr val="1F2A37"/>
+                </a:solidFill>
+              </a:rPr>
+              <a:t>• Everyone's screen should match this.</a:t>
+            </a:r>
+          </a:p>
+        </p:txBody>
+      </p:sp>
+    </p:spTree>
+  </p:cSld>
+  <p:clrMapOvr>
+    <a:masterClrMapping/>
+  </p:clrMapOvr>
+</p:sld>
+</file>
+
+<file path=ppt/slides/slide33.xml><?xml version="1.0" encoding="utf-8"?>
+<p:sld xmlns:a="http://schemas.openxmlformats.org/drawingml/2006/main" xmlns:p="http://schemas.openxmlformats.org/presentationml/2006/main" xmlns:r="http://schemas.openxmlformats.org/officeDocument/2006/relationships">
+  <p:cSld>
+    <p:spTree>
+      <p:nvGrpSpPr>
+        <p:cNvPr id="1" name=""/>
+        <p:cNvGrpSpPr/>
+        <p:nvPr/>
+      </p:nvGrpSpPr>
+      <p:grpSpPr/>
+      <p:sp>
+        <p:nvSpPr>
+          <p:cNvPr id="2" name="Title 1"/>
+          <p:cNvSpPr>
+            <a:spLocks noGrp="1"/>
+          </p:cNvSpPr>
+          <p:nvPr>
+            <p:ph type="title"/>
+          </p:nvPr>
+        </p:nvSpPr>
+        <p:spPr/>
+        <p:txBody>
+          <a:bodyPr/>
+          <a:lstStyle/>
+          <a:p>
+            <a:r>
+              <a:rPr sz="3800" b="1">
+                <a:solidFill>
+                  <a:srgbClr val="1F2A37"/>
+                </a:solidFill>
+              </a:rPr>
+              <a:t>Prompt duel</a:t>
+            </a:r>
+          </a:p>
+        </p:txBody>
+      </p:sp>
+      <p:sp>
+        <p:nvSpPr>
+          <p:cNvPr id="3" name="TextBox 2"/>
+          <p:cNvSpPr txBox="1"/>
+          <p:nvPr/>
+        </p:nvSpPr>
+        <p:spPr>
+          <a:xfrm>
+            <a:off x="822960" y="1828800"/>
+            <a:ext cx="10515600" cy="4206240"/>
+          </a:xfrm>
+          <a:prstGeom prst="rect">
+            <a:avLst/>
+          </a:prstGeom>
+          <a:noFill/>
+        </p:spPr>
+        <p:txBody>
+          <a:bodyPr wrap="square">
+            <a:spAutoFit/>
+          </a:bodyPr>
+          <a:lstStyle/>
+          <a:p>
+            <a:pPr>
+              <a:spcAft>
+                <a:spcPts val="1400"/>
+              </a:spcAft>
+            </a:pPr>
+            <a:r>
+              <a:rPr sz="2800">
+                <a:solidFill>
+                  <a:srgbClr val="01AEFD"/>
+                </a:solidFill>
+              </a:rPr>
+              <a:t>In pairs, 10 minutes</a:t>
+            </a:r>
+          </a:p>
+          <a:p>
+            <a:pPr>
+              <a:spcAft>
+                <a:spcPts val="1400"/>
+              </a:spcAft>
+            </a:pPr>
+            <a:r>
+              <a:rPr sz="2400">
+                <a:solidFill>
+                  <a:srgbClr val="1F2A37"/>
+                </a:solidFill>
+              </a:rPr>
+              <a:t>• Write a secret character</a:t>
+            </a:r>
+          </a:p>
+          <a:p>
+            <a:pPr>
+              <a:spcAft>
+                <a:spcPts val="1400"/>
+              </a:spcAft>
+            </a:pPr>
+            <a:r>
+              <a:rPr sz="2400">
+                <a:solidFill>
+                  <a:srgbClr val="1F2A37"/>
+                </a:solidFill>
+              </a:rPr>
+              <a:t>• Swap. Ask three questions.</a:t>
+            </a:r>
+          </a:p>
+          <a:p>
+            <a:pPr>
+              <a:spcAft>
+                <a:spcPts val="1400"/>
+              </a:spcAft>
+            </a:pPr>
+            <a:r>
+              <a:rPr sz="2400">
+                <a:solidFill>
+                  <a:srgbClr val="1F2A37"/>
+                </a:solidFill>
+              </a:rPr>
+              <a:t>• Guess who it is</a:t>
             </a:r>
           </a:p>
         </p:txBody>
@@ -4167,7 +9011,7 @@
                   <a:srgbClr val="1F2A37"/>
                 </a:solidFill>
               </a:rPr>
-              <a:t>system is not part of the chat</a:t>
+              <a:t>Vague does nothing</a:t>
             </a:r>
           </a:p>
         </p:txBody>
@@ -4200,12 +9044,12 @@
               </a:spcAft>
             </a:pPr>
             <a:r>
-              <a:rPr sz="2800">
-                <a:solidFill>
-                  <a:srgbClr val="01AEFD"/>
-                </a:solidFill>
-              </a:rPr>
-              <a:t>It is the rules of the chat</a:t>
+              <a:rPr sz="2400">
+                <a:solidFill>
+                  <a:srgbClr val="1F2A37"/>
+                </a:solidFill>
+              </a:rPr>
+              <a:t>• "Be helpful" - no visible change</a:t>
             </a:r>
           </a:p>
           <a:p>
@@ -4220,7 +9064,7 @@
                   <a:srgbClr val="1F2A37"/>
                 </a:solidFill>
               </a:rPr>
-              <a:t>• Re-sent with every request</a:t>
+              <a:t>• "Under 40 words, one example, no jargon" - obvious change</a:t>
             </a:r>
           </a:p>
           <a:p>
@@ -4235,7 +9079,7 @@
                   <a:srgbClr val="1F2A37"/>
                 </a:solidFill>
               </a:rPr>
-              <a:t>• The model reads it first, every time</a:t>
+              <a:t>• Say exactly what you want</a:t>
             </a:r>
           </a:p>
         </p:txBody>
@@ -4249,6 +9093,248 @@
 </file>
 
 <file path=ppt/slides/slide5.xml><?xml version="1.0" encoding="utf-8"?>
+<p:sld xmlns:a="http://schemas.openxmlformats.org/drawingml/2006/main" xmlns:p="http://schemas.openxmlformats.org/presentationml/2006/main" xmlns:r="http://schemas.openxmlformats.org/officeDocument/2006/relationships">
+  <p:cSld>
+    <p:spTree>
+      <p:nvGrpSpPr>
+        <p:cNvPr id="1" name=""/>
+        <p:cNvGrpSpPr/>
+        <p:nvPr/>
+      </p:nvGrpSpPr>
+      <p:grpSpPr/>
+      <p:sp>
+        <p:nvSpPr>
+          <p:cNvPr id="2" name="Title 1"/>
+          <p:cNvSpPr>
+            <a:spLocks noGrp="1"/>
+          </p:cNvSpPr>
+          <p:nvPr>
+            <p:ph type="title"/>
+          </p:nvPr>
+        </p:nvSpPr>
+        <p:spPr/>
+        <p:txBody>
+          <a:bodyPr/>
+          <a:lstStyle/>
+          <a:p>
+            <a:r>
+              <a:rPr sz="3800" b="1">
+                <a:solidFill>
+                  <a:srgbClr val="1F2A37"/>
+                </a:solidFill>
+              </a:rPr>
+              <a:t>Behaviour became data</a:t>
+            </a:r>
+          </a:p>
+        </p:txBody>
+      </p:sp>
+      <p:sp>
+        <p:nvSpPr>
+          <p:cNvPr id="3" name="TextBox 2"/>
+          <p:cNvSpPr txBox="1"/>
+          <p:nvPr/>
+        </p:nvSpPr>
+        <p:spPr>
+          <a:xfrm>
+            <a:off x="822960" y="1828800"/>
+            <a:ext cx="10515600" cy="4206240"/>
+          </a:xfrm>
+          <a:prstGeom prst="rect">
+            <a:avLst/>
+          </a:prstGeom>
+          <a:noFill/>
+        </p:spPr>
+        <p:txBody>
+          <a:bodyPr wrap="square">
+            <a:spAutoFit/>
+          </a:bodyPr>
+          <a:lstStyle/>
+          <a:p>
+            <a:pPr>
+              <a:spcAft>
+                <a:spcPts val="1400"/>
+              </a:spcAft>
+            </a:pPr>
+            <a:r>
+              <a:rPr sz="2800">
+                <a:solidFill>
+                  <a:srgbClr val="01AEFD"/>
+                </a:solidFill>
+              </a:rPr>
+              <a:t>The personality is in a textarea now</a:t>
+            </a:r>
+          </a:p>
+          <a:p>
+            <a:pPr>
+              <a:spcAft>
+                <a:spcPts val="1400"/>
+              </a:spcAft>
+            </a:pPr>
+            <a:r>
+              <a:rPr sz="2400">
+                <a:solidFill>
+                  <a:srgbClr val="1F2A37"/>
+                </a:solidFill>
+              </a:rPr>
+              <a:t>• Change it without touching code</a:t>
+            </a:r>
+          </a:p>
+          <a:p>
+            <a:pPr>
+              <a:spcAft>
+                <a:spcPts val="1400"/>
+              </a:spcAft>
+            </a:pPr>
+            <a:r>
+              <a:rPr sz="2400">
+                <a:solidFill>
+                  <a:srgbClr val="1F2A37"/>
+                </a:solidFill>
+              </a:rPr>
+              <a:t>• This idea shows up everywhere in software</a:t>
+            </a:r>
+          </a:p>
+        </p:txBody>
+      </p:sp>
+    </p:spTree>
+  </p:cSld>
+  <p:clrMapOvr>
+    <a:masterClrMapping/>
+  </p:clrMapOvr>
+</p:sld>
+</file>
+
+<file path=ppt/slides/slide6.xml><?xml version="1.0" encoding="utf-8"?>
+<p:sld xmlns:a="http://schemas.openxmlformats.org/drawingml/2006/main" xmlns:p="http://schemas.openxmlformats.org/presentationml/2006/main" xmlns:r="http://schemas.openxmlformats.org/officeDocument/2006/relationships">
+  <p:cSld>
+    <p:spTree>
+      <p:nvGrpSpPr>
+        <p:cNvPr id="1" name=""/>
+        <p:cNvGrpSpPr/>
+        <p:nvPr/>
+      </p:nvGrpSpPr>
+      <p:grpSpPr/>
+      <p:sp>
+        <p:nvSpPr>
+          <p:cNvPr id="2" name="Title 1"/>
+          <p:cNvSpPr>
+            <a:spLocks noGrp="1"/>
+          </p:cNvSpPr>
+          <p:nvPr>
+            <p:ph type="title"/>
+          </p:nvPr>
+        </p:nvSpPr>
+        <p:spPr/>
+        <p:txBody>
+          <a:bodyPr/>
+          <a:lstStyle/>
+          <a:p>
+            <a:r>
+              <a:rPr sz="3800" b="1">
+                <a:solidFill>
+                  <a:srgbClr val="1F2A37"/>
+                </a:solidFill>
+              </a:rPr>
+              <a:t>The &lt;details&gt; tag</a:t>
+            </a:r>
+          </a:p>
+        </p:txBody>
+      </p:sp>
+      <p:sp>
+        <p:nvSpPr>
+          <p:cNvPr id="3" name="TextBox 2"/>
+          <p:cNvSpPr txBox="1"/>
+          <p:nvPr/>
+        </p:nvSpPr>
+        <p:spPr>
+          <a:xfrm>
+            <a:off x="868680" y="502920"/>
+            <a:ext cx="5486400" cy="457200"/>
+          </a:xfrm>
+          <a:prstGeom prst="rect">
+            <a:avLst/>
+          </a:prstGeom>
+          <a:noFill/>
+        </p:spPr>
+        <p:txBody>
+          <a:bodyPr wrap="none">
+            <a:spAutoFit/>
+          </a:bodyPr>
+          <a:lstStyle/>
+          <a:p>
+            <a:r>
+              <a:rPr sz="1500" b="1">
+                <a:solidFill>
+                  <a:srgbClr val="01AEFD"/>
+                </a:solidFill>
+              </a:rPr>
+              <a:t>HTML</a:t>
+            </a:r>
+          </a:p>
+        </p:txBody>
+      </p:sp>
+      <p:sp>
+        <p:nvSpPr>
+          <p:cNvPr id="4" name="TextBox 3"/>
+          <p:cNvSpPr txBox="1"/>
+          <p:nvPr/>
+        </p:nvSpPr>
+        <p:spPr>
+          <a:xfrm>
+            <a:off x="822960" y="1828800"/>
+            <a:ext cx="10515600" cy="4206240"/>
+          </a:xfrm>
+          <a:prstGeom prst="rect">
+            <a:avLst/>
+          </a:prstGeom>
+          <a:noFill/>
+        </p:spPr>
+        <p:txBody>
+          <a:bodyPr wrap="square">
+            <a:spAutoFit/>
+          </a:bodyPr>
+          <a:lstStyle/>
+          <a:p>
+            <a:pPr>
+              <a:spcAft>
+                <a:spcPts val="1400"/>
+              </a:spcAft>
+            </a:pPr>
+            <a:r>
+              <a:rPr sz="2400">
+                <a:solidFill>
+                  <a:srgbClr val="1F2A37"/>
+                </a:solidFill>
+              </a:rPr>
+              <a:t>• A box that folds open and shut.</a:t>
+            </a:r>
+          </a:p>
+          <a:p>
+            <a:pPr>
+              <a:spcAft>
+                <a:spcPts val="1400"/>
+              </a:spcAft>
+            </a:pPr>
+            <a:r>
+              <a:rPr sz="2400">
+                <a:solidFill>
+                  <a:srgbClr val="1F2A37"/>
+                </a:solidFill>
+              </a:rPr>
+              <a:t>• It stays closed until you click it - handy for optional settings.</a:t>
+            </a:r>
+          </a:p>
+        </p:txBody>
+      </p:sp>
+    </p:spTree>
+  </p:cSld>
+  <p:clrMapOvr>
+    <a:masterClrMapping/>
+  </p:clrMapOvr>
+</p:sld>
+</file>
+
+<file path=ppt/slides/slide7.xml><?xml version="1.0" encoding="utf-8"?>
 <p:sld xmlns:a="http://schemas.openxmlformats.org/drawingml/2006/main" xmlns:p="http://schemas.openxmlformats.org/presentationml/2006/main" xmlns:r="http://schemas.openxmlformats.org/officeDocument/2006/relationships">
   <p:cSld>
     <p:bg>
@@ -4275,7 +9361,7 @@
         <p:spPr>
           <a:xfrm>
             <a:off x="502920" y="274320"/>
-            <a:ext cx="11155680" cy="731520"/>
+            <a:ext cx="11155680" cy="548640"/>
           </a:xfrm>
           <a:prstGeom prst="rect">
             <a:avLst/>
@@ -4289,12 +9375,12 @@
           <a:lstStyle/>
           <a:p>
             <a:r>
-              <a:rPr sz="2600" b="1">
+              <a:rPr sz="2200" b="1">
                 <a:solidFill>
                   <a:srgbClr val="01AEFD"/>
                 </a:solidFill>
               </a:rPr>
-              <a:t>Type this into script.js  (1 of 2)</a:t>
+              <a:t>Type this into index.html   -   line 8</a:t>
             </a:r>
           </a:p>
         </p:txBody>
@@ -4307,8 +9393,8 @@
         </p:nvSpPr>
         <p:spPr>
           <a:xfrm>
-            <a:off x="502920" y="1051560"/>
-            <a:ext cx="11155680" cy="5394960"/>
+            <a:off x="502920" y="960120"/>
+            <a:ext cx="11155680" cy="4297680"/>
           </a:xfrm>
           <a:prstGeom prst="rect">
             <a:avLst/>
@@ -4327,412 +9413,36 @@
               </a:spcAft>
             </a:pPr>
             <a:r>
-              <a:rPr sz="1400">
-                <a:solidFill>
-                  <a:srgbClr val="6D8C97"/>
-                </a:solidFill>
-                <a:latin typeface="Consolas"/>
-              </a:rPr>
-              <a:t>  51  </a:t>
-            </a:r>
-            <a:r>
-              <a:rPr sz="1400">
-                <a:solidFill>
-                  <a:srgbClr val="DCECEF"/>
-                </a:solidFill>
-                <a:latin typeface="Consolas"/>
-              </a:rPr>
-              <a:t> </a:t>
-            </a:r>
-          </a:p>
-          <a:p>
-            <a:pPr>
-              <a:spcAft>
-                <a:spcPts val="0"/>
-              </a:spcAft>
-            </a:pPr>
-            <a:r>
-              <a:rPr sz="1400">
-                <a:solidFill>
-                  <a:srgbClr val="6D8C97"/>
-                </a:solidFill>
-                <a:latin typeface="Consolas"/>
-              </a:rPr>
-              <a:t>  52  </a:t>
-            </a:r>
-            <a:r>
-              <a:rPr sz="1400">
-                <a:solidFill>
-                  <a:srgbClr val="DCECEF"/>
-                </a:solidFill>
-                <a:latin typeface="Consolas"/>
-              </a:rPr>
-              <a:t>// Week 4: ask the AI a real question.</a:t>
-            </a:r>
-          </a:p>
-          <a:p>
-            <a:pPr>
-              <a:spcAft>
-                <a:spcPts val="0"/>
-              </a:spcAft>
-            </a:pPr>
-            <a:r>
-              <a:rPr sz="1400">
-                <a:solidFill>
-                  <a:srgbClr val="6D8C97"/>
-                </a:solidFill>
-                <a:latin typeface="Consolas"/>
-              </a:rPr>
-              <a:t>  53  </a:t>
-            </a:r>
-            <a:r>
-              <a:rPr sz="1400">
-                <a:solidFill>
-                  <a:srgbClr val="DCECEF"/>
-                </a:solidFill>
-                <a:latin typeface="Consolas"/>
-              </a:rPr>
-              <a:t>// A chat request is a LIST of messages. Each one says who said it.</a:t>
-            </a:r>
-          </a:p>
-          <a:p>
-            <a:pPr>
-              <a:spcAft>
-                <a:spcPts val="0"/>
-              </a:spcAft>
-            </a:pPr>
-            <a:r>
-              <a:rPr sz="1400">
-                <a:solidFill>
-                  <a:srgbClr val="6D8C97"/>
-                </a:solidFill>
-                <a:latin typeface="Consolas"/>
-              </a:rPr>
-              <a:t>  54  </a:t>
-            </a:r>
-            <a:r>
-              <a:rPr sz="1400">
-                <a:solidFill>
-                  <a:srgbClr val="DCECEF"/>
-                </a:solidFill>
-                <a:latin typeface="Consolas"/>
-              </a:rPr>
-              <a:t>async function askAI(question) {</a:t>
-            </a:r>
-          </a:p>
-          <a:p>
-            <a:pPr>
-              <a:spcAft>
-                <a:spcPts val="0"/>
-              </a:spcAft>
-            </a:pPr>
-            <a:r>
-              <a:rPr sz="1400">
-                <a:solidFill>
-                  <a:srgbClr val="6D8C97"/>
-                </a:solidFill>
-                <a:latin typeface="Consolas"/>
-              </a:rPr>
-              <a:t>  55  </a:t>
-            </a:r>
-            <a:r>
-              <a:rPr sz="1400">
-                <a:solidFill>
-                  <a:srgbClr val="DCECEF"/>
-                </a:solidFill>
-                <a:latin typeface="Consolas"/>
-              </a:rPr>
-              <a:t>  const res = await fetch(AI_BASE + '/v1/chat/completions', {</a:t>
-            </a:r>
-          </a:p>
-          <a:p>
-            <a:pPr>
-              <a:spcAft>
-                <a:spcPts val="0"/>
-              </a:spcAft>
-            </a:pPr>
-            <a:r>
-              <a:rPr sz="1400">
-                <a:solidFill>
-                  <a:srgbClr val="6D8C97"/>
-                </a:solidFill>
-                <a:latin typeface="Consolas"/>
-              </a:rPr>
-              <a:t>  56  </a:t>
-            </a:r>
-            <a:r>
-              <a:rPr sz="1400">
-                <a:solidFill>
-                  <a:srgbClr val="DCECEF"/>
-                </a:solidFill>
-                <a:latin typeface="Consolas"/>
-              </a:rPr>
-              <a:t>    method: 'POST',                       // POST = I am sending you something</a:t>
-            </a:r>
-          </a:p>
-          <a:p>
-            <a:pPr>
-              <a:spcAft>
-                <a:spcPts val="0"/>
-              </a:spcAft>
-            </a:pPr>
-            <a:r>
-              <a:rPr sz="1400">
-                <a:solidFill>
-                  <a:srgbClr val="6D8C97"/>
-                </a:solidFill>
-                <a:latin typeface="Consolas"/>
-              </a:rPr>
-              <a:t>  57  </a:t>
-            </a:r>
-            <a:r>
-              <a:rPr sz="1400">
-                <a:solidFill>
-                  <a:srgbClr val="DCECEF"/>
-                </a:solidFill>
-                <a:latin typeface="Consolas"/>
-              </a:rPr>
-              <a:t>    headers: {</a:t>
-            </a:r>
-          </a:p>
-          <a:p>
-            <a:pPr>
-              <a:spcAft>
-                <a:spcPts val="0"/>
-              </a:spcAft>
-            </a:pPr>
-            <a:r>
-              <a:rPr sz="1400">
-                <a:solidFill>
-                  <a:srgbClr val="6D8C97"/>
-                </a:solidFill>
-                <a:latin typeface="Consolas"/>
-              </a:rPr>
-              <a:t>  58  </a:t>
-            </a:r>
-            <a:r>
-              <a:rPr sz="1400">
-                <a:solidFill>
-                  <a:srgbClr val="DCECEF"/>
-                </a:solidFill>
-                <a:latin typeface="Consolas"/>
-              </a:rPr>
-              <a:t>      'Content-Type': 'application/json', // what I am sending is JSON</a:t>
-            </a:r>
-          </a:p>
-          <a:p>
-            <a:pPr>
-              <a:spcAft>
-                <a:spcPts val="0"/>
-              </a:spcAft>
-            </a:pPr>
-            <a:r>
-              <a:rPr sz="1400">
-                <a:solidFill>
-                  <a:srgbClr val="6D8C97"/>
-                </a:solidFill>
-                <a:latin typeface="Consolas"/>
-              </a:rPr>
-              <a:t>  59  </a:t>
-            </a:r>
-            <a:r>
-              <a:rPr sz="1400">
-                <a:solidFill>
-                  <a:srgbClr val="DCECEF"/>
-                </a:solidFill>
-                <a:latin typeface="Consolas"/>
-              </a:rPr>
-              <a:t>      'Authorization': 'Bearer ' + API_KEY</a:t>
-            </a:r>
-          </a:p>
-          <a:p>
-            <a:pPr>
-              <a:spcAft>
-                <a:spcPts val="0"/>
-              </a:spcAft>
-            </a:pPr>
-            <a:r>
-              <a:rPr sz="1400">
-                <a:solidFill>
-                  <a:srgbClr val="6D8C97"/>
-                </a:solidFill>
-                <a:latin typeface="Consolas"/>
-              </a:rPr>
-              <a:t>  60  </a:t>
-            </a:r>
-            <a:r>
-              <a:rPr sz="1400">
-                <a:solidFill>
-                  <a:srgbClr val="DCECEF"/>
-                </a:solidFill>
-                <a:latin typeface="Consolas"/>
-              </a:rPr>
-              <a:t>    },</a:t>
-            </a:r>
-          </a:p>
-          <a:p>
-            <a:pPr>
-              <a:spcAft>
-                <a:spcPts val="0"/>
-              </a:spcAft>
-            </a:pPr>
-            <a:r>
-              <a:rPr sz="1400">
-                <a:solidFill>
-                  <a:srgbClr val="6D8C97"/>
-                </a:solidFill>
-                <a:latin typeface="Consolas"/>
-              </a:rPr>
-              <a:t>  61  </a:t>
-            </a:r>
-            <a:r>
-              <a:rPr sz="1400">
-                <a:solidFill>
-                  <a:srgbClr val="DCECEF"/>
-                </a:solidFill>
-                <a:latin typeface="Consolas"/>
-              </a:rPr>
-              <a:t>    body: JSON.stringify({</a:t>
-            </a:r>
-          </a:p>
-          <a:p>
-            <a:pPr>
-              <a:spcAft>
-                <a:spcPts val="0"/>
-              </a:spcAft>
-            </a:pPr>
-            <a:r>
-              <a:rPr sz="1400">
-                <a:solidFill>
-                  <a:srgbClr val="6D8C97"/>
-                </a:solidFill>
-                <a:latin typeface="Consolas"/>
-              </a:rPr>
-              <a:t>  62  </a:t>
-            </a:r>
-            <a:r>
-              <a:rPr sz="1400">
-                <a:solidFill>
-                  <a:srgbClr val="DCECEF"/>
-                </a:solidFill>
-                <a:latin typeface="Consolas"/>
-              </a:rPr>
-              <a:t>      model: 'fast',</a:t>
-            </a:r>
-          </a:p>
-          <a:p>
-            <a:pPr>
-              <a:spcAft>
-                <a:spcPts val="0"/>
-              </a:spcAft>
-            </a:pPr>
-            <a:r>
-              <a:rPr sz="1400">
-                <a:solidFill>
-                  <a:srgbClr val="6D8C97"/>
-                </a:solidFill>
-                <a:latin typeface="Consolas"/>
-              </a:rPr>
-              <a:t>  63  </a:t>
-            </a:r>
-            <a:r>
-              <a:rPr sz="1400">
-                <a:solidFill>
-                  <a:srgbClr val="DCECEF"/>
-                </a:solidFill>
-                <a:latin typeface="Consolas"/>
-              </a:rPr>
-              <a:t>      messages: [</a:t>
-            </a:r>
-          </a:p>
-          <a:p>
-            <a:pPr>
-              <a:spcAft>
-                <a:spcPts val="0"/>
-              </a:spcAft>
-            </a:pPr>
-            <a:r>
-              <a:rPr sz="1400">
-                <a:solidFill>
-                  <a:srgbClr val="6D8C97"/>
-                </a:solidFill>
-                <a:latin typeface="Consolas"/>
-              </a:rPr>
-              <a:t>  64  </a:t>
-            </a:r>
-            <a:r>
-              <a:rPr sz="1400">
+              <a:rPr sz="1800">
+                <a:solidFill>
+                  <a:srgbClr val="6D8C97"/>
+                </a:solidFill>
+                <a:latin typeface="Consolas"/>
+              </a:rPr>
+              <a:t>   8  </a:t>
+            </a:r>
+            <a:r>
+              <a:rPr sz="1800">
                 <a:solidFill>
                   <a:srgbClr val="7FE0A0"/>
                 </a:solidFill>
                 <a:latin typeface="Consolas"/>
               </a:rPr>
-              <a:t>        // Week 6: the standing instruction, read before every single reply.</a:t>
-            </a:r>
-          </a:p>
-          <a:p>
-            <a:pPr>
-              <a:spcAft>
-                <a:spcPts val="0"/>
-              </a:spcAft>
-            </a:pPr>
-            <a:r>
-              <a:rPr sz="1400">
-                <a:solidFill>
-                  <a:srgbClr val="6D8C97"/>
-                </a:solidFill>
-                <a:latin typeface="Consolas"/>
-              </a:rPr>
-              <a:t>  65  </a:t>
-            </a:r>
-            <a:r>
-              <a:rPr sz="1400">
-                <a:solidFill>
-                  <a:srgbClr val="7FE0A0"/>
-                </a:solidFill>
-                <a:latin typeface="Consolas"/>
-              </a:rPr>
-              <a:t>        { role: 'system', content: personaBox.value },</a:t>
-            </a:r>
-          </a:p>
-        </p:txBody>
-      </p:sp>
-    </p:spTree>
-  </p:cSld>
-  <p:clrMapOvr>
-    <a:masterClrMapping/>
-  </p:clrMapOvr>
-</p:sld>
-</file>
-
-<file path=ppt/slides/slide6.xml><?xml version="1.0" encoding="utf-8"?>
-<p:sld xmlns:a="http://schemas.openxmlformats.org/drawingml/2006/main" xmlns:p="http://schemas.openxmlformats.org/presentationml/2006/main" xmlns:r="http://schemas.openxmlformats.org/officeDocument/2006/relationships">
-  <p:cSld>
-    <p:bg>
-      <p:bgPr>
-        <a:solidFill>
-          <a:srgbClr val="102127"/>
-        </a:solidFill>
-        <a:effectLst/>
-      </p:bgPr>
-    </p:bg>
-    <p:spTree>
-      <p:nvGrpSpPr>
-        <p:cNvPr id="1" name=""/>
-        <p:cNvGrpSpPr/>
-        <p:nvPr/>
-      </p:nvGrpSpPr>
-      <p:grpSpPr/>
-      <p:sp>
-        <p:nvSpPr>
-          <p:cNvPr id="2" name="TextBox 1"/>
+              <a:t>  &lt;details class="setup"&gt;</a:t>
+            </a:r>
+          </a:p>
+        </p:txBody>
+      </p:sp>
+      <p:sp>
+        <p:nvSpPr>
+          <p:cNvPr id="4" name="TextBox 3"/>
           <p:cNvSpPr txBox="1"/>
           <p:nvPr/>
         </p:nvSpPr>
         <p:spPr>
           <a:xfrm>
-            <a:off x="502920" y="274320"/>
-            <a:ext cx="11155680" cy="731520"/>
+            <a:off x="548640" y="5623560"/>
+            <a:ext cx="11064240" cy="1051560"/>
           </a:xfrm>
           <a:prstGeom prst="rect">
             <a:avLst/>
@@ -4740,528 +9450,18 @@
           <a:noFill/>
         </p:spPr>
         <p:txBody>
-          <a:bodyPr wrap="none">
-            <a:spAutoFit/>
-          </a:bodyPr>
-          <a:lstStyle/>
-          <a:p>
-            <a:r>
-              <a:rPr sz="2600" b="1">
-                <a:solidFill>
-                  <a:srgbClr val="01AEFD"/>
-                </a:solidFill>
-              </a:rPr>
-              <a:t>Type this into script.js  (2 of 2)</a:t>
-            </a:r>
-          </a:p>
-        </p:txBody>
-      </p:sp>
-      <p:sp>
-        <p:nvSpPr>
-          <p:cNvPr id="3" name="TextBox 2"/>
-          <p:cNvSpPr txBox="1"/>
-          <p:nvPr/>
-        </p:nvSpPr>
-        <p:spPr>
-          <a:xfrm>
-            <a:off x="502920" y="1051560"/>
-            <a:ext cx="11155680" cy="5394960"/>
-          </a:xfrm>
-          <a:prstGeom prst="rect">
-            <a:avLst/>
-          </a:prstGeom>
-          <a:noFill/>
-        </p:spPr>
-        <p:txBody>
-          <a:bodyPr wrap="none">
-            <a:spAutoFit/>
-          </a:bodyPr>
-          <a:lstStyle/>
-          <a:p>
-            <a:pPr>
-              <a:spcAft>
-                <a:spcPts val="0"/>
-              </a:spcAft>
-            </a:pPr>
-            <a:r>
-              <a:rPr sz="1400">
-                <a:solidFill>
-                  <a:srgbClr val="6D8C97"/>
-                </a:solidFill>
-                <a:latin typeface="Consolas"/>
-              </a:rPr>
-              <a:t>  66  </a:t>
-            </a:r>
-            <a:r>
-              <a:rPr sz="1400">
-                <a:solidFill>
-                  <a:srgbClr val="DCECEF"/>
-                </a:solidFill>
-                <a:latin typeface="Consolas"/>
-              </a:rPr>
-              <a:t>        { role: 'user', content: question }</a:t>
-            </a:r>
-          </a:p>
-          <a:p>
-            <a:pPr>
-              <a:spcAft>
-                <a:spcPts val="0"/>
-              </a:spcAft>
-            </a:pPr>
-            <a:r>
-              <a:rPr sz="1400">
-                <a:solidFill>
-                  <a:srgbClr val="6D8C97"/>
-                </a:solidFill>
-                <a:latin typeface="Consolas"/>
-              </a:rPr>
-              <a:t>  67  </a:t>
-            </a:r>
-            <a:r>
-              <a:rPr sz="1400">
-                <a:solidFill>
-                  <a:srgbClr val="DCECEF"/>
-                </a:solidFill>
-                <a:latin typeface="Consolas"/>
-              </a:rPr>
-              <a:t>      ]</a:t>
-            </a:r>
-          </a:p>
-          <a:p>
-            <a:pPr>
-              <a:spcAft>
-                <a:spcPts val="0"/>
-              </a:spcAft>
-            </a:pPr>
-            <a:r>
-              <a:rPr sz="1400">
-                <a:solidFill>
-                  <a:srgbClr val="6D8C97"/>
-                </a:solidFill>
-                <a:latin typeface="Consolas"/>
-              </a:rPr>
-              <a:t>  68  </a:t>
-            </a:r>
-            <a:r>
-              <a:rPr sz="1400">
-                <a:solidFill>
-                  <a:srgbClr val="DCECEF"/>
-                </a:solidFill>
-                <a:latin typeface="Consolas"/>
-              </a:rPr>
-              <a:t>    })</a:t>
-            </a:r>
-          </a:p>
-          <a:p>
-            <a:pPr>
-              <a:spcAft>
-                <a:spcPts val="0"/>
-              </a:spcAft>
-            </a:pPr>
-            <a:r>
-              <a:rPr sz="1400">
-                <a:solidFill>
-                  <a:srgbClr val="6D8C97"/>
-                </a:solidFill>
-                <a:latin typeface="Consolas"/>
-              </a:rPr>
-              <a:t>  69  </a:t>
-            </a:r>
-            <a:r>
-              <a:rPr sz="1400">
-                <a:solidFill>
-                  <a:srgbClr val="DCECEF"/>
-                </a:solidFill>
-                <a:latin typeface="Consolas"/>
-              </a:rPr>
-              <a:t>  });</a:t>
-            </a:r>
-          </a:p>
-          <a:p>
-            <a:pPr>
-              <a:spcAft>
-                <a:spcPts val="0"/>
-              </a:spcAft>
-            </a:pPr>
-            <a:r>
-              <a:rPr sz="1400">
-                <a:solidFill>
-                  <a:srgbClr val="6D8C97"/>
-                </a:solidFill>
-                <a:latin typeface="Consolas"/>
-              </a:rPr>
-              <a:t>  70  </a:t>
-            </a:r>
-            <a:r>
-              <a:rPr sz="1400">
-                <a:solidFill>
-                  <a:srgbClr val="DCECEF"/>
-                </a:solidFill>
-                <a:latin typeface="Consolas"/>
-              </a:rPr>
-              <a:t> </a:t>
-            </a:r>
-          </a:p>
-          <a:p>
-            <a:pPr>
-              <a:spcAft>
-                <a:spcPts val="0"/>
-              </a:spcAft>
-            </a:pPr>
-            <a:r>
-              <a:rPr sz="1400">
-                <a:solidFill>
-                  <a:srgbClr val="6D8C97"/>
-                </a:solidFill>
-                <a:latin typeface="Consolas"/>
-              </a:rPr>
-              <a:t>  71  </a:t>
-            </a:r>
-            <a:r>
-              <a:rPr sz="1400">
-                <a:solidFill>
-                  <a:srgbClr val="DCECEF"/>
-                </a:solidFill>
-                <a:latin typeface="Consolas"/>
-              </a:rPr>
-              <a:t>  // Week 5: fetch does NOT throw when the server says no. A 429 arrives</a:t>
-            </a:r>
-          </a:p>
-          <a:p>
-            <a:pPr>
-              <a:spcAft>
-                <a:spcPts val="0"/>
-              </a:spcAft>
-            </a:pPr>
-            <a:r>
-              <a:rPr sz="1400">
-                <a:solidFill>
-                  <a:srgbClr val="6D8C97"/>
-                </a:solidFill>
-                <a:latin typeface="Consolas"/>
-              </a:rPr>
-              <a:t>  72  </a:t>
-            </a:r>
-            <a:r>
-              <a:rPr sz="1400">
-                <a:solidFill>
-                  <a:srgbClr val="DCECEF"/>
-                </a:solidFill>
-                <a:latin typeface="Consolas"/>
-              </a:rPr>
-              <a:t>  // looking just like a success until you actually check.</a:t>
-            </a:r>
-          </a:p>
-          <a:p>
-            <a:pPr>
-              <a:spcAft>
-                <a:spcPts val="0"/>
-              </a:spcAft>
-            </a:pPr>
-            <a:r>
-              <a:rPr sz="1400">
-                <a:solidFill>
-                  <a:srgbClr val="6D8C97"/>
-                </a:solidFill>
-                <a:latin typeface="Consolas"/>
-              </a:rPr>
-              <a:t>  73  </a:t>
-            </a:r>
-            <a:r>
-              <a:rPr sz="1400">
-                <a:solidFill>
-                  <a:srgbClr val="DCECEF"/>
-                </a:solidFill>
-                <a:latin typeface="Consolas"/>
-              </a:rPr>
-              <a:t>  if (!res.ok) {</a:t>
-            </a:r>
-          </a:p>
-          <a:p>
-            <a:pPr>
-              <a:spcAft>
-                <a:spcPts val="0"/>
-              </a:spcAft>
-            </a:pPr>
-            <a:r>
-              <a:rPr sz="1400">
-                <a:solidFill>
-                  <a:srgbClr val="6D8C97"/>
-                </a:solidFill>
-                <a:latin typeface="Consolas"/>
-              </a:rPr>
-              <a:t>  74  </a:t>
-            </a:r>
-            <a:r>
-              <a:rPr sz="1400">
-                <a:solidFill>
-                  <a:srgbClr val="DCECEF"/>
-                </a:solidFill>
-                <a:latin typeface="Consolas"/>
-              </a:rPr>
-              <a:t>    const problem = await res.json();</a:t>
-            </a:r>
-          </a:p>
-          <a:p>
-            <a:pPr>
-              <a:spcAft>
-                <a:spcPts val="0"/>
-              </a:spcAft>
-            </a:pPr>
-            <a:r>
-              <a:rPr sz="1400">
-                <a:solidFill>
-                  <a:srgbClr val="6D8C97"/>
-                </a:solidFill>
-                <a:latin typeface="Consolas"/>
-              </a:rPr>
-              <a:t>  75  </a:t>
-            </a:r>
-            <a:r>
-              <a:rPr sz="1400">
-                <a:solidFill>
-                  <a:srgbClr val="DCECEF"/>
-                </a:solidFill>
-                <a:latin typeface="Consolas"/>
-              </a:rPr>
-              <a:t>    throw new Error(explain(res.status, problem));</a:t>
-            </a:r>
-          </a:p>
-          <a:p>
-            <a:pPr>
-              <a:spcAft>
-                <a:spcPts val="0"/>
-              </a:spcAft>
-            </a:pPr>
-            <a:r>
-              <a:rPr sz="1400">
-                <a:solidFill>
-                  <a:srgbClr val="6D8C97"/>
-                </a:solidFill>
-                <a:latin typeface="Consolas"/>
-              </a:rPr>
-              <a:t>  76  </a:t>
-            </a:r>
-            <a:r>
-              <a:rPr sz="1400">
-                <a:solidFill>
-                  <a:srgbClr val="DCECEF"/>
-                </a:solidFill>
-                <a:latin typeface="Consolas"/>
-              </a:rPr>
-              <a:t>  }</a:t>
-            </a:r>
-          </a:p>
-          <a:p>
-            <a:pPr>
-              <a:spcAft>
-                <a:spcPts val="0"/>
-              </a:spcAft>
-            </a:pPr>
-            <a:r>
-              <a:rPr sz="1400">
-                <a:solidFill>
-                  <a:srgbClr val="6D8C97"/>
-                </a:solidFill>
-                <a:latin typeface="Consolas"/>
-              </a:rPr>
-              <a:t>  77  </a:t>
-            </a:r>
-            <a:r>
-              <a:rPr sz="1400">
-                <a:solidFill>
-                  <a:srgbClr val="DCECEF"/>
-                </a:solidFill>
-                <a:latin typeface="Consolas"/>
-              </a:rPr>
-              <a:t> </a:t>
-            </a:r>
-          </a:p>
-          <a:p>
-            <a:pPr>
-              <a:spcAft>
-                <a:spcPts val="0"/>
-              </a:spcAft>
-            </a:pPr>
-            <a:r>
-              <a:rPr sz="1400">
-                <a:solidFill>
-                  <a:srgbClr val="6D8C97"/>
-                </a:solidFill>
-                <a:latin typeface="Consolas"/>
-              </a:rPr>
-              <a:t>  78  </a:t>
-            </a:r>
-            <a:r>
-              <a:rPr sz="1400">
-                <a:solidFill>
-                  <a:srgbClr val="DCECEF"/>
-                </a:solidFill>
-                <a:latin typeface="Consolas"/>
-              </a:rPr>
-              <a:t>  const data = await res.json();</a:t>
-            </a:r>
-          </a:p>
-          <a:p>
-            <a:pPr>
-              <a:spcAft>
-                <a:spcPts val="0"/>
-              </a:spcAft>
-            </a:pPr>
-            <a:r>
-              <a:rPr sz="1400">
-                <a:solidFill>
-                  <a:srgbClr val="6D8C97"/>
-                </a:solidFill>
-                <a:latin typeface="Consolas"/>
-              </a:rPr>
-              <a:t>  79  </a:t>
-            </a:r>
-            <a:r>
-              <a:rPr sz="1400">
-                <a:solidFill>
-                  <a:srgbClr val="DCECEF"/>
-                </a:solidFill>
-                <a:latin typeface="Consolas"/>
-              </a:rPr>
-              <a:t>  return data.choices[0].message.content;</a:t>
-            </a:r>
-          </a:p>
-          <a:p>
-            <a:pPr>
-              <a:spcAft>
-                <a:spcPts val="0"/>
-              </a:spcAft>
-            </a:pPr>
-            <a:r>
-              <a:rPr sz="1400">
-                <a:solidFill>
-                  <a:srgbClr val="6D8C97"/>
-                </a:solidFill>
-                <a:latin typeface="Consolas"/>
-              </a:rPr>
-              <a:t>  80  </a:t>
-            </a:r>
-            <a:r>
-              <a:rPr sz="1400">
-                <a:solidFill>
-                  <a:srgbClr val="DCECEF"/>
-                </a:solidFill>
-                <a:latin typeface="Consolas"/>
-              </a:rPr>
-              <a:t>}</a:t>
-            </a:r>
-          </a:p>
-        </p:txBody>
-      </p:sp>
-    </p:spTree>
-  </p:cSld>
-  <p:clrMapOvr>
-    <a:masterClrMapping/>
-  </p:clrMapOvr>
-</p:sld>
-</file>
-
-<file path=ppt/slides/slide7.xml><?xml version="1.0" encoding="utf-8"?>
-<p:sld xmlns:a="http://schemas.openxmlformats.org/drawingml/2006/main" xmlns:p="http://schemas.openxmlformats.org/presentationml/2006/main" xmlns:r="http://schemas.openxmlformats.org/officeDocument/2006/relationships">
-  <p:cSld>
-    <p:spTree>
-      <p:nvGrpSpPr>
-        <p:cNvPr id="1" name=""/>
-        <p:cNvGrpSpPr/>
-        <p:nvPr/>
-      </p:nvGrpSpPr>
-      <p:grpSpPr/>
-      <p:sp>
-        <p:nvSpPr>
-          <p:cNvPr id="2" name="Title 1"/>
-          <p:cNvSpPr>
-            <a:spLocks noGrp="1"/>
-          </p:cNvSpPr>
-          <p:nvPr>
-            <p:ph type="title"/>
-          </p:nvPr>
-        </p:nvSpPr>
-        <p:spPr/>
-        <p:txBody>
-          <a:bodyPr/>
-          <a:lstStyle/>
-          <a:p>
-            <a:r>
-              <a:rPr sz="3800" b="1">
-                <a:solidFill>
-                  <a:srgbClr val="1F2A37"/>
-                </a:solidFill>
-              </a:rPr>
-              <a:t>Vague does nothing</a:t>
-            </a:r>
-          </a:p>
-        </p:txBody>
-      </p:sp>
-      <p:sp>
-        <p:nvSpPr>
-          <p:cNvPr id="3" name="TextBox 2"/>
-          <p:cNvSpPr txBox="1"/>
-          <p:nvPr/>
-        </p:nvSpPr>
-        <p:spPr>
-          <a:xfrm>
-            <a:off x="822960" y="1828800"/>
-            <a:ext cx="10515600" cy="4206240"/>
-          </a:xfrm>
-          <a:prstGeom prst="rect">
-            <a:avLst/>
-          </a:prstGeom>
-          <a:noFill/>
-        </p:spPr>
-        <p:txBody>
           <a:bodyPr wrap="square">
             <a:spAutoFit/>
           </a:bodyPr>
           <a:lstStyle/>
           <a:p>
-            <a:pPr>
-              <a:spcAft>
-                <a:spcPts val="1400"/>
-              </a:spcAft>
-            </a:pPr>
-            <a:r>
-              <a:rPr sz="2400">
-                <a:solidFill>
-                  <a:srgbClr val="1F2A37"/>
-                </a:solidFill>
-              </a:rPr>
-              <a:t>• "Be helpful" - no visible change</a:t>
-            </a:r>
-          </a:p>
-          <a:p>
-            <a:pPr>
-              <a:spcAft>
-                <a:spcPts val="1400"/>
-              </a:spcAft>
-            </a:pPr>
-            <a:r>
-              <a:rPr sz="2400">
-                <a:solidFill>
-                  <a:srgbClr val="1F2A37"/>
-                </a:solidFill>
-              </a:rPr>
-              <a:t>• "Under 40 words, one example, no jargon" - obvious change</a:t>
-            </a:r>
-          </a:p>
-          <a:p>
-            <a:pPr>
-              <a:spcAft>
-                <a:spcPts val="1400"/>
-              </a:spcAft>
-            </a:pPr>
-            <a:r>
-              <a:rPr sz="2400">
-                <a:solidFill>
-                  <a:srgbClr val="1F2A37"/>
-                </a:solidFill>
-              </a:rPr>
-              <a:t>• Say exactly what you want</a:t>
+            <a:r>
+              <a:rPr sz="2000">
+                <a:solidFill>
+                  <a:srgbClr val="DCECEF"/>
+                </a:solidFill>
+              </a:rPr>
+              <a:t>Open a &lt;details&gt; box - a fold-away panel. class="setup" lets CSS style it.</a:t>
             </a:r>
           </a:p>
         </p:txBody>
@@ -5305,7 +9505,7 @@
                   <a:srgbClr val="1F2A37"/>
                 </a:solidFill>
               </a:rPr>
-              <a:t>Behaviour became data</a:t>
+              <a:t>The &lt;summary&gt; tag</a:t>
             </a:r>
           </a:p>
         </p:txBody>
@@ -5313,6 +9513,39 @@
       <p:sp>
         <p:nvSpPr>
           <p:cNvPr id="3" name="TextBox 2"/>
+          <p:cNvSpPr txBox="1"/>
+          <p:nvPr/>
+        </p:nvSpPr>
+        <p:spPr>
+          <a:xfrm>
+            <a:off x="868680" y="502920"/>
+            <a:ext cx="5486400" cy="457200"/>
+          </a:xfrm>
+          <a:prstGeom prst="rect">
+            <a:avLst/>
+          </a:prstGeom>
+          <a:noFill/>
+        </p:spPr>
+        <p:txBody>
+          <a:bodyPr wrap="none">
+            <a:spAutoFit/>
+          </a:bodyPr>
+          <a:lstStyle/>
+          <a:p>
+            <a:r>
+              <a:rPr sz="1500" b="1">
+                <a:solidFill>
+                  <a:srgbClr val="01AEFD"/>
+                </a:solidFill>
+              </a:rPr>
+              <a:t>HTML</a:t>
+            </a:r>
+          </a:p>
+        </p:txBody>
+      </p:sp>
+      <p:sp>
+        <p:nvSpPr>
+          <p:cNvPr id="4" name="TextBox 3"/>
           <p:cNvSpPr txBox="1"/>
           <p:nvPr/>
         </p:nvSpPr>
@@ -5338,12 +9571,12 @@
               </a:spcAft>
             </a:pPr>
             <a:r>
-              <a:rPr sz="2800">
-                <a:solidFill>
-                  <a:srgbClr val="01AEFD"/>
-                </a:solidFill>
-              </a:rPr>
-              <a:t>The personality is in a textarea now</a:t>
+              <a:rPr sz="2400">
+                <a:solidFill>
+                  <a:srgbClr val="1F2A37"/>
+                </a:solidFill>
+              </a:rPr>
+              <a:t>• The label you always see on a &lt;details&gt; box.</a:t>
             </a:r>
           </a:p>
           <a:p>
@@ -5358,22 +9591,7 @@
                   <a:srgbClr val="1F2A37"/>
                 </a:solidFill>
               </a:rPr>
-              <a:t>• Change it without touching code</a:t>
-            </a:r>
-          </a:p>
-          <a:p>
-            <a:pPr>
-              <a:spcAft>
-                <a:spcPts val="1400"/>
-              </a:spcAft>
-            </a:pPr>
-            <a:r>
-              <a:rPr sz="2400">
-                <a:solidFill>
-                  <a:srgbClr val="1F2A37"/>
-                </a:solidFill>
-              </a:rPr>
-              <a:t>• This idea shows up everywhere in software</a:t>
+              <a:t>• Clicking it opens or closes the rest.</a:t>
             </a:r>
           </a:p>
         </p:txBody>
@@ -5413,7 +9631,7 @@
         <p:spPr>
           <a:xfrm>
             <a:off x="502920" y="274320"/>
-            <a:ext cx="11155680" cy="731520"/>
+            <a:ext cx="11155680" cy="548640"/>
           </a:xfrm>
           <a:prstGeom prst="rect">
             <a:avLst/>
@@ -5427,12 +9645,12 @@
           <a:lstStyle/>
           <a:p>
             <a:r>
-              <a:rPr sz="2600" b="1">
+              <a:rPr sz="2200" b="1">
                 <a:solidFill>
                   <a:srgbClr val="01AEFD"/>
                 </a:solidFill>
               </a:rPr>
-              <a:t>Type this into index.html  (1 of 3)</a:t>
+              <a:t>Type this into index.html   -   line 9</a:t>
             </a:r>
           </a:p>
         </p:txBody>
@@ -5445,8 +9663,8 @@
         </p:nvSpPr>
         <p:spPr>
           <a:xfrm>
-            <a:off x="502920" y="1051560"/>
-            <a:ext cx="11155680" cy="5394960"/>
+            <a:off x="502920" y="960120"/>
+            <a:ext cx="11155680" cy="4297680"/>
           </a:xfrm>
           <a:prstGeom prst="rect">
             <a:avLst/>
@@ -5465,7 +9683,7 @@
               </a:spcAft>
             </a:pPr>
             <a:r>
-              <a:rPr sz="1700">
+              <a:rPr sz="1800">
                 <a:solidFill>
                   <a:srgbClr val="6D8C97"/>
                 </a:solidFill>
@@ -5474,88 +9692,71 @@
               <a:t>   8  </a:t>
             </a:r>
             <a:r>
-              <a:rPr sz="1700">
+              <a:rPr sz="1800">
+                <a:solidFill>
+                  <a:srgbClr val="6D8C97"/>
+                </a:solidFill>
+                <a:latin typeface="Consolas"/>
+              </a:rPr>
+              <a:t>  &lt;details class="setup"&gt;</a:t>
+            </a:r>
+          </a:p>
+          <a:p>
+            <a:pPr>
+              <a:spcAft>
+                <a:spcPts val="0"/>
+              </a:spcAft>
+            </a:pPr>
+            <a:r>
+              <a:rPr sz="1800">
+                <a:solidFill>
+                  <a:srgbClr val="6D8C97"/>
+                </a:solidFill>
+                <a:latin typeface="Consolas"/>
+              </a:rPr>
+              <a:t>   9  </a:t>
+            </a:r>
+            <a:r>
+              <a:rPr sz="1800">
                 <a:solidFill>
                   <a:srgbClr val="7FE0A0"/>
                 </a:solidFill>
                 <a:latin typeface="Consolas"/>
               </a:rPr>
-              <a:t>  &lt;details class="setup"&gt;</a:t>
-            </a:r>
-          </a:p>
-          <a:p>
-            <a:pPr>
-              <a:spcAft>
-                <a:spcPts val="0"/>
-              </a:spcAft>
-            </a:pPr>
-            <a:r>
-              <a:rPr sz="1700">
-                <a:solidFill>
-                  <a:srgbClr val="6D8C97"/>
-                </a:solidFill>
-                <a:latin typeface="Consolas"/>
-              </a:rPr>
-              <a:t>   9  </a:t>
-            </a:r>
-            <a:r>
-              <a:rPr sz="1700">
-                <a:solidFill>
-                  <a:srgbClr val="7FE0A0"/>
-                </a:solidFill>
-                <a:latin typeface="Consolas"/>
-              </a:rPr>
               <a:t>    &lt;summary&gt;Personality&lt;/summary&gt;</a:t>
             </a:r>
           </a:p>
-          <a:p>
-            <a:pPr>
-              <a:spcAft>
-                <a:spcPts val="0"/>
-              </a:spcAft>
-            </a:pPr>
-            <a:r>
-              <a:rPr sz="1700">
-                <a:solidFill>
-                  <a:srgbClr val="6D8C97"/>
-                </a:solidFill>
-                <a:latin typeface="Consolas"/>
-              </a:rPr>
-              <a:t>  10  </a:t>
-            </a:r>
-            <a:r>
-              <a:rPr sz="1700">
-                <a:solidFill>
-                  <a:srgbClr val="7FE0A0"/>
-                </a:solidFill>
-                <a:latin typeface="Consolas"/>
-              </a:rPr>
-              <a:t>    &lt;textarea id="persona" rows="3"&gt;You are a friendly, patient helper for a 13-year-old. Keep answers under 60 words. If you are not sure, say so.&lt;/textarea&gt;</a:t>
-            </a:r>
-          </a:p>
-          <a:p>
-            <a:pPr>
-              <a:spcAft>
-                <a:spcPts val="0"/>
-              </a:spcAft>
-            </a:pPr>
-            <a:r>
-              <a:rPr sz="1700">
-                <a:solidFill>
-                  <a:srgbClr val="6D8C97"/>
-                </a:solidFill>
-                <a:latin typeface="Consolas"/>
-              </a:rPr>
-              <a:t>  11  </a:t>
-            </a:r>
-            <a:r>
-              <a:rPr sz="1700">
-                <a:solidFill>
-                  <a:srgbClr val="7FE0A0"/>
-                </a:solidFill>
-                <a:latin typeface="Consolas"/>
-              </a:rPr>
-              <a:t>  &lt;/details&gt;</a:t>
+        </p:txBody>
+      </p:sp>
+      <p:sp>
+        <p:nvSpPr>
+          <p:cNvPr id="4" name="TextBox 3"/>
+          <p:cNvSpPr txBox="1"/>
+          <p:nvPr/>
+        </p:nvSpPr>
+        <p:spPr>
+          <a:xfrm>
+            <a:off x="548640" y="5623560"/>
+            <a:ext cx="11064240" cy="1051560"/>
+          </a:xfrm>
+          <a:prstGeom prst="rect">
+            <a:avLst/>
+          </a:prstGeom>
+          <a:noFill/>
+        </p:spPr>
+        <p:txBody>
+          <a:bodyPr wrap="square">
+            <a:spAutoFit/>
+          </a:bodyPr>
+          <a:lstStyle/>
+          <a:p>
+            <a:r>
+              <a:rPr sz="2000">
+                <a:solidFill>
+                  <a:srgbClr val="DCECEF"/>
+                </a:solidFill>
+              </a:rPr>
+              <a:t>The &lt;summary&gt; is the label you always see: 'Personality'. Click it to open the box.</a:t>
             </a:r>
           </a:p>
         </p:txBody>

--- a/ai101/slides/week-06.pptx
+++ b/ai101/slides/week-06.pptx
@@ -3289,12 +3289,27 @@
               </a:spcAft>
             </a:pPr>
             <a:r>
+              <a:rPr sz="2800">
+                <a:solidFill>
+                  <a:srgbClr val="01AEFD"/>
+                </a:solidFill>
+              </a:rPr>
+              <a:t>&lt;textarea id="persona" rows="3"&gt;&lt;/textarea&gt;</a:t>
+            </a:r>
+          </a:p>
+          <a:p>
+            <a:pPr>
+              <a:spcAft>
+                <a:spcPts val="1400"/>
+              </a:spcAft>
+            </a:pPr>
+            <a:r>
               <a:rPr sz="2400">
                 <a:solidFill>
                   <a:srgbClr val="1F2A37"/>
                 </a:solidFill>
               </a:rPr>
-              <a:t>• A text box for SEVERAL lines, unlike &lt;input&gt; which is one line.</a:t>
+              <a:t>• A text box for SEVERAL lines - unlike &lt;input&gt; (week 2), which is one line.</a:t>
             </a:r>
           </a:p>
           <a:p>
@@ -3310,6 +3325,21 @@
                 </a:solidFill>
               </a:rPr>
               <a:t>• rows sets how tall it starts.</a:t>
+            </a:r>
+          </a:p>
+          <a:p>
+            <a:pPr>
+              <a:spcAft>
+                <a:spcPts val="1400"/>
+              </a:spcAft>
+            </a:pPr>
+            <a:r>
+              <a:rPr sz="2400">
+                <a:solidFill>
+                  <a:srgbClr val="1F2A37"/>
+                </a:solidFill>
+              </a:rPr>
+              <a:t>• You read what was typed with .value, exactly like an &lt;input&gt;.</a:t>
             </a:r>
           </a:p>
         </p:txBody>
@@ -4039,12 +4069,57 @@
               </a:spcAft>
             </a:pPr>
             <a:r>
+              <a:rPr sz="2800">
+                <a:solidFill>
+                  <a:srgbClr val="01AEFD"/>
+                </a:solidFill>
+              </a:rPr>
+              <a:t>margin-bottom: 12px;</a:t>
+            </a:r>
+          </a:p>
+          <a:p>
+            <a:pPr>
+              <a:spcAft>
+                <a:spcPts val="1400"/>
+              </a:spcAft>
+            </a:pPr>
+            <a:r>
               <a:rPr sz="2400">
                 <a:solidFill>
                   <a:srgbClr val="1F2A37"/>
                 </a:solidFill>
               </a:rPr>
-              <a:t>• Space below the box, pushing whatever is next further down.</a:t>
+              <a:t>• Space BELOW the box, pushing whatever comes next further down.</a:t>
+            </a:r>
+          </a:p>
+          <a:p>
+            <a:pPr>
+              <a:spcAft>
+                <a:spcPts val="1400"/>
+              </a:spcAft>
+            </a:pPr>
+            <a:r>
+              <a:rPr sz="2400">
+                <a:solidFill>
+                  <a:srgbClr val="1F2A37"/>
+                </a:solidFill>
+              </a:rPr>
+              <a:t>• It is one side of margin (week 1), which spaced all four sides at once.</a:t>
+            </a:r>
+          </a:p>
+          <a:p>
+            <a:pPr>
+              <a:spcAft>
+                <a:spcPts val="1400"/>
+              </a:spcAft>
+            </a:pPr>
+            <a:r>
+              <a:rPr sz="2400">
+                <a:solidFill>
+                  <a:srgbClr val="1F2A37"/>
+                </a:solidFill>
+              </a:rPr>
+              <a:t>• margin-bottom: 12px leaves a 12-pixel gap under it.</a:t>
             </a:r>
           </a:p>
         </p:txBody>
@@ -4294,12 +4369,57 @@
               </a:spcAft>
             </a:pPr>
             <a:r>
+              <a:rPr sz="2800">
+                <a:solidFill>
+                  <a:srgbClr val="01AEFD"/>
+                </a:solidFill>
+              </a:rPr>
+              <a:t>font-weight: bold;</a:t>
+            </a:r>
+          </a:p>
+          <a:p>
+            <a:pPr>
+              <a:spcAft>
+                <a:spcPts val="1400"/>
+              </a:spcAft>
+            </a:pPr>
+            <a:r>
               <a:rPr sz="2400">
                 <a:solidFill>
                   <a:srgbClr val="1F2A37"/>
                 </a:solidFill>
               </a:rPr>
-              <a:t>• How heavy the text is. bold stands out; normal is regular.</a:t>
+              <a:t>• How heavy the text is - bold stands out, normal is regular.</a:t>
+            </a:r>
+          </a:p>
+          <a:p>
+            <a:pPr>
+              <a:spcAft>
+                <a:spcPts val="1400"/>
+              </a:spcAft>
+            </a:pPr>
+            <a:r>
+              <a:rPr sz="2400">
+                <a:solidFill>
+                  <a:srgbClr val="1F2A37"/>
+                </a:solidFill>
+              </a:rPr>
+              <a:t>• A cousin of font-size and font-family (week 1): all three shape the text.</a:t>
+            </a:r>
+          </a:p>
+          <a:p>
+            <a:pPr>
+              <a:spcAft>
+                <a:spcPts val="1400"/>
+              </a:spcAft>
+            </a:pPr>
+            <a:r>
+              <a:rPr sz="2400">
+                <a:solidFill>
+                  <a:srgbClr val="1F2A37"/>
+                </a:solidFill>
+              </a:rPr>
+              <a:t>• bold makes the label read like a button you can press.</a:t>
             </a:r>
           </a:p>
         </p:txBody>
@@ -4764,12 +4884,57 @@
               </a:spcAft>
             </a:pPr>
             <a:r>
+              <a:rPr sz="2800">
+                <a:solidFill>
+                  <a:srgbClr val="01AEFD"/>
+                </a:solidFill>
+              </a:rPr>
+              <a:t>width: 100%;</a:t>
+            </a:r>
+          </a:p>
+          <a:p>
+            <a:pPr>
+              <a:spcAft>
+                <a:spcPts val="1400"/>
+              </a:spcAft>
+            </a:pPr>
+            <a:r>
               <a:rPr sz="2400">
                 <a:solidFill>
                   <a:srgbClr val="1F2A37"/>
                 </a:solidFill>
               </a:rPr>
-              <a:t>• How wide the box is. 100% means as wide as its container.</a:t>
+              <a:t>• How wide the box actually is.</a:t>
+            </a:r>
+          </a:p>
+          <a:p>
+            <a:pPr>
+              <a:spcAft>
+                <a:spcPts val="1400"/>
+              </a:spcAft>
+            </a:pPr>
+            <a:r>
+              <a:rPr sz="2400">
+                <a:solidFill>
+                  <a:srgbClr val="1F2A37"/>
+                </a:solidFill>
+              </a:rPr>
+              <a:t>• max-width (week 1) was only a LIMIT; width sets the real size.</a:t>
+            </a:r>
+          </a:p>
+          <a:p>
+            <a:pPr>
+              <a:spcAft>
+                <a:spcPts val="1400"/>
+              </a:spcAft>
+            </a:pPr>
+            <a:r>
+              <a:rPr sz="2400">
+                <a:solidFill>
+                  <a:srgbClr val="1F2A37"/>
+                </a:solidFill>
+              </a:rPr>
+              <a:t>• 100% means as wide as whatever box holds it.</a:t>
             </a:r>
           </a:p>
         </p:txBody>
@@ -9301,12 +9466,27 @@
               </a:spcAft>
             </a:pPr>
             <a:r>
+              <a:rPr sz="2800">
+                <a:solidFill>
+                  <a:srgbClr val="01AEFD"/>
+                </a:solidFill>
+              </a:rPr>
+              <a:t>&lt;details&gt; ... &lt;/details&gt;</a:t>
+            </a:r>
+          </a:p>
+          <a:p>
+            <a:pPr>
+              <a:spcAft>
+                <a:spcPts val="1400"/>
+              </a:spcAft>
+            </a:pPr>
+            <a:r>
               <a:rPr sz="2400">
                 <a:solidFill>
                   <a:srgbClr val="1F2A37"/>
                 </a:solidFill>
               </a:rPr>
-              <a:t>• A box that folds open and shut.</a:t>
+              <a:t>• A box that folds open and shut - hidden until you click it.</a:t>
             </a:r>
           </a:p>
           <a:p>
@@ -9321,7 +9501,22 @@
                   <a:srgbClr val="1F2A37"/>
                 </a:solidFill>
               </a:rPr>
-              <a:t>• It stays closed until you click it - handy for optional settings.</a:t>
+              <a:t>• Perfect for optional settings you do not always want on screen.</a:t>
+            </a:r>
+          </a:p>
+          <a:p>
+            <a:pPr>
+              <a:spcAft>
+                <a:spcPts val="1400"/>
+              </a:spcAft>
+            </a:pPr>
+            <a:r>
+              <a:rPr sz="2400">
+                <a:solidFill>
+                  <a:srgbClr val="1F2A37"/>
+                </a:solidFill>
+              </a:rPr>
+              <a:t>• It is a &lt;div&gt; (week 1) that the browser gives open/close behaviour for free.</a:t>
             </a:r>
           </a:p>
         </p:txBody>
@@ -9571,12 +9766,27 @@
               </a:spcAft>
             </a:pPr>
             <a:r>
+              <a:rPr sz="2800">
+                <a:solidFill>
+                  <a:srgbClr val="01AEFD"/>
+                </a:solidFill>
+              </a:rPr>
+              <a:t>&lt;summary&gt;Personality&lt;/summary&gt;</a:t>
+            </a:r>
+          </a:p>
+          <a:p>
+            <a:pPr>
+              <a:spcAft>
+                <a:spcPts val="1400"/>
+              </a:spcAft>
+            </a:pPr>
+            <a:r>
               <a:rPr sz="2400">
                 <a:solidFill>
                   <a:srgbClr val="1F2A37"/>
                 </a:solidFill>
               </a:rPr>
-              <a:t>• The label you always see on a &lt;details&gt; box.</a:t>
+              <a:t>• The always-visible label on a &lt;details&gt; box - the part you click.</a:t>
             </a:r>
           </a:p>
           <a:p>
@@ -9591,7 +9801,22 @@
                   <a:srgbClr val="1F2A37"/>
                 </a:solidFill>
               </a:rPr>
-              <a:t>• Clicking it opens or closes the rest.</a:t>
+              <a:t>• Everything else in the box hides behind it until you open it.</a:t>
+            </a:r>
+          </a:p>
+          <a:p>
+            <a:pPr>
+              <a:spcAft>
+                <a:spcPts val="1400"/>
+              </a:spcAft>
+            </a:pPr>
+            <a:r>
+              <a:rPr sz="2400">
+                <a:solidFill>
+                  <a:srgbClr val="1F2A37"/>
+                </a:solidFill>
+              </a:rPr>
+              <a:t>• It sits inside &lt;details&gt; the way &lt;h1&gt; sits inside &lt;header&gt; (week 1).</a:t>
             </a:r>
           </a:p>
         </p:txBody>

--- a/ai101/slides/week-06.pptx
+++ b/ai101/slides/week-06.pptx
@@ -38,6 +38,10 @@
     <p:sldId id="286" r:id="rId37"/>
     <p:sldId id="287" r:id="rId38"/>
     <p:sldId id="288" r:id="rId39"/>
+    <p:sldId id="289" r:id="rId40"/>
+    <p:sldId id="290" r:id="rId41"/>
+    <p:sldId id="291" r:id="rId42"/>
+    <p:sldId id="292" r:id="rId43"/>
   </p:sldIdLst>
   <p:sldSz cx="12191695" cy="6858000" type="screen4x3"/>
   <p:notesSz cx="6858000" cy="9144000"/>
@@ -3358,7 +3362,7 @@
     <p:bg>
       <p:bgPr>
         <a:solidFill>
-          <a:srgbClr val="102127"/>
+          <a:srgbClr val="F4F8FB"/>
         </a:solidFill>
         <a:effectLst/>
       </p:bgPr>
@@ -3378,8 +3382,8 @@
         </p:nvSpPr>
         <p:spPr>
           <a:xfrm>
-            <a:off x="502920" y="274320"/>
-            <a:ext cx="11155680" cy="548640"/>
+            <a:off x="822960" y="365760"/>
+            <a:ext cx="7315200" cy="365760"/>
           </a:xfrm>
           <a:prstGeom prst="rect">
             <a:avLst/>
@@ -3393,12 +3397,12 @@
           <a:lstStyle/>
           <a:p>
             <a:r>
-              <a:rPr sz="2200" b="1">
+              <a:rPr sz="1400" b="1">
                 <a:solidFill>
                   <a:srgbClr val="01AEFD"/>
                 </a:solidFill>
               </a:rPr>
-              <a:t>Type this into index.html   -   line 10</a:t>
+              <a:t>ON THE PAGE</a:t>
             </a:r>
           </a:p>
         </p:txBody>
@@ -3411,8 +3415,8 @@
         </p:nvSpPr>
         <p:spPr>
           <a:xfrm>
-            <a:off x="502920" y="960120"/>
-            <a:ext cx="11155680" cy="4297680"/>
+            <a:off x="822960" y="658368"/>
+            <a:ext cx="10515600" cy="731520"/>
           </a:xfrm>
           <a:prstGeom prst="rect">
             <a:avLst/>
@@ -3425,92 +3429,511 @@
           </a:bodyPr>
           <a:lstStyle/>
           <a:p>
-            <a:pPr>
-              <a:spcAft>
-                <a:spcPts val="0"/>
-              </a:spcAft>
-            </a:pPr>
-            <a:r>
-              <a:rPr sz="1800">
-                <a:solidFill>
-                  <a:srgbClr val="6D8C97"/>
-                </a:solidFill>
-                <a:latin typeface="Consolas"/>
-              </a:rPr>
-              <a:t>   8  </a:t>
-            </a:r>
-            <a:r>
-              <a:rPr sz="1800">
-                <a:solidFill>
-                  <a:srgbClr val="6D8C97"/>
-                </a:solidFill>
-                <a:latin typeface="Consolas"/>
-              </a:rPr>
-              <a:t>  &lt;details class="setup"&gt;</a:t>
-            </a:r>
-          </a:p>
-          <a:p>
-            <a:pPr>
-              <a:spcAft>
-                <a:spcPts val="0"/>
-              </a:spcAft>
-            </a:pPr>
-            <a:r>
-              <a:rPr sz="1800">
-                <a:solidFill>
-                  <a:srgbClr val="6D8C97"/>
-                </a:solidFill>
-                <a:latin typeface="Consolas"/>
-              </a:rPr>
-              <a:t>   9  </a:t>
-            </a:r>
-            <a:r>
-              <a:rPr sz="1800">
-                <a:solidFill>
-                  <a:srgbClr val="6D8C97"/>
-                </a:solidFill>
-                <a:latin typeface="Consolas"/>
-              </a:rPr>
-              <a:t>    &lt;summary&gt;Personality&lt;/summary&gt;</a:t>
-            </a:r>
-          </a:p>
-          <a:p>
-            <a:pPr>
-              <a:spcAft>
-                <a:spcPts val="0"/>
-              </a:spcAft>
-            </a:pPr>
-            <a:r>
-              <a:rPr sz="1800">
-                <a:solidFill>
-                  <a:srgbClr val="6D8C97"/>
-                </a:solidFill>
-                <a:latin typeface="Consolas"/>
-              </a:rPr>
-              <a:t>  10  </a:t>
-            </a:r>
-            <a:r>
-              <a:rPr sz="1800">
-                <a:solidFill>
-                  <a:srgbClr val="7FE0A0"/>
-                </a:solidFill>
-                <a:latin typeface="Consolas"/>
-              </a:rPr>
-              <a:t>    &lt;textarea id="persona" rows="3"&gt;You are a friendly, patient helper for a 13-year-old. Keep answers under 60 words. If you are not sure, say so.&lt;/textarea&gt;</a:t>
-            </a:r>
-          </a:p>
-        </p:txBody>
-      </p:sp>
-      <p:sp>
-        <p:nvSpPr>
-          <p:cNvPr id="4" name="TextBox 3"/>
+            <a:r>
+              <a:rPr sz="3200" b="1">
+                <a:solidFill>
+                  <a:srgbClr val="1F2A37"/>
+                </a:solidFill>
+              </a:rPr>
+              <a:t>The &lt;textarea&gt; tag</a:t>
+            </a:r>
+          </a:p>
+        </p:txBody>
+      </p:sp>
+      <p:sp>
+        <p:nvSpPr>
+          <p:cNvPr id="4" name="Rounded Rectangle 3"/>
+          <p:cNvSpPr/>
+          <p:nvPr/>
+        </p:nvSpPr>
+        <p:spPr>
+          <a:xfrm>
+            <a:off x="3454237" y="1641896"/>
+            <a:ext cx="5249387" cy="3918021"/>
+          </a:xfrm>
+          <a:prstGeom prst="roundRect">
+            <a:avLst/>
+          </a:prstGeom>
+          <a:solidFill>
+            <a:srgbClr val="0F1F27"/>
+          </a:solidFill>
+          <a:ln>
+            <a:noFill/>
+          </a:ln>
+          <a:effectLst/>
+        </p:spPr>
+        <p:style>
+          <a:lnRef idx="1">
+            <a:schemeClr val="accent1"/>
+          </a:lnRef>
+          <a:fillRef idx="3">
+            <a:schemeClr val="accent1"/>
+          </a:fillRef>
+          <a:effectRef idx="2">
+            <a:schemeClr val="accent1"/>
+          </a:effectRef>
+          <a:fontRef idx="minor">
+            <a:schemeClr val="lt1"/>
+          </a:fontRef>
+        </p:style>
+        <p:txBody>
+          <a:bodyPr rtlCol="0" anchor="ctr"/>
+          <a:lstStyle/>
+          <a:p>
+            <a:pPr algn="ctr"/>
+          </a:p>
+        </p:txBody>
+      </p:sp>
+      <p:sp>
+        <p:nvSpPr>
+          <p:cNvPr id="5" name="Rounded Rectangle 4"/>
+          <p:cNvSpPr/>
+          <p:nvPr/>
+        </p:nvSpPr>
+        <p:spPr>
+          <a:xfrm>
+            <a:off x="3606393" y="2022287"/>
+            <a:ext cx="4945075" cy="437448"/>
+          </a:xfrm>
+          <a:prstGeom prst="roundRect">
+            <a:avLst/>
+          </a:prstGeom>
+          <a:solidFill>
+            <a:srgbClr val="16303A"/>
+          </a:solidFill>
+          <a:ln>
+            <a:noFill/>
+          </a:ln>
+          <a:effectLst/>
+        </p:spPr>
+        <p:style>
+          <a:lnRef idx="1">
+            <a:schemeClr val="accent1"/>
+          </a:lnRef>
+          <a:fillRef idx="3">
+            <a:schemeClr val="accent1"/>
+          </a:fillRef>
+          <a:effectRef idx="2">
+            <a:schemeClr val="accent1"/>
+          </a:effectRef>
+          <a:fontRef idx="minor">
+            <a:schemeClr val="lt1"/>
+          </a:fontRef>
+        </p:style>
+        <p:txBody>
+          <a:bodyPr rtlCol="0" anchor="ctr"/>
+          <a:lstStyle/>
+          <a:p>
+            <a:pPr algn="ctr"/>
+          </a:p>
+        </p:txBody>
+      </p:sp>
+      <p:sp>
+        <p:nvSpPr>
+          <p:cNvPr id="6" name="Rounded Rectangle 5"/>
+          <p:cNvSpPr/>
+          <p:nvPr/>
+        </p:nvSpPr>
+        <p:spPr>
+          <a:xfrm>
+            <a:off x="3720510" y="2155423"/>
+            <a:ext cx="1426463" cy="190195"/>
+          </a:xfrm>
+          <a:prstGeom prst="roundRect">
+            <a:avLst/>
+          </a:prstGeom>
+          <a:solidFill>
+            <a:srgbClr val="4A6B78"/>
+          </a:solidFill>
+          <a:ln>
+            <a:noFill/>
+          </a:ln>
+          <a:effectLst/>
+        </p:spPr>
+        <p:style>
+          <a:lnRef idx="1">
+            <a:schemeClr val="accent1"/>
+          </a:lnRef>
+          <a:fillRef idx="3">
+            <a:schemeClr val="accent1"/>
+          </a:fillRef>
+          <a:effectRef idx="2">
+            <a:schemeClr val="accent1"/>
+          </a:effectRef>
+          <a:fontRef idx="minor">
+            <a:schemeClr val="lt1"/>
+          </a:fontRef>
+        </p:style>
+        <p:txBody>
+          <a:bodyPr rtlCol="0" anchor="ctr"/>
+          <a:lstStyle/>
+          <a:p>
+            <a:pPr algn="ctr"/>
+          </a:p>
+        </p:txBody>
+      </p:sp>
+      <p:sp>
+        <p:nvSpPr>
+          <p:cNvPr id="7" name="Rounded Rectangle 6"/>
+          <p:cNvSpPr/>
+          <p:nvPr/>
+        </p:nvSpPr>
+        <p:spPr>
+          <a:xfrm>
+            <a:off x="3606393" y="2554833"/>
+            <a:ext cx="4945075" cy="1806854"/>
+          </a:xfrm>
+          <a:prstGeom prst="roundRect">
+            <a:avLst/>
+          </a:prstGeom>
+          <a:solidFill>
+            <a:srgbClr val="0B171D"/>
+          </a:solidFill>
+          <a:ln>
+            <a:noFill/>
+          </a:ln>
+          <a:effectLst/>
+        </p:spPr>
+        <p:style>
+          <a:lnRef idx="1">
+            <a:schemeClr val="accent1"/>
+          </a:lnRef>
+          <a:fillRef idx="3">
+            <a:schemeClr val="accent1"/>
+          </a:fillRef>
+          <a:effectRef idx="2">
+            <a:schemeClr val="accent1"/>
+          </a:effectRef>
+          <a:fontRef idx="minor">
+            <a:schemeClr val="lt1"/>
+          </a:fontRef>
+        </p:style>
+        <p:txBody>
+          <a:bodyPr rtlCol="0" anchor="ctr"/>
+          <a:lstStyle/>
+          <a:p>
+            <a:pPr algn="ctr"/>
+          </a:p>
+        </p:txBody>
+      </p:sp>
+      <p:sp>
+        <p:nvSpPr>
+          <p:cNvPr id="8" name="Rounded Rectangle 7"/>
+          <p:cNvSpPr/>
+          <p:nvPr/>
+        </p:nvSpPr>
+        <p:spPr>
+          <a:xfrm>
+            <a:off x="3720510" y="2668950"/>
+            <a:ext cx="2852927" cy="399409"/>
+          </a:xfrm>
+          <a:prstGeom prst="roundRect">
+            <a:avLst/>
+          </a:prstGeom>
+          <a:solidFill>
+            <a:srgbClr val="1B3540"/>
+          </a:solidFill>
+          <a:ln>
+            <a:noFill/>
+          </a:ln>
+          <a:effectLst/>
+        </p:spPr>
+        <p:style>
+          <a:lnRef idx="1">
+            <a:schemeClr val="accent1"/>
+          </a:lnRef>
+          <a:fillRef idx="3">
+            <a:schemeClr val="accent1"/>
+          </a:fillRef>
+          <a:effectRef idx="2">
+            <a:schemeClr val="accent1"/>
+          </a:effectRef>
+          <a:fontRef idx="minor">
+            <a:schemeClr val="lt1"/>
+          </a:fontRef>
+        </p:style>
+        <p:txBody>
+          <a:bodyPr rtlCol="0" anchor="ctr"/>
+          <a:lstStyle/>
+          <a:p>
+            <a:pPr algn="ctr"/>
+          </a:p>
+        </p:txBody>
+      </p:sp>
+      <p:sp>
+        <p:nvSpPr>
+          <p:cNvPr id="9" name="Rounded Rectangle 8"/>
+          <p:cNvSpPr/>
+          <p:nvPr/>
+        </p:nvSpPr>
+        <p:spPr>
+          <a:xfrm>
+            <a:off x="5584423" y="3182477"/>
+            <a:ext cx="2852927" cy="399409"/>
+          </a:xfrm>
+          <a:prstGeom prst="roundRect">
+            <a:avLst/>
+          </a:prstGeom>
+          <a:solidFill>
+            <a:srgbClr val="123A32"/>
+          </a:solidFill>
+          <a:ln>
+            <a:noFill/>
+          </a:ln>
+          <a:effectLst/>
+        </p:spPr>
+        <p:style>
+          <a:lnRef idx="1">
+            <a:schemeClr val="accent1"/>
+          </a:lnRef>
+          <a:fillRef idx="3">
+            <a:schemeClr val="accent1"/>
+          </a:fillRef>
+          <a:effectRef idx="2">
+            <a:schemeClr val="accent1"/>
+          </a:effectRef>
+          <a:fontRef idx="minor">
+            <a:schemeClr val="lt1"/>
+          </a:fontRef>
+        </p:style>
+        <p:txBody>
+          <a:bodyPr rtlCol="0" anchor="ctr"/>
+          <a:lstStyle/>
+          <a:p>
+            <a:pPr algn="ctr"/>
+          </a:p>
+        </p:txBody>
+      </p:sp>
+      <p:sp>
+        <p:nvSpPr>
+          <p:cNvPr id="10" name="Rounded Rectangle 9"/>
+          <p:cNvSpPr/>
+          <p:nvPr/>
+        </p:nvSpPr>
+        <p:spPr>
+          <a:xfrm>
+            <a:off x="3720510" y="3696004"/>
+            <a:ext cx="3138220" cy="399409"/>
+          </a:xfrm>
+          <a:prstGeom prst="roundRect">
+            <a:avLst/>
+          </a:prstGeom>
+          <a:solidFill>
+            <a:srgbClr val="1B3540"/>
+          </a:solidFill>
+          <a:ln>
+            <a:noFill/>
+          </a:ln>
+          <a:effectLst/>
+        </p:spPr>
+        <p:style>
+          <a:lnRef idx="1">
+            <a:schemeClr val="accent1"/>
+          </a:lnRef>
+          <a:fillRef idx="3">
+            <a:schemeClr val="accent1"/>
+          </a:fillRef>
+          <a:effectRef idx="2">
+            <a:schemeClr val="accent1"/>
+          </a:effectRef>
+          <a:fontRef idx="minor">
+            <a:schemeClr val="lt1"/>
+          </a:fontRef>
+        </p:style>
+        <p:txBody>
+          <a:bodyPr rtlCol="0" anchor="ctr"/>
+          <a:lstStyle/>
+          <a:p>
+            <a:pPr algn="ctr"/>
+          </a:p>
+        </p:txBody>
+      </p:sp>
+      <p:sp>
+        <p:nvSpPr>
+          <p:cNvPr id="11" name="Rounded Rectangle 10"/>
+          <p:cNvSpPr/>
+          <p:nvPr/>
+        </p:nvSpPr>
+        <p:spPr>
+          <a:xfrm>
+            <a:off x="3701491" y="4856195"/>
+            <a:ext cx="3899001" cy="323331"/>
+          </a:xfrm>
+          <a:prstGeom prst="roundRect">
+            <a:avLst/>
+          </a:prstGeom>
+          <a:solidFill>
+            <a:srgbClr val="16303A"/>
+          </a:solidFill>
+          <a:ln>
+            <a:noFill/>
+          </a:ln>
+          <a:effectLst/>
+        </p:spPr>
+        <p:style>
+          <a:lnRef idx="1">
+            <a:schemeClr val="accent1"/>
+          </a:lnRef>
+          <a:fillRef idx="3">
+            <a:schemeClr val="accent1"/>
+          </a:fillRef>
+          <a:effectRef idx="2">
+            <a:schemeClr val="accent1"/>
+          </a:effectRef>
+          <a:fontRef idx="minor">
+            <a:schemeClr val="lt1"/>
+          </a:fontRef>
+        </p:style>
+        <p:txBody>
+          <a:bodyPr rtlCol="0" anchor="ctr"/>
+          <a:lstStyle/>
+          <a:p>
+            <a:pPr algn="ctr"/>
+          </a:p>
+        </p:txBody>
+      </p:sp>
+      <p:sp>
+        <p:nvSpPr>
+          <p:cNvPr id="12" name="Rounded Rectangle 11"/>
+          <p:cNvSpPr/>
+          <p:nvPr/>
+        </p:nvSpPr>
+        <p:spPr>
+          <a:xfrm>
+            <a:off x="7695590" y="4856195"/>
+            <a:ext cx="779800" cy="323331"/>
+          </a:xfrm>
+          <a:prstGeom prst="roundRect">
+            <a:avLst/>
+          </a:prstGeom>
+          <a:solidFill>
+            <a:srgbClr val="01AEFD"/>
+          </a:solidFill>
+          <a:ln>
+            <a:noFill/>
+          </a:ln>
+          <a:effectLst/>
+        </p:spPr>
+        <p:style>
+          <a:lnRef idx="1">
+            <a:schemeClr val="accent1"/>
+          </a:lnRef>
+          <a:fillRef idx="3">
+            <a:schemeClr val="accent1"/>
+          </a:fillRef>
+          <a:effectRef idx="2">
+            <a:schemeClr val="accent1"/>
+          </a:effectRef>
+          <a:fontRef idx="minor">
+            <a:schemeClr val="lt1"/>
+          </a:fontRef>
+        </p:style>
+        <p:txBody>
+          <a:bodyPr rtlCol="0" anchor="ctr"/>
+          <a:lstStyle/>
+          <a:p>
+            <a:pPr algn="ctr"/>
+          </a:p>
+        </p:txBody>
+      </p:sp>
+      <p:sp>
+        <p:nvSpPr>
+          <p:cNvPr id="13" name="Rounded Rectangle 12"/>
+          <p:cNvSpPr/>
+          <p:nvPr/>
+        </p:nvSpPr>
+        <p:spPr>
+          <a:xfrm>
+            <a:off x="3720510" y="5407761"/>
+            <a:ext cx="1616659" cy="95097"/>
+          </a:xfrm>
+          <a:prstGeom prst="roundRect">
+            <a:avLst/>
+          </a:prstGeom>
+          <a:solidFill>
+            <a:srgbClr val="2A4550"/>
+          </a:solidFill>
+          <a:ln>
+            <a:noFill/>
+          </a:ln>
+          <a:effectLst/>
+        </p:spPr>
+        <p:style>
+          <a:lnRef idx="1">
+            <a:schemeClr val="accent1"/>
+          </a:lnRef>
+          <a:fillRef idx="3">
+            <a:schemeClr val="accent1"/>
+          </a:fillRef>
+          <a:effectRef idx="2">
+            <a:schemeClr val="accent1"/>
+          </a:effectRef>
+          <a:fontRef idx="minor">
+            <a:schemeClr val="lt1"/>
+          </a:fontRef>
+        </p:style>
+        <p:txBody>
+          <a:bodyPr rtlCol="0" anchor="ctr"/>
+          <a:lstStyle/>
+          <a:p>
+            <a:pPr algn="ctr"/>
+          </a:p>
+        </p:txBody>
+      </p:sp>
+      <p:sp>
+        <p:nvSpPr>
+          <p:cNvPr id="14" name="Rounded Rectangle 13"/>
+          <p:cNvSpPr/>
+          <p:nvPr/>
+        </p:nvSpPr>
+        <p:spPr>
+          <a:xfrm>
+            <a:off x="3663452" y="4818156"/>
+            <a:ext cx="3975079" cy="399409"/>
+          </a:xfrm>
+          <a:prstGeom prst="roundRect">
+            <a:avLst/>
+          </a:prstGeom>
+          <a:noFill/>
+          <a:ln w="44450">
+            <a:solidFill>
+              <a:srgbClr val="FFD633"/>
+            </a:solidFill>
+          </a:ln>
+          <a:effectLst/>
+        </p:spPr>
+        <p:style>
+          <a:lnRef idx="1">
+            <a:schemeClr val="accent1"/>
+          </a:lnRef>
+          <a:fillRef idx="3">
+            <a:schemeClr val="accent1"/>
+          </a:fillRef>
+          <a:effectRef idx="2">
+            <a:schemeClr val="accent1"/>
+          </a:effectRef>
+          <a:fontRef idx="minor">
+            <a:schemeClr val="lt1"/>
+          </a:fontRef>
+        </p:style>
+        <p:txBody>
+          <a:bodyPr rtlCol="0" anchor="ctr"/>
+          <a:lstStyle/>
+          <a:p>
+            <a:pPr algn="ctr"/>
+          </a:p>
+        </p:txBody>
+      </p:sp>
+      <p:sp>
+        <p:nvSpPr>
+          <p:cNvPr id="15" name="TextBox 14"/>
           <p:cNvSpPr txBox="1"/>
           <p:nvPr/>
         </p:nvSpPr>
         <p:spPr>
           <a:xfrm>
-            <a:off x="548640" y="5623560"/>
-            <a:ext cx="11064240" cy="1051560"/>
+            <a:off x="822960" y="6172200"/>
+            <a:ext cx="10515600" cy="548640"/>
           </a:xfrm>
           <a:prstGeom prst="rect">
             <a:avLst/>
@@ -3526,10 +3949,10 @@
             <a:r>
               <a:rPr sz="2000">
                 <a:solidFill>
-                  <a:srgbClr val="DCECEF"/>
-                </a:solidFill>
-              </a:rPr>
-              <a:t>A &lt;textarea&gt; for a few lines of instruction. id="persona" lets the code read it; the text inside is the starting personality.</a:t>
+                  <a:srgbClr val="0A6299"/>
+                </a:solidFill>
+              </a:rPr>
+              <a:t>The &lt;textarea&gt; is where you type your message.</a:t>
             </a:r>
           </a:p>
         </p:txBody>
@@ -3588,7 +4011,7 @@
                   <a:srgbClr val="01AEFD"/>
                 </a:solidFill>
               </a:rPr>
-              <a:t>Type this into index.html   -   line 11</a:t>
+              <a:t>Type this into index.html   -   line 10</a:t>
             </a:r>
           </a:p>
         </p:txBody>
@@ -3682,36 +4105,11 @@
             <a:r>
               <a:rPr sz="1800">
                 <a:solidFill>
-                  <a:srgbClr val="6D8C97"/>
+                  <a:srgbClr val="7FE0A0"/>
                 </a:solidFill>
                 <a:latin typeface="Consolas"/>
               </a:rPr>
               <a:t>    &lt;textarea id="persona" rows="3"&gt;You are a friendly, patient helper for a 13-year-old. Keep answers under 60 words. If you are not sure, say so.&lt;/textarea&gt;</a:t>
-            </a:r>
-          </a:p>
-          <a:p>
-            <a:pPr>
-              <a:spcAft>
-                <a:spcPts val="0"/>
-              </a:spcAft>
-            </a:pPr>
-            <a:r>
-              <a:rPr sz="1800">
-                <a:solidFill>
-                  <a:srgbClr val="6D8C97"/>
-                </a:solidFill>
-                <a:latin typeface="Consolas"/>
-              </a:rPr>
-              <a:t>  11  </a:t>
-            </a:r>
-            <a:r>
-              <a:rPr sz="1800">
-                <a:solidFill>
-                  <a:srgbClr val="7FE0A0"/>
-                </a:solidFill>
-                <a:latin typeface="Consolas"/>
-              </a:rPr>
-              <a:t>  &lt;/details&gt;</a:t>
             </a:r>
           </a:p>
         </p:txBody>
@@ -3744,7 +4142,7 @@
                   <a:srgbClr val="DCECEF"/>
                 </a:solidFill>
               </a:rPr>
-              <a:t>Close the &lt;/details&gt; box.</a:t>
+              <a:t>A &lt;textarea&gt; for a few lines of instruction. id="persona" lets the code read it; the text inside is the starting personality.</a:t>
             </a:r>
           </a:p>
         </p:txBody>
@@ -3803,7 +4201,7 @@
                   <a:srgbClr val="01AEFD"/>
                 </a:solidFill>
               </a:rPr>
-              <a:t>All together in index.html</a:t>
+              <a:t>Type this into index.html   -   line 11</a:t>
             </a:r>
           </a:p>
         </p:txBody>
@@ -3847,7 +4245,7 @@
             <a:r>
               <a:rPr sz="1800">
                 <a:solidFill>
-                  <a:srgbClr val="7FE0A0"/>
+                  <a:srgbClr val="6D8C97"/>
                 </a:solidFill>
                 <a:latin typeface="Consolas"/>
               </a:rPr>
@@ -3872,7 +4270,7 @@
             <a:r>
               <a:rPr sz="1800">
                 <a:solidFill>
-                  <a:srgbClr val="7FE0A0"/>
+                  <a:srgbClr val="6D8C97"/>
                 </a:solidFill>
                 <a:latin typeface="Consolas"/>
               </a:rPr>
@@ -3897,7 +4295,7 @@
             <a:r>
               <a:rPr sz="1800">
                 <a:solidFill>
-                  <a:srgbClr val="7FE0A0"/>
+                  <a:srgbClr val="6D8C97"/>
                 </a:solidFill>
                 <a:latin typeface="Consolas"/>
               </a:rPr>
@@ -3959,7 +4357,7 @@
                   <a:srgbClr val="DCECEF"/>
                 </a:solidFill>
               </a:rPr>
-              <a:t>That is the whole piece. Check yours looks the same before moving on.</a:t>
+              <a:t>Close the &lt;/details&gt; box.</a:t>
             </a:r>
           </a:p>
         </p:txBody>
@@ -3973,166 +4371,6 @@
 </file>
 
 <file path=ppt/slides/slide14.xml><?xml version="1.0" encoding="utf-8"?>
-<p:sld xmlns:a="http://schemas.openxmlformats.org/drawingml/2006/main" xmlns:p="http://schemas.openxmlformats.org/presentationml/2006/main" xmlns:r="http://schemas.openxmlformats.org/officeDocument/2006/relationships">
-  <p:cSld>
-    <p:spTree>
-      <p:nvGrpSpPr>
-        <p:cNvPr id="1" name=""/>
-        <p:cNvGrpSpPr/>
-        <p:nvPr/>
-      </p:nvGrpSpPr>
-      <p:grpSpPr/>
-      <p:sp>
-        <p:nvSpPr>
-          <p:cNvPr id="2" name="Title 1"/>
-          <p:cNvSpPr>
-            <a:spLocks noGrp="1"/>
-          </p:cNvSpPr>
-          <p:nvPr>
-            <p:ph type="title"/>
-          </p:nvPr>
-        </p:nvSpPr>
-        <p:spPr/>
-        <p:txBody>
-          <a:bodyPr/>
-          <a:lstStyle/>
-          <a:p>
-            <a:r>
-              <a:rPr sz="3800" b="1">
-                <a:solidFill>
-                  <a:srgbClr val="1F2A37"/>
-                </a:solidFill>
-              </a:rPr>
-              <a:t>margin-bottom</a:t>
-            </a:r>
-          </a:p>
-        </p:txBody>
-      </p:sp>
-      <p:sp>
-        <p:nvSpPr>
-          <p:cNvPr id="3" name="TextBox 2"/>
-          <p:cNvSpPr txBox="1"/>
-          <p:nvPr/>
-        </p:nvSpPr>
-        <p:spPr>
-          <a:xfrm>
-            <a:off x="868680" y="502920"/>
-            <a:ext cx="5486400" cy="457200"/>
-          </a:xfrm>
-          <a:prstGeom prst="rect">
-            <a:avLst/>
-          </a:prstGeom>
-          <a:noFill/>
-        </p:spPr>
-        <p:txBody>
-          <a:bodyPr wrap="none">
-            <a:spAutoFit/>
-          </a:bodyPr>
-          <a:lstStyle/>
-          <a:p>
-            <a:r>
-              <a:rPr sz="1500" b="1">
-                <a:solidFill>
-                  <a:srgbClr val="01AEFD"/>
-                </a:solidFill>
-              </a:rPr>
-              <a:t>CSS</a:t>
-            </a:r>
-          </a:p>
-        </p:txBody>
-      </p:sp>
-      <p:sp>
-        <p:nvSpPr>
-          <p:cNvPr id="4" name="TextBox 3"/>
-          <p:cNvSpPr txBox="1"/>
-          <p:nvPr/>
-        </p:nvSpPr>
-        <p:spPr>
-          <a:xfrm>
-            <a:off x="822960" y="1828800"/>
-            <a:ext cx="10515600" cy="4206240"/>
-          </a:xfrm>
-          <a:prstGeom prst="rect">
-            <a:avLst/>
-          </a:prstGeom>
-          <a:noFill/>
-        </p:spPr>
-        <p:txBody>
-          <a:bodyPr wrap="square">
-            <a:spAutoFit/>
-          </a:bodyPr>
-          <a:lstStyle/>
-          <a:p>
-            <a:pPr>
-              <a:spcAft>
-                <a:spcPts val="1400"/>
-              </a:spcAft>
-            </a:pPr>
-            <a:r>
-              <a:rPr sz="2800">
-                <a:solidFill>
-                  <a:srgbClr val="01AEFD"/>
-                </a:solidFill>
-              </a:rPr>
-              <a:t>margin-bottom: 12px;</a:t>
-            </a:r>
-          </a:p>
-          <a:p>
-            <a:pPr>
-              <a:spcAft>
-                <a:spcPts val="1400"/>
-              </a:spcAft>
-            </a:pPr>
-            <a:r>
-              <a:rPr sz="2400">
-                <a:solidFill>
-                  <a:srgbClr val="1F2A37"/>
-                </a:solidFill>
-              </a:rPr>
-              <a:t>• Space BELOW the box, pushing whatever comes next further down.</a:t>
-            </a:r>
-          </a:p>
-          <a:p>
-            <a:pPr>
-              <a:spcAft>
-                <a:spcPts val="1400"/>
-              </a:spcAft>
-            </a:pPr>
-            <a:r>
-              <a:rPr sz="2400">
-                <a:solidFill>
-                  <a:srgbClr val="1F2A37"/>
-                </a:solidFill>
-              </a:rPr>
-              <a:t>• It is one side of margin (week 1), which spaced all four sides at once.</a:t>
-            </a:r>
-          </a:p>
-          <a:p>
-            <a:pPr>
-              <a:spcAft>
-                <a:spcPts val="1400"/>
-              </a:spcAft>
-            </a:pPr>
-            <a:r>
-              <a:rPr sz="2400">
-                <a:solidFill>
-                  <a:srgbClr val="1F2A37"/>
-                </a:solidFill>
-              </a:rPr>
-              <a:t>• margin-bottom: 12px leaves a 12-pixel gap under it.</a:t>
-            </a:r>
-          </a:p>
-        </p:txBody>
-      </p:sp>
-    </p:spTree>
-  </p:cSld>
-  <p:clrMapOvr>
-    <a:masterClrMapping/>
-  </p:clrMapOvr>
-</p:sld>
-</file>
-
-<file path=ppt/slides/slide15.xml><?xml version="1.0" encoding="utf-8"?>
 <p:sld xmlns:a="http://schemas.openxmlformats.org/drawingml/2006/main" xmlns:p="http://schemas.openxmlformats.org/presentationml/2006/main" xmlns:r="http://schemas.openxmlformats.org/officeDocument/2006/relationships">
   <p:cSld>
     <p:bg>
@@ -4178,7 +4416,7 @@
                   <a:srgbClr val="01AEFD"/>
                 </a:solidFill>
               </a:rPr>
-              <a:t>Type this into style.css   -   line 21</a:t>
+              <a:t>All together in index.html</a:t>
             </a:r>
           </a:p>
         </p:txBody>
@@ -4217,7 +4455,7 @@
                 </a:solidFill>
                 <a:latin typeface="Consolas"/>
               </a:rPr>
-              <a:t>  21  </a:t>
+              <a:t>   8  </a:t>
             </a:r>
             <a:r>
               <a:rPr sz="1800">
@@ -4226,7 +4464,82 @@
                 </a:solidFill>
                 <a:latin typeface="Consolas"/>
               </a:rPr>
-              <a:t>.setup { margin-bottom: 12px; font-size: 14px; }</a:t>
+              <a:t>  &lt;details class="setup"&gt;</a:t>
+            </a:r>
+          </a:p>
+          <a:p>
+            <a:pPr>
+              <a:spcAft>
+                <a:spcPts val="0"/>
+              </a:spcAft>
+            </a:pPr>
+            <a:r>
+              <a:rPr sz="1800">
+                <a:solidFill>
+                  <a:srgbClr val="6D8C97"/>
+                </a:solidFill>
+                <a:latin typeface="Consolas"/>
+              </a:rPr>
+              <a:t>   9  </a:t>
+            </a:r>
+            <a:r>
+              <a:rPr sz="1800">
+                <a:solidFill>
+                  <a:srgbClr val="7FE0A0"/>
+                </a:solidFill>
+                <a:latin typeface="Consolas"/>
+              </a:rPr>
+              <a:t>    &lt;summary&gt;Personality&lt;/summary&gt;</a:t>
+            </a:r>
+          </a:p>
+          <a:p>
+            <a:pPr>
+              <a:spcAft>
+                <a:spcPts val="0"/>
+              </a:spcAft>
+            </a:pPr>
+            <a:r>
+              <a:rPr sz="1800">
+                <a:solidFill>
+                  <a:srgbClr val="6D8C97"/>
+                </a:solidFill>
+                <a:latin typeface="Consolas"/>
+              </a:rPr>
+              <a:t>  10  </a:t>
+            </a:r>
+            <a:r>
+              <a:rPr sz="1800">
+                <a:solidFill>
+                  <a:srgbClr val="7FE0A0"/>
+                </a:solidFill>
+                <a:latin typeface="Consolas"/>
+              </a:rPr>
+              <a:t>    &lt;textarea id="persona" rows="3"&gt;You are a friendly, patient helper for a 13-year-old. Keep answers under 60 words. If you are not sure, say so.&lt;/textarea&gt;</a:t>
+            </a:r>
+          </a:p>
+          <a:p>
+            <a:pPr>
+              <a:spcAft>
+                <a:spcPts val="0"/>
+              </a:spcAft>
+            </a:pPr>
+            <a:r>
+              <a:rPr sz="1800">
+                <a:solidFill>
+                  <a:srgbClr val="6D8C97"/>
+                </a:solidFill>
+                <a:latin typeface="Consolas"/>
+              </a:rPr>
+              <a:t>  11  </a:t>
+            </a:r>
+            <a:r>
+              <a:rPr sz="1800">
+                <a:solidFill>
+                  <a:srgbClr val="7FE0A0"/>
+                </a:solidFill>
+                <a:latin typeface="Consolas"/>
+              </a:rPr>
+              <a:t>  &lt;/details&gt;</a:t>
             </a:r>
           </a:p>
         </p:txBody>
@@ -4259,7 +4572,167 @@
                   <a:srgbClr val="DCECEF"/>
                 </a:solidFill>
               </a:rPr>
-              <a:t>Style the whole panel: a gap below it, and slightly smaller text.</a:t>
+              <a:t>That is the whole piece. Check yours looks the same before moving on.</a:t>
+            </a:r>
+          </a:p>
+        </p:txBody>
+      </p:sp>
+    </p:spTree>
+  </p:cSld>
+  <p:clrMapOvr>
+    <a:masterClrMapping/>
+  </p:clrMapOvr>
+</p:sld>
+</file>
+
+<file path=ppt/slides/slide15.xml><?xml version="1.0" encoding="utf-8"?>
+<p:sld xmlns:a="http://schemas.openxmlformats.org/drawingml/2006/main" xmlns:p="http://schemas.openxmlformats.org/presentationml/2006/main" xmlns:r="http://schemas.openxmlformats.org/officeDocument/2006/relationships">
+  <p:cSld>
+    <p:spTree>
+      <p:nvGrpSpPr>
+        <p:cNvPr id="1" name=""/>
+        <p:cNvGrpSpPr/>
+        <p:nvPr/>
+      </p:nvGrpSpPr>
+      <p:grpSpPr/>
+      <p:sp>
+        <p:nvSpPr>
+          <p:cNvPr id="2" name="Title 1"/>
+          <p:cNvSpPr>
+            <a:spLocks noGrp="1"/>
+          </p:cNvSpPr>
+          <p:nvPr>
+            <p:ph type="title"/>
+          </p:nvPr>
+        </p:nvSpPr>
+        <p:spPr/>
+        <p:txBody>
+          <a:bodyPr/>
+          <a:lstStyle/>
+          <a:p>
+            <a:r>
+              <a:rPr sz="3800" b="1">
+                <a:solidFill>
+                  <a:srgbClr val="1F2A37"/>
+                </a:solidFill>
+              </a:rPr>
+              <a:t>margin-bottom</a:t>
+            </a:r>
+          </a:p>
+        </p:txBody>
+      </p:sp>
+      <p:sp>
+        <p:nvSpPr>
+          <p:cNvPr id="3" name="TextBox 2"/>
+          <p:cNvSpPr txBox="1"/>
+          <p:nvPr/>
+        </p:nvSpPr>
+        <p:spPr>
+          <a:xfrm>
+            <a:off x="868680" y="502920"/>
+            <a:ext cx="5486400" cy="457200"/>
+          </a:xfrm>
+          <a:prstGeom prst="rect">
+            <a:avLst/>
+          </a:prstGeom>
+          <a:noFill/>
+        </p:spPr>
+        <p:txBody>
+          <a:bodyPr wrap="none">
+            <a:spAutoFit/>
+          </a:bodyPr>
+          <a:lstStyle/>
+          <a:p>
+            <a:r>
+              <a:rPr sz="1500" b="1">
+                <a:solidFill>
+                  <a:srgbClr val="01AEFD"/>
+                </a:solidFill>
+              </a:rPr>
+              <a:t>CSS</a:t>
+            </a:r>
+          </a:p>
+        </p:txBody>
+      </p:sp>
+      <p:sp>
+        <p:nvSpPr>
+          <p:cNvPr id="4" name="TextBox 3"/>
+          <p:cNvSpPr txBox="1"/>
+          <p:nvPr/>
+        </p:nvSpPr>
+        <p:spPr>
+          <a:xfrm>
+            <a:off x="822960" y="1828800"/>
+            <a:ext cx="10515600" cy="4206240"/>
+          </a:xfrm>
+          <a:prstGeom prst="rect">
+            <a:avLst/>
+          </a:prstGeom>
+          <a:noFill/>
+        </p:spPr>
+        <p:txBody>
+          <a:bodyPr wrap="square">
+            <a:spAutoFit/>
+          </a:bodyPr>
+          <a:lstStyle/>
+          <a:p>
+            <a:pPr>
+              <a:spcAft>
+                <a:spcPts val="1400"/>
+              </a:spcAft>
+            </a:pPr>
+            <a:r>
+              <a:rPr sz="2800">
+                <a:solidFill>
+                  <a:srgbClr val="01AEFD"/>
+                </a:solidFill>
+              </a:rPr>
+              <a:t>margin-bottom: 12px;</a:t>
+            </a:r>
+          </a:p>
+          <a:p>
+            <a:pPr>
+              <a:spcAft>
+                <a:spcPts val="1400"/>
+              </a:spcAft>
+            </a:pPr>
+            <a:r>
+              <a:rPr sz="2400">
+                <a:solidFill>
+                  <a:srgbClr val="1F2A37"/>
+                </a:solidFill>
+              </a:rPr>
+              <a:t>• Space BELOW the box, pushing whatever comes next further down.</a:t>
+            </a:r>
+          </a:p>
+          <a:p>
+            <a:pPr>
+              <a:spcAft>
+                <a:spcPts val="1400"/>
+              </a:spcAft>
+            </a:pPr>
+            <a:r>
+              <a:rPr sz="2400">
+                <a:solidFill>
+                  <a:srgbClr val="1F2A37"/>
+                </a:solidFill>
+              </a:rPr>
+              <a:t>• It is one side of margin (week 1), which spaced all four sides at once.</a:t>
+            </a:r>
+          </a:p>
+          <a:p>
+            <a:pPr>
+              <a:spcAft>
+                <a:spcPts val="1400"/>
+              </a:spcAft>
+            </a:pPr>
+            <a:r>
+              <a:rPr sz="2400">
+                <a:solidFill>
+                  <a:srgbClr val="1F2A37"/>
+                </a:solidFill>
+              </a:rPr>
+              <a:t>• margin-bottom: 12px leaves a 12-pixel gap under it.</a:t>
             </a:r>
           </a:p>
         </p:txBody>
@@ -4275,6 +4748,14 @@
 <file path=ppt/slides/slide16.xml><?xml version="1.0" encoding="utf-8"?>
 <p:sld xmlns:a="http://schemas.openxmlformats.org/drawingml/2006/main" xmlns:p="http://schemas.openxmlformats.org/presentationml/2006/main" xmlns:r="http://schemas.openxmlformats.org/officeDocument/2006/relationships">
   <p:cSld>
+    <p:bg>
+      <p:bgPr>
+        <a:solidFill>
+          <a:srgbClr val="F4F8FB"/>
+        </a:solidFill>
+        <a:effectLst/>
+      </p:bgPr>
+    </p:bg>
     <p:spTree>
       <p:nvGrpSpPr>
         <p:cNvPr id="1" name=""/>
@@ -4284,40 +4765,14 @@
       <p:grpSpPr/>
       <p:sp>
         <p:nvSpPr>
-          <p:cNvPr id="2" name="Title 1"/>
-          <p:cNvSpPr>
-            <a:spLocks noGrp="1"/>
-          </p:cNvSpPr>
-          <p:nvPr>
-            <p:ph type="title"/>
-          </p:nvPr>
-        </p:nvSpPr>
-        <p:spPr/>
-        <p:txBody>
-          <a:bodyPr/>
-          <a:lstStyle/>
-          <a:p>
-            <a:r>
-              <a:rPr sz="3800" b="1">
-                <a:solidFill>
-                  <a:srgbClr val="1F2A37"/>
-                </a:solidFill>
-              </a:rPr>
-              <a:t>font-weight</a:t>
-            </a:r>
-          </a:p>
-        </p:txBody>
-      </p:sp>
-      <p:sp>
-        <p:nvSpPr>
-          <p:cNvPr id="3" name="TextBox 2"/>
+          <p:cNvPr id="2" name="TextBox 1"/>
           <p:cNvSpPr txBox="1"/>
           <p:nvPr/>
         </p:nvSpPr>
         <p:spPr>
           <a:xfrm>
-            <a:off x="868680" y="502920"/>
-            <a:ext cx="5486400" cy="457200"/>
+            <a:off x="822960" y="365760"/>
+            <a:ext cx="7315200" cy="365760"/>
           </a:xfrm>
           <a:prstGeom prst="rect">
             <a:avLst/>
@@ -4331,26 +4786,543 @@
           <a:lstStyle/>
           <a:p>
             <a:r>
-              <a:rPr sz="1500" b="1">
+              <a:rPr sz="1400" b="1">
                 <a:solidFill>
                   <a:srgbClr val="01AEFD"/>
                 </a:solidFill>
               </a:rPr>
-              <a:t>CSS</a:t>
-            </a:r>
-          </a:p>
-        </p:txBody>
-      </p:sp>
-      <p:sp>
-        <p:nvSpPr>
-          <p:cNvPr id="4" name="TextBox 3"/>
+              <a:t>ON THE PAGE</a:t>
+            </a:r>
+          </a:p>
+        </p:txBody>
+      </p:sp>
+      <p:sp>
+        <p:nvSpPr>
+          <p:cNvPr id="3" name="TextBox 2"/>
           <p:cNvSpPr txBox="1"/>
           <p:nvPr/>
         </p:nvSpPr>
         <p:spPr>
           <a:xfrm>
-            <a:off x="822960" y="1828800"/>
-            <a:ext cx="10515600" cy="4206240"/>
+            <a:off x="822960" y="658368"/>
+            <a:ext cx="10515600" cy="731520"/>
+          </a:xfrm>
+          <a:prstGeom prst="rect">
+            <a:avLst/>
+          </a:prstGeom>
+          <a:noFill/>
+        </p:spPr>
+        <p:txBody>
+          <a:bodyPr wrap="none">
+            <a:spAutoFit/>
+          </a:bodyPr>
+          <a:lstStyle/>
+          <a:p>
+            <a:r>
+              <a:rPr sz="3200" b="1">
+                <a:solidFill>
+                  <a:srgbClr val="1F2A37"/>
+                </a:solidFill>
+              </a:rPr>
+              <a:t>margin-bottom</a:t>
+            </a:r>
+          </a:p>
+        </p:txBody>
+      </p:sp>
+      <p:sp>
+        <p:nvSpPr>
+          <p:cNvPr id="4" name="Rounded Rectangle 3"/>
+          <p:cNvSpPr/>
+          <p:nvPr/>
+        </p:nvSpPr>
+        <p:spPr>
+          <a:xfrm>
+            <a:off x="3454237" y="1641896"/>
+            <a:ext cx="5249387" cy="3918021"/>
+          </a:xfrm>
+          <a:prstGeom prst="roundRect">
+            <a:avLst/>
+          </a:prstGeom>
+          <a:solidFill>
+            <a:srgbClr val="0F1F27"/>
+          </a:solidFill>
+          <a:ln>
+            <a:noFill/>
+          </a:ln>
+          <a:effectLst/>
+        </p:spPr>
+        <p:style>
+          <a:lnRef idx="1">
+            <a:schemeClr val="accent1"/>
+          </a:lnRef>
+          <a:fillRef idx="3">
+            <a:schemeClr val="accent1"/>
+          </a:fillRef>
+          <a:effectRef idx="2">
+            <a:schemeClr val="accent1"/>
+          </a:effectRef>
+          <a:fontRef idx="minor">
+            <a:schemeClr val="lt1"/>
+          </a:fontRef>
+        </p:style>
+        <p:txBody>
+          <a:bodyPr rtlCol="0" anchor="ctr"/>
+          <a:lstStyle/>
+          <a:p>
+            <a:pPr algn="ctr"/>
+          </a:p>
+        </p:txBody>
+      </p:sp>
+      <p:sp>
+        <p:nvSpPr>
+          <p:cNvPr id="5" name="Rounded Rectangle 4"/>
+          <p:cNvSpPr/>
+          <p:nvPr/>
+        </p:nvSpPr>
+        <p:spPr>
+          <a:xfrm>
+            <a:off x="3606393" y="2022287"/>
+            <a:ext cx="4945075" cy="437448"/>
+          </a:xfrm>
+          <a:prstGeom prst="roundRect">
+            <a:avLst/>
+          </a:prstGeom>
+          <a:solidFill>
+            <a:srgbClr val="16303A"/>
+          </a:solidFill>
+          <a:ln>
+            <a:noFill/>
+          </a:ln>
+          <a:effectLst/>
+        </p:spPr>
+        <p:style>
+          <a:lnRef idx="1">
+            <a:schemeClr val="accent1"/>
+          </a:lnRef>
+          <a:fillRef idx="3">
+            <a:schemeClr val="accent1"/>
+          </a:fillRef>
+          <a:effectRef idx="2">
+            <a:schemeClr val="accent1"/>
+          </a:effectRef>
+          <a:fontRef idx="minor">
+            <a:schemeClr val="lt1"/>
+          </a:fontRef>
+        </p:style>
+        <p:txBody>
+          <a:bodyPr rtlCol="0" anchor="ctr"/>
+          <a:lstStyle/>
+          <a:p>
+            <a:pPr algn="ctr"/>
+          </a:p>
+        </p:txBody>
+      </p:sp>
+      <p:sp>
+        <p:nvSpPr>
+          <p:cNvPr id="6" name="Rounded Rectangle 5"/>
+          <p:cNvSpPr/>
+          <p:nvPr/>
+        </p:nvSpPr>
+        <p:spPr>
+          <a:xfrm>
+            <a:off x="3720510" y="2155423"/>
+            <a:ext cx="1426463" cy="190195"/>
+          </a:xfrm>
+          <a:prstGeom prst="roundRect">
+            <a:avLst/>
+          </a:prstGeom>
+          <a:solidFill>
+            <a:srgbClr val="4A6B78"/>
+          </a:solidFill>
+          <a:ln>
+            <a:noFill/>
+          </a:ln>
+          <a:effectLst/>
+        </p:spPr>
+        <p:style>
+          <a:lnRef idx="1">
+            <a:schemeClr val="accent1"/>
+          </a:lnRef>
+          <a:fillRef idx="3">
+            <a:schemeClr val="accent1"/>
+          </a:fillRef>
+          <a:effectRef idx="2">
+            <a:schemeClr val="accent1"/>
+          </a:effectRef>
+          <a:fontRef idx="minor">
+            <a:schemeClr val="lt1"/>
+          </a:fontRef>
+        </p:style>
+        <p:txBody>
+          <a:bodyPr rtlCol="0" anchor="ctr"/>
+          <a:lstStyle/>
+          <a:p>
+            <a:pPr algn="ctr"/>
+          </a:p>
+        </p:txBody>
+      </p:sp>
+      <p:sp>
+        <p:nvSpPr>
+          <p:cNvPr id="7" name="Rounded Rectangle 6"/>
+          <p:cNvSpPr/>
+          <p:nvPr/>
+        </p:nvSpPr>
+        <p:spPr>
+          <a:xfrm>
+            <a:off x="3606393" y="2554833"/>
+            <a:ext cx="4945075" cy="1806854"/>
+          </a:xfrm>
+          <a:prstGeom prst="roundRect">
+            <a:avLst/>
+          </a:prstGeom>
+          <a:solidFill>
+            <a:srgbClr val="0B171D"/>
+          </a:solidFill>
+          <a:ln>
+            <a:noFill/>
+          </a:ln>
+          <a:effectLst/>
+        </p:spPr>
+        <p:style>
+          <a:lnRef idx="1">
+            <a:schemeClr val="accent1"/>
+          </a:lnRef>
+          <a:fillRef idx="3">
+            <a:schemeClr val="accent1"/>
+          </a:fillRef>
+          <a:effectRef idx="2">
+            <a:schemeClr val="accent1"/>
+          </a:effectRef>
+          <a:fontRef idx="minor">
+            <a:schemeClr val="lt1"/>
+          </a:fontRef>
+        </p:style>
+        <p:txBody>
+          <a:bodyPr rtlCol="0" anchor="ctr"/>
+          <a:lstStyle/>
+          <a:p>
+            <a:pPr algn="ctr"/>
+          </a:p>
+        </p:txBody>
+      </p:sp>
+      <p:sp>
+        <p:nvSpPr>
+          <p:cNvPr id="8" name="Rounded Rectangle 7"/>
+          <p:cNvSpPr/>
+          <p:nvPr/>
+        </p:nvSpPr>
+        <p:spPr>
+          <a:xfrm>
+            <a:off x="3720510" y="2668950"/>
+            <a:ext cx="2852927" cy="399409"/>
+          </a:xfrm>
+          <a:prstGeom prst="roundRect">
+            <a:avLst/>
+          </a:prstGeom>
+          <a:solidFill>
+            <a:srgbClr val="1B3540"/>
+          </a:solidFill>
+          <a:ln>
+            <a:noFill/>
+          </a:ln>
+          <a:effectLst/>
+        </p:spPr>
+        <p:style>
+          <a:lnRef idx="1">
+            <a:schemeClr val="accent1"/>
+          </a:lnRef>
+          <a:fillRef idx="3">
+            <a:schemeClr val="accent1"/>
+          </a:fillRef>
+          <a:effectRef idx="2">
+            <a:schemeClr val="accent1"/>
+          </a:effectRef>
+          <a:fontRef idx="minor">
+            <a:schemeClr val="lt1"/>
+          </a:fontRef>
+        </p:style>
+        <p:txBody>
+          <a:bodyPr rtlCol="0" anchor="ctr"/>
+          <a:lstStyle/>
+          <a:p>
+            <a:pPr algn="ctr"/>
+          </a:p>
+        </p:txBody>
+      </p:sp>
+      <p:sp>
+        <p:nvSpPr>
+          <p:cNvPr id="9" name="Rounded Rectangle 8"/>
+          <p:cNvSpPr/>
+          <p:nvPr/>
+        </p:nvSpPr>
+        <p:spPr>
+          <a:xfrm>
+            <a:off x="5584423" y="3182477"/>
+            <a:ext cx="2852927" cy="399409"/>
+          </a:xfrm>
+          <a:prstGeom prst="roundRect">
+            <a:avLst/>
+          </a:prstGeom>
+          <a:solidFill>
+            <a:srgbClr val="123A32"/>
+          </a:solidFill>
+          <a:ln>
+            <a:noFill/>
+          </a:ln>
+          <a:effectLst/>
+        </p:spPr>
+        <p:style>
+          <a:lnRef idx="1">
+            <a:schemeClr val="accent1"/>
+          </a:lnRef>
+          <a:fillRef idx="3">
+            <a:schemeClr val="accent1"/>
+          </a:fillRef>
+          <a:effectRef idx="2">
+            <a:schemeClr val="accent1"/>
+          </a:effectRef>
+          <a:fontRef idx="minor">
+            <a:schemeClr val="lt1"/>
+          </a:fontRef>
+        </p:style>
+        <p:txBody>
+          <a:bodyPr rtlCol="0" anchor="ctr"/>
+          <a:lstStyle/>
+          <a:p>
+            <a:pPr algn="ctr"/>
+          </a:p>
+        </p:txBody>
+      </p:sp>
+      <p:sp>
+        <p:nvSpPr>
+          <p:cNvPr id="10" name="Rounded Rectangle 9"/>
+          <p:cNvSpPr/>
+          <p:nvPr/>
+        </p:nvSpPr>
+        <p:spPr>
+          <a:xfrm>
+            <a:off x="3720510" y="3696004"/>
+            <a:ext cx="3138220" cy="399409"/>
+          </a:xfrm>
+          <a:prstGeom prst="roundRect">
+            <a:avLst/>
+          </a:prstGeom>
+          <a:solidFill>
+            <a:srgbClr val="1B3540"/>
+          </a:solidFill>
+          <a:ln>
+            <a:noFill/>
+          </a:ln>
+          <a:effectLst/>
+        </p:spPr>
+        <p:style>
+          <a:lnRef idx="1">
+            <a:schemeClr val="accent1"/>
+          </a:lnRef>
+          <a:fillRef idx="3">
+            <a:schemeClr val="accent1"/>
+          </a:fillRef>
+          <a:effectRef idx="2">
+            <a:schemeClr val="accent1"/>
+          </a:effectRef>
+          <a:fontRef idx="minor">
+            <a:schemeClr val="lt1"/>
+          </a:fontRef>
+        </p:style>
+        <p:txBody>
+          <a:bodyPr rtlCol="0" anchor="ctr"/>
+          <a:lstStyle/>
+          <a:p>
+            <a:pPr algn="ctr"/>
+          </a:p>
+        </p:txBody>
+      </p:sp>
+      <p:sp>
+        <p:nvSpPr>
+          <p:cNvPr id="11" name="Rounded Rectangle 10"/>
+          <p:cNvSpPr/>
+          <p:nvPr/>
+        </p:nvSpPr>
+        <p:spPr>
+          <a:xfrm>
+            <a:off x="3701491" y="4856195"/>
+            <a:ext cx="3899001" cy="323331"/>
+          </a:xfrm>
+          <a:prstGeom prst="roundRect">
+            <a:avLst/>
+          </a:prstGeom>
+          <a:solidFill>
+            <a:srgbClr val="16303A"/>
+          </a:solidFill>
+          <a:ln>
+            <a:noFill/>
+          </a:ln>
+          <a:effectLst/>
+        </p:spPr>
+        <p:style>
+          <a:lnRef idx="1">
+            <a:schemeClr val="accent1"/>
+          </a:lnRef>
+          <a:fillRef idx="3">
+            <a:schemeClr val="accent1"/>
+          </a:fillRef>
+          <a:effectRef idx="2">
+            <a:schemeClr val="accent1"/>
+          </a:effectRef>
+          <a:fontRef idx="minor">
+            <a:schemeClr val="lt1"/>
+          </a:fontRef>
+        </p:style>
+        <p:txBody>
+          <a:bodyPr rtlCol="0" anchor="ctr"/>
+          <a:lstStyle/>
+          <a:p>
+            <a:pPr algn="ctr"/>
+          </a:p>
+        </p:txBody>
+      </p:sp>
+      <p:sp>
+        <p:nvSpPr>
+          <p:cNvPr id="12" name="Rounded Rectangle 11"/>
+          <p:cNvSpPr/>
+          <p:nvPr/>
+        </p:nvSpPr>
+        <p:spPr>
+          <a:xfrm>
+            <a:off x="7695590" y="4856195"/>
+            <a:ext cx="779800" cy="323331"/>
+          </a:xfrm>
+          <a:prstGeom prst="roundRect">
+            <a:avLst/>
+          </a:prstGeom>
+          <a:solidFill>
+            <a:srgbClr val="01AEFD"/>
+          </a:solidFill>
+          <a:ln>
+            <a:noFill/>
+          </a:ln>
+          <a:effectLst/>
+        </p:spPr>
+        <p:style>
+          <a:lnRef idx="1">
+            <a:schemeClr val="accent1"/>
+          </a:lnRef>
+          <a:fillRef idx="3">
+            <a:schemeClr val="accent1"/>
+          </a:fillRef>
+          <a:effectRef idx="2">
+            <a:schemeClr val="accent1"/>
+          </a:effectRef>
+          <a:fontRef idx="minor">
+            <a:schemeClr val="lt1"/>
+          </a:fontRef>
+        </p:style>
+        <p:txBody>
+          <a:bodyPr rtlCol="0" anchor="ctr"/>
+          <a:lstStyle/>
+          <a:p>
+            <a:pPr algn="ctr"/>
+          </a:p>
+        </p:txBody>
+      </p:sp>
+      <p:sp>
+        <p:nvSpPr>
+          <p:cNvPr id="13" name="Rounded Rectangle 12"/>
+          <p:cNvSpPr/>
+          <p:nvPr/>
+        </p:nvSpPr>
+        <p:spPr>
+          <a:xfrm>
+            <a:off x="3720510" y="5407761"/>
+            <a:ext cx="1616659" cy="95097"/>
+          </a:xfrm>
+          <a:prstGeom prst="roundRect">
+            <a:avLst/>
+          </a:prstGeom>
+          <a:solidFill>
+            <a:srgbClr val="2A4550"/>
+          </a:solidFill>
+          <a:ln>
+            <a:noFill/>
+          </a:ln>
+          <a:effectLst/>
+        </p:spPr>
+        <p:style>
+          <a:lnRef idx="1">
+            <a:schemeClr val="accent1"/>
+          </a:lnRef>
+          <a:fillRef idx="3">
+            <a:schemeClr val="accent1"/>
+          </a:fillRef>
+          <a:effectRef idx="2">
+            <a:schemeClr val="accent1"/>
+          </a:effectRef>
+          <a:fontRef idx="minor">
+            <a:schemeClr val="lt1"/>
+          </a:fontRef>
+        </p:style>
+        <p:txBody>
+          <a:bodyPr rtlCol="0" anchor="ctr"/>
+          <a:lstStyle/>
+          <a:p>
+            <a:pPr algn="ctr"/>
+          </a:p>
+        </p:txBody>
+      </p:sp>
+      <p:sp>
+        <p:nvSpPr>
+          <p:cNvPr id="14" name="Rounded Rectangle 13"/>
+          <p:cNvSpPr/>
+          <p:nvPr/>
+        </p:nvSpPr>
+        <p:spPr>
+          <a:xfrm>
+            <a:off x="3682471" y="2630911"/>
+            <a:ext cx="2929006" cy="475488"/>
+          </a:xfrm>
+          <a:prstGeom prst="roundRect">
+            <a:avLst/>
+          </a:prstGeom>
+          <a:noFill/>
+          <a:ln w="44450">
+            <a:solidFill>
+              <a:srgbClr val="FFD633"/>
+            </a:solidFill>
+          </a:ln>
+          <a:effectLst/>
+        </p:spPr>
+        <p:style>
+          <a:lnRef idx="1">
+            <a:schemeClr val="accent1"/>
+          </a:lnRef>
+          <a:fillRef idx="3">
+            <a:schemeClr val="accent1"/>
+          </a:fillRef>
+          <a:effectRef idx="2">
+            <a:schemeClr val="accent1"/>
+          </a:effectRef>
+          <a:fontRef idx="minor">
+            <a:schemeClr val="lt1"/>
+          </a:fontRef>
+        </p:style>
+        <p:txBody>
+          <a:bodyPr rtlCol="0" anchor="ctr"/>
+          <a:lstStyle/>
+          <a:p>
+            <a:pPr algn="ctr"/>
+          </a:p>
+        </p:txBody>
+      </p:sp>
+      <p:sp>
+        <p:nvSpPr>
+          <p:cNvPr id="15" name="TextBox 14"/>
+          <p:cNvSpPr txBox="1"/>
+          <p:nvPr/>
+        </p:nvSpPr>
+        <p:spPr>
+          <a:xfrm>
+            <a:off x="822960" y="6172200"/>
+            <a:ext cx="10515600" cy="548640"/>
           </a:xfrm>
           <a:prstGeom prst="rect">
             <a:avLst/>
@@ -4363,63 +5335,13 @@
           </a:bodyPr>
           <a:lstStyle/>
           <a:p>
-            <a:pPr>
-              <a:spcAft>
-                <a:spcPts val="1400"/>
-              </a:spcAft>
-            </a:pPr>
-            <a:r>
-              <a:rPr sz="2800">
-                <a:solidFill>
-                  <a:srgbClr val="01AEFD"/>
-                </a:solidFill>
-              </a:rPr>
-              <a:t>font-weight: bold;</a:t>
-            </a:r>
-          </a:p>
-          <a:p>
-            <a:pPr>
-              <a:spcAft>
-                <a:spcPts val="1400"/>
-              </a:spcAft>
-            </a:pPr>
-            <a:r>
-              <a:rPr sz="2400">
-                <a:solidFill>
-                  <a:srgbClr val="1F2A37"/>
-                </a:solidFill>
-              </a:rPr>
-              <a:t>• How heavy the text is - bold stands out, normal is regular.</a:t>
-            </a:r>
-          </a:p>
-          <a:p>
-            <a:pPr>
-              <a:spcAft>
-                <a:spcPts val="1400"/>
-              </a:spcAft>
-            </a:pPr>
-            <a:r>
-              <a:rPr sz="2400">
-                <a:solidFill>
-                  <a:srgbClr val="1F2A37"/>
-                </a:solidFill>
-              </a:rPr>
-              <a:t>• A cousin of font-size and font-family (week 1): all three shape the text.</a:t>
-            </a:r>
-          </a:p>
-          <a:p>
-            <a:pPr>
-              <a:spcAft>
-                <a:spcPts val="1400"/>
-              </a:spcAft>
-            </a:pPr>
-            <a:r>
-              <a:rPr sz="2400">
-                <a:solidFill>
-                  <a:srgbClr val="1F2A37"/>
-                </a:solidFill>
-              </a:rPr>
-              <a:t>• bold makes the label read like a button you can press.</a:t>
+            <a:r>
+              <a:rPr sz="2000">
+                <a:solidFill>
+                  <a:srgbClr val="0A6299"/>
+                </a:solidFill>
+              </a:rPr>
+              <a:t>margin-bottom spaces a bubble from the next.</a:t>
             </a:r>
           </a:p>
         </p:txBody>
@@ -4478,7 +5400,7 @@
                   <a:srgbClr val="01AEFD"/>
                 </a:solidFill>
               </a:rPr>
-              <a:t>Type this into style.css   -   line 22</a:t>
+              <a:t>Type this into style.css   -   line 21</a:t>
             </a:r>
           </a:p>
         </p:txBody>
@@ -4522,36 +5444,11 @@
             <a:r>
               <a:rPr sz="1800">
                 <a:solidFill>
-                  <a:srgbClr val="6D8C97"/>
+                  <a:srgbClr val="7FE0A0"/>
                 </a:solidFill>
                 <a:latin typeface="Consolas"/>
               </a:rPr>
               <a:t>.setup { margin-bottom: 12px; font-size: 14px; }</a:t>
-            </a:r>
-          </a:p>
-          <a:p>
-            <a:pPr>
-              <a:spcAft>
-                <a:spcPts val="0"/>
-              </a:spcAft>
-            </a:pPr>
-            <a:r>
-              <a:rPr sz="1800">
-                <a:solidFill>
-                  <a:srgbClr val="6D8C97"/>
-                </a:solidFill>
-                <a:latin typeface="Consolas"/>
-              </a:rPr>
-              <a:t>  22  </a:t>
-            </a:r>
-            <a:r>
-              <a:rPr sz="1800">
-                <a:solidFill>
-                  <a:srgbClr val="7FE0A0"/>
-                </a:solidFill>
-                <a:latin typeface="Consolas"/>
-              </a:rPr>
-              <a:t>.setup summary { cursor: pointer; color: #0a6299; font-weight: bold; }</a:t>
             </a:r>
           </a:p>
         </p:txBody>
@@ -4584,7 +5481,7 @@
                   <a:srgbClr val="DCECEF"/>
                 </a:solidFill>
               </a:rPr>
-              <a:t>Style the clickable label: a hand pointer, a blue colour, and bold so it reads as a button.</a:t>
+              <a:t>Style the whole panel: a gap below it, and slightly smaller text.</a:t>
             </a:r>
           </a:p>
         </p:txBody>
@@ -4600,10 +5497,170 @@
 <file path=ppt/slides/slide18.xml><?xml version="1.0" encoding="utf-8"?>
 <p:sld xmlns:a="http://schemas.openxmlformats.org/drawingml/2006/main" xmlns:p="http://schemas.openxmlformats.org/presentationml/2006/main" xmlns:r="http://schemas.openxmlformats.org/officeDocument/2006/relationships">
   <p:cSld>
+    <p:spTree>
+      <p:nvGrpSpPr>
+        <p:cNvPr id="1" name=""/>
+        <p:cNvGrpSpPr/>
+        <p:nvPr/>
+      </p:nvGrpSpPr>
+      <p:grpSpPr/>
+      <p:sp>
+        <p:nvSpPr>
+          <p:cNvPr id="2" name="Title 1"/>
+          <p:cNvSpPr>
+            <a:spLocks noGrp="1"/>
+          </p:cNvSpPr>
+          <p:nvPr>
+            <p:ph type="title"/>
+          </p:nvPr>
+        </p:nvSpPr>
+        <p:spPr/>
+        <p:txBody>
+          <a:bodyPr/>
+          <a:lstStyle/>
+          <a:p>
+            <a:r>
+              <a:rPr sz="3800" b="1">
+                <a:solidFill>
+                  <a:srgbClr val="1F2A37"/>
+                </a:solidFill>
+              </a:rPr>
+              <a:t>font-weight</a:t>
+            </a:r>
+          </a:p>
+        </p:txBody>
+      </p:sp>
+      <p:sp>
+        <p:nvSpPr>
+          <p:cNvPr id="3" name="TextBox 2"/>
+          <p:cNvSpPr txBox="1"/>
+          <p:nvPr/>
+        </p:nvSpPr>
+        <p:spPr>
+          <a:xfrm>
+            <a:off x="868680" y="502920"/>
+            <a:ext cx="5486400" cy="457200"/>
+          </a:xfrm>
+          <a:prstGeom prst="rect">
+            <a:avLst/>
+          </a:prstGeom>
+          <a:noFill/>
+        </p:spPr>
+        <p:txBody>
+          <a:bodyPr wrap="none">
+            <a:spAutoFit/>
+          </a:bodyPr>
+          <a:lstStyle/>
+          <a:p>
+            <a:r>
+              <a:rPr sz="1500" b="1">
+                <a:solidFill>
+                  <a:srgbClr val="01AEFD"/>
+                </a:solidFill>
+              </a:rPr>
+              <a:t>CSS</a:t>
+            </a:r>
+          </a:p>
+        </p:txBody>
+      </p:sp>
+      <p:sp>
+        <p:nvSpPr>
+          <p:cNvPr id="4" name="TextBox 3"/>
+          <p:cNvSpPr txBox="1"/>
+          <p:nvPr/>
+        </p:nvSpPr>
+        <p:spPr>
+          <a:xfrm>
+            <a:off x="822960" y="1828800"/>
+            <a:ext cx="10515600" cy="4206240"/>
+          </a:xfrm>
+          <a:prstGeom prst="rect">
+            <a:avLst/>
+          </a:prstGeom>
+          <a:noFill/>
+        </p:spPr>
+        <p:txBody>
+          <a:bodyPr wrap="square">
+            <a:spAutoFit/>
+          </a:bodyPr>
+          <a:lstStyle/>
+          <a:p>
+            <a:pPr>
+              <a:spcAft>
+                <a:spcPts val="1400"/>
+              </a:spcAft>
+            </a:pPr>
+            <a:r>
+              <a:rPr sz="2800">
+                <a:solidFill>
+                  <a:srgbClr val="01AEFD"/>
+                </a:solidFill>
+              </a:rPr>
+              <a:t>font-weight: bold;</a:t>
+            </a:r>
+          </a:p>
+          <a:p>
+            <a:pPr>
+              <a:spcAft>
+                <a:spcPts val="1400"/>
+              </a:spcAft>
+            </a:pPr>
+            <a:r>
+              <a:rPr sz="2400">
+                <a:solidFill>
+                  <a:srgbClr val="1F2A37"/>
+                </a:solidFill>
+              </a:rPr>
+              <a:t>• How heavy the text is - bold stands out, normal is regular.</a:t>
+            </a:r>
+          </a:p>
+          <a:p>
+            <a:pPr>
+              <a:spcAft>
+                <a:spcPts val="1400"/>
+              </a:spcAft>
+            </a:pPr>
+            <a:r>
+              <a:rPr sz="2400">
+                <a:solidFill>
+                  <a:srgbClr val="1F2A37"/>
+                </a:solidFill>
+              </a:rPr>
+              <a:t>• A cousin of font-size and font-family (week 1): all three shape the text.</a:t>
+            </a:r>
+          </a:p>
+          <a:p>
+            <a:pPr>
+              <a:spcAft>
+                <a:spcPts val="1400"/>
+              </a:spcAft>
+            </a:pPr>
+            <a:r>
+              <a:rPr sz="2400">
+                <a:solidFill>
+                  <a:srgbClr val="1F2A37"/>
+                </a:solidFill>
+              </a:rPr>
+              <a:t>• bold makes the label read like a button you can press.</a:t>
+            </a:r>
+          </a:p>
+        </p:txBody>
+      </p:sp>
+    </p:spTree>
+  </p:cSld>
+  <p:clrMapOvr>
+    <a:masterClrMapping/>
+  </p:clrMapOvr>
+</p:sld>
+</file>
+
+<file path=ppt/slides/slide19.xml><?xml version="1.0" encoding="utf-8"?>
+<p:sld xmlns:a="http://schemas.openxmlformats.org/drawingml/2006/main" xmlns:p="http://schemas.openxmlformats.org/presentationml/2006/main" xmlns:r="http://schemas.openxmlformats.org/officeDocument/2006/relationships">
+  <p:cSld>
     <p:bg>
       <p:bgPr>
         <a:solidFill>
-          <a:srgbClr val="102127"/>
+          <a:srgbClr val="F4F8FB"/>
         </a:solidFill>
         <a:effectLst/>
       </p:bgPr>
@@ -4623,8 +5680,8 @@
         </p:nvSpPr>
         <p:spPr>
           <a:xfrm>
-            <a:off x="502920" y="274320"/>
-            <a:ext cx="11155680" cy="548640"/>
+            <a:off x="822960" y="365760"/>
+            <a:ext cx="7315200" cy="365760"/>
           </a:xfrm>
           <a:prstGeom prst="rect">
             <a:avLst/>
@@ -4638,12 +5695,12 @@
           <a:lstStyle/>
           <a:p>
             <a:r>
-              <a:rPr sz="2200" b="1">
+              <a:rPr sz="1400" b="1">
                 <a:solidFill>
                   <a:srgbClr val="01AEFD"/>
                 </a:solidFill>
               </a:rPr>
-              <a:t>Type this into style.css   -   line 23</a:t>
+              <a:t>ON THE PAGE</a:t>
             </a:r>
           </a:p>
         </p:txBody>
@@ -4656,8 +5713,8 @@
         </p:nvSpPr>
         <p:spPr>
           <a:xfrm>
-            <a:off x="502920" y="960120"/>
-            <a:ext cx="11155680" cy="4297680"/>
+            <a:off x="822960" y="658368"/>
+            <a:ext cx="10515600" cy="731520"/>
           </a:xfrm>
           <a:prstGeom prst="rect">
             <a:avLst/>
@@ -4670,92 +5727,511 @@
           </a:bodyPr>
           <a:lstStyle/>
           <a:p>
-            <a:pPr>
-              <a:spcAft>
-                <a:spcPts val="0"/>
-              </a:spcAft>
-            </a:pPr>
-            <a:r>
-              <a:rPr sz="1800">
-                <a:solidFill>
-                  <a:srgbClr val="6D8C97"/>
-                </a:solidFill>
-                <a:latin typeface="Consolas"/>
-              </a:rPr>
-              <a:t>  21  </a:t>
-            </a:r>
-            <a:r>
-              <a:rPr sz="1800">
-                <a:solidFill>
-                  <a:srgbClr val="6D8C97"/>
-                </a:solidFill>
-                <a:latin typeface="Consolas"/>
-              </a:rPr>
-              <a:t>.setup { margin-bottom: 12px; font-size: 14px; }</a:t>
-            </a:r>
-          </a:p>
-          <a:p>
-            <a:pPr>
-              <a:spcAft>
-                <a:spcPts val="0"/>
-              </a:spcAft>
-            </a:pPr>
-            <a:r>
-              <a:rPr sz="1800">
-                <a:solidFill>
-                  <a:srgbClr val="6D8C97"/>
-                </a:solidFill>
-                <a:latin typeface="Consolas"/>
-              </a:rPr>
-              <a:t>  22  </a:t>
-            </a:r>
-            <a:r>
-              <a:rPr sz="1800">
-                <a:solidFill>
-                  <a:srgbClr val="6D8C97"/>
-                </a:solidFill>
-                <a:latin typeface="Consolas"/>
-              </a:rPr>
-              <a:t>.setup summary { cursor: pointer; color: #0a6299; font-weight: bold; }</a:t>
-            </a:r>
-          </a:p>
-          <a:p>
-            <a:pPr>
-              <a:spcAft>
-                <a:spcPts val="0"/>
-              </a:spcAft>
-            </a:pPr>
-            <a:r>
-              <a:rPr sz="1800">
-                <a:solidFill>
-                  <a:srgbClr val="6D8C97"/>
-                </a:solidFill>
-                <a:latin typeface="Consolas"/>
-              </a:rPr>
-              <a:t>  23  </a:t>
-            </a:r>
-            <a:r>
-              <a:rPr sz="1800">
-                <a:solidFill>
-                  <a:srgbClr val="7FE0A0"/>
-                </a:solidFill>
-                <a:latin typeface="Consolas"/>
-              </a:rPr>
-              <a:t>.setup textarea {</a:t>
-            </a:r>
-          </a:p>
-        </p:txBody>
-      </p:sp>
-      <p:sp>
-        <p:nvSpPr>
-          <p:cNvPr id="4" name="TextBox 3"/>
+            <a:r>
+              <a:rPr sz="3200" b="1">
+                <a:solidFill>
+                  <a:srgbClr val="1F2A37"/>
+                </a:solidFill>
+              </a:rPr>
+              <a:t>font-weight</a:t>
+            </a:r>
+          </a:p>
+        </p:txBody>
+      </p:sp>
+      <p:sp>
+        <p:nvSpPr>
+          <p:cNvPr id="4" name="Rounded Rectangle 3"/>
+          <p:cNvSpPr/>
+          <p:nvPr/>
+        </p:nvSpPr>
+        <p:spPr>
+          <a:xfrm>
+            <a:off x="3454237" y="1641896"/>
+            <a:ext cx="5249387" cy="3918021"/>
+          </a:xfrm>
+          <a:prstGeom prst="roundRect">
+            <a:avLst/>
+          </a:prstGeom>
+          <a:solidFill>
+            <a:srgbClr val="0F1F27"/>
+          </a:solidFill>
+          <a:ln>
+            <a:noFill/>
+          </a:ln>
+          <a:effectLst/>
+        </p:spPr>
+        <p:style>
+          <a:lnRef idx="1">
+            <a:schemeClr val="accent1"/>
+          </a:lnRef>
+          <a:fillRef idx="3">
+            <a:schemeClr val="accent1"/>
+          </a:fillRef>
+          <a:effectRef idx="2">
+            <a:schemeClr val="accent1"/>
+          </a:effectRef>
+          <a:fontRef idx="minor">
+            <a:schemeClr val="lt1"/>
+          </a:fontRef>
+        </p:style>
+        <p:txBody>
+          <a:bodyPr rtlCol="0" anchor="ctr"/>
+          <a:lstStyle/>
+          <a:p>
+            <a:pPr algn="ctr"/>
+          </a:p>
+        </p:txBody>
+      </p:sp>
+      <p:sp>
+        <p:nvSpPr>
+          <p:cNvPr id="5" name="Rounded Rectangle 4"/>
+          <p:cNvSpPr/>
+          <p:nvPr/>
+        </p:nvSpPr>
+        <p:spPr>
+          <a:xfrm>
+            <a:off x="3606393" y="2022287"/>
+            <a:ext cx="4945075" cy="437448"/>
+          </a:xfrm>
+          <a:prstGeom prst="roundRect">
+            <a:avLst/>
+          </a:prstGeom>
+          <a:solidFill>
+            <a:srgbClr val="16303A"/>
+          </a:solidFill>
+          <a:ln>
+            <a:noFill/>
+          </a:ln>
+          <a:effectLst/>
+        </p:spPr>
+        <p:style>
+          <a:lnRef idx="1">
+            <a:schemeClr val="accent1"/>
+          </a:lnRef>
+          <a:fillRef idx="3">
+            <a:schemeClr val="accent1"/>
+          </a:fillRef>
+          <a:effectRef idx="2">
+            <a:schemeClr val="accent1"/>
+          </a:effectRef>
+          <a:fontRef idx="minor">
+            <a:schemeClr val="lt1"/>
+          </a:fontRef>
+        </p:style>
+        <p:txBody>
+          <a:bodyPr rtlCol="0" anchor="ctr"/>
+          <a:lstStyle/>
+          <a:p>
+            <a:pPr algn="ctr"/>
+          </a:p>
+        </p:txBody>
+      </p:sp>
+      <p:sp>
+        <p:nvSpPr>
+          <p:cNvPr id="6" name="Rounded Rectangle 5"/>
+          <p:cNvSpPr/>
+          <p:nvPr/>
+        </p:nvSpPr>
+        <p:spPr>
+          <a:xfrm>
+            <a:off x="3720510" y="2155423"/>
+            <a:ext cx="1426463" cy="190195"/>
+          </a:xfrm>
+          <a:prstGeom prst="roundRect">
+            <a:avLst/>
+          </a:prstGeom>
+          <a:solidFill>
+            <a:srgbClr val="4A6B78"/>
+          </a:solidFill>
+          <a:ln>
+            <a:noFill/>
+          </a:ln>
+          <a:effectLst/>
+        </p:spPr>
+        <p:style>
+          <a:lnRef idx="1">
+            <a:schemeClr val="accent1"/>
+          </a:lnRef>
+          <a:fillRef idx="3">
+            <a:schemeClr val="accent1"/>
+          </a:fillRef>
+          <a:effectRef idx="2">
+            <a:schemeClr val="accent1"/>
+          </a:effectRef>
+          <a:fontRef idx="minor">
+            <a:schemeClr val="lt1"/>
+          </a:fontRef>
+        </p:style>
+        <p:txBody>
+          <a:bodyPr rtlCol="0" anchor="ctr"/>
+          <a:lstStyle/>
+          <a:p>
+            <a:pPr algn="ctr"/>
+          </a:p>
+        </p:txBody>
+      </p:sp>
+      <p:sp>
+        <p:nvSpPr>
+          <p:cNvPr id="7" name="Rounded Rectangle 6"/>
+          <p:cNvSpPr/>
+          <p:nvPr/>
+        </p:nvSpPr>
+        <p:spPr>
+          <a:xfrm>
+            <a:off x="3606393" y="2554833"/>
+            <a:ext cx="4945075" cy="1806854"/>
+          </a:xfrm>
+          <a:prstGeom prst="roundRect">
+            <a:avLst/>
+          </a:prstGeom>
+          <a:solidFill>
+            <a:srgbClr val="0B171D"/>
+          </a:solidFill>
+          <a:ln>
+            <a:noFill/>
+          </a:ln>
+          <a:effectLst/>
+        </p:spPr>
+        <p:style>
+          <a:lnRef idx="1">
+            <a:schemeClr val="accent1"/>
+          </a:lnRef>
+          <a:fillRef idx="3">
+            <a:schemeClr val="accent1"/>
+          </a:fillRef>
+          <a:effectRef idx="2">
+            <a:schemeClr val="accent1"/>
+          </a:effectRef>
+          <a:fontRef idx="minor">
+            <a:schemeClr val="lt1"/>
+          </a:fontRef>
+        </p:style>
+        <p:txBody>
+          <a:bodyPr rtlCol="0" anchor="ctr"/>
+          <a:lstStyle/>
+          <a:p>
+            <a:pPr algn="ctr"/>
+          </a:p>
+        </p:txBody>
+      </p:sp>
+      <p:sp>
+        <p:nvSpPr>
+          <p:cNvPr id="8" name="Rounded Rectangle 7"/>
+          <p:cNvSpPr/>
+          <p:nvPr/>
+        </p:nvSpPr>
+        <p:spPr>
+          <a:xfrm>
+            <a:off x="3720510" y="2668950"/>
+            <a:ext cx="2852927" cy="399409"/>
+          </a:xfrm>
+          <a:prstGeom prst="roundRect">
+            <a:avLst/>
+          </a:prstGeom>
+          <a:solidFill>
+            <a:srgbClr val="1B3540"/>
+          </a:solidFill>
+          <a:ln>
+            <a:noFill/>
+          </a:ln>
+          <a:effectLst/>
+        </p:spPr>
+        <p:style>
+          <a:lnRef idx="1">
+            <a:schemeClr val="accent1"/>
+          </a:lnRef>
+          <a:fillRef idx="3">
+            <a:schemeClr val="accent1"/>
+          </a:fillRef>
+          <a:effectRef idx="2">
+            <a:schemeClr val="accent1"/>
+          </a:effectRef>
+          <a:fontRef idx="minor">
+            <a:schemeClr val="lt1"/>
+          </a:fontRef>
+        </p:style>
+        <p:txBody>
+          <a:bodyPr rtlCol="0" anchor="ctr"/>
+          <a:lstStyle/>
+          <a:p>
+            <a:pPr algn="ctr"/>
+          </a:p>
+        </p:txBody>
+      </p:sp>
+      <p:sp>
+        <p:nvSpPr>
+          <p:cNvPr id="9" name="Rounded Rectangle 8"/>
+          <p:cNvSpPr/>
+          <p:nvPr/>
+        </p:nvSpPr>
+        <p:spPr>
+          <a:xfrm>
+            <a:off x="5584423" y="3182477"/>
+            <a:ext cx="2852927" cy="399409"/>
+          </a:xfrm>
+          <a:prstGeom prst="roundRect">
+            <a:avLst/>
+          </a:prstGeom>
+          <a:solidFill>
+            <a:srgbClr val="123A32"/>
+          </a:solidFill>
+          <a:ln>
+            <a:noFill/>
+          </a:ln>
+          <a:effectLst/>
+        </p:spPr>
+        <p:style>
+          <a:lnRef idx="1">
+            <a:schemeClr val="accent1"/>
+          </a:lnRef>
+          <a:fillRef idx="3">
+            <a:schemeClr val="accent1"/>
+          </a:fillRef>
+          <a:effectRef idx="2">
+            <a:schemeClr val="accent1"/>
+          </a:effectRef>
+          <a:fontRef idx="minor">
+            <a:schemeClr val="lt1"/>
+          </a:fontRef>
+        </p:style>
+        <p:txBody>
+          <a:bodyPr rtlCol="0" anchor="ctr"/>
+          <a:lstStyle/>
+          <a:p>
+            <a:pPr algn="ctr"/>
+          </a:p>
+        </p:txBody>
+      </p:sp>
+      <p:sp>
+        <p:nvSpPr>
+          <p:cNvPr id="10" name="Rounded Rectangle 9"/>
+          <p:cNvSpPr/>
+          <p:nvPr/>
+        </p:nvSpPr>
+        <p:spPr>
+          <a:xfrm>
+            <a:off x="3720510" y="3696004"/>
+            <a:ext cx="3138220" cy="399409"/>
+          </a:xfrm>
+          <a:prstGeom prst="roundRect">
+            <a:avLst/>
+          </a:prstGeom>
+          <a:solidFill>
+            <a:srgbClr val="1B3540"/>
+          </a:solidFill>
+          <a:ln>
+            <a:noFill/>
+          </a:ln>
+          <a:effectLst/>
+        </p:spPr>
+        <p:style>
+          <a:lnRef idx="1">
+            <a:schemeClr val="accent1"/>
+          </a:lnRef>
+          <a:fillRef idx="3">
+            <a:schemeClr val="accent1"/>
+          </a:fillRef>
+          <a:effectRef idx="2">
+            <a:schemeClr val="accent1"/>
+          </a:effectRef>
+          <a:fontRef idx="minor">
+            <a:schemeClr val="lt1"/>
+          </a:fontRef>
+        </p:style>
+        <p:txBody>
+          <a:bodyPr rtlCol="0" anchor="ctr"/>
+          <a:lstStyle/>
+          <a:p>
+            <a:pPr algn="ctr"/>
+          </a:p>
+        </p:txBody>
+      </p:sp>
+      <p:sp>
+        <p:nvSpPr>
+          <p:cNvPr id="11" name="Rounded Rectangle 10"/>
+          <p:cNvSpPr/>
+          <p:nvPr/>
+        </p:nvSpPr>
+        <p:spPr>
+          <a:xfrm>
+            <a:off x="3701491" y="4856195"/>
+            <a:ext cx="3899001" cy="323331"/>
+          </a:xfrm>
+          <a:prstGeom prst="roundRect">
+            <a:avLst/>
+          </a:prstGeom>
+          <a:solidFill>
+            <a:srgbClr val="16303A"/>
+          </a:solidFill>
+          <a:ln>
+            <a:noFill/>
+          </a:ln>
+          <a:effectLst/>
+        </p:spPr>
+        <p:style>
+          <a:lnRef idx="1">
+            <a:schemeClr val="accent1"/>
+          </a:lnRef>
+          <a:fillRef idx="3">
+            <a:schemeClr val="accent1"/>
+          </a:fillRef>
+          <a:effectRef idx="2">
+            <a:schemeClr val="accent1"/>
+          </a:effectRef>
+          <a:fontRef idx="minor">
+            <a:schemeClr val="lt1"/>
+          </a:fontRef>
+        </p:style>
+        <p:txBody>
+          <a:bodyPr rtlCol="0" anchor="ctr"/>
+          <a:lstStyle/>
+          <a:p>
+            <a:pPr algn="ctr"/>
+          </a:p>
+        </p:txBody>
+      </p:sp>
+      <p:sp>
+        <p:nvSpPr>
+          <p:cNvPr id="12" name="Rounded Rectangle 11"/>
+          <p:cNvSpPr/>
+          <p:nvPr/>
+        </p:nvSpPr>
+        <p:spPr>
+          <a:xfrm>
+            <a:off x="7695590" y="4856195"/>
+            <a:ext cx="779800" cy="323331"/>
+          </a:xfrm>
+          <a:prstGeom prst="roundRect">
+            <a:avLst/>
+          </a:prstGeom>
+          <a:solidFill>
+            <a:srgbClr val="01AEFD"/>
+          </a:solidFill>
+          <a:ln>
+            <a:noFill/>
+          </a:ln>
+          <a:effectLst/>
+        </p:spPr>
+        <p:style>
+          <a:lnRef idx="1">
+            <a:schemeClr val="accent1"/>
+          </a:lnRef>
+          <a:fillRef idx="3">
+            <a:schemeClr val="accent1"/>
+          </a:fillRef>
+          <a:effectRef idx="2">
+            <a:schemeClr val="accent1"/>
+          </a:effectRef>
+          <a:fontRef idx="minor">
+            <a:schemeClr val="lt1"/>
+          </a:fontRef>
+        </p:style>
+        <p:txBody>
+          <a:bodyPr rtlCol="0" anchor="ctr"/>
+          <a:lstStyle/>
+          <a:p>
+            <a:pPr algn="ctr"/>
+          </a:p>
+        </p:txBody>
+      </p:sp>
+      <p:sp>
+        <p:nvSpPr>
+          <p:cNvPr id="13" name="Rounded Rectangle 12"/>
+          <p:cNvSpPr/>
+          <p:nvPr/>
+        </p:nvSpPr>
+        <p:spPr>
+          <a:xfrm>
+            <a:off x="3720510" y="5407761"/>
+            <a:ext cx="1616659" cy="95097"/>
+          </a:xfrm>
+          <a:prstGeom prst="roundRect">
+            <a:avLst/>
+          </a:prstGeom>
+          <a:solidFill>
+            <a:srgbClr val="2A4550"/>
+          </a:solidFill>
+          <a:ln>
+            <a:noFill/>
+          </a:ln>
+          <a:effectLst/>
+        </p:spPr>
+        <p:style>
+          <a:lnRef idx="1">
+            <a:schemeClr val="accent1"/>
+          </a:lnRef>
+          <a:fillRef idx="3">
+            <a:schemeClr val="accent1"/>
+          </a:fillRef>
+          <a:effectRef idx="2">
+            <a:schemeClr val="accent1"/>
+          </a:effectRef>
+          <a:fontRef idx="minor">
+            <a:schemeClr val="lt1"/>
+          </a:fontRef>
+        </p:style>
+        <p:txBody>
+          <a:bodyPr rtlCol="0" anchor="ctr"/>
+          <a:lstStyle/>
+          <a:p>
+            <a:pPr algn="ctr"/>
+          </a:p>
+        </p:txBody>
+      </p:sp>
+      <p:sp>
+        <p:nvSpPr>
+          <p:cNvPr id="14" name="Rounded Rectangle 13"/>
+          <p:cNvSpPr/>
+          <p:nvPr/>
+        </p:nvSpPr>
+        <p:spPr>
+          <a:xfrm>
+            <a:off x="3682471" y="2117384"/>
+            <a:ext cx="1502542" cy="266273"/>
+          </a:xfrm>
+          <a:prstGeom prst="roundRect">
+            <a:avLst/>
+          </a:prstGeom>
+          <a:noFill/>
+          <a:ln w="44450">
+            <a:solidFill>
+              <a:srgbClr val="FFD633"/>
+            </a:solidFill>
+          </a:ln>
+          <a:effectLst/>
+        </p:spPr>
+        <p:style>
+          <a:lnRef idx="1">
+            <a:schemeClr val="accent1"/>
+          </a:lnRef>
+          <a:fillRef idx="3">
+            <a:schemeClr val="accent1"/>
+          </a:fillRef>
+          <a:effectRef idx="2">
+            <a:schemeClr val="accent1"/>
+          </a:effectRef>
+          <a:fontRef idx="minor">
+            <a:schemeClr val="lt1"/>
+          </a:fontRef>
+        </p:style>
+        <p:txBody>
+          <a:bodyPr rtlCol="0" anchor="ctr"/>
+          <a:lstStyle/>
+          <a:p>
+            <a:pPr algn="ctr"/>
+          </a:p>
+        </p:txBody>
+      </p:sp>
+      <p:sp>
+        <p:nvSpPr>
+          <p:cNvPr id="15" name="TextBox 14"/>
           <p:cNvSpPr txBox="1"/>
           <p:nvPr/>
         </p:nvSpPr>
         <p:spPr>
           <a:xfrm>
-            <a:off x="548640" y="5623560"/>
-            <a:ext cx="11064240" cy="1051560"/>
+            <a:off x="822960" y="6172200"/>
+            <a:ext cx="10515600" cy="548640"/>
           </a:xfrm>
           <a:prstGeom prst="rect">
             <a:avLst/>
@@ -4771,170 +6247,10 @@
             <a:r>
               <a:rPr sz="2000">
                 <a:solidFill>
-                  <a:srgbClr val="DCECEF"/>
-                </a:solidFill>
-              </a:rPr>
-              <a:t>Start a rule for the text box inside the panel.</a:t>
-            </a:r>
-          </a:p>
-        </p:txBody>
-      </p:sp>
-    </p:spTree>
-  </p:cSld>
-  <p:clrMapOvr>
-    <a:masterClrMapping/>
-  </p:clrMapOvr>
-</p:sld>
-</file>
-
-<file path=ppt/slides/slide19.xml><?xml version="1.0" encoding="utf-8"?>
-<p:sld xmlns:a="http://schemas.openxmlformats.org/drawingml/2006/main" xmlns:p="http://schemas.openxmlformats.org/presentationml/2006/main" xmlns:r="http://schemas.openxmlformats.org/officeDocument/2006/relationships">
-  <p:cSld>
-    <p:spTree>
-      <p:nvGrpSpPr>
-        <p:cNvPr id="1" name=""/>
-        <p:cNvGrpSpPr/>
-        <p:nvPr/>
-      </p:nvGrpSpPr>
-      <p:grpSpPr/>
-      <p:sp>
-        <p:nvSpPr>
-          <p:cNvPr id="2" name="Title 1"/>
-          <p:cNvSpPr>
-            <a:spLocks noGrp="1"/>
-          </p:cNvSpPr>
-          <p:nvPr>
-            <p:ph type="title"/>
-          </p:nvPr>
-        </p:nvSpPr>
-        <p:spPr/>
-        <p:txBody>
-          <a:bodyPr/>
-          <a:lstStyle/>
-          <a:p>
-            <a:r>
-              <a:rPr sz="3800" b="1">
-                <a:solidFill>
-                  <a:srgbClr val="1F2A37"/>
-                </a:solidFill>
-              </a:rPr>
-              <a:t>width</a:t>
-            </a:r>
-          </a:p>
-        </p:txBody>
-      </p:sp>
-      <p:sp>
-        <p:nvSpPr>
-          <p:cNvPr id="3" name="TextBox 2"/>
-          <p:cNvSpPr txBox="1"/>
-          <p:nvPr/>
-        </p:nvSpPr>
-        <p:spPr>
-          <a:xfrm>
-            <a:off x="868680" y="502920"/>
-            <a:ext cx="5486400" cy="457200"/>
-          </a:xfrm>
-          <a:prstGeom prst="rect">
-            <a:avLst/>
-          </a:prstGeom>
-          <a:noFill/>
-        </p:spPr>
-        <p:txBody>
-          <a:bodyPr wrap="none">
-            <a:spAutoFit/>
-          </a:bodyPr>
-          <a:lstStyle/>
-          <a:p>
-            <a:r>
-              <a:rPr sz="1500" b="1">
-                <a:solidFill>
-                  <a:srgbClr val="01AEFD"/>
-                </a:solidFill>
-              </a:rPr>
-              <a:t>CSS</a:t>
-            </a:r>
-          </a:p>
-        </p:txBody>
-      </p:sp>
-      <p:sp>
-        <p:nvSpPr>
-          <p:cNvPr id="4" name="TextBox 3"/>
-          <p:cNvSpPr txBox="1"/>
-          <p:nvPr/>
-        </p:nvSpPr>
-        <p:spPr>
-          <a:xfrm>
-            <a:off x="822960" y="1828800"/>
-            <a:ext cx="10515600" cy="4206240"/>
-          </a:xfrm>
-          <a:prstGeom prst="rect">
-            <a:avLst/>
-          </a:prstGeom>
-          <a:noFill/>
-        </p:spPr>
-        <p:txBody>
-          <a:bodyPr wrap="square">
-            <a:spAutoFit/>
-          </a:bodyPr>
-          <a:lstStyle/>
-          <a:p>
-            <a:pPr>
-              <a:spcAft>
-                <a:spcPts val="1400"/>
-              </a:spcAft>
-            </a:pPr>
-            <a:r>
-              <a:rPr sz="2800">
-                <a:solidFill>
-                  <a:srgbClr val="01AEFD"/>
-                </a:solidFill>
-              </a:rPr>
-              <a:t>width: 100%;</a:t>
-            </a:r>
-          </a:p>
-          <a:p>
-            <a:pPr>
-              <a:spcAft>
-                <a:spcPts val="1400"/>
-              </a:spcAft>
-            </a:pPr>
-            <a:r>
-              <a:rPr sz="2400">
-                <a:solidFill>
-                  <a:srgbClr val="1F2A37"/>
-                </a:solidFill>
-              </a:rPr>
-              <a:t>• How wide the box actually is.</a:t>
-            </a:r>
-          </a:p>
-          <a:p>
-            <a:pPr>
-              <a:spcAft>
-                <a:spcPts val="1400"/>
-              </a:spcAft>
-            </a:pPr>
-            <a:r>
-              <a:rPr sz="2400">
-                <a:solidFill>
-                  <a:srgbClr val="1F2A37"/>
-                </a:solidFill>
-              </a:rPr>
-              <a:t>• max-width (week 1) was only a LIMIT; width sets the real size.</a:t>
-            </a:r>
-          </a:p>
-          <a:p>
-            <a:pPr>
-              <a:spcAft>
-                <a:spcPts val="1400"/>
-              </a:spcAft>
-            </a:pPr>
-            <a:r>
-              <a:rPr sz="2400">
-                <a:solidFill>
-                  <a:srgbClr val="1F2A37"/>
-                </a:solidFill>
-              </a:rPr>
-              <a:t>• 100% means as wide as whatever box holds it.</a:t>
+                  <a:srgbClr val="0A6299"/>
+                </a:solidFill>
+              </a:rPr>
+              <a:t>font-weight makes text bold, like the title.</a:t>
             </a:r>
           </a:p>
         </p:txBody>
@@ -5105,7 +6421,7 @@
                   <a:srgbClr val="01AEFD"/>
                 </a:solidFill>
               </a:rPr>
-              <a:t>Type this into style.css   -   line 24</a:t>
+              <a:t>Type this into style.css   -   line 22</a:t>
             </a:r>
           </a:p>
         </p:txBody>
@@ -5174,61 +6490,11 @@
             <a:r>
               <a:rPr sz="1800">
                 <a:solidFill>
-                  <a:srgbClr val="6D8C97"/>
+                  <a:srgbClr val="7FE0A0"/>
                 </a:solidFill>
                 <a:latin typeface="Consolas"/>
               </a:rPr>
               <a:t>.setup summary { cursor: pointer; color: #0a6299; font-weight: bold; }</a:t>
-            </a:r>
-          </a:p>
-          <a:p>
-            <a:pPr>
-              <a:spcAft>
-                <a:spcPts val="0"/>
-              </a:spcAft>
-            </a:pPr>
-            <a:r>
-              <a:rPr sz="1800">
-                <a:solidFill>
-                  <a:srgbClr val="6D8C97"/>
-                </a:solidFill>
-                <a:latin typeface="Consolas"/>
-              </a:rPr>
-              <a:t>  23  </a:t>
-            </a:r>
-            <a:r>
-              <a:rPr sz="1800">
-                <a:solidFill>
-                  <a:srgbClr val="6D8C97"/>
-                </a:solidFill>
-                <a:latin typeface="Consolas"/>
-              </a:rPr>
-              <a:t>.setup textarea {</a:t>
-            </a:r>
-          </a:p>
-          <a:p>
-            <a:pPr>
-              <a:spcAft>
-                <a:spcPts val="0"/>
-              </a:spcAft>
-            </a:pPr>
-            <a:r>
-              <a:rPr sz="1800">
-                <a:solidFill>
-                  <a:srgbClr val="6D8C97"/>
-                </a:solidFill>
-                <a:latin typeface="Consolas"/>
-              </a:rPr>
-              <a:t>  24  </a:t>
-            </a:r>
-            <a:r>
-              <a:rPr sz="1800">
-                <a:solidFill>
-                  <a:srgbClr val="7FE0A0"/>
-                </a:solidFill>
-                <a:latin typeface="Consolas"/>
-              </a:rPr>
-              <a:t>  width: 100%;</a:t>
             </a:r>
           </a:p>
         </p:txBody>
@@ -5261,7 +6527,7 @@
                   <a:srgbClr val="DCECEF"/>
                 </a:solidFill>
               </a:rPr>
-              <a:t>Make it as wide as the panel.</a:t>
+              <a:t>Style the clickable label: a hand pointer, a blue colour, and bold so it reads as a button.</a:t>
             </a:r>
           </a:p>
         </p:txBody>
@@ -5320,7 +6586,7 @@
                   <a:srgbClr val="01AEFD"/>
                 </a:solidFill>
               </a:rPr>
-              <a:t>Type this into style.css   -   line 25</a:t>
+              <a:t>Type this into style.css   -   line 23</a:t>
             </a:r>
           </a:p>
         </p:txBody>
@@ -5414,61 +6680,11 @@
             <a:r>
               <a:rPr sz="1800">
                 <a:solidFill>
-                  <a:srgbClr val="6D8C97"/>
+                  <a:srgbClr val="7FE0A0"/>
                 </a:solidFill>
                 <a:latin typeface="Consolas"/>
               </a:rPr>
               <a:t>.setup textarea {</a:t>
-            </a:r>
-          </a:p>
-          <a:p>
-            <a:pPr>
-              <a:spcAft>
-                <a:spcPts val="0"/>
-              </a:spcAft>
-            </a:pPr>
-            <a:r>
-              <a:rPr sz="1800">
-                <a:solidFill>
-                  <a:srgbClr val="6D8C97"/>
-                </a:solidFill>
-                <a:latin typeface="Consolas"/>
-              </a:rPr>
-              <a:t>  24  </a:t>
-            </a:r>
-            <a:r>
-              <a:rPr sz="1800">
-                <a:solidFill>
-                  <a:srgbClr val="6D8C97"/>
-                </a:solidFill>
-                <a:latin typeface="Consolas"/>
-              </a:rPr>
-              <a:t>  width: 100%;</a:t>
-            </a:r>
-          </a:p>
-          <a:p>
-            <a:pPr>
-              <a:spcAft>
-                <a:spcPts val="0"/>
-              </a:spcAft>
-            </a:pPr>
-            <a:r>
-              <a:rPr sz="1800">
-                <a:solidFill>
-                  <a:srgbClr val="6D8C97"/>
-                </a:solidFill>
-                <a:latin typeface="Consolas"/>
-              </a:rPr>
-              <a:t>  25  </a:t>
-            </a:r>
-            <a:r>
-              <a:rPr sz="1800">
-                <a:solidFill>
-                  <a:srgbClr val="7FE0A0"/>
-                </a:solidFill>
-                <a:latin typeface="Consolas"/>
-              </a:rPr>
-              <a:t>  margin-top: 8px;</a:t>
             </a:r>
           </a:p>
         </p:txBody>
@@ -5501,7 +6717,7 @@
                   <a:srgbClr val="DCECEF"/>
                 </a:solidFill>
               </a:rPr>
-              <a:t>A little space above it, under the label.</a:t>
+              <a:t>Start a rule for the text box inside the panel.</a:t>
             </a:r>
           </a:p>
         </p:txBody>
@@ -5517,14 +6733,6 @@
 <file path=ppt/slides/slide22.xml><?xml version="1.0" encoding="utf-8"?>
 <p:sld xmlns:a="http://schemas.openxmlformats.org/drawingml/2006/main" xmlns:p="http://schemas.openxmlformats.org/presentationml/2006/main" xmlns:r="http://schemas.openxmlformats.org/officeDocument/2006/relationships">
   <p:cSld>
-    <p:bg>
-      <p:bgPr>
-        <a:solidFill>
-          <a:srgbClr val="102127"/>
-        </a:solidFill>
-        <a:effectLst/>
-      </p:bgPr>
-    </p:bg>
     <p:spTree>
       <p:nvGrpSpPr>
         <p:cNvPr id="1" name=""/>
@@ -5534,14 +6742,40 @@
       <p:grpSpPr/>
       <p:sp>
         <p:nvSpPr>
-          <p:cNvPr id="2" name="TextBox 1"/>
+          <p:cNvPr id="2" name="Title 1"/>
+          <p:cNvSpPr>
+            <a:spLocks noGrp="1"/>
+          </p:cNvSpPr>
+          <p:nvPr>
+            <p:ph type="title"/>
+          </p:nvPr>
+        </p:nvSpPr>
+        <p:spPr/>
+        <p:txBody>
+          <a:bodyPr/>
+          <a:lstStyle/>
+          <a:p>
+            <a:r>
+              <a:rPr sz="3800" b="1">
+                <a:solidFill>
+                  <a:srgbClr val="1F2A37"/>
+                </a:solidFill>
+              </a:rPr>
+              <a:t>width</a:t>
+            </a:r>
+          </a:p>
+        </p:txBody>
+      </p:sp>
+      <p:sp>
+        <p:nvSpPr>
+          <p:cNvPr id="3" name="TextBox 2"/>
           <p:cNvSpPr txBox="1"/>
           <p:nvPr/>
         </p:nvSpPr>
         <p:spPr>
           <a:xfrm>
-            <a:off x="502920" y="274320"/>
-            <a:ext cx="11155680" cy="548640"/>
+            <a:off x="868680" y="502920"/>
+            <a:ext cx="5486400" cy="457200"/>
           </a:xfrm>
           <a:prstGeom prst="rect">
             <a:avLst/>
@@ -5555,185 +6789,12 @@
           <a:lstStyle/>
           <a:p>
             <a:r>
-              <a:rPr sz="2200" b="1">
+              <a:rPr sz="1500" b="1">
                 <a:solidFill>
                   <a:srgbClr val="01AEFD"/>
                 </a:solidFill>
               </a:rPr>
-              <a:t>Type this into style.css   -   line 26</a:t>
-            </a:r>
-          </a:p>
-        </p:txBody>
-      </p:sp>
-      <p:sp>
-        <p:nvSpPr>
-          <p:cNvPr id="3" name="TextBox 2"/>
-          <p:cNvSpPr txBox="1"/>
-          <p:nvPr/>
-        </p:nvSpPr>
-        <p:spPr>
-          <a:xfrm>
-            <a:off x="502920" y="960120"/>
-            <a:ext cx="11155680" cy="4297680"/>
-          </a:xfrm>
-          <a:prstGeom prst="rect">
-            <a:avLst/>
-          </a:prstGeom>
-          <a:noFill/>
-        </p:spPr>
-        <p:txBody>
-          <a:bodyPr wrap="none">
-            <a:spAutoFit/>
-          </a:bodyPr>
-          <a:lstStyle/>
-          <a:p>
-            <a:pPr>
-              <a:spcAft>
-                <a:spcPts val="0"/>
-              </a:spcAft>
-            </a:pPr>
-            <a:r>
-              <a:rPr sz="1800">
-                <a:solidFill>
-                  <a:srgbClr val="6D8C97"/>
-                </a:solidFill>
-                <a:latin typeface="Consolas"/>
-              </a:rPr>
-              <a:t>  21  </a:t>
-            </a:r>
-            <a:r>
-              <a:rPr sz="1800">
-                <a:solidFill>
-                  <a:srgbClr val="6D8C97"/>
-                </a:solidFill>
-                <a:latin typeface="Consolas"/>
-              </a:rPr>
-              <a:t>.setup { margin-bottom: 12px; font-size: 14px; }</a:t>
-            </a:r>
-          </a:p>
-          <a:p>
-            <a:pPr>
-              <a:spcAft>
-                <a:spcPts val="0"/>
-              </a:spcAft>
-            </a:pPr>
-            <a:r>
-              <a:rPr sz="1800">
-                <a:solidFill>
-                  <a:srgbClr val="6D8C97"/>
-                </a:solidFill>
-                <a:latin typeface="Consolas"/>
-              </a:rPr>
-              <a:t>  22  </a:t>
-            </a:r>
-            <a:r>
-              <a:rPr sz="1800">
-                <a:solidFill>
-                  <a:srgbClr val="6D8C97"/>
-                </a:solidFill>
-                <a:latin typeface="Consolas"/>
-              </a:rPr>
-              <a:t>.setup summary { cursor: pointer; color: #0a6299; font-weight: bold; }</a:t>
-            </a:r>
-          </a:p>
-          <a:p>
-            <a:pPr>
-              <a:spcAft>
-                <a:spcPts val="0"/>
-              </a:spcAft>
-            </a:pPr>
-            <a:r>
-              <a:rPr sz="1800">
-                <a:solidFill>
-                  <a:srgbClr val="6D8C97"/>
-                </a:solidFill>
-                <a:latin typeface="Consolas"/>
-              </a:rPr>
-              <a:t>  23  </a:t>
-            </a:r>
-            <a:r>
-              <a:rPr sz="1800">
-                <a:solidFill>
-                  <a:srgbClr val="6D8C97"/>
-                </a:solidFill>
-                <a:latin typeface="Consolas"/>
-              </a:rPr>
-              <a:t>.setup textarea {</a:t>
-            </a:r>
-          </a:p>
-          <a:p>
-            <a:pPr>
-              <a:spcAft>
-                <a:spcPts val="0"/>
-              </a:spcAft>
-            </a:pPr>
-            <a:r>
-              <a:rPr sz="1800">
-                <a:solidFill>
-                  <a:srgbClr val="6D8C97"/>
-                </a:solidFill>
-                <a:latin typeface="Consolas"/>
-              </a:rPr>
-              <a:t>  24  </a:t>
-            </a:r>
-            <a:r>
-              <a:rPr sz="1800">
-                <a:solidFill>
-                  <a:srgbClr val="6D8C97"/>
-                </a:solidFill>
-                <a:latin typeface="Consolas"/>
-              </a:rPr>
-              <a:t>  width: 100%;</a:t>
-            </a:r>
-          </a:p>
-          <a:p>
-            <a:pPr>
-              <a:spcAft>
-                <a:spcPts val="0"/>
-              </a:spcAft>
-            </a:pPr>
-            <a:r>
-              <a:rPr sz="1800">
-                <a:solidFill>
-                  <a:srgbClr val="6D8C97"/>
-                </a:solidFill>
-                <a:latin typeface="Consolas"/>
-              </a:rPr>
-              <a:t>  25  </a:t>
-            </a:r>
-            <a:r>
-              <a:rPr sz="1800">
-                <a:solidFill>
-                  <a:srgbClr val="6D8C97"/>
-                </a:solidFill>
-                <a:latin typeface="Consolas"/>
-              </a:rPr>
-              <a:t>  margin-top: 8px;</a:t>
-            </a:r>
-          </a:p>
-          <a:p>
-            <a:pPr>
-              <a:spcAft>
-                <a:spcPts val="0"/>
-              </a:spcAft>
-            </a:pPr>
-            <a:r>
-              <a:rPr sz="1800">
-                <a:solidFill>
-                  <a:srgbClr val="6D8C97"/>
-                </a:solidFill>
-                <a:latin typeface="Consolas"/>
-              </a:rPr>
-              <a:t>  26  </a:t>
-            </a:r>
-            <a:r>
-              <a:rPr sz="1800">
-                <a:solidFill>
-                  <a:srgbClr val="7FE0A0"/>
-                </a:solidFill>
-                <a:latin typeface="Consolas"/>
-              </a:rPr>
-              <a:t>  padding: 9px;</a:t>
+              <a:t>CSS</a:t>
             </a:r>
           </a:p>
         </p:txBody>
@@ -5746,8 +6807,8 @@
         </p:nvSpPr>
         <p:spPr>
           <a:xfrm>
-            <a:off x="548640" y="5623560"/>
-            <a:ext cx="11064240" cy="1051560"/>
+            <a:off x="822960" y="1828800"/>
+            <a:ext cx="10515600" cy="4206240"/>
           </a:xfrm>
           <a:prstGeom prst="rect">
             <a:avLst/>
@@ -5760,13 +6821,63 @@
           </a:bodyPr>
           <a:lstStyle/>
           <a:p>
-            <a:r>
-              <a:rPr sz="2000">
-                <a:solidFill>
-                  <a:srgbClr val="DCECEF"/>
-                </a:solidFill>
-              </a:rPr>
-              <a:t>Padding so the text is not jammed against the edge.</a:t>
+            <a:pPr>
+              <a:spcAft>
+                <a:spcPts val="1400"/>
+              </a:spcAft>
+            </a:pPr>
+            <a:r>
+              <a:rPr sz="2800">
+                <a:solidFill>
+                  <a:srgbClr val="01AEFD"/>
+                </a:solidFill>
+              </a:rPr>
+              <a:t>width: 100%;</a:t>
+            </a:r>
+          </a:p>
+          <a:p>
+            <a:pPr>
+              <a:spcAft>
+                <a:spcPts val="1400"/>
+              </a:spcAft>
+            </a:pPr>
+            <a:r>
+              <a:rPr sz="2400">
+                <a:solidFill>
+                  <a:srgbClr val="1F2A37"/>
+                </a:solidFill>
+              </a:rPr>
+              <a:t>• How wide the box actually is.</a:t>
+            </a:r>
+          </a:p>
+          <a:p>
+            <a:pPr>
+              <a:spcAft>
+                <a:spcPts val="1400"/>
+              </a:spcAft>
+            </a:pPr>
+            <a:r>
+              <a:rPr sz="2400">
+                <a:solidFill>
+                  <a:srgbClr val="1F2A37"/>
+                </a:solidFill>
+              </a:rPr>
+              <a:t>• max-width (week 1) was only a LIMIT; width sets the real size.</a:t>
+            </a:r>
+          </a:p>
+          <a:p>
+            <a:pPr>
+              <a:spcAft>
+                <a:spcPts val="1400"/>
+              </a:spcAft>
+            </a:pPr>
+            <a:r>
+              <a:rPr sz="2400">
+                <a:solidFill>
+                  <a:srgbClr val="1F2A37"/>
+                </a:solidFill>
+              </a:rPr>
+              <a:t>• 100% means as wide as whatever box holds it.</a:t>
             </a:r>
           </a:p>
         </p:txBody>
@@ -5785,7 +6896,7 @@
     <p:bg>
       <p:bgPr>
         <a:solidFill>
-          <a:srgbClr val="102127"/>
+          <a:srgbClr val="F4F8FB"/>
         </a:solidFill>
         <a:effectLst/>
       </p:bgPr>
@@ -5805,8 +6916,8 @@
         </p:nvSpPr>
         <p:spPr>
           <a:xfrm>
-            <a:off x="502920" y="274320"/>
-            <a:ext cx="11155680" cy="548640"/>
+            <a:off x="822960" y="365760"/>
+            <a:ext cx="7315200" cy="365760"/>
           </a:xfrm>
           <a:prstGeom prst="rect">
             <a:avLst/>
@@ -5820,12 +6931,12 @@
           <a:lstStyle/>
           <a:p>
             <a:r>
-              <a:rPr sz="2200" b="1">
+              <a:rPr sz="1400" b="1">
                 <a:solidFill>
                   <a:srgbClr val="01AEFD"/>
                 </a:solidFill>
               </a:rPr>
-              <a:t>Type this into style.css   -   line 27</a:t>
+              <a:t>ON THE PAGE</a:t>
             </a:r>
           </a:p>
         </p:txBody>
@@ -5838,8 +6949,8 @@
         </p:nvSpPr>
         <p:spPr>
           <a:xfrm>
-            <a:off x="502920" y="960120"/>
-            <a:ext cx="11155680" cy="4297680"/>
+            <a:off x="822960" y="658368"/>
+            <a:ext cx="10515600" cy="731520"/>
           </a:xfrm>
           <a:prstGeom prst="rect">
             <a:avLst/>
@@ -5852,192 +6963,511 @@
           </a:bodyPr>
           <a:lstStyle/>
           <a:p>
-            <a:pPr>
-              <a:spcAft>
-                <a:spcPts val="0"/>
-              </a:spcAft>
-            </a:pPr>
-            <a:r>
-              <a:rPr sz="1800">
-                <a:solidFill>
-                  <a:srgbClr val="6D8C97"/>
-                </a:solidFill>
-                <a:latin typeface="Consolas"/>
-              </a:rPr>
-              <a:t>  21  </a:t>
-            </a:r>
-            <a:r>
-              <a:rPr sz="1800">
-                <a:solidFill>
-                  <a:srgbClr val="6D8C97"/>
-                </a:solidFill>
-                <a:latin typeface="Consolas"/>
-              </a:rPr>
-              <a:t>.setup { margin-bottom: 12px; font-size: 14px; }</a:t>
-            </a:r>
-          </a:p>
-          <a:p>
-            <a:pPr>
-              <a:spcAft>
-                <a:spcPts val="0"/>
-              </a:spcAft>
-            </a:pPr>
-            <a:r>
-              <a:rPr sz="1800">
-                <a:solidFill>
-                  <a:srgbClr val="6D8C97"/>
-                </a:solidFill>
-                <a:latin typeface="Consolas"/>
-              </a:rPr>
-              <a:t>  22  </a:t>
-            </a:r>
-            <a:r>
-              <a:rPr sz="1800">
-                <a:solidFill>
-                  <a:srgbClr val="6D8C97"/>
-                </a:solidFill>
-                <a:latin typeface="Consolas"/>
-              </a:rPr>
-              <a:t>.setup summary { cursor: pointer; color: #0a6299; font-weight: bold; }</a:t>
-            </a:r>
-          </a:p>
-          <a:p>
-            <a:pPr>
-              <a:spcAft>
-                <a:spcPts val="0"/>
-              </a:spcAft>
-            </a:pPr>
-            <a:r>
-              <a:rPr sz="1800">
-                <a:solidFill>
-                  <a:srgbClr val="6D8C97"/>
-                </a:solidFill>
-                <a:latin typeface="Consolas"/>
-              </a:rPr>
-              <a:t>  23  </a:t>
-            </a:r>
-            <a:r>
-              <a:rPr sz="1800">
-                <a:solidFill>
-                  <a:srgbClr val="6D8C97"/>
-                </a:solidFill>
-                <a:latin typeface="Consolas"/>
-              </a:rPr>
-              <a:t>.setup textarea {</a:t>
-            </a:r>
-          </a:p>
-          <a:p>
-            <a:pPr>
-              <a:spcAft>
-                <a:spcPts val="0"/>
-              </a:spcAft>
-            </a:pPr>
-            <a:r>
-              <a:rPr sz="1800">
-                <a:solidFill>
-                  <a:srgbClr val="6D8C97"/>
-                </a:solidFill>
-                <a:latin typeface="Consolas"/>
-              </a:rPr>
-              <a:t>  24  </a:t>
-            </a:r>
-            <a:r>
-              <a:rPr sz="1800">
-                <a:solidFill>
-                  <a:srgbClr val="6D8C97"/>
-                </a:solidFill>
-                <a:latin typeface="Consolas"/>
-              </a:rPr>
-              <a:t>  width: 100%;</a:t>
-            </a:r>
-          </a:p>
-          <a:p>
-            <a:pPr>
-              <a:spcAft>
-                <a:spcPts val="0"/>
-              </a:spcAft>
-            </a:pPr>
-            <a:r>
-              <a:rPr sz="1800">
-                <a:solidFill>
-                  <a:srgbClr val="6D8C97"/>
-                </a:solidFill>
-                <a:latin typeface="Consolas"/>
-              </a:rPr>
-              <a:t>  25  </a:t>
-            </a:r>
-            <a:r>
-              <a:rPr sz="1800">
-                <a:solidFill>
-                  <a:srgbClr val="6D8C97"/>
-                </a:solidFill>
-                <a:latin typeface="Consolas"/>
-              </a:rPr>
-              <a:t>  margin-top: 8px;</a:t>
-            </a:r>
-          </a:p>
-          <a:p>
-            <a:pPr>
-              <a:spcAft>
-                <a:spcPts val="0"/>
-              </a:spcAft>
-            </a:pPr>
-            <a:r>
-              <a:rPr sz="1800">
-                <a:solidFill>
-                  <a:srgbClr val="6D8C97"/>
-                </a:solidFill>
-                <a:latin typeface="Consolas"/>
-              </a:rPr>
-              <a:t>  26  </a:t>
-            </a:r>
-            <a:r>
-              <a:rPr sz="1800">
-                <a:solidFill>
-                  <a:srgbClr val="6D8C97"/>
-                </a:solidFill>
-                <a:latin typeface="Consolas"/>
-              </a:rPr>
-              <a:t>  padding: 9px;</a:t>
-            </a:r>
-          </a:p>
-          <a:p>
-            <a:pPr>
-              <a:spcAft>
-                <a:spcPts val="0"/>
-              </a:spcAft>
-            </a:pPr>
-            <a:r>
-              <a:rPr sz="1800">
-                <a:solidFill>
-                  <a:srgbClr val="6D8C97"/>
-                </a:solidFill>
-                <a:latin typeface="Consolas"/>
-              </a:rPr>
-              <a:t>  27  </a:t>
-            </a:r>
-            <a:r>
-              <a:rPr sz="1800">
-                <a:solidFill>
-                  <a:srgbClr val="7FE0A0"/>
-                </a:solidFill>
-                <a:latin typeface="Consolas"/>
-              </a:rPr>
-              <a:t>  border: 1px solid #dbe3ec;</a:t>
-            </a:r>
-          </a:p>
-        </p:txBody>
-      </p:sp>
-      <p:sp>
-        <p:nvSpPr>
-          <p:cNvPr id="4" name="TextBox 3"/>
+            <a:r>
+              <a:rPr sz="3200" b="1">
+                <a:solidFill>
+                  <a:srgbClr val="1F2A37"/>
+                </a:solidFill>
+              </a:rPr>
+              <a:t>width</a:t>
+            </a:r>
+          </a:p>
+        </p:txBody>
+      </p:sp>
+      <p:sp>
+        <p:nvSpPr>
+          <p:cNvPr id="4" name="Rounded Rectangle 3"/>
+          <p:cNvSpPr/>
+          <p:nvPr/>
+        </p:nvSpPr>
+        <p:spPr>
+          <a:xfrm>
+            <a:off x="3454237" y="1641896"/>
+            <a:ext cx="5249387" cy="3918021"/>
+          </a:xfrm>
+          <a:prstGeom prst="roundRect">
+            <a:avLst/>
+          </a:prstGeom>
+          <a:solidFill>
+            <a:srgbClr val="0F1F27"/>
+          </a:solidFill>
+          <a:ln>
+            <a:noFill/>
+          </a:ln>
+          <a:effectLst/>
+        </p:spPr>
+        <p:style>
+          <a:lnRef idx="1">
+            <a:schemeClr val="accent1"/>
+          </a:lnRef>
+          <a:fillRef idx="3">
+            <a:schemeClr val="accent1"/>
+          </a:fillRef>
+          <a:effectRef idx="2">
+            <a:schemeClr val="accent1"/>
+          </a:effectRef>
+          <a:fontRef idx="minor">
+            <a:schemeClr val="lt1"/>
+          </a:fontRef>
+        </p:style>
+        <p:txBody>
+          <a:bodyPr rtlCol="0" anchor="ctr"/>
+          <a:lstStyle/>
+          <a:p>
+            <a:pPr algn="ctr"/>
+          </a:p>
+        </p:txBody>
+      </p:sp>
+      <p:sp>
+        <p:nvSpPr>
+          <p:cNvPr id="5" name="Rounded Rectangle 4"/>
+          <p:cNvSpPr/>
+          <p:nvPr/>
+        </p:nvSpPr>
+        <p:spPr>
+          <a:xfrm>
+            <a:off x="3606393" y="2022287"/>
+            <a:ext cx="4945075" cy="437448"/>
+          </a:xfrm>
+          <a:prstGeom prst="roundRect">
+            <a:avLst/>
+          </a:prstGeom>
+          <a:solidFill>
+            <a:srgbClr val="16303A"/>
+          </a:solidFill>
+          <a:ln>
+            <a:noFill/>
+          </a:ln>
+          <a:effectLst/>
+        </p:spPr>
+        <p:style>
+          <a:lnRef idx="1">
+            <a:schemeClr val="accent1"/>
+          </a:lnRef>
+          <a:fillRef idx="3">
+            <a:schemeClr val="accent1"/>
+          </a:fillRef>
+          <a:effectRef idx="2">
+            <a:schemeClr val="accent1"/>
+          </a:effectRef>
+          <a:fontRef idx="minor">
+            <a:schemeClr val="lt1"/>
+          </a:fontRef>
+        </p:style>
+        <p:txBody>
+          <a:bodyPr rtlCol="0" anchor="ctr"/>
+          <a:lstStyle/>
+          <a:p>
+            <a:pPr algn="ctr"/>
+          </a:p>
+        </p:txBody>
+      </p:sp>
+      <p:sp>
+        <p:nvSpPr>
+          <p:cNvPr id="6" name="Rounded Rectangle 5"/>
+          <p:cNvSpPr/>
+          <p:nvPr/>
+        </p:nvSpPr>
+        <p:spPr>
+          <a:xfrm>
+            <a:off x="3720510" y="2155423"/>
+            <a:ext cx="1426463" cy="190195"/>
+          </a:xfrm>
+          <a:prstGeom prst="roundRect">
+            <a:avLst/>
+          </a:prstGeom>
+          <a:solidFill>
+            <a:srgbClr val="4A6B78"/>
+          </a:solidFill>
+          <a:ln>
+            <a:noFill/>
+          </a:ln>
+          <a:effectLst/>
+        </p:spPr>
+        <p:style>
+          <a:lnRef idx="1">
+            <a:schemeClr val="accent1"/>
+          </a:lnRef>
+          <a:fillRef idx="3">
+            <a:schemeClr val="accent1"/>
+          </a:fillRef>
+          <a:effectRef idx="2">
+            <a:schemeClr val="accent1"/>
+          </a:effectRef>
+          <a:fontRef idx="minor">
+            <a:schemeClr val="lt1"/>
+          </a:fontRef>
+        </p:style>
+        <p:txBody>
+          <a:bodyPr rtlCol="0" anchor="ctr"/>
+          <a:lstStyle/>
+          <a:p>
+            <a:pPr algn="ctr"/>
+          </a:p>
+        </p:txBody>
+      </p:sp>
+      <p:sp>
+        <p:nvSpPr>
+          <p:cNvPr id="7" name="Rounded Rectangle 6"/>
+          <p:cNvSpPr/>
+          <p:nvPr/>
+        </p:nvSpPr>
+        <p:spPr>
+          <a:xfrm>
+            <a:off x="3606393" y="2554833"/>
+            <a:ext cx="4945075" cy="1806854"/>
+          </a:xfrm>
+          <a:prstGeom prst="roundRect">
+            <a:avLst/>
+          </a:prstGeom>
+          <a:solidFill>
+            <a:srgbClr val="0B171D"/>
+          </a:solidFill>
+          <a:ln>
+            <a:noFill/>
+          </a:ln>
+          <a:effectLst/>
+        </p:spPr>
+        <p:style>
+          <a:lnRef idx="1">
+            <a:schemeClr val="accent1"/>
+          </a:lnRef>
+          <a:fillRef idx="3">
+            <a:schemeClr val="accent1"/>
+          </a:fillRef>
+          <a:effectRef idx="2">
+            <a:schemeClr val="accent1"/>
+          </a:effectRef>
+          <a:fontRef idx="minor">
+            <a:schemeClr val="lt1"/>
+          </a:fontRef>
+        </p:style>
+        <p:txBody>
+          <a:bodyPr rtlCol="0" anchor="ctr"/>
+          <a:lstStyle/>
+          <a:p>
+            <a:pPr algn="ctr"/>
+          </a:p>
+        </p:txBody>
+      </p:sp>
+      <p:sp>
+        <p:nvSpPr>
+          <p:cNvPr id="8" name="Rounded Rectangle 7"/>
+          <p:cNvSpPr/>
+          <p:nvPr/>
+        </p:nvSpPr>
+        <p:spPr>
+          <a:xfrm>
+            <a:off x="3720510" y="2668950"/>
+            <a:ext cx="2852927" cy="399409"/>
+          </a:xfrm>
+          <a:prstGeom prst="roundRect">
+            <a:avLst/>
+          </a:prstGeom>
+          <a:solidFill>
+            <a:srgbClr val="1B3540"/>
+          </a:solidFill>
+          <a:ln>
+            <a:noFill/>
+          </a:ln>
+          <a:effectLst/>
+        </p:spPr>
+        <p:style>
+          <a:lnRef idx="1">
+            <a:schemeClr val="accent1"/>
+          </a:lnRef>
+          <a:fillRef idx="3">
+            <a:schemeClr val="accent1"/>
+          </a:fillRef>
+          <a:effectRef idx="2">
+            <a:schemeClr val="accent1"/>
+          </a:effectRef>
+          <a:fontRef idx="minor">
+            <a:schemeClr val="lt1"/>
+          </a:fontRef>
+        </p:style>
+        <p:txBody>
+          <a:bodyPr rtlCol="0" anchor="ctr"/>
+          <a:lstStyle/>
+          <a:p>
+            <a:pPr algn="ctr"/>
+          </a:p>
+        </p:txBody>
+      </p:sp>
+      <p:sp>
+        <p:nvSpPr>
+          <p:cNvPr id="9" name="Rounded Rectangle 8"/>
+          <p:cNvSpPr/>
+          <p:nvPr/>
+        </p:nvSpPr>
+        <p:spPr>
+          <a:xfrm>
+            <a:off x="5584423" y="3182477"/>
+            <a:ext cx="2852927" cy="399409"/>
+          </a:xfrm>
+          <a:prstGeom prst="roundRect">
+            <a:avLst/>
+          </a:prstGeom>
+          <a:solidFill>
+            <a:srgbClr val="123A32"/>
+          </a:solidFill>
+          <a:ln>
+            <a:noFill/>
+          </a:ln>
+          <a:effectLst/>
+        </p:spPr>
+        <p:style>
+          <a:lnRef idx="1">
+            <a:schemeClr val="accent1"/>
+          </a:lnRef>
+          <a:fillRef idx="3">
+            <a:schemeClr val="accent1"/>
+          </a:fillRef>
+          <a:effectRef idx="2">
+            <a:schemeClr val="accent1"/>
+          </a:effectRef>
+          <a:fontRef idx="minor">
+            <a:schemeClr val="lt1"/>
+          </a:fontRef>
+        </p:style>
+        <p:txBody>
+          <a:bodyPr rtlCol="0" anchor="ctr"/>
+          <a:lstStyle/>
+          <a:p>
+            <a:pPr algn="ctr"/>
+          </a:p>
+        </p:txBody>
+      </p:sp>
+      <p:sp>
+        <p:nvSpPr>
+          <p:cNvPr id="10" name="Rounded Rectangle 9"/>
+          <p:cNvSpPr/>
+          <p:nvPr/>
+        </p:nvSpPr>
+        <p:spPr>
+          <a:xfrm>
+            <a:off x="3720510" y="3696004"/>
+            <a:ext cx="3138220" cy="399409"/>
+          </a:xfrm>
+          <a:prstGeom prst="roundRect">
+            <a:avLst/>
+          </a:prstGeom>
+          <a:solidFill>
+            <a:srgbClr val="1B3540"/>
+          </a:solidFill>
+          <a:ln>
+            <a:noFill/>
+          </a:ln>
+          <a:effectLst/>
+        </p:spPr>
+        <p:style>
+          <a:lnRef idx="1">
+            <a:schemeClr val="accent1"/>
+          </a:lnRef>
+          <a:fillRef idx="3">
+            <a:schemeClr val="accent1"/>
+          </a:fillRef>
+          <a:effectRef idx="2">
+            <a:schemeClr val="accent1"/>
+          </a:effectRef>
+          <a:fontRef idx="minor">
+            <a:schemeClr val="lt1"/>
+          </a:fontRef>
+        </p:style>
+        <p:txBody>
+          <a:bodyPr rtlCol="0" anchor="ctr"/>
+          <a:lstStyle/>
+          <a:p>
+            <a:pPr algn="ctr"/>
+          </a:p>
+        </p:txBody>
+      </p:sp>
+      <p:sp>
+        <p:nvSpPr>
+          <p:cNvPr id="11" name="Rounded Rectangle 10"/>
+          <p:cNvSpPr/>
+          <p:nvPr/>
+        </p:nvSpPr>
+        <p:spPr>
+          <a:xfrm>
+            <a:off x="3701491" y="4856195"/>
+            <a:ext cx="3899001" cy="323331"/>
+          </a:xfrm>
+          <a:prstGeom prst="roundRect">
+            <a:avLst/>
+          </a:prstGeom>
+          <a:solidFill>
+            <a:srgbClr val="16303A"/>
+          </a:solidFill>
+          <a:ln>
+            <a:noFill/>
+          </a:ln>
+          <a:effectLst/>
+        </p:spPr>
+        <p:style>
+          <a:lnRef idx="1">
+            <a:schemeClr val="accent1"/>
+          </a:lnRef>
+          <a:fillRef idx="3">
+            <a:schemeClr val="accent1"/>
+          </a:fillRef>
+          <a:effectRef idx="2">
+            <a:schemeClr val="accent1"/>
+          </a:effectRef>
+          <a:fontRef idx="minor">
+            <a:schemeClr val="lt1"/>
+          </a:fontRef>
+        </p:style>
+        <p:txBody>
+          <a:bodyPr rtlCol="0" anchor="ctr"/>
+          <a:lstStyle/>
+          <a:p>
+            <a:pPr algn="ctr"/>
+          </a:p>
+        </p:txBody>
+      </p:sp>
+      <p:sp>
+        <p:nvSpPr>
+          <p:cNvPr id="12" name="Rounded Rectangle 11"/>
+          <p:cNvSpPr/>
+          <p:nvPr/>
+        </p:nvSpPr>
+        <p:spPr>
+          <a:xfrm>
+            <a:off x="7695590" y="4856195"/>
+            <a:ext cx="779800" cy="323331"/>
+          </a:xfrm>
+          <a:prstGeom prst="roundRect">
+            <a:avLst/>
+          </a:prstGeom>
+          <a:solidFill>
+            <a:srgbClr val="01AEFD"/>
+          </a:solidFill>
+          <a:ln>
+            <a:noFill/>
+          </a:ln>
+          <a:effectLst/>
+        </p:spPr>
+        <p:style>
+          <a:lnRef idx="1">
+            <a:schemeClr val="accent1"/>
+          </a:lnRef>
+          <a:fillRef idx="3">
+            <a:schemeClr val="accent1"/>
+          </a:fillRef>
+          <a:effectRef idx="2">
+            <a:schemeClr val="accent1"/>
+          </a:effectRef>
+          <a:fontRef idx="minor">
+            <a:schemeClr val="lt1"/>
+          </a:fontRef>
+        </p:style>
+        <p:txBody>
+          <a:bodyPr rtlCol="0" anchor="ctr"/>
+          <a:lstStyle/>
+          <a:p>
+            <a:pPr algn="ctr"/>
+          </a:p>
+        </p:txBody>
+      </p:sp>
+      <p:sp>
+        <p:nvSpPr>
+          <p:cNvPr id="13" name="Rounded Rectangle 12"/>
+          <p:cNvSpPr/>
+          <p:nvPr/>
+        </p:nvSpPr>
+        <p:spPr>
+          <a:xfrm>
+            <a:off x="3720510" y="5407761"/>
+            <a:ext cx="1616659" cy="95097"/>
+          </a:xfrm>
+          <a:prstGeom prst="roundRect">
+            <a:avLst/>
+          </a:prstGeom>
+          <a:solidFill>
+            <a:srgbClr val="2A4550"/>
+          </a:solidFill>
+          <a:ln>
+            <a:noFill/>
+          </a:ln>
+          <a:effectLst/>
+        </p:spPr>
+        <p:style>
+          <a:lnRef idx="1">
+            <a:schemeClr val="accent1"/>
+          </a:lnRef>
+          <a:fillRef idx="3">
+            <a:schemeClr val="accent1"/>
+          </a:fillRef>
+          <a:effectRef idx="2">
+            <a:schemeClr val="accent1"/>
+          </a:effectRef>
+          <a:fontRef idx="minor">
+            <a:schemeClr val="lt1"/>
+          </a:fontRef>
+        </p:style>
+        <p:txBody>
+          <a:bodyPr rtlCol="0" anchor="ctr"/>
+          <a:lstStyle/>
+          <a:p>
+            <a:pPr algn="ctr"/>
+          </a:p>
+        </p:txBody>
+      </p:sp>
+      <p:sp>
+        <p:nvSpPr>
+          <p:cNvPr id="14" name="Rounded Rectangle 13"/>
+          <p:cNvSpPr/>
+          <p:nvPr/>
+        </p:nvSpPr>
+        <p:spPr>
+          <a:xfrm>
+            <a:off x="3416198" y="1603857"/>
+            <a:ext cx="5325465" cy="3994099"/>
+          </a:xfrm>
+          <a:prstGeom prst="roundRect">
+            <a:avLst/>
+          </a:prstGeom>
+          <a:noFill/>
+          <a:ln w="44450">
+            <a:solidFill>
+              <a:srgbClr val="FFD633"/>
+            </a:solidFill>
+          </a:ln>
+          <a:effectLst/>
+        </p:spPr>
+        <p:style>
+          <a:lnRef idx="1">
+            <a:schemeClr val="accent1"/>
+          </a:lnRef>
+          <a:fillRef idx="3">
+            <a:schemeClr val="accent1"/>
+          </a:fillRef>
+          <a:effectRef idx="2">
+            <a:schemeClr val="accent1"/>
+          </a:effectRef>
+          <a:fontRef idx="minor">
+            <a:schemeClr val="lt1"/>
+          </a:fontRef>
+        </p:style>
+        <p:txBody>
+          <a:bodyPr rtlCol="0" anchor="ctr"/>
+          <a:lstStyle/>
+          <a:p>
+            <a:pPr algn="ctr"/>
+          </a:p>
+        </p:txBody>
+      </p:sp>
+      <p:sp>
+        <p:nvSpPr>
+          <p:cNvPr id="15" name="TextBox 14"/>
           <p:cNvSpPr txBox="1"/>
           <p:nvPr/>
         </p:nvSpPr>
         <p:spPr>
           <a:xfrm>
-            <a:off x="548640" y="5623560"/>
-            <a:ext cx="11064240" cy="1051560"/>
+            <a:off x="822960" y="6172200"/>
+            <a:ext cx="10515600" cy="548640"/>
           </a:xfrm>
           <a:prstGeom prst="rect">
             <a:avLst/>
@@ -6053,10 +7483,10 @@
             <a:r>
               <a:rPr sz="2000">
                 <a:solidFill>
-                  <a:srgbClr val="DCECEF"/>
-                </a:solidFill>
-              </a:rPr>
-              <a:t>A thin grey border.</a:t>
+                  <a:srgbClr val="0A6299"/>
+                </a:solidFill>
+              </a:rPr>
+              <a:t>width sets how wide the app column is.</a:t>
             </a:r>
           </a:p>
         </p:txBody>
@@ -6115,7 +7545,7 @@
                   <a:srgbClr val="01AEFD"/>
                 </a:solidFill>
               </a:rPr>
-              <a:t>Type this into style.css   -   line 28</a:t>
+              <a:t>Type this into style.css   -   line 24</a:t>
             </a:r>
           </a:p>
         </p:txBody>
@@ -6234,111 +7664,11 @@
             <a:r>
               <a:rPr sz="1800">
                 <a:solidFill>
-                  <a:srgbClr val="6D8C97"/>
+                  <a:srgbClr val="7FE0A0"/>
                 </a:solidFill>
                 <a:latin typeface="Consolas"/>
               </a:rPr>
               <a:t>  width: 100%;</a:t>
-            </a:r>
-          </a:p>
-          <a:p>
-            <a:pPr>
-              <a:spcAft>
-                <a:spcPts val="0"/>
-              </a:spcAft>
-            </a:pPr>
-            <a:r>
-              <a:rPr sz="1800">
-                <a:solidFill>
-                  <a:srgbClr val="6D8C97"/>
-                </a:solidFill>
-                <a:latin typeface="Consolas"/>
-              </a:rPr>
-              <a:t>  25  </a:t>
-            </a:r>
-            <a:r>
-              <a:rPr sz="1800">
-                <a:solidFill>
-                  <a:srgbClr val="6D8C97"/>
-                </a:solidFill>
-                <a:latin typeface="Consolas"/>
-              </a:rPr>
-              <a:t>  margin-top: 8px;</a:t>
-            </a:r>
-          </a:p>
-          <a:p>
-            <a:pPr>
-              <a:spcAft>
-                <a:spcPts val="0"/>
-              </a:spcAft>
-            </a:pPr>
-            <a:r>
-              <a:rPr sz="1800">
-                <a:solidFill>
-                  <a:srgbClr val="6D8C97"/>
-                </a:solidFill>
-                <a:latin typeface="Consolas"/>
-              </a:rPr>
-              <a:t>  26  </a:t>
-            </a:r>
-            <a:r>
-              <a:rPr sz="1800">
-                <a:solidFill>
-                  <a:srgbClr val="6D8C97"/>
-                </a:solidFill>
-                <a:latin typeface="Consolas"/>
-              </a:rPr>
-              <a:t>  padding: 9px;</a:t>
-            </a:r>
-          </a:p>
-          <a:p>
-            <a:pPr>
-              <a:spcAft>
-                <a:spcPts val="0"/>
-              </a:spcAft>
-            </a:pPr>
-            <a:r>
-              <a:rPr sz="1800">
-                <a:solidFill>
-                  <a:srgbClr val="6D8C97"/>
-                </a:solidFill>
-                <a:latin typeface="Consolas"/>
-              </a:rPr>
-              <a:t>  27  </a:t>
-            </a:r>
-            <a:r>
-              <a:rPr sz="1800">
-                <a:solidFill>
-                  <a:srgbClr val="6D8C97"/>
-                </a:solidFill>
-                <a:latin typeface="Consolas"/>
-              </a:rPr>
-              <a:t>  border: 1px solid #dbe3ec;</a:t>
-            </a:r>
-          </a:p>
-          <a:p>
-            <a:pPr>
-              <a:spcAft>
-                <a:spcPts val="0"/>
-              </a:spcAft>
-            </a:pPr>
-            <a:r>
-              <a:rPr sz="1800">
-                <a:solidFill>
-                  <a:srgbClr val="6D8C97"/>
-                </a:solidFill>
-                <a:latin typeface="Consolas"/>
-              </a:rPr>
-              <a:t>  28  </a:t>
-            </a:r>
-            <a:r>
-              <a:rPr sz="1800">
-                <a:solidFill>
-                  <a:srgbClr val="7FE0A0"/>
-                </a:solidFill>
-                <a:latin typeface="Consolas"/>
-              </a:rPr>
-              <a:t>  border-radius: 6px;</a:t>
             </a:r>
           </a:p>
         </p:txBody>
@@ -6371,7 +7701,7 @@
                   <a:srgbClr val="DCECEF"/>
                 </a:solidFill>
               </a:rPr>
-              <a:t>Slightly rounded corners.</a:t>
+              <a:t>Make it as wide as the panel.</a:t>
             </a:r>
           </a:p>
         </p:txBody>
@@ -6430,7 +7760,7 @@
                   <a:srgbClr val="01AEFD"/>
                 </a:solidFill>
               </a:rPr>
-              <a:t>Type this into style.css   -   line 29</a:t>
+              <a:t>Type this into style.css   -   line 25</a:t>
             </a:r>
           </a:p>
         </p:txBody>
@@ -6574,111 +7904,11 @@
             <a:r>
               <a:rPr sz="1800">
                 <a:solidFill>
-                  <a:srgbClr val="6D8C97"/>
+                  <a:srgbClr val="7FE0A0"/>
                 </a:solidFill>
                 <a:latin typeface="Consolas"/>
               </a:rPr>
               <a:t>  margin-top: 8px;</a:t>
-            </a:r>
-          </a:p>
-          <a:p>
-            <a:pPr>
-              <a:spcAft>
-                <a:spcPts val="0"/>
-              </a:spcAft>
-            </a:pPr>
-            <a:r>
-              <a:rPr sz="1800">
-                <a:solidFill>
-                  <a:srgbClr val="6D8C97"/>
-                </a:solidFill>
-                <a:latin typeface="Consolas"/>
-              </a:rPr>
-              <a:t>  26  </a:t>
-            </a:r>
-            <a:r>
-              <a:rPr sz="1800">
-                <a:solidFill>
-                  <a:srgbClr val="6D8C97"/>
-                </a:solidFill>
-                <a:latin typeface="Consolas"/>
-              </a:rPr>
-              <a:t>  padding: 9px;</a:t>
-            </a:r>
-          </a:p>
-          <a:p>
-            <a:pPr>
-              <a:spcAft>
-                <a:spcPts val="0"/>
-              </a:spcAft>
-            </a:pPr>
-            <a:r>
-              <a:rPr sz="1800">
-                <a:solidFill>
-                  <a:srgbClr val="6D8C97"/>
-                </a:solidFill>
-                <a:latin typeface="Consolas"/>
-              </a:rPr>
-              <a:t>  27  </a:t>
-            </a:r>
-            <a:r>
-              <a:rPr sz="1800">
-                <a:solidFill>
-                  <a:srgbClr val="6D8C97"/>
-                </a:solidFill>
-                <a:latin typeface="Consolas"/>
-              </a:rPr>
-              <a:t>  border: 1px solid #dbe3ec;</a:t>
-            </a:r>
-          </a:p>
-          <a:p>
-            <a:pPr>
-              <a:spcAft>
-                <a:spcPts val="0"/>
-              </a:spcAft>
-            </a:pPr>
-            <a:r>
-              <a:rPr sz="1800">
-                <a:solidFill>
-                  <a:srgbClr val="6D8C97"/>
-                </a:solidFill>
-                <a:latin typeface="Consolas"/>
-              </a:rPr>
-              <a:t>  28  </a:t>
-            </a:r>
-            <a:r>
-              <a:rPr sz="1800">
-                <a:solidFill>
-                  <a:srgbClr val="6D8C97"/>
-                </a:solidFill>
-                <a:latin typeface="Consolas"/>
-              </a:rPr>
-              <a:t>  border-radius: 6px;</a:t>
-            </a:r>
-          </a:p>
-          <a:p>
-            <a:pPr>
-              <a:spcAft>
-                <a:spcPts val="0"/>
-              </a:spcAft>
-            </a:pPr>
-            <a:r>
-              <a:rPr sz="1800">
-                <a:solidFill>
-                  <a:srgbClr val="6D8C97"/>
-                </a:solidFill>
-                <a:latin typeface="Consolas"/>
-              </a:rPr>
-              <a:t>  29  </a:t>
-            </a:r>
-            <a:r>
-              <a:rPr sz="1800">
-                <a:solidFill>
-                  <a:srgbClr val="7FE0A0"/>
-                </a:solidFill>
-                <a:latin typeface="Consolas"/>
-              </a:rPr>
-              <a:t>  font-family: inherit;</a:t>
             </a:r>
           </a:p>
         </p:txBody>
@@ -6711,7 +7941,7 @@
                   <a:srgbClr val="DCECEF"/>
                 </a:solidFill>
               </a:rPr>
-              <a:t>Use the same font as the rest of the page, not the browser default.</a:t>
+              <a:t>A little space above it, under the label.</a:t>
             </a:r>
           </a:p>
         </p:txBody>
@@ -6770,7 +8000,7 @@
                   <a:srgbClr val="01AEFD"/>
                 </a:solidFill>
               </a:rPr>
-              <a:t>Type this into style.css   -   line 30</a:t>
+              <a:t>Type this into style.css   -   line 26</a:t>
             </a:r>
           </a:p>
         </p:txBody>
@@ -6939,111 +8169,11 @@
             <a:r>
               <a:rPr sz="1800">
                 <a:solidFill>
-                  <a:srgbClr val="6D8C97"/>
+                  <a:srgbClr val="7FE0A0"/>
                 </a:solidFill>
                 <a:latin typeface="Consolas"/>
               </a:rPr>
               <a:t>  padding: 9px;</a:t>
-            </a:r>
-          </a:p>
-          <a:p>
-            <a:pPr>
-              <a:spcAft>
-                <a:spcPts val="0"/>
-              </a:spcAft>
-            </a:pPr>
-            <a:r>
-              <a:rPr sz="1800">
-                <a:solidFill>
-                  <a:srgbClr val="6D8C97"/>
-                </a:solidFill>
-                <a:latin typeface="Consolas"/>
-              </a:rPr>
-              <a:t>  27  </a:t>
-            </a:r>
-            <a:r>
-              <a:rPr sz="1800">
-                <a:solidFill>
-                  <a:srgbClr val="6D8C97"/>
-                </a:solidFill>
-                <a:latin typeface="Consolas"/>
-              </a:rPr>
-              <a:t>  border: 1px solid #dbe3ec;</a:t>
-            </a:r>
-          </a:p>
-          <a:p>
-            <a:pPr>
-              <a:spcAft>
-                <a:spcPts val="0"/>
-              </a:spcAft>
-            </a:pPr>
-            <a:r>
-              <a:rPr sz="1800">
-                <a:solidFill>
-                  <a:srgbClr val="6D8C97"/>
-                </a:solidFill>
-                <a:latin typeface="Consolas"/>
-              </a:rPr>
-              <a:t>  28  </a:t>
-            </a:r>
-            <a:r>
-              <a:rPr sz="1800">
-                <a:solidFill>
-                  <a:srgbClr val="6D8C97"/>
-                </a:solidFill>
-                <a:latin typeface="Consolas"/>
-              </a:rPr>
-              <a:t>  border-radius: 6px;</a:t>
-            </a:r>
-          </a:p>
-          <a:p>
-            <a:pPr>
-              <a:spcAft>
-                <a:spcPts val="0"/>
-              </a:spcAft>
-            </a:pPr>
-            <a:r>
-              <a:rPr sz="1800">
-                <a:solidFill>
-                  <a:srgbClr val="6D8C97"/>
-                </a:solidFill>
-                <a:latin typeface="Consolas"/>
-              </a:rPr>
-              <a:t>  29  </a:t>
-            </a:r>
-            <a:r>
-              <a:rPr sz="1800">
-                <a:solidFill>
-                  <a:srgbClr val="6D8C97"/>
-                </a:solidFill>
-                <a:latin typeface="Consolas"/>
-              </a:rPr>
-              <a:t>  font-family: inherit;</a:t>
-            </a:r>
-          </a:p>
-          <a:p>
-            <a:pPr>
-              <a:spcAft>
-                <a:spcPts val="0"/>
-              </a:spcAft>
-            </a:pPr>
-            <a:r>
-              <a:rPr sz="1800">
-                <a:solidFill>
-                  <a:srgbClr val="6D8C97"/>
-                </a:solidFill>
-                <a:latin typeface="Consolas"/>
-              </a:rPr>
-              <a:t>  30  </a:t>
-            </a:r>
-            <a:r>
-              <a:rPr sz="1800">
-                <a:solidFill>
-                  <a:srgbClr val="7FE0A0"/>
-                </a:solidFill>
-                <a:latin typeface="Consolas"/>
-              </a:rPr>
-              <a:t>  font-size: 14px;</a:t>
             </a:r>
           </a:p>
         </p:txBody>
@@ -7076,7 +8206,7 @@
                   <a:srgbClr val="DCECEF"/>
                 </a:solidFill>
               </a:rPr>
-              <a:t>Set the text size.</a:t>
+              <a:t>Padding so the text is not jammed against the edge.</a:t>
             </a:r>
           </a:p>
         </p:txBody>
@@ -7135,7 +8265,7 @@
                   <a:srgbClr val="01AEFD"/>
                 </a:solidFill>
               </a:rPr>
-              <a:t>Type this into style.css   -   line 31</a:t>
+              <a:t>Type this into style.css   -   line 27</a:t>
             </a:r>
           </a:p>
         </p:txBody>
@@ -7168,7 +8298,7 @@
               </a:spcAft>
             </a:pPr>
             <a:r>
-              <a:rPr sz="1300">
+              <a:rPr sz="1800">
                 <a:solidFill>
                   <a:srgbClr val="6D8C97"/>
                 </a:solidFill>
@@ -7177,7 +8307,7 @@
               <a:t>  21  </a:t>
             </a:r>
             <a:r>
-              <a:rPr sz="1300">
+              <a:rPr sz="1800">
                 <a:solidFill>
                   <a:srgbClr val="6D8C97"/>
                 </a:solidFill>
@@ -7193,7 +8323,7 @@
               </a:spcAft>
             </a:pPr>
             <a:r>
-              <a:rPr sz="1300">
+              <a:rPr sz="1800">
                 <a:solidFill>
                   <a:srgbClr val="6D8C97"/>
                 </a:solidFill>
@@ -7202,7 +8332,7 @@
               <a:t>  22  </a:t>
             </a:r>
             <a:r>
-              <a:rPr sz="1300">
+              <a:rPr sz="1800">
                 <a:solidFill>
                   <a:srgbClr val="6D8C97"/>
                 </a:solidFill>
@@ -7218,7 +8348,7 @@
               </a:spcAft>
             </a:pPr>
             <a:r>
-              <a:rPr sz="1300">
+              <a:rPr sz="1800">
                 <a:solidFill>
                   <a:srgbClr val="6D8C97"/>
                 </a:solidFill>
@@ -7227,7 +8357,7 @@
               <a:t>  23  </a:t>
             </a:r>
             <a:r>
-              <a:rPr sz="1300">
+              <a:rPr sz="1800">
                 <a:solidFill>
                   <a:srgbClr val="6D8C97"/>
                 </a:solidFill>
@@ -7243,7 +8373,7 @@
               </a:spcAft>
             </a:pPr>
             <a:r>
-              <a:rPr sz="1300">
+              <a:rPr sz="1800">
                 <a:solidFill>
                   <a:srgbClr val="6D8C97"/>
                 </a:solidFill>
@@ -7252,7 +8382,7 @@
               <a:t>  24  </a:t>
             </a:r>
             <a:r>
-              <a:rPr sz="1300">
+              <a:rPr sz="1800">
                 <a:solidFill>
                   <a:srgbClr val="6D8C97"/>
                 </a:solidFill>
@@ -7268,7 +8398,7 @@
               </a:spcAft>
             </a:pPr>
             <a:r>
-              <a:rPr sz="1300">
+              <a:rPr sz="1800">
                 <a:solidFill>
                   <a:srgbClr val="6D8C97"/>
                 </a:solidFill>
@@ -7277,7 +8407,7 @@
               <a:t>  25  </a:t>
             </a:r>
             <a:r>
-              <a:rPr sz="1300">
+              <a:rPr sz="1800">
                 <a:solidFill>
                   <a:srgbClr val="6D8C97"/>
                 </a:solidFill>
@@ -7293,7 +8423,7 @@
               </a:spcAft>
             </a:pPr>
             <a:r>
-              <a:rPr sz="1300">
+              <a:rPr sz="1800">
                 <a:solidFill>
                   <a:srgbClr val="6D8C97"/>
                 </a:solidFill>
@@ -7302,7 +8432,7 @@
               <a:t>  26  </a:t>
             </a:r>
             <a:r>
-              <a:rPr sz="1300">
+              <a:rPr sz="1800">
                 <a:solidFill>
                   <a:srgbClr val="6D8C97"/>
                 </a:solidFill>
@@ -7318,7 +8448,7 @@
               </a:spcAft>
             </a:pPr>
             <a:r>
-              <a:rPr sz="1300">
+              <a:rPr sz="1800">
                 <a:solidFill>
                   <a:srgbClr val="6D8C97"/>
                 </a:solidFill>
@@ -7327,113 +8457,13 @@
               <a:t>  27  </a:t>
             </a:r>
             <a:r>
-              <a:rPr sz="1300">
-                <a:solidFill>
-                  <a:srgbClr val="6D8C97"/>
+              <a:rPr sz="1800">
+                <a:solidFill>
+                  <a:srgbClr val="7FE0A0"/>
                 </a:solidFill>
                 <a:latin typeface="Consolas"/>
               </a:rPr>
               <a:t>  border: 1px solid #dbe3ec;</a:t>
-            </a:r>
-          </a:p>
-          <a:p>
-            <a:pPr>
-              <a:spcAft>
-                <a:spcPts val="0"/>
-              </a:spcAft>
-            </a:pPr>
-            <a:r>
-              <a:rPr sz="1300">
-                <a:solidFill>
-                  <a:srgbClr val="6D8C97"/>
-                </a:solidFill>
-                <a:latin typeface="Consolas"/>
-              </a:rPr>
-              <a:t>  28  </a:t>
-            </a:r>
-            <a:r>
-              <a:rPr sz="1300">
-                <a:solidFill>
-                  <a:srgbClr val="6D8C97"/>
-                </a:solidFill>
-                <a:latin typeface="Consolas"/>
-              </a:rPr>
-              <a:t>  border-radius: 6px;</a:t>
-            </a:r>
-          </a:p>
-          <a:p>
-            <a:pPr>
-              <a:spcAft>
-                <a:spcPts val="0"/>
-              </a:spcAft>
-            </a:pPr>
-            <a:r>
-              <a:rPr sz="1300">
-                <a:solidFill>
-                  <a:srgbClr val="6D8C97"/>
-                </a:solidFill>
-                <a:latin typeface="Consolas"/>
-              </a:rPr>
-              <a:t>  29  </a:t>
-            </a:r>
-            <a:r>
-              <a:rPr sz="1300">
-                <a:solidFill>
-                  <a:srgbClr val="6D8C97"/>
-                </a:solidFill>
-                <a:latin typeface="Consolas"/>
-              </a:rPr>
-              <a:t>  font-family: inherit;</a:t>
-            </a:r>
-          </a:p>
-          <a:p>
-            <a:pPr>
-              <a:spcAft>
-                <a:spcPts val="0"/>
-              </a:spcAft>
-            </a:pPr>
-            <a:r>
-              <a:rPr sz="1300">
-                <a:solidFill>
-                  <a:srgbClr val="6D8C97"/>
-                </a:solidFill>
-                <a:latin typeface="Consolas"/>
-              </a:rPr>
-              <a:t>  30  </a:t>
-            </a:r>
-            <a:r>
-              <a:rPr sz="1300">
-                <a:solidFill>
-                  <a:srgbClr val="6D8C97"/>
-                </a:solidFill>
-                <a:latin typeface="Consolas"/>
-              </a:rPr>
-              <a:t>  font-size: 14px;</a:t>
-            </a:r>
-          </a:p>
-          <a:p>
-            <a:pPr>
-              <a:spcAft>
-                <a:spcPts val="0"/>
-              </a:spcAft>
-            </a:pPr>
-            <a:r>
-              <a:rPr sz="1300">
-                <a:solidFill>
-                  <a:srgbClr val="6D8C97"/>
-                </a:solidFill>
-                <a:latin typeface="Consolas"/>
-              </a:rPr>
-              <a:t>  31  </a:t>
-            </a:r>
-            <a:r>
-              <a:rPr sz="1300">
-                <a:solidFill>
-                  <a:srgbClr val="7FE0A0"/>
-                </a:solidFill>
-                <a:latin typeface="Consolas"/>
-              </a:rPr>
-              <a:t>}</a:t>
             </a:r>
           </a:p>
         </p:txBody>
@@ -7466,7 +8496,7 @@
                   <a:srgbClr val="DCECEF"/>
                 </a:solidFill>
               </a:rPr>
-              <a:t>Close the rule.</a:t>
+              <a:t>A thin grey border.</a:t>
             </a:r>
           </a:p>
         </p:txBody>
@@ -7525,7 +8555,7 @@
                   <a:srgbClr val="01AEFD"/>
                 </a:solidFill>
               </a:rPr>
-              <a:t>All together in style.css</a:t>
+              <a:t>Type this into style.css   -   line 28</a:t>
             </a:r>
           </a:p>
         </p:txBody>
@@ -7558,7 +8588,7 @@
               </a:spcAft>
             </a:pPr>
             <a:r>
-              <a:rPr sz="1300">
+              <a:rPr sz="1800">
                 <a:solidFill>
                   <a:srgbClr val="6D8C97"/>
                 </a:solidFill>
@@ -7567,263 +8597,188 @@
               <a:t>  21  </a:t>
             </a:r>
             <a:r>
-              <a:rPr sz="1300">
+              <a:rPr sz="1800">
+                <a:solidFill>
+                  <a:srgbClr val="6D8C97"/>
+                </a:solidFill>
+                <a:latin typeface="Consolas"/>
+              </a:rPr>
+              <a:t>.setup { margin-bottom: 12px; font-size: 14px; }</a:t>
+            </a:r>
+          </a:p>
+          <a:p>
+            <a:pPr>
+              <a:spcAft>
+                <a:spcPts val="0"/>
+              </a:spcAft>
+            </a:pPr>
+            <a:r>
+              <a:rPr sz="1800">
+                <a:solidFill>
+                  <a:srgbClr val="6D8C97"/>
+                </a:solidFill>
+                <a:latin typeface="Consolas"/>
+              </a:rPr>
+              <a:t>  22  </a:t>
+            </a:r>
+            <a:r>
+              <a:rPr sz="1800">
+                <a:solidFill>
+                  <a:srgbClr val="6D8C97"/>
+                </a:solidFill>
+                <a:latin typeface="Consolas"/>
+              </a:rPr>
+              <a:t>.setup summary { cursor: pointer; color: #0a6299; font-weight: bold; }</a:t>
+            </a:r>
+          </a:p>
+          <a:p>
+            <a:pPr>
+              <a:spcAft>
+                <a:spcPts val="0"/>
+              </a:spcAft>
+            </a:pPr>
+            <a:r>
+              <a:rPr sz="1800">
+                <a:solidFill>
+                  <a:srgbClr val="6D8C97"/>
+                </a:solidFill>
+                <a:latin typeface="Consolas"/>
+              </a:rPr>
+              <a:t>  23  </a:t>
+            </a:r>
+            <a:r>
+              <a:rPr sz="1800">
+                <a:solidFill>
+                  <a:srgbClr val="6D8C97"/>
+                </a:solidFill>
+                <a:latin typeface="Consolas"/>
+              </a:rPr>
+              <a:t>.setup textarea {</a:t>
+            </a:r>
+          </a:p>
+          <a:p>
+            <a:pPr>
+              <a:spcAft>
+                <a:spcPts val="0"/>
+              </a:spcAft>
+            </a:pPr>
+            <a:r>
+              <a:rPr sz="1800">
+                <a:solidFill>
+                  <a:srgbClr val="6D8C97"/>
+                </a:solidFill>
+                <a:latin typeface="Consolas"/>
+              </a:rPr>
+              <a:t>  24  </a:t>
+            </a:r>
+            <a:r>
+              <a:rPr sz="1800">
+                <a:solidFill>
+                  <a:srgbClr val="6D8C97"/>
+                </a:solidFill>
+                <a:latin typeface="Consolas"/>
+              </a:rPr>
+              <a:t>  width: 100%;</a:t>
+            </a:r>
+          </a:p>
+          <a:p>
+            <a:pPr>
+              <a:spcAft>
+                <a:spcPts val="0"/>
+              </a:spcAft>
+            </a:pPr>
+            <a:r>
+              <a:rPr sz="1800">
+                <a:solidFill>
+                  <a:srgbClr val="6D8C97"/>
+                </a:solidFill>
+                <a:latin typeface="Consolas"/>
+              </a:rPr>
+              <a:t>  25  </a:t>
+            </a:r>
+            <a:r>
+              <a:rPr sz="1800">
+                <a:solidFill>
+                  <a:srgbClr val="6D8C97"/>
+                </a:solidFill>
+                <a:latin typeface="Consolas"/>
+              </a:rPr>
+              <a:t>  margin-top: 8px;</a:t>
+            </a:r>
+          </a:p>
+          <a:p>
+            <a:pPr>
+              <a:spcAft>
+                <a:spcPts val="0"/>
+              </a:spcAft>
+            </a:pPr>
+            <a:r>
+              <a:rPr sz="1800">
+                <a:solidFill>
+                  <a:srgbClr val="6D8C97"/>
+                </a:solidFill>
+                <a:latin typeface="Consolas"/>
+              </a:rPr>
+              <a:t>  26  </a:t>
+            </a:r>
+            <a:r>
+              <a:rPr sz="1800">
+                <a:solidFill>
+                  <a:srgbClr val="6D8C97"/>
+                </a:solidFill>
+                <a:latin typeface="Consolas"/>
+              </a:rPr>
+              <a:t>  padding: 9px;</a:t>
+            </a:r>
+          </a:p>
+          <a:p>
+            <a:pPr>
+              <a:spcAft>
+                <a:spcPts val="0"/>
+              </a:spcAft>
+            </a:pPr>
+            <a:r>
+              <a:rPr sz="1800">
+                <a:solidFill>
+                  <a:srgbClr val="6D8C97"/>
+                </a:solidFill>
+                <a:latin typeface="Consolas"/>
+              </a:rPr>
+              <a:t>  27  </a:t>
+            </a:r>
+            <a:r>
+              <a:rPr sz="1800">
+                <a:solidFill>
+                  <a:srgbClr val="6D8C97"/>
+                </a:solidFill>
+                <a:latin typeface="Consolas"/>
+              </a:rPr>
+              <a:t>  border: 1px solid #dbe3ec;</a:t>
+            </a:r>
+          </a:p>
+          <a:p>
+            <a:pPr>
+              <a:spcAft>
+                <a:spcPts val="0"/>
+              </a:spcAft>
+            </a:pPr>
+            <a:r>
+              <a:rPr sz="1800">
+                <a:solidFill>
+                  <a:srgbClr val="6D8C97"/>
+                </a:solidFill>
+                <a:latin typeface="Consolas"/>
+              </a:rPr>
+              <a:t>  28  </a:t>
+            </a:r>
+            <a:r>
+              <a:rPr sz="1800">
                 <a:solidFill>
                   <a:srgbClr val="7FE0A0"/>
                 </a:solidFill>
                 <a:latin typeface="Consolas"/>
               </a:rPr>
-              <a:t>.setup { margin-bottom: 12px; font-size: 14px; }</a:t>
-            </a:r>
-          </a:p>
-          <a:p>
-            <a:pPr>
-              <a:spcAft>
-                <a:spcPts val="0"/>
-              </a:spcAft>
-            </a:pPr>
-            <a:r>
-              <a:rPr sz="1300">
-                <a:solidFill>
-                  <a:srgbClr val="6D8C97"/>
-                </a:solidFill>
-                <a:latin typeface="Consolas"/>
-              </a:rPr>
-              <a:t>  22  </a:t>
-            </a:r>
-            <a:r>
-              <a:rPr sz="1300">
-                <a:solidFill>
-                  <a:srgbClr val="7FE0A0"/>
-                </a:solidFill>
-                <a:latin typeface="Consolas"/>
-              </a:rPr>
-              <a:t>.setup summary { cursor: pointer; color: #0a6299; font-weight: bold; }</a:t>
-            </a:r>
-          </a:p>
-          <a:p>
-            <a:pPr>
-              <a:spcAft>
-                <a:spcPts val="0"/>
-              </a:spcAft>
-            </a:pPr>
-            <a:r>
-              <a:rPr sz="1300">
-                <a:solidFill>
-                  <a:srgbClr val="6D8C97"/>
-                </a:solidFill>
-                <a:latin typeface="Consolas"/>
-              </a:rPr>
-              <a:t>  23  </a:t>
-            </a:r>
-            <a:r>
-              <a:rPr sz="1300">
-                <a:solidFill>
-                  <a:srgbClr val="7FE0A0"/>
-                </a:solidFill>
-                <a:latin typeface="Consolas"/>
-              </a:rPr>
-              <a:t>.setup textarea {</a:t>
-            </a:r>
-          </a:p>
-          <a:p>
-            <a:pPr>
-              <a:spcAft>
-                <a:spcPts val="0"/>
-              </a:spcAft>
-            </a:pPr>
-            <a:r>
-              <a:rPr sz="1300">
-                <a:solidFill>
-                  <a:srgbClr val="6D8C97"/>
-                </a:solidFill>
-                <a:latin typeface="Consolas"/>
-              </a:rPr>
-              <a:t>  24  </a:t>
-            </a:r>
-            <a:r>
-              <a:rPr sz="1300">
-                <a:solidFill>
-                  <a:srgbClr val="7FE0A0"/>
-                </a:solidFill>
-                <a:latin typeface="Consolas"/>
-              </a:rPr>
-              <a:t>  width: 100%;</a:t>
-            </a:r>
-          </a:p>
-          <a:p>
-            <a:pPr>
-              <a:spcAft>
-                <a:spcPts val="0"/>
-              </a:spcAft>
-            </a:pPr>
-            <a:r>
-              <a:rPr sz="1300">
-                <a:solidFill>
-                  <a:srgbClr val="6D8C97"/>
-                </a:solidFill>
-                <a:latin typeface="Consolas"/>
-              </a:rPr>
-              <a:t>  25  </a:t>
-            </a:r>
-            <a:r>
-              <a:rPr sz="1300">
-                <a:solidFill>
-                  <a:srgbClr val="7FE0A0"/>
-                </a:solidFill>
-                <a:latin typeface="Consolas"/>
-              </a:rPr>
-              <a:t>  margin-top: 8px;</a:t>
-            </a:r>
-          </a:p>
-          <a:p>
-            <a:pPr>
-              <a:spcAft>
-                <a:spcPts val="0"/>
-              </a:spcAft>
-            </a:pPr>
-            <a:r>
-              <a:rPr sz="1300">
-                <a:solidFill>
-                  <a:srgbClr val="6D8C97"/>
-                </a:solidFill>
-                <a:latin typeface="Consolas"/>
-              </a:rPr>
-              <a:t>  26  </a:t>
-            </a:r>
-            <a:r>
-              <a:rPr sz="1300">
-                <a:solidFill>
-                  <a:srgbClr val="7FE0A0"/>
-                </a:solidFill>
-                <a:latin typeface="Consolas"/>
-              </a:rPr>
-              <a:t>  padding: 9px;</a:t>
-            </a:r>
-          </a:p>
-          <a:p>
-            <a:pPr>
-              <a:spcAft>
-                <a:spcPts val="0"/>
-              </a:spcAft>
-            </a:pPr>
-            <a:r>
-              <a:rPr sz="1300">
-                <a:solidFill>
-                  <a:srgbClr val="6D8C97"/>
-                </a:solidFill>
-                <a:latin typeface="Consolas"/>
-              </a:rPr>
-              <a:t>  27  </a:t>
-            </a:r>
-            <a:r>
-              <a:rPr sz="1300">
-                <a:solidFill>
-                  <a:srgbClr val="7FE0A0"/>
-                </a:solidFill>
-                <a:latin typeface="Consolas"/>
-              </a:rPr>
-              <a:t>  border: 1px solid #dbe3ec;</a:t>
-            </a:r>
-          </a:p>
-          <a:p>
-            <a:pPr>
-              <a:spcAft>
-                <a:spcPts val="0"/>
-              </a:spcAft>
-            </a:pPr>
-            <a:r>
-              <a:rPr sz="1300">
-                <a:solidFill>
-                  <a:srgbClr val="6D8C97"/>
-                </a:solidFill>
-                <a:latin typeface="Consolas"/>
-              </a:rPr>
-              <a:t>  28  </a:t>
-            </a:r>
-            <a:r>
-              <a:rPr sz="1300">
-                <a:solidFill>
-                  <a:srgbClr val="7FE0A0"/>
-                </a:solidFill>
-                <a:latin typeface="Consolas"/>
-              </a:rPr>
               <a:t>  border-radius: 6px;</a:t>
-            </a:r>
-          </a:p>
-          <a:p>
-            <a:pPr>
-              <a:spcAft>
-                <a:spcPts val="0"/>
-              </a:spcAft>
-            </a:pPr>
-            <a:r>
-              <a:rPr sz="1300">
-                <a:solidFill>
-                  <a:srgbClr val="6D8C97"/>
-                </a:solidFill>
-                <a:latin typeface="Consolas"/>
-              </a:rPr>
-              <a:t>  29  </a:t>
-            </a:r>
-            <a:r>
-              <a:rPr sz="1300">
-                <a:solidFill>
-                  <a:srgbClr val="7FE0A0"/>
-                </a:solidFill>
-                <a:latin typeface="Consolas"/>
-              </a:rPr>
-              <a:t>  font-family: inherit;</a:t>
-            </a:r>
-          </a:p>
-          <a:p>
-            <a:pPr>
-              <a:spcAft>
-                <a:spcPts val="0"/>
-              </a:spcAft>
-            </a:pPr>
-            <a:r>
-              <a:rPr sz="1300">
-                <a:solidFill>
-                  <a:srgbClr val="6D8C97"/>
-                </a:solidFill>
-                <a:latin typeface="Consolas"/>
-              </a:rPr>
-              <a:t>  30  </a:t>
-            </a:r>
-            <a:r>
-              <a:rPr sz="1300">
-                <a:solidFill>
-                  <a:srgbClr val="7FE0A0"/>
-                </a:solidFill>
-                <a:latin typeface="Consolas"/>
-              </a:rPr>
-              <a:t>  font-size: 14px;</a:t>
-            </a:r>
-          </a:p>
-          <a:p>
-            <a:pPr>
-              <a:spcAft>
-                <a:spcPts val="0"/>
-              </a:spcAft>
-            </a:pPr>
-            <a:r>
-              <a:rPr sz="1300">
-                <a:solidFill>
-                  <a:srgbClr val="6D8C97"/>
-                </a:solidFill>
-                <a:latin typeface="Consolas"/>
-              </a:rPr>
-              <a:t>  31  </a:t>
-            </a:r>
-            <a:r>
-              <a:rPr sz="1300">
-                <a:solidFill>
-                  <a:srgbClr val="7FE0A0"/>
-                </a:solidFill>
-                <a:latin typeface="Consolas"/>
-              </a:rPr>
-              <a:t>}</a:t>
             </a:r>
           </a:p>
         </p:txBody>
@@ -7856,7 +8811,7 @@
                   <a:srgbClr val="DCECEF"/>
                 </a:solidFill>
               </a:rPr>
-              <a:t>That is the whole piece. Check yours looks the same before moving on.</a:t>
+              <a:t>Slightly rounded corners.</a:t>
             </a:r>
           </a:p>
         </p:txBody>
@@ -7915,7 +8870,7 @@
                   <a:srgbClr val="01AEFD"/>
                 </a:solidFill>
               </a:rPr>
-              <a:t>Type this into script.js   -   line 22</a:t>
+              <a:t>Type this into style.css   -   line 29</a:t>
             </a:r>
           </a:p>
         </p:txBody>
@@ -7954,16 +8909,16 @@
                 </a:solidFill>
                 <a:latin typeface="Consolas"/>
               </a:rPr>
-              <a:t>  16  </a:t>
-            </a:r>
-            <a:r>
-              <a:rPr sz="1800">
-                <a:solidFill>
-                  <a:srgbClr val="6D8C97"/>
-                </a:solidFill>
-                <a:latin typeface="Consolas"/>
-              </a:rPr>
-              <a:t> </a:t>
+              <a:t>  21  </a:t>
+            </a:r>
+            <a:r>
+              <a:rPr sz="1800">
+                <a:solidFill>
+                  <a:srgbClr val="6D8C97"/>
+                </a:solidFill>
+                <a:latin typeface="Consolas"/>
+              </a:rPr>
+              <a:t>.setup { margin-bottom: 12px; font-size: 14px; }</a:t>
             </a:r>
           </a:p>
           <a:p>
@@ -7979,16 +8934,16 @@
                 </a:solidFill>
                 <a:latin typeface="Consolas"/>
               </a:rPr>
-              <a:t>  17  </a:t>
-            </a:r>
-            <a:r>
-              <a:rPr sz="1800">
-                <a:solidFill>
-                  <a:srgbClr val="6D8C97"/>
-                </a:solidFill>
-                <a:latin typeface="Consolas"/>
-              </a:rPr>
-              <a:t>// Week 2: find the boxes we named in index.html.</a:t>
+              <a:t>  22  </a:t>
+            </a:r>
+            <a:r>
+              <a:rPr sz="1800">
+                <a:solidFill>
+                  <a:srgbClr val="6D8C97"/>
+                </a:solidFill>
+                <a:latin typeface="Consolas"/>
+              </a:rPr>
+              <a:t>.setup summary { cursor: pointer; color: #0a6299; font-weight: bold; }</a:t>
             </a:r>
           </a:p>
           <a:p>
@@ -8004,16 +8959,16 @@
                 </a:solidFill>
                 <a:latin typeface="Consolas"/>
               </a:rPr>
-              <a:t>  18  </a:t>
-            </a:r>
-            <a:r>
-              <a:rPr sz="1800">
-                <a:solidFill>
-                  <a:srgbClr val="6D8C97"/>
-                </a:solidFill>
-                <a:latin typeface="Consolas"/>
-              </a:rPr>
-              <a:t>// document.getElementById looks for the id= we wrote on each element.</a:t>
+              <a:t>  23  </a:t>
+            </a:r>
+            <a:r>
+              <a:rPr sz="1800">
+                <a:solidFill>
+                  <a:srgbClr val="6D8C97"/>
+                </a:solidFill>
+                <a:latin typeface="Consolas"/>
+              </a:rPr>
+              <a:t>.setup textarea {</a:t>
             </a:r>
           </a:p>
           <a:p>
@@ -8029,16 +8984,16 @@
                 </a:solidFill>
                 <a:latin typeface="Consolas"/>
               </a:rPr>
-              <a:t>  19  </a:t>
-            </a:r>
-            <a:r>
-              <a:rPr sz="1800">
-                <a:solidFill>
-                  <a:srgbClr val="6D8C97"/>
-                </a:solidFill>
-                <a:latin typeface="Consolas"/>
-              </a:rPr>
-              <a:t>const chat = document.getElementById('chat');</a:t>
+              <a:t>  24  </a:t>
+            </a:r>
+            <a:r>
+              <a:rPr sz="1800">
+                <a:solidFill>
+                  <a:srgbClr val="6D8C97"/>
+                </a:solidFill>
+                <a:latin typeface="Consolas"/>
+              </a:rPr>
+              <a:t>  width: 100%;</a:t>
             </a:r>
           </a:p>
           <a:p>
@@ -8054,16 +9009,16 @@
                 </a:solidFill>
                 <a:latin typeface="Consolas"/>
               </a:rPr>
-              <a:t>  20  </a:t>
-            </a:r>
-            <a:r>
-              <a:rPr sz="1800">
-                <a:solidFill>
-                  <a:srgbClr val="6D8C97"/>
-                </a:solidFill>
-                <a:latin typeface="Consolas"/>
-              </a:rPr>
-              <a:t>const composer = document.getElementById('composer');</a:t>
+              <a:t>  25  </a:t>
+            </a:r>
+            <a:r>
+              <a:rPr sz="1800">
+                <a:solidFill>
+                  <a:srgbClr val="6D8C97"/>
+                </a:solidFill>
+                <a:latin typeface="Consolas"/>
+              </a:rPr>
+              <a:t>  margin-top: 8px;</a:t>
             </a:r>
           </a:p>
           <a:p>
@@ -8079,16 +9034,16 @@
                 </a:solidFill>
                 <a:latin typeface="Consolas"/>
               </a:rPr>
-              <a:t>  21  </a:t>
-            </a:r>
-            <a:r>
-              <a:rPr sz="1800">
-                <a:solidFill>
-                  <a:srgbClr val="6D8C97"/>
-                </a:solidFill>
-                <a:latin typeface="Consolas"/>
-              </a:rPr>
-              <a:t>const promptBox = document.getElementById('prompt');</a:t>
+              <a:t>  26  </a:t>
+            </a:r>
+            <a:r>
+              <a:rPr sz="1800">
+                <a:solidFill>
+                  <a:srgbClr val="6D8C97"/>
+                </a:solidFill>
+                <a:latin typeface="Consolas"/>
+              </a:rPr>
+              <a:t>  padding: 9px;</a:t>
             </a:r>
           </a:p>
           <a:p>
@@ -8104,7 +9059,57 @@
                 </a:solidFill>
                 <a:latin typeface="Consolas"/>
               </a:rPr>
-              <a:t>  22  </a:t>
+              <a:t>  27  </a:t>
+            </a:r>
+            <a:r>
+              <a:rPr sz="1800">
+                <a:solidFill>
+                  <a:srgbClr val="6D8C97"/>
+                </a:solidFill>
+                <a:latin typeface="Consolas"/>
+              </a:rPr>
+              <a:t>  border: 1px solid #dbe3ec;</a:t>
+            </a:r>
+          </a:p>
+          <a:p>
+            <a:pPr>
+              <a:spcAft>
+                <a:spcPts val="0"/>
+              </a:spcAft>
+            </a:pPr>
+            <a:r>
+              <a:rPr sz="1800">
+                <a:solidFill>
+                  <a:srgbClr val="6D8C97"/>
+                </a:solidFill>
+                <a:latin typeface="Consolas"/>
+              </a:rPr>
+              <a:t>  28  </a:t>
+            </a:r>
+            <a:r>
+              <a:rPr sz="1800">
+                <a:solidFill>
+                  <a:srgbClr val="6D8C97"/>
+                </a:solidFill>
+                <a:latin typeface="Consolas"/>
+              </a:rPr>
+              <a:t>  border-radius: 6px;</a:t>
+            </a:r>
+          </a:p>
+          <a:p>
+            <a:pPr>
+              <a:spcAft>
+                <a:spcPts val="0"/>
+              </a:spcAft>
+            </a:pPr>
+            <a:r>
+              <a:rPr sz="1800">
+                <a:solidFill>
+                  <a:srgbClr val="6D8C97"/>
+                </a:solidFill>
+                <a:latin typeface="Consolas"/>
+              </a:rPr>
+              <a:t>  29  </a:t>
             </a:r>
             <a:r>
               <a:rPr sz="1800">
@@ -8113,7 +9118,7 @@
                 </a:solidFill>
                 <a:latin typeface="Consolas"/>
               </a:rPr>
-              <a:t>const personaBox = document.getElementById('persona');</a:t>
+              <a:t>  font-family: inherit;</a:t>
             </a:r>
           </a:p>
         </p:txBody>
@@ -8146,7 +9151,7 @@
                   <a:srgbClr val="DCECEF"/>
                 </a:solidFill>
               </a:rPr>
-              <a:t>Find the Personality box too, so the code can read what is typed in it.</a:t>
+              <a:t>Use the same font as the rest of the page, not the browser default.</a:t>
             </a:r>
           </a:p>
         </p:txBody>
@@ -8274,6 +9279,14 @@
 <file path=ppt/slides/slide30.xml><?xml version="1.0" encoding="utf-8"?>
 <p:sld xmlns:a="http://schemas.openxmlformats.org/drawingml/2006/main" xmlns:p="http://schemas.openxmlformats.org/presentationml/2006/main" xmlns:r="http://schemas.openxmlformats.org/officeDocument/2006/relationships">
   <p:cSld>
+    <p:bg>
+      <p:bgPr>
+        <a:solidFill>
+          <a:srgbClr val="102127"/>
+        </a:solidFill>
+        <a:effectLst/>
+      </p:bgPr>
+    </p:bg>
     <p:spTree>
       <p:nvGrpSpPr>
         <p:cNvPr id="1" name=""/>
@@ -8283,26 +9296,33 @@
       <p:grpSpPr/>
       <p:sp>
         <p:nvSpPr>
-          <p:cNvPr id="2" name="Title 1"/>
-          <p:cNvSpPr>
-            <a:spLocks noGrp="1"/>
-          </p:cNvSpPr>
-          <p:nvPr>
-            <p:ph type="title"/>
-          </p:nvPr>
-        </p:nvSpPr>
-        <p:spPr/>
-        <p:txBody>
-          <a:bodyPr/>
-          <a:lstStyle/>
-          <a:p>
-            <a:r>
-              <a:rPr sz="3800" b="1">
-                <a:solidFill>
-                  <a:srgbClr val="1F2A37"/>
-                </a:solidFill>
-              </a:rPr>
-              <a:t>system is not part of the chat</a:t>
+          <p:cNvPr id="2" name="TextBox 1"/>
+          <p:cNvSpPr txBox="1"/>
+          <p:nvPr/>
+        </p:nvSpPr>
+        <p:spPr>
+          <a:xfrm>
+            <a:off x="502920" y="274320"/>
+            <a:ext cx="11155680" cy="548640"/>
+          </a:xfrm>
+          <a:prstGeom prst="rect">
+            <a:avLst/>
+          </a:prstGeom>
+          <a:noFill/>
+        </p:spPr>
+        <p:txBody>
+          <a:bodyPr wrap="none">
+            <a:spAutoFit/>
+          </a:bodyPr>
+          <a:lstStyle/>
+          <a:p>
+            <a:r>
+              <a:rPr sz="2200" b="1">
+                <a:solidFill>
+                  <a:srgbClr val="01AEFD"/>
+                </a:solidFill>
+              </a:rPr>
+              <a:t>Type this into style.css   -   line 30</a:t>
             </a:r>
           </a:p>
         </p:txBody>
@@ -8315,8 +9335,281 @@
         </p:nvSpPr>
         <p:spPr>
           <a:xfrm>
-            <a:off x="822960" y="1828800"/>
-            <a:ext cx="10515600" cy="4206240"/>
+            <a:off x="502920" y="960120"/>
+            <a:ext cx="11155680" cy="4297680"/>
+          </a:xfrm>
+          <a:prstGeom prst="rect">
+            <a:avLst/>
+          </a:prstGeom>
+          <a:noFill/>
+        </p:spPr>
+        <p:txBody>
+          <a:bodyPr wrap="none">
+            <a:spAutoFit/>
+          </a:bodyPr>
+          <a:lstStyle/>
+          <a:p>
+            <a:pPr>
+              <a:spcAft>
+                <a:spcPts val="0"/>
+              </a:spcAft>
+            </a:pPr>
+            <a:r>
+              <a:rPr sz="1800">
+                <a:solidFill>
+                  <a:srgbClr val="6D8C97"/>
+                </a:solidFill>
+                <a:latin typeface="Consolas"/>
+              </a:rPr>
+              <a:t>  21  </a:t>
+            </a:r>
+            <a:r>
+              <a:rPr sz="1800">
+                <a:solidFill>
+                  <a:srgbClr val="6D8C97"/>
+                </a:solidFill>
+                <a:latin typeface="Consolas"/>
+              </a:rPr>
+              <a:t>.setup { margin-bottom: 12px; font-size: 14px; }</a:t>
+            </a:r>
+          </a:p>
+          <a:p>
+            <a:pPr>
+              <a:spcAft>
+                <a:spcPts val="0"/>
+              </a:spcAft>
+            </a:pPr>
+            <a:r>
+              <a:rPr sz="1800">
+                <a:solidFill>
+                  <a:srgbClr val="6D8C97"/>
+                </a:solidFill>
+                <a:latin typeface="Consolas"/>
+              </a:rPr>
+              <a:t>  22  </a:t>
+            </a:r>
+            <a:r>
+              <a:rPr sz="1800">
+                <a:solidFill>
+                  <a:srgbClr val="6D8C97"/>
+                </a:solidFill>
+                <a:latin typeface="Consolas"/>
+              </a:rPr>
+              <a:t>.setup summary { cursor: pointer; color: #0a6299; font-weight: bold; }</a:t>
+            </a:r>
+          </a:p>
+          <a:p>
+            <a:pPr>
+              <a:spcAft>
+                <a:spcPts val="0"/>
+              </a:spcAft>
+            </a:pPr>
+            <a:r>
+              <a:rPr sz="1800">
+                <a:solidFill>
+                  <a:srgbClr val="6D8C97"/>
+                </a:solidFill>
+                <a:latin typeface="Consolas"/>
+              </a:rPr>
+              <a:t>  23  </a:t>
+            </a:r>
+            <a:r>
+              <a:rPr sz="1800">
+                <a:solidFill>
+                  <a:srgbClr val="6D8C97"/>
+                </a:solidFill>
+                <a:latin typeface="Consolas"/>
+              </a:rPr>
+              <a:t>.setup textarea {</a:t>
+            </a:r>
+          </a:p>
+          <a:p>
+            <a:pPr>
+              <a:spcAft>
+                <a:spcPts val="0"/>
+              </a:spcAft>
+            </a:pPr>
+            <a:r>
+              <a:rPr sz="1800">
+                <a:solidFill>
+                  <a:srgbClr val="6D8C97"/>
+                </a:solidFill>
+                <a:latin typeface="Consolas"/>
+              </a:rPr>
+              <a:t>  24  </a:t>
+            </a:r>
+            <a:r>
+              <a:rPr sz="1800">
+                <a:solidFill>
+                  <a:srgbClr val="6D8C97"/>
+                </a:solidFill>
+                <a:latin typeface="Consolas"/>
+              </a:rPr>
+              <a:t>  width: 100%;</a:t>
+            </a:r>
+          </a:p>
+          <a:p>
+            <a:pPr>
+              <a:spcAft>
+                <a:spcPts val="0"/>
+              </a:spcAft>
+            </a:pPr>
+            <a:r>
+              <a:rPr sz="1800">
+                <a:solidFill>
+                  <a:srgbClr val="6D8C97"/>
+                </a:solidFill>
+                <a:latin typeface="Consolas"/>
+              </a:rPr>
+              <a:t>  25  </a:t>
+            </a:r>
+            <a:r>
+              <a:rPr sz="1800">
+                <a:solidFill>
+                  <a:srgbClr val="6D8C97"/>
+                </a:solidFill>
+                <a:latin typeface="Consolas"/>
+              </a:rPr>
+              <a:t>  margin-top: 8px;</a:t>
+            </a:r>
+          </a:p>
+          <a:p>
+            <a:pPr>
+              <a:spcAft>
+                <a:spcPts val="0"/>
+              </a:spcAft>
+            </a:pPr>
+            <a:r>
+              <a:rPr sz="1800">
+                <a:solidFill>
+                  <a:srgbClr val="6D8C97"/>
+                </a:solidFill>
+                <a:latin typeface="Consolas"/>
+              </a:rPr>
+              <a:t>  26  </a:t>
+            </a:r>
+            <a:r>
+              <a:rPr sz="1800">
+                <a:solidFill>
+                  <a:srgbClr val="6D8C97"/>
+                </a:solidFill>
+                <a:latin typeface="Consolas"/>
+              </a:rPr>
+              <a:t>  padding: 9px;</a:t>
+            </a:r>
+          </a:p>
+          <a:p>
+            <a:pPr>
+              <a:spcAft>
+                <a:spcPts val="0"/>
+              </a:spcAft>
+            </a:pPr>
+            <a:r>
+              <a:rPr sz="1800">
+                <a:solidFill>
+                  <a:srgbClr val="6D8C97"/>
+                </a:solidFill>
+                <a:latin typeface="Consolas"/>
+              </a:rPr>
+              <a:t>  27  </a:t>
+            </a:r>
+            <a:r>
+              <a:rPr sz="1800">
+                <a:solidFill>
+                  <a:srgbClr val="6D8C97"/>
+                </a:solidFill>
+                <a:latin typeface="Consolas"/>
+              </a:rPr>
+              <a:t>  border: 1px solid #dbe3ec;</a:t>
+            </a:r>
+          </a:p>
+          <a:p>
+            <a:pPr>
+              <a:spcAft>
+                <a:spcPts val="0"/>
+              </a:spcAft>
+            </a:pPr>
+            <a:r>
+              <a:rPr sz="1800">
+                <a:solidFill>
+                  <a:srgbClr val="6D8C97"/>
+                </a:solidFill>
+                <a:latin typeface="Consolas"/>
+              </a:rPr>
+              <a:t>  28  </a:t>
+            </a:r>
+            <a:r>
+              <a:rPr sz="1800">
+                <a:solidFill>
+                  <a:srgbClr val="6D8C97"/>
+                </a:solidFill>
+                <a:latin typeface="Consolas"/>
+              </a:rPr>
+              <a:t>  border-radius: 6px;</a:t>
+            </a:r>
+          </a:p>
+          <a:p>
+            <a:pPr>
+              <a:spcAft>
+                <a:spcPts val="0"/>
+              </a:spcAft>
+            </a:pPr>
+            <a:r>
+              <a:rPr sz="1800">
+                <a:solidFill>
+                  <a:srgbClr val="6D8C97"/>
+                </a:solidFill>
+                <a:latin typeface="Consolas"/>
+              </a:rPr>
+              <a:t>  29  </a:t>
+            </a:r>
+            <a:r>
+              <a:rPr sz="1800">
+                <a:solidFill>
+                  <a:srgbClr val="6D8C97"/>
+                </a:solidFill>
+                <a:latin typeface="Consolas"/>
+              </a:rPr>
+              <a:t>  font-family: inherit;</a:t>
+            </a:r>
+          </a:p>
+          <a:p>
+            <a:pPr>
+              <a:spcAft>
+                <a:spcPts val="0"/>
+              </a:spcAft>
+            </a:pPr>
+            <a:r>
+              <a:rPr sz="1800">
+                <a:solidFill>
+                  <a:srgbClr val="6D8C97"/>
+                </a:solidFill>
+                <a:latin typeface="Consolas"/>
+              </a:rPr>
+              <a:t>  30  </a:t>
+            </a:r>
+            <a:r>
+              <a:rPr sz="1800">
+                <a:solidFill>
+                  <a:srgbClr val="7FE0A0"/>
+                </a:solidFill>
+                <a:latin typeface="Consolas"/>
+              </a:rPr>
+              <a:t>  font-size: 14px;</a:t>
+            </a:r>
+          </a:p>
+        </p:txBody>
+      </p:sp>
+      <p:sp>
+        <p:nvSpPr>
+          <p:cNvPr id="4" name="TextBox 3"/>
+          <p:cNvSpPr txBox="1"/>
+          <p:nvPr/>
+        </p:nvSpPr>
+        <p:spPr>
+          <a:xfrm>
+            <a:off x="548640" y="5623560"/>
+            <a:ext cx="11064240" cy="1051560"/>
           </a:xfrm>
           <a:prstGeom prst="rect">
             <a:avLst/>
@@ -8329,48 +9622,13 @@
           </a:bodyPr>
           <a:lstStyle/>
           <a:p>
-            <a:pPr>
-              <a:spcAft>
-                <a:spcPts val="1400"/>
-              </a:spcAft>
-            </a:pPr>
-            <a:r>
-              <a:rPr sz="2800">
-                <a:solidFill>
-                  <a:srgbClr val="01AEFD"/>
-                </a:solidFill>
-              </a:rPr>
-              <a:t>It is the rules of the chat</a:t>
-            </a:r>
-          </a:p>
-          <a:p>
-            <a:pPr>
-              <a:spcAft>
-                <a:spcPts val="1400"/>
-              </a:spcAft>
-            </a:pPr>
-            <a:r>
-              <a:rPr sz="2400">
-                <a:solidFill>
-                  <a:srgbClr val="1F2A37"/>
-                </a:solidFill>
-              </a:rPr>
-              <a:t>• Re-sent with every request</a:t>
-            </a:r>
-          </a:p>
-          <a:p>
-            <a:pPr>
-              <a:spcAft>
-                <a:spcPts val="1400"/>
-              </a:spcAft>
-            </a:pPr>
-            <a:r>
-              <a:rPr sz="2400">
-                <a:solidFill>
-                  <a:srgbClr val="1F2A37"/>
-                </a:solidFill>
-              </a:rPr>
-              <a:t>• The model reads it first, every time</a:t>
+            <a:r>
+              <a:rPr sz="2000">
+                <a:solidFill>
+                  <a:srgbClr val="DCECEF"/>
+                </a:solidFill>
+              </a:rPr>
+              <a:t>Set the text size.</a:t>
             </a:r>
           </a:p>
         </p:txBody>
@@ -8429,7 +9687,7 @@
                   <a:srgbClr val="01AEFD"/>
                 </a:solidFill>
               </a:rPr>
-              <a:t>Type this into script.js   -   line 65</a:t>
+              <a:t>Type this into style.css   -   line 31</a:t>
             </a:r>
           </a:p>
         </p:txBody>
@@ -8468,7 +9726,7 @@
                 </a:solidFill>
                 <a:latin typeface="Consolas"/>
               </a:rPr>
-              <a:t>  51  </a:t>
+              <a:t>  21  </a:t>
             </a:r>
             <a:r>
               <a:rPr sz="1300">
@@ -8477,7 +9735,7 @@
                 </a:solidFill>
                 <a:latin typeface="Consolas"/>
               </a:rPr>
-              <a:t> </a:t>
+              <a:t>.setup { margin-bottom: 12px; font-size: 14px; }</a:t>
             </a:r>
           </a:p>
           <a:p>
@@ -8493,7 +9751,7 @@
                 </a:solidFill>
                 <a:latin typeface="Consolas"/>
               </a:rPr>
-              <a:t>  52  </a:t>
+              <a:t>  22  </a:t>
             </a:r>
             <a:r>
               <a:rPr sz="1300">
@@ -8502,7 +9760,7 @@
                 </a:solidFill>
                 <a:latin typeface="Consolas"/>
               </a:rPr>
-              <a:t>// Week 4: ask the AI a real question.</a:t>
+              <a:t>.setup summary { cursor: pointer; color: #0a6299; font-weight: bold; }</a:t>
             </a:r>
           </a:p>
           <a:p>
@@ -8518,7 +9776,7 @@
                 </a:solidFill>
                 <a:latin typeface="Consolas"/>
               </a:rPr>
-              <a:t>  53  </a:t>
+              <a:t>  23  </a:t>
             </a:r>
             <a:r>
               <a:rPr sz="1300">
@@ -8527,7 +9785,7 @@
                 </a:solidFill>
                 <a:latin typeface="Consolas"/>
               </a:rPr>
-              <a:t>// A chat request is a LIST of messages. Each one says who said it.</a:t>
+              <a:t>.setup textarea {</a:t>
             </a:r>
           </a:p>
           <a:p>
@@ -8543,7 +9801,7 @@
                 </a:solidFill>
                 <a:latin typeface="Consolas"/>
               </a:rPr>
-              <a:t>  54  </a:t>
+              <a:t>  24  </a:t>
             </a:r>
             <a:r>
               <a:rPr sz="1300">
@@ -8552,7 +9810,7 @@
                 </a:solidFill>
                 <a:latin typeface="Consolas"/>
               </a:rPr>
-              <a:t>async function askAI(question) {</a:t>
+              <a:t>  width: 100%;</a:t>
             </a:r>
           </a:p>
           <a:p>
@@ -8568,7 +9826,7 @@
                 </a:solidFill>
                 <a:latin typeface="Consolas"/>
               </a:rPr>
-              <a:t>  55  </a:t>
+              <a:t>  25  </a:t>
             </a:r>
             <a:r>
               <a:rPr sz="1300">
@@ -8577,7 +9835,7 @@
                 </a:solidFill>
                 <a:latin typeface="Consolas"/>
               </a:rPr>
-              <a:t>  const res = await fetch(AI_BASE + '/v1/chat/completions', {</a:t>
+              <a:t>  margin-top: 8px;</a:t>
             </a:r>
           </a:p>
           <a:p>
@@ -8593,7 +9851,7 @@
                 </a:solidFill>
                 <a:latin typeface="Consolas"/>
               </a:rPr>
-              <a:t>  56  </a:t>
+              <a:t>  26  </a:t>
             </a:r>
             <a:r>
               <a:rPr sz="1300">
@@ -8602,7 +9860,7 @@
                 </a:solidFill>
                 <a:latin typeface="Consolas"/>
               </a:rPr>
-              <a:t>    method: 'POST',                       // POST = I am sending you something</a:t>
+              <a:t>  padding: 9px;</a:t>
             </a:r>
           </a:p>
           <a:p>
@@ -8618,7 +9876,7 @@
                 </a:solidFill>
                 <a:latin typeface="Consolas"/>
               </a:rPr>
-              <a:t>  57  </a:t>
+              <a:t>  27  </a:t>
             </a:r>
             <a:r>
               <a:rPr sz="1300">
@@ -8627,7 +9885,7 @@
                 </a:solidFill>
                 <a:latin typeface="Consolas"/>
               </a:rPr>
-              <a:t>    headers: {</a:t>
+              <a:t>  border: 1px solid #dbe3ec;</a:t>
             </a:r>
           </a:p>
           <a:p>
@@ -8643,7 +9901,7 @@
                 </a:solidFill>
                 <a:latin typeface="Consolas"/>
               </a:rPr>
-              <a:t>  58  </a:t>
+              <a:t>  28  </a:t>
             </a:r>
             <a:r>
               <a:rPr sz="1300">
@@ -8652,7 +9910,7 @@
                 </a:solidFill>
                 <a:latin typeface="Consolas"/>
               </a:rPr>
-              <a:t>      'Content-Type': 'application/json', // what I am sending is JSON</a:t>
+              <a:t>  border-radius: 6px;</a:t>
             </a:r>
           </a:p>
           <a:p>
@@ -8668,7 +9926,7 @@
                 </a:solidFill>
                 <a:latin typeface="Consolas"/>
               </a:rPr>
-              <a:t>  59  </a:t>
+              <a:t>  29  </a:t>
             </a:r>
             <a:r>
               <a:rPr sz="1300">
@@ -8677,7 +9935,7 @@
                 </a:solidFill>
                 <a:latin typeface="Consolas"/>
               </a:rPr>
-              <a:t>      'Authorization': 'Bearer ' + API_KEY</a:t>
+              <a:t>  font-family: inherit;</a:t>
             </a:r>
           </a:p>
           <a:p>
@@ -8693,7 +9951,7 @@
                 </a:solidFill>
                 <a:latin typeface="Consolas"/>
               </a:rPr>
-              <a:t>  60  </a:t>
+              <a:t>  30  </a:t>
             </a:r>
             <a:r>
               <a:rPr sz="1300">
@@ -8702,7 +9960,7 @@
                 </a:solidFill>
                 <a:latin typeface="Consolas"/>
               </a:rPr>
-              <a:t>    },</a:t>
+              <a:t>  font-size: 14px;</a:t>
             </a:r>
           </a:p>
           <a:p>
@@ -8718,116 +9976,16 @@
                 </a:solidFill>
                 <a:latin typeface="Consolas"/>
               </a:rPr>
-              <a:t>  61  </a:t>
+              <a:t>  31  </a:t>
             </a:r>
             <a:r>
               <a:rPr sz="1300">
                 <a:solidFill>
-                  <a:srgbClr val="6D8C97"/>
-                </a:solidFill>
-                <a:latin typeface="Consolas"/>
-              </a:rPr>
-              <a:t>    body: JSON.stringify({</a:t>
-            </a:r>
-          </a:p>
-          <a:p>
-            <a:pPr>
-              <a:spcAft>
-                <a:spcPts val="0"/>
-              </a:spcAft>
-            </a:pPr>
-            <a:r>
-              <a:rPr sz="1300">
-                <a:solidFill>
-                  <a:srgbClr val="6D8C97"/>
-                </a:solidFill>
-                <a:latin typeface="Consolas"/>
-              </a:rPr>
-              <a:t>  62  </a:t>
-            </a:r>
-            <a:r>
-              <a:rPr sz="1300">
-                <a:solidFill>
-                  <a:srgbClr val="6D8C97"/>
-                </a:solidFill>
-                <a:latin typeface="Consolas"/>
-              </a:rPr>
-              <a:t>      model: 'fast',</a:t>
-            </a:r>
-          </a:p>
-          <a:p>
-            <a:pPr>
-              <a:spcAft>
-                <a:spcPts val="0"/>
-              </a:spcAft>
-            </a:pPr>
-            <a:r>
-              <a:rPr sz="1300">
-                <a:solidFill>
-                  <a:srgbClr val="6D8C97"/>
-                </a:solidFill>
-                <a:latin typeface="Consolas"/>
-              </a:rPr>
-              <a:t>  63  </a:t>
-            </a:r>
-            <a:r>
-              <a:rPr sz="1300">
-                <a:solidFill>
-                  <a:srgbClr val="6D8C97"/>
-                </a:solidFill>
-                <a:latin typeface="Consolas"/>
-              </a:rPr>
-              <a:t>      messages: [</a:t>
-            </a:r>
-          </a:p>
-          <a:p>
-            <a:pPr>
-              <a:spcAft>
-                <a:spcPts val="0"/>
-              </a:spcAft>
-            </a:pPr>
-            <a:r>
-              <a:rPr sz="1300">
-                <a:solidFill>
-                  <a:srgbClr val="6D8C97"/>
-                </a:solidFill>
-                <a:latin typeface="Consolas"/>
-              </a:rPr>
-              <a:t>  64  </a:t>
-            </a:r>
-            <a:r>
-              <a:rPr sz="1300">
-                <a:solidFill>
-                  <a:srgbClr val="6D8C97"/>
-                </a:solidFill>
-                <a:latin typeface="Consolas"/>
-              </a:rPr>
-              <a:t>        // Week 6: the standing instruction, read before every single reply.</a:t>
-            </a:r>
-          </a:p>
-          <a:p>
-            <a:pPr>
-              <a:spcAft>
-                <a:spcPts val="0"/>
-              </a:spcAft>
-            </a:pPr>
-            <a:r>
-              <a:rPr sz="1300">
-                <a:solidFill>
-                  <a:srgbClr val="6D8C97"/>
-                </a:solidFill>
-                <a:latin typeface="Consolas"/>
-              </a:rPr>
-              <a:t>  65  </a:t>
-            </a:r>
-            <a:r>
-              <a:rPr sz="1300">
-                <a:solidFill>
                   <a:srgbClr val="7FE0A0"/>
                 </a:solidFill>
                 <a:latin typeface="Consolas"/>
               </a:rPr>
-              <a:t>        { role: 'system', content: personaBox.value },</a:t>
+              <a:t>}</a:t>
             </a:r>
           </a:p>
         </p:txBody>
@@ -8860,7 +10018,7 @@
                   <a:srgbClr val="DCECEF"/>
                 </a:solidFill>
               </a:rPr>
-              <a:t>Add a 'system' message FIRST - the standing instruction the model reads before every reply. Its content is whatever is typed in the Personality box.</a:t>
+              <a:t>Close the rule.</a:t>
             </a:r>
           </a:p>
         </p:txBody>
@@ -8876,6 +10034,14 @@
 <file path=ppt/slides/slide32.xml><?xml version="1.0" encoding="utf-8"?>
 <p:sld xmlns:a="http://schemas.openxmlformats.org/drawingml/2006/main" xmlns:p="http://schemas.openxmlformats.org/presentationml/2006/main" xmlns:r="http://schemas.openxmlformats.org/officeDocument/2006/relationships">
   <p:cSld>
+    <p:bg>
+      <p:bgPr>
+        <a:solidFill>
+          <a:srgbClr val="102127"/>
+        </a:solidFill>
+        <a:effectLst/>
+      </p:bgPr>
+    </p:bg>
     <p:spTree>
       <p:nvGrpSpPr>
         <p:cNvPr id="1" name=""/>
@@ -8885,40 +10051,14 @@
       <p:grpSpPr/>
       <p:sp>
         <p:nvSpPr>
-          <p:cNvPr id="2" name="Title 1"/>
-          <p:cNvSpPr>
-            <a:spLocks noGrp="1"/>
-          </p:cNvSpPr>
-          <p:nvPr>
-            <p:ph type="title"/>
-          </p:nvPr>
-        </p:nvSpPr>
-        <p:spPr/>
-        <p:txBody>
-          <a:bodyPr/>
-          <a:lstStyle/>
-          <a:p>
-            <a:r>
-              <a:rPr sz="3800" b="1">
-                <a:solidFill>
-                  <a:srgbClr val="1F2A37"/>
-                </a:solidFill>
-              </a:rPr>
-              <a:t>Checkpoint: it has a personality</a:t>
-            </a:r>
-          </a:p>
-        </p:txBody>
-      </p:sp>
-      <p:sp>
-        <p:nvSpPr>
-          <p:cNvPr id="3" name="TextBox 2"/>
+          <p:cNvPr id="2" name="TextBox 1"/>
           <p:cNvSpPr txBox="1"/>
           <p:nvPr/>
         </p:nvSpPr>
         <p:spPr>
           <a:xfrm>
-            <a:off x="868680" y="502920"/>
-            <a:ext cx="5486400" cy="457200"/>
+            <a:off x="502920" y="274320"/>
+            <a:ext cx="11155680" cy="548640"/>
           </a:xfrm>
           <a:prstGeom prst="rect">
             <a:avLst/>
@@ -8932,12 +10072,310 @@
           <a:lstStyle/>
           <a:p>
             <a:r>
-              <a:rPr sz="1500" b="1">
+              <a:rPr sz="2200" b="1">
                 <a:solidFill>
                   <a:srgbClr val="01AEFD"/>
                 </a:solidFill>
               </a:rPr>
-              <a:t>CHECKPOINT - RUN IT</a:t>
+              <a:t>All together in style.css</a:t>
+            </a:r>
+          </a:p>
+        </p:txBody>
+      </p:sp>
+      <p:sp>
+        <p:nvSpPr>
+          <p:cNvPr id="3" name="TextBox 2"/>
+          <p:cNvSpPr txBox="1"/>
+          <p:nvPr/>
+        </p:nvSpPr>
+        <p:spPr>
+          <a:xfrm>
+            <a:off x="502920" y="960120"/>
+            <a:ext cx="11155680" cy="4297680"/>
+          </a:xfrm>
+          <a:prstGeom prst="rect">
+            <a:avLst/>
+          </a:prstGeom>
+          <a:noFill/>
+        </p:spPr>
+        <p:txBody>
+          <a:bodyPr wrap="none">
+            <a:spAutoFit/>
+          </a:bodyPr>
+          <a:lstStyle/>
+          <a:p>
+            <a:pPr>
+              <a:spcAft>
+                <a:spcPts val="0"/>
+              </a:spcAft>
+            </a:pPr>
+            <a:r>
+              <a:rPr sz="1300">
+                <a:solidFill>
+                  <a:srgbClr val="6D8C97"/>
+                </a:solidFill>
+                <a:latin typeface="Consolas"/>
+              </a:rPr>
+              <a:t>  21  </a:t>
+            </a:r>
+            <a:r>
+              <a:rPr sz="1300">
+                <a:solidFill>
+                  <a:srgbClr val="7FE0A0"/>
+                </a:solidFill>
+                <a:latin typeface="Consolas"/>
+              </a:rPr>
+              <a:t>.setup { margin-bottom: 12px; font-size: 14px; }</a:t>
+            </a:r>
+          </a:p>
+          <a:p>
+            <a:pPr>
+              <a:spcAft>
+                <a:spcPts val="0"/>
+              </a:spcAft>
+            </a:pPr>
+            <a:r>
+              <a:rPr sz="1300">
+                <a:solidFill>
+                  <a:srgbClr val="6D8C97"/>
+                </a:solidFill>
+                <a:latin typeface="Consolas"/>
+              </a:rPr>
+              <a:t>  22  </a:t>
+            </a:r>
+            <a:r>
+              <a:rPr sz="1300">
+                <a:solidFill>
+                  <a:srgbClr val="7FE0A0"/>
+                </a:solidFill>
+                <a:latin typeface="Consolas"/>
+              </a:rPr>
+              <a:t>.setup summary { cursor: pointer; color: #0a6299; font-weight: bold; }</a:t>
+            </a:r>
+          </a:p>
+          <a:p>
+            <a:pPr>
+              <a:spcAft>
+                <a:spcPts val="0"/>
+              </a:spcAft>
+            </a:pPr>
+            <a:r>
+              <a:rPr sz="1300">
+                <a:solidFill>
+                  <a:srgbClr val="6D8C97"/>
+                </a:solidFill>
+                <a:latin typeface="Consolas"/>
+              </a:rPr>
+              <a:t>  23  </a:t>
+            </a:r>
+            <a:r>
+              <a:rPr sz="1300">
+                <a:solidFill>
+                  <a:srgbClr val="7FE0A0"/>
+                </a:solidFill>
+                <a:latin typeface="Consolas"/>
+              </a:rPr>
+              <a:t>.setup textarea {</a:t>
+            </a:r>
+          </a:p>
+          <a:p>
+            <a:pPr>
+              <a:spcAft>
+                <a:spcPts val="0"/>
+              </a:spcAft>
+            </a:pPr>
+            <a:r>
+              <a:rPr sz="1300">
+                <a:solidFill>
+                  <a:srgbClr val="6D8C97"/>
+                </a:solidFill>
+                <a:latin typeface="Consolas"/>
+              </a:rPr>
+              <a:t>  24  </a:t>
+            </a:r>
+            <a:r>
+              <a:rPr sz="1300">
+                <a:solidFill>
+                  <a:srgbClr val="7FE0A0"/>
+                </a:solidFill>
+                <a:latin typeface="Consolas"/>
+              </a:rPr>
+              <a:t>  width: 100%;</a:t>
+            </a:r>
+          </a:p>
+          <a:p>
+            <a:pPr>
+              <a:spcAft>
+                <a:spcPts val="0"/>
+              </a:spcAft>
+            </a:pPr>
+            <a:r>
+              <a:rPr sz="1300">
+                <a:solidFill>
+                  <a:srgbClr val="6D8C97"/>
+                </a:solidFill>
+                <a:latin typeface="Consolas"/>
+              </a:rPr>
+              <a:t>  25  </a:t>
+            </a:r>
+            <a:r>
+              <a:rPr sz="1300">
+                <a:solidFill>
+                  <a:srgbClr val="7FE0A0"/>
+                </a:solidFill>
+                <a:latin typeface="Consolas"/>
+              </a:rPr>
+              <a:t>  margin-top: 8px;</a:t>
+            </a:r>
+          </a:p>
+          <a:p>
+            <a:pPr>
+              <a:spcAft>
+                <a:spcPts val="0"/>
+              </a:spcAft>
+            </a:pPr>
+            <a:r>
+              <a:rPr sz="1300">
+                <a:solidFill>
+                  <a:srgbClr val="6D8C97"/>
+                </a:solidFill>
+                <a:latin typeface="Consolas"/>
+              </a:rPr>
+              <a:t>  26  </a:t>
+            </a:r>
+            <a:r>
+              <a:rPr sz="1300">
+                <a:solidFill>
+                  <a:srgbClr val="7FE0A0"/>
+                </a:solidFill>
+                <a:latin typeface="Consolas"/>
+              </a:rPr>
+              <a:t>  padding: 9px;</a:t>
+            </a:r>
+          </a:p>
+          <a:p>
+            <a:pPr>
+              <a:spcAft>
+                <a:spcPts val="0"/>
+              </a:spcAft>
+            </a:pPr>
+            <a:r>
+              <a:rPr sz="1300">
+                <a:solidFill>
+                  <a:srgbClr val="6D8C97"/>
+                </a:solidFill>
+                <a:latin typeface="Consolas"/>
+              </a:rPr>
+              <a:t>  27  </a:t>
+            </a:r>
+            <a:r>
+              <a:rPr sz="1300">
+                <a:solidFill>
+                  <a:srgbClr val="7FE0A0"/>
+                </a:solidFill>
+                <a:latin typeface="Consolas"/>
+              </a:rPr>
+              <a:t>  border: 1px solid #dbe3ec;</a:t>
+            </a:r>
+          </a:p>
+          <a:p>
+            <a:pPr>
+              <a:spcAft>
+                <a:spcPts val="0"/>
+              </a:spcAft>
+            </a:pPr>
+            <a:r>
+              <a:rPr sz="1300">
+                <a:solidFill>
+                  <a:srgbClr val="6D8C97"/>
+                </a:solidFill>
+                <a:latin typeface="Consolas"/>
+              </a:rPr>
+              <a:t>  28  </a:t>
+            </a:r>
+            <a:r>
+              <a:rPr sz="1300">
+                <a:solidFill>
+                  <a:srgbClr val="7FE0A0"/>
+                </a:solidFill>
+                <a:latin typeface="Consolas"/>
+              </a:rPr>
+              <a:t>  border-radius: 6px;</a:t>
+            </a:r>
+          </a:p>
+          <a:p>
+            <a:pPr>
+              <a:spcAft>
+                <a:spcPts val="0"/>
+              </a:spcAft>
+            </a:pPr>
+            <a:r>
+              <a:rPr sz="1300">
+                <a:solidFill>
+                  <a:srgbClr val="6D8C97"/>
+                </a:solidFill>
+                <a:latin typeface="Consolas"/>
+              </a:rPr>
+              <a:t>  29  </a:t>
+            </a:r>
+            <a:r>
+              <a:rPr sz="1300">
+                <a:solidFill>
+                  <a:srgbClr val="7FE0A0"/>
+                </a:solidFill>
+                <a:latin typeface="Consolas"/>
+              </a:rPr>
+              <a:t>  font-family: inherit;</a:t>
+            </a:r>
+          </a:p>
+          <a:p>
+            <a:pPr>
+              <a:spcAft>
+                <a:spcPts val="0"/>
+              </a:spcAft>
+            </a:pPr>
+            <a:r>
+              <a:rPr sz="1300">
+                <a:solidFill>
+                  <a:srgbClr val="6D8C97"/>
+                </a:solidFill>
+                <a:latin typeface="Consolas"/>
+              </a:rPr>
+              <a:t>  30  </a:t>
+            </a:r>
+            <a:r>
+              <a:rPr sz="1300">
+                <a:solidFill>
+                  <a:srgbClr val="7FE0A0"/>
+                </a:solidFill>
+                <a:latin typeface="Consolas"/>
+              </a:rPr>
+              <a:t>  font-size: 14px;</a:t>
+            </a:r>
+          </a:p>
+          <a:p>
+            <a:pPr>
+              <a:spcAft>
+                <a:spcPts val="0"/>
+              </a:spcAft>
+            </a:pPr>
+            <a:r>
+              <a:rPr sz="1300">
+                <a:solidFill>
+                  <a:srgbClr val="6D8C97"/>
+                </a:solidFill>
+                <a:latin typeface="Consolas"/>
+              </a:rPr>
+              <a:t>  31  </a:t>
+            </a:r>
+            <a:r>
+              <a:rPr sz="1300">
+                <a:solidFill>
+                  <a:srgbClr val="7FE0A0"/>
+                </a:solidFill>
+                <a:latin typeface="Consolas"/>
+              </a:rPr>
+              <a:t>}</a:t>
             </a:r>
           </a:p>
         </p:txBody>
@@ -8950,8 +10388,8 @@
         </p:nvSpPr>
         <p:spPr>
           <a:xfrm>
-            <a:off x="822960" y="1828800"/>
-            <a:ext cx="10515600" cy="4206240"/>
+            <a:off x="548640" y="5623560"/>
+            <a:ext cx="11064240" cy="1051560"/>
           </a:xfrm>
           <a:prstGeom prst="rect">
             <a:avLst/>
@@ -8964,48 +10402,13 @@
           </a:bodyPr>
           <a:lstStyle/>
           <a:p>
-            <a:pPr>
-              <a:spcAft>
-                <a:spcPts val="1400"/>
-              </a:spcAft>
-            </a:pPr>
-            <a:r>
-              <a:rPr sz="2800">
-                <a:solidFill>
-                  <a:srgbClr val="01AEFD"/>
-                </a:solidFill>
-              </a:rPr>
-              <a:t>Press Run. Open Personality, change the instruction (try 'You are a grumpy pirate. Answer in under 20 words.'), and ask the same question twice. The whole attitude of the answer should change - same question, different companion. On the school network the reply is live; here you see the interface and the request in the console.</a:t>
-            </a:r>
-          </a:p>
-          <a:p>
-            <a:pPr>
-              <a:spcAft>
-                <a:spcPts val="1400"/>
-              </a:spcAft>
-            </a:pPr>
-            <a:r>
-              <a:rPr sz="2400">
-                <a:solidFill>
-                  <a:srgbClr val="1F2A37"/>
-                </a:solidFill>
-              </a:rPr>
-              <a:t>• Run it in the classroom, or press Show the output in the web deck.</a:t>
-            </a:r>
-          </a:p>
-          <a:p>
-            <a:pPr>
-              <a:spcAft>
-                <a:spcPts val="1400"/>
-              </a:spcAft>
-            </a:pPr>
-            <a:r>
-              <a:rPr sz="2400">
-                <a:solidFill>
-                  <a:srgbClr val="1F2A37"/>
-                </a:solidFill>
-              </a:rPr>
-              <a:t>• Everyone's screen should match this.</a:t>
+            <a:r>
+              <a:rPr sz="2000">
+                <a:solidFill>
+                  <a:srgbClr val="DCECEF"/>
+                </a:solidFill>
+              </a:rPr>
+              <a:t>That is the whole piece. Check yours looks the same before moving on.</a:t>
             </a:r>
           </a:p>
         </p:txBody>
@@ -9019,6 +10422,1043 @@
 </file>
 
 <file path=ppt/slides/slide33.xml><?xml version="1.0" encoding="utf-8"?>
+<p:sld xmlns:a="http://schemas.openxmlformats.org/drawingml/2006/main" xmlns:p="http://schemas.openxmlformats.org/presentationml/2006/main" xmlns:r="http://schemas.openxmlformats.org/officeDocument/2006/relationships">
+  <p:cSld>
+    <p:bg>
+      <p:bgPr>
+        <a:solidFill>
+          <a:srgbClr val="102127"/>
+        </a:solidFill>
+        <a:effectLst/>
+      </p:bgPr>
+    </p:bg>
+    <p:spTree>
+      <p:nvGrpSpPr>
+        <p:cNvPr id="1" name=""/>
+        <p:cNvGrpSpPr/>
+        <p:nvPr/>
+      </p:nvGrpSpPr>
+      <p:grpSpPr/>
+      <p:sp>
+        <p:nvSpPr>
+          <p:cNvPr id="2" name="TextBox 1"/>
+          <p:cNvSpPr txBox="1"/>
+          <p:nvPr/>
+        </p:nvSpPr>
+        <p:spPr>
+          <a:xfrm>
+            <a:off x="502920" y="274320"/>
+            <a:ext cx="11155680" cy="548640"/>
+          </a:xfrm>
+          <a:prstGeom prst="rect">
+            <a:avLst/>
+          </a:prstGeom>
+          <a:noFill/>
+        </p:spPr>
+        <p:txBody>
+          <a:bodyPr wrap="none">
+            <a:spAutoFit/>
+          </a:bodyPr>
+          <a:lstStyle/>
+          <a:p>
+            <a:r>
+              <a:rPr sz="2200" b="1">
+                <a:solidFill>
+                  <a:srgbClr val="01AEFD"/>
+                </a:solidFill>
+              </a:rPr>
+              <a:t>Type this into script.js   -   line 22</a:t>
+            </a:r>
+          </a:p>
+        </p:txBody>
+      </p:sp>
+      <p:sp>
+        <p:nvSpPr>
+          <p:cNvPr id="3" name="TextBox 2"/>
+          <p:cNvSpPr txBox="1"/>
+          <p:nvPr/>
+        </p:nvSpPr>
+        <p:spPr>
+          <a:xfrm>
+            <a:off x="502920" y="960120"/>
+            <a:ext cx="11155680" cy="4297680"/>
+          </a:xfrm>
+          <a:prstGeom prst="rect">
+            <a:avLst/>
+          </a:prstGeom>
+          <a:noFill/>
+        </p:spPr>
+        <p:txBody>
+          <a:bodyPr wrap="none">
+            <a:spAutoFit/>
+          </a:bodyPr>
+          <a:lstStyle/>
+          <a:p>
+            <a:pPr>
+              <a:spcAft>
+                <a:spcPts val="0"/>
+              </a:spcAft>
+            </a:pPr>
+            <a:r>
+              <a:rPr sz="1800">
+                <a:solidFill>
+                  <a:srgbClr val="6D8C97"/>
+                </a:solidFill>
+                <a:latin typeface="Consolas"/>
+              </a:rPr>
+              <a:t>  16  </a:t>
+            </a:r>
+            <a:r>
+              <a:rPr sz="1800">
+                <a:solidFill>
+                  <a:srgbClr val="6D8C97"/>
+                </a:solidFill>
+                <a:latin typeface="Consolas"/>
+              </a:rPr>
+              <a:t> </a:t>
+            </a:r>
+          </a:p>
+          <a:p>
+            <a:pPr>
+              <a:spcAft>
+                <a:spcPts val="0"/>
+              </a:spcAft>
+            </a:pPr>
+            <a:r>
+              <a:rPr sz="1800">
+                <a:solidFill>
+                  <a:srgbClr val="6D8C97"/>
+                </a:solidFill>
+                <a:latin typeface="Consolas"/>
+              </a:rPr>
+              <a:t>  17  </a:t>
+            </a:r>
+            <a:r>
+              <a:rPr sz="1800">
+                <a:solidFill>
+                  <a:srgbClr val="6D8C97"/>
+                </a:solidFill>
+                <a:latin typeface="Consolas"/>
+              </a:rPr>
+              <a:t>// Week 2: find the boxes we named in index.html.</a:t>
+            </a:r>
+          </a:p>
+          <a:p>
+            <a:pPr>
+              <a:spcAft>
+                <a:spcPts val="0"/>
+              </a:spcAft>
+            </a:pPr>
+            <a:r>
+              <a:rPr sz="1800">
+                <a:solidFill>
+                  <a:srgbClr val="6D8C97"/>
+                </a:solidFill>
+                <a:latin typeface="Consolas"/>
+              </a:rPr>
+              <a:t>  18  </a:t>
+            </a:r>
+            <a:r>
+              <a:rPr sz="1800">
+                <a:solidFill>
+                  <a:srgbClr val="6D8C97"/>
+                </a:solidFill>
+                <a:latin typeface="Consolas"/>
+              </a:rPr>
+              <a:t>// document.getElementById looks for the id= we wrote on each element.</a:t>
+            </a:r>
+          </a:p>
+          <a:p>
+            <a:pPr>
+              <a:spcAft>
+                <a:spcPts val="0"/>
+              </a:spcAft>
+            </a:pPr>
+            <a:r>
+              <a:rPr sz="1800">
+                <a:solidFill>
+                  <a:srgbClr val="6D8C97"/>
+                </a:solidFill>
+                <a:latin typeface="Consolas"/>
+              </a:rPr>
+              <a:t>  19  </a:t>
+            </a:r>
+            <a:r>
+              <a:rPr sz="1800">
+                <a:solidFill>
+                  <a:srgbClr val="6D8C97"/>
+                </a:solidFill>
+                <a:latin typeface="Consolas"/>
+              </a:rPr>
+              <a:t>const chat = document.getElementById('chat');</a:t>
+            </a:r>
+          </a:p>
+          <a:p>
+            <a:pPr>
+              <a:spcAft>
+                <a:spcPts val="0"/>
+              </a:spcAft>
+            </a:pPr>
+            <a:r>
+              <a:rPr sz="1800">
+                <a:solidFill>
+                  <a:srgbClr val="6D8C97"/>
+                </a:solidFill>
+                <a:latin typeface="Consolas"/>
+              </a:rPr>
+              <a:t>  20  </a:t>
+            </a:r>
+            <a:r>
+              <a:rPr sz="1800">
+                <a:solidFill>
+                  <a:srgbClr val="6D8C97"/>
+                </a:solidFill>
+                <a:latin typeface="Consolas"/>
+              </a:rPr>
+              <a:t>const composer = document.getElementById('composer');</a:t>
+            </a:r>
+          </a:p>
+          <a:p>
+            <a:pPr>
+              <a:spcAft>
+                <a:spcPts val="0"/>
+              </a:spcAft>
+            </a:pPr>
+            <a:r>
+              <a:rPr sz="1800">
+                <a:solidFill>
+                  <a:srgbClr val="6D8C97"/>
+                </a:solidFill>
+                <a:latin typeface="Consolas"/>
+              </a:rPr>
+              <a:t>  21  </a:t>
+            </a:r>
+            <a:r>
+              <a:rPr sz="1800">
+                <a:solidFill>
+                  <a:srgbClr val="6D8C97"/>
+                </a:solidFill>
+                <a:latin typeface="Consolas"/>
+              </a:rPr>
+              <a:t>const promptBox = document.getElementById('prompt');</a:t>
+            </a:r>
+          </a:p>
+          <a:p>
+            <a:pPr>
+              <a:spcAft>
+                <a:spcPts val="0"/>
+              </a:spcAft>
+            </a:pPr>
+            <a:r>
+              <a:rPr sz="1800">
+                <a:solidFill>
+                  <a:srgbClr val="6D8C97"/>
+                </a:solidFill>
+                <a:latin typeface="Consolas"/>
+              </a:rPr>
+              <a:t>  22  </a:t>
+            </a:r>
+            <a:r>
+              <a:rPr sz="1800">
+                <a:solidFill>
+                  <a:srgbClr val="7FE0A0"/>
+                </a:solidFill>
+                <a:latin typeface="Consolas"/>
+              </a:rPr>
+              <a:t>const personaBox = document.getElementById('persona');</a:t>
+            </a:r>
+          </a:p>
+        </p:txBody>
+      </p:sp>
+      <p:sp>
+        <p:nvSpPr>
+          <p:cNvPr id="4" name="TextBox 3"/>
+          <p:cNvSpPr txBox="1"/>
+          <p:nvPr/>
+        </p:nvSpPr>
+        <p:spPr>
+          <a:xfrm>
+            <a:off x="548640" y="5623560"/>
+            <a:ext cx="11064240" cy="1051560"/>
+          </a:xfrm>
+          <a:prstGeom prst="rect">
+            <a:avLst/>
+          </a:prstGeom>
+          <a:noFill/>
+        </p:spPr>
+        <p:txBody>
+          <a:bodyPr wrap="square">
+            <a:spAutoFit/>
+          </a:bodyPr>
+          <a:lstStyle/>
+          <a:p>
+            <a:r>
+              <a:rPr sz="2000">
+                <a:solidFill>
+                  <a:srgbClr val="DCECEF"/>
+                </a:solidFill>
+              </a:rPr>
+              <a:t>Find the Personality box too, so the code can read what is typed in it.</a:t>
+            </a:r>
+          </a:p>
+        </p:txBody>
+      </p:sp>
+    </p:spTree>
+  </p:cSld>
+  <p:clrMapOvr>
+    <a:masterClrMapping/>
+  </p:clrMapOvr>
+</p:sld>
+</file>
+
+<file path=ppt/slides/slide34.xml><?xml version="1.0" encoding="utf-8"?>
+<p:sld xmlns:a="http://schemas.openxmlformats.org/drawingml/2006/main" xmlns:p="http://schemas.openxmlformats.org/presentationml/2006/main" xmlns:r="http://schemas.openxmlformats.org/officeDocument/2006/relationships">
+  <p:cSld>
+    <p:spTree>
+      <p:nvGrpSpPr>
+        <p:cNvPr id="1" name=""/>
+        <p:cNvGrpSpPr/>
+        <p:nvPr/>
+      </p:nvGrpSpPr>
+      <p:grpSpPr/>
+      <p:sp>
+        <p:nvSpPr>
+          <p:cNvPr id="2" name="Title 1"/>
+          <p:cNvSpPr>
+            <a:spLocks noGrp="1"/>
+          </p:cNvSpPr>
+          <p:nvPr>
+            <p:ph type="title"/>
+          </p:nvPr>
+        </p:nvSpPr>
+        <p:spPr/>
+        <p:txBody>
+          <a:bodyPr/>
+          <a:lstStyle/>
+          <a:p>
+            <a:r>
+              <a:rPr sz="3800" b="1">
+                <a:solidFill>
+                  <a:srgbClr val="1F2A37"/>
+                </a:solidFill>
+              </a:rPr>
+              <a:t>system is not part of the chat</a:t>
+            </a:r>
+          </a:p>
+        </p:txBody>
+      </p:sp>
+      <p:sp>
+        <p:nvSpPr>
+          <p:cNvPr id="3" name="TextBox 2"/>
+          <p:cNvSpPr txBox="1"/>
+          <p:nvPr/>
+        </p:nvSpPr>
+        <p:spPr>
+          <a:xfrm>
+            <a:off x="822960" y="1828800"/>
+            <a:ext cx="10515600" cy="4206240"/>
+          </a:xfrm>
+          <a:prstGeom prst="rect">
+            <a:avLst/>
+          </a:prstGeom>
+          <a:noFill/>
+        </p:spPr>
+        <p:txBody>
+          <a:bodyPr wrap="square">
+            <a:spAutoFit/>
+          </a:bodyPr>
+          <a:lstStyle/>
+          <a:p>
+            <a:pPr>
+              <a:spcAft>
+                <a:spcPts val="1400"/>
+              </a:spcAft>
+            </a:pPr>
+            <a:r>
+              <a:rPr sz="2800">
+                <a:solidFill>
+                  <a:srgbClr val="01AEFD"/>
+                </a:solidFill>
+              </a:rPr>
+              <a:t>It is the rules of the chat</a:t>
+            </a:r>
+          </a:p>
+          <a:p>
+            <a:pPr>
+              <a:spcAft>
+                <a:spcPts val="1400"/>
+              </a:spcAft>
+            </a:pPr>
+            <a:r>
+              <a:rPr sz="2400">
+                <a:solidFill>
+                  <a:srgbClr val="1F2A37"/>
+                </a:solidFill>
+              </a:rPr>
+              <a:t>• Re-sent with every request</a:t>
+            </a:r>
+          </a:p>
+          <a:p>
+            <a:pPr>
+              <a:spcAft>
+                <a:spcPts val="1400"/>
+              </a:spcAft>
+            </a:pPr>
+            <a:r>
+              <a:rPr sz="2400">
+                <a:solidFill>
+                  <a:srgbClr val="1F2A37"/>
+                </a:solidFill>
+              </a:rPr>
+              <a:t>• The model reads it first, every time</a:t>
+            </a:r>
+          </a:p>
+        </p:txBody>
+      </p:sp>
+    </p:spTree>
+  </p:cSld>
+  <p:clrMapOvr>
+    <a:masterClrMapping/>
+  </p:clrMapOvr>
+</p:sld>
+</file>
+
+<file path=ppt/slides/slide35.xml><?xml version="1.0" encoding="utf-8"?>
+<p:sld xmlns:a="http://schemas.openxmlformats.org/drawingml/2006/main" xmlns:p="http://schemas.openxmlformats.org/presentationml/2006/main" xmlns:r="http://schemas.openxmlformats.org/officeDocument/2006/relationships">
+  <p:cSld>
+    <p:bg>
+      <p:bgPr>
+        <a:solidFill>
+          <a:srgbClr val="102127"/>
+        </a:solidFill>
+        <a:effectLst/>
+      </p:bgPr>
+    </p:bg>
+    <p:spTree>
+      <p:nvGrpSpPr>
+        <p:cNvPr id="1" name=""/>
+        <p:cNvGrpSpPr/>
+        <p:nvPr/>
+      </p:nvGrpSpPr>
+      <p:grpSpPr/>
+      <p:sp>
+        <p:nvSpPr>
+          <p:cNvPr id="2" name="TextBox 1"/>
+          <p:cNvSpPr txBox="1"/>
+          <p:nvPr/>
+        </p:nvSpPr>
+        <p:spPr>
+          <a:xfrm>
+            <a:off x="502920" y="274320"/>
+            <a:ext cx="11155680" cy="548640"/>
+          </a:xfrm>
+          <a:prstGeom prst="rect">
+            <a:avLst/>
+          </a:prstGeom>
+          <a:noFill/>
+        </p:spPr>
+        <p:txBody>
+          <a:bodyPr wrap="none">
+            <a:spAutoFit/>
+          </a:bodyPr>
+          <a:lstStyle/>
+          <a:p>
+            <a:r>
+              <a:rPr sz="2200" b="1">
+                <a:solidFill>
+                  <a:srgbClr val="01AEFD"/>
+                </a:solidFill>
+              </a:rPr>
+              <a:t>Type this into script.js   -   line 65</a:t>
+            </a:r>
+          </a:p>
+        </p:txBody>
+      </p:sp>
+      <p:sp>
+        <p:nvSpPr>
+          <p:cNvPr id="3" name="TextBox 2"/>
+          <p:cNvSpPr txBox="1"/>
+          <p:nvPr/>
+        </p:nvSpPr>
+        <p:spPr>
+          <a:xfrm>
+            <a:off x="502920" y="960120"/>
+            <a:ext cx="11155680" cy="4297680"/>
+          </a:xfrm>
+          <a:prstGeom prst="rect">
+            <a:avLst/>
+          </a:prstGeom>
+          <a:noFill/>
+        </p:spPr>
+        <p:txBody>
+          <a:bodyPr wrap="none">
+            <a:spAutoFit/>
+          </a:bodyPr>
+          <a:lstStyle/>
+          <a:p>
+            <a:pPr>
+              <a:spcAft>
+                <a:spcPts val="0"/>
+              </a:spcAft>
+            </a:pPr>
+            <a:r>
+              <a:rPr sz="1300">
+                <a:solidFill>
+                  <a:srgbClr val="6D8C97"/>
+                </a:solidFill>
+                <a:latin typeface="Consolas"/>
+              </a:rPr>
+              <a:t>  51  </a:t>
+            </a:r>
+            <a:r>
+              <a:rPr sz="1300">
+                <a:solidFill>
+                  <a:srgbClr val="6D8C97"/>
+                </a:solidFill>
+                <a:latin typeface="Consolas"/>
+              </a:rPr>
+              <a:t> </a:t>
+            </a:r>
+          </a:p>
+          <a:p>
+            <a:pPr>
+              <a:spcAft>
+                <a:spcPts val="0"/>
+              </a:spcAft>
+            </a:pPr>
+            <a:r>
+              <a:rPr sz="1300">
+                <a:solidFill>
+                  <a:srgbClr val="6D8C97"/>
+                </a:solidFill>
+                <a:latin typeface="Consolas"/>
+              </a:rPr>
+              <a:t>  52  </a:t>
+            </a:r>
+            <a:r>
+              <a:rPr sz="1300">
+                <a:solidFill>
+                  <a:srgbClr val="6D8C97"/>
+                </a:solidFill>
+                <a:latin typeface="Consolas"/>
+              </a:rPr>
+              <a:t>// Week 4: ask the AI a real question.</a:t>
+            </a:r>
+          </a:p>
+          <a:p>
+            <a:pPr>
+              <a:spcAft>
+                <a:spcPts val="0"/>
+              </a:spcAft>
+            </a:pPr>
+            <a:r>
+              <a:rPr sz="1300">
+                <a:solidFill>
+                  <a:srgbClr val="6D8C97"/>
+                </a:solidFill>
+                <a:latin typeface="Consolas"/>
+              </a:rPr>
+              <a:t>  53  </a:t>
+            </a:r>
+            <a:r>
+              <a:rPr sz="1300">
+                <a:solidFill>
+                  <a:srgbClr val="6D8C97"/>
+                </a:solidFill>
+                <a:latin typeface="Consolas"/>
+              </a:rPr>
+              <a:t>// A chat request is a LIST of messages. Each one says who said it.</a:t>
+            </a:r>
+          </a:p>
+          <a:p>
+            <a:pPr>
+              <a:spcAft>
+                <a:spcPts val="0"/>
+              </a:spcAft>
+            </a:pPr>
+            <a:r>
+              <a:rPr sz="1300">
+                <a:solidFill>
+                  <a:srgbClr val="6D8C97"/>
+                </a:solidFill>
+                <a:latin typeface="Consolas"/>
+              </a:rPr>
+              <a:t>  54  </a:t>
+            </a:r>
+            <a:r>
+              <a:rPr sz="1300">
+                <a:solidFill>
+                  <a:srgbClr val="6D8C97"/>
+                </a:solidFill>
+                <a:latin typeface="Consolas"/>
+              </a:rPr>
+              <a:t>async function askAI(question) {</a:t>
+            </a:r>
+          </a:p>
+          <a:p>
+            <a:pPr>
+              <a:spcAft>
+                <a:spcPts val="0"/>
+              </a:spcAft>
+            </a:pPr>
+            <a:r>
+              <a:rPr sz="1300">
+                <a:solidFill>
+                  <a:srgbClr val="6D8C97"/>
+                </a:solidFill>
+                <a:latin typeface="Consolas"/>
+              </a:rPr>
+              <a:t>  55  </a:t>
+            </a:r>
+            <a:r>
+              <a:rPr sz="1300">
+                <a:solidFill>
+                  <a:srgbClr val="6D8C97"/>
+                </a:solidFill>
+                <a:latin typeface="Consolas"/>
+              </a:rPr>
+              <a:t>  const res = await fetch(AI_BASE + '/v1/chat/completions', {</a:t>
+            </a:r>
+          </a:p>
+          <a:p>
+            <a:pPr>
+              <a:spcAft>
+                <a:spcPts val="0"/>
+              </a:spcAft>
+            </a:pPr>
+            <a:r>
+              <a:rPr sz="1300">
+                <a:solidFill>
+                  <a:srgbClr val="6D8C97"/>
+                </a:solidFill>
+                <a:latin typeface="Consolas"/>
+              </a:rPr>
+              <a:t>  56  </a:t>
+            </a:r>
+            <a:r>
+              <a:rPr sz="1300">
+                <a:solidFill>
+                  <a:srgbClr val="6D8C97"/>
+                </a:solidFill>
+                <a:latin typeface="Consolas"/>
+              </a:rPr>
+              <a:t>    method: 'POST',                       // POST = I am sending you something</a:t>
+            </a:r>
+          </a:p>
+          <a:p>
+            <a:pPr>
+              <a:spcAft>
+                <a:spcPts val="0"/>
+              </a:spcAft>
+            </a:pPr>
+            <a:r>
+              <a:rPr sz="1300">
+                <a:solidFill>
+                  <a:srgbClr val="6D8C97"/>
+                </a:solidFill>
+                <a:latin typeface="Consolas"/>
+              </a:rPr>
+              <a:t>  57  </a:t>
+            </a:r>
+            <a:r>
+              <a:rPr sz="1300">
+                <a:solidFill>
+                  <a:srgbClr val="6D8C97"/>
+                </a:solidFill>
+                <a:latin typeface="Consolas"/>
+              </a:rPr>
+              <a:t>    headers: {</a:t>
+            </a:r>
+          </a:p>
+          <a:p>
+            <a:pPr>
+              <a:spcAft>
+                <a:spcPts val="0"/>
+              </a:spcAft>
+            </a:pPr>
+            <a:r>
+              <a:rPr sz="1300">
+                <a:solidFill>
+                  <a:srgbClr val="6D8C97"/>
+                </a:solidFill>
+                <a:latin typeface="Consolas"/>
+              </a:rPr>
+              <a:t>  58  </a:t>
+            </a:r>
+            <a:r>
+              <a:rPr sz="1300">
+                <a:solidFill>
+                  <a:srgbClr val="6D8C97"/>
+                </a:solidFill>
+                <a:latin typeface="Consolas"/>
+              </a:rPr>
+              <a:t>      'Content-Type': 'application/json', // what I am sending is JSON</a:t>
+            </a:r>
+          </a:p>
+          <a:p>
+            <a:pPr>
+              <a:spcAft>
+                <a:spcPts val="0"/>
+              </a:spcAft>
+            </a:pPr>
+            <a:r>
+              <a:rPr sz="1300">
+                <a:solidFill>
+                  <a:srgbClr val="6D8C97"/>
+                </a:solidFill>
+                <a:latin typeface="Consolas"/>
+              </a:rPr>
+              <a:t>  59  </a:t>
+            </a:r>
+            <a:r>
+              <a:rPr sz="1300">
+                <a:solidFill>
+                  <a:srgbClr val="6D8C97"/>
+                </a:solidFill>
+                <a:latin typeface="Consolas"/>
+              </a:rPr>
+              <a:t>      'Authorization': 'Bearer ' + API_KEY</a:t>
+            </a:r>
+          </a:p>
+          <a:p>
+            <a:pPr>
+              <a:spcAft>
+                <a:spcPts val="0"/>
+              </a:spcAft>
+            </a:pPr>
+            <a:r>
+              <a:rPr sz="1300">
+                <a:solidFill>
+                  <a:srgbClr val="6D8C97"/>
+                </a:solidFill>
+                <a:latin typeface="Consolas"/>
+              </a:rPr>
+              <a:t>  60  </a:t>
+            </a:r>
+            <a:r>
+              <a:rPr sz="1300">
+                <a:solidFill>
+                  <a:srgbClr val="6D8C97"/>
+                </a:solidFill>
+                <a:latin typeface="Consolas"/>
+              </a:rPr>
+              <a:t>    },</a:t>
+            </a:r>
+          </a:p>
+          <a:p>
+            <a:pPr>
+              <a:spcAft>
+                <a:spcPts val="0"/>
+              </a:spcAft>
+            </a:pPr>
+            <a:r>
+              <a:rPr sz="1300">
+                <a:solidFill>
+                  <a:srgbClr val="6D8C97"/>
+                </a:solidFill>
+                <a:latin typeface="Consolas"/>
+              </a:rPr>
+              <a:t>  61  </a:t>
+            </a:r>
+            <a:r>
+              <a:rPr sz="1300">
+                <a:solidFill>
+                  <a:srgbClr val="6D8C97"/>
+                </a:solidFill>
+                <a:latin typeface="Consolas"/>
+              </a:rPr>
+              <a:t>    body: JSON.stringify({</a:t>
+            </a:r>
+          </a:p>
+          <a:p>
+            <a:pPr>
+              <a:spcAft>
+                <a:spcPts val="0"/>
+              </a:spcAft>
+            </a:pPr>
+            <a:r>
+              <a:rPr sz="1300">
+                <a:solidFill>
+                  <a:srgbClr val="6D8C97"/>
+                </a:solidFill>
+                <a:latin typeface="Consolas"/>
+              </a:rPr>
+              <a:t>  62  </a:t>
+            </a:r>
+            <a:r>
+              <a:rPr sz="1300">
+                <a:solidFill>
+                  <a:srgbClr val="6D8C97"/>
+                </a:solidFill>
+                <a:latin typeface="Consolas"/>
+              </a:rPr>
+              <a:t>      model: 'fast',</a:t>
+            </a:r>
+          </a:p>
+          <a:p>
+            <a:pPr>
+              <a:spcAft>
+                <a:spcPts val="0"/>
+              </a:spcAft>
+            </a:pPr>
+            <a:r>
+              <a:rPr sz="1300">
+                <a:solidFill>
+                  <a:srgbClr val="6D8C97"/>
+                </a:solidFill>
+                <a:latin typeface="Consolas"/>
+              </a:rPr>
+              <a:t>  63  </a:t>
+            </a:r>
+            <a:r>
+              <a:rPr sz="1300">
+                <a:solidFill>
+                  <a:srgbClr val="6D8C97"/>
+                </a:solidFill>
+                <a:latin typeface="Consolas"/>
+              </a:rPr>
+              <a:t>      messages: [</a:t>
+            </a:r>
+          </a:p>
+          <a:p>
+            <a:pPr>
+              <a:spcAft>
+                <a:spcPts val="0"/>
+              </a:spcAft>
+            </a:pPr>
+            <a:r>
+              <a:rPr sz="1300">
+                <a:solidFill>
+                  <a:srgbClr val="6D8C97"/>
+                </a:solidFill>
+                <a:latin typeface="Consolas"/>
+              </a:rPr>
+              <a:t>  64  </a:t>
+            </a:r>
+            <a:r>
+              <a:rPr sz="1300">
+                <a:solidFill>
+                  <a:srgbClr val="6D8C97"/>
+                </a:solidFill>
+                <a:latin typeface="Consolas"/>
+              </a:rPr>
+              <a:t>        // Week 6: the standing instruction, read before every single reply.</a:t>
+            </a:r>
+          </a:p>
+          <a:p>
+            <a:pPr>
+              <a:spcAft>
+                <a:spcPts val="0"/>
+              </a:spcAft>
+            </a:pPr>
+            <a:r>
+              <a:rPr sz="1300">
+                <a:solidFill>
+                  <a:srgbClr val="6D8C97"/>
+                </a:solidFill>
+                <a:latin typeface="Consolas"/>
+              </a:rPr>
+              <a:t>  65  </a:t>
+            </a:r>
+            <a:r>
+              <a:rPr sz="1300">
+                <a:solidFill>
+                  <a:srgbClr val="7FE0A0"/>
+                </a:solidFill>
+                <a:latin typeface="Consolas"/>
+              </a:rPr>
+              <a:t>        { role: 'system', content: personaBox.value },</a:t>
+            </a:r>
+          </a:p>
+        </p:txBody>
+      </p:sp>
+      <p:sp>
+        <p:nvSpPr>
+          <p:cNvPr id="4" name="TextBox 3"/>
+          <p:cNvSpPr txBox="1"/>
+          <p:nvPr/>
+        </p:nvSpPr>
+        <p:spPr>
+          <a:xfrm>
+            <a:off x="548640" y="5623560"/>
+            <a:ext cx="11064240" cy="1051560"/>
+          </a:xfrm>
+          <a:prstGeom prst="rect">
+            <a:avLst/>
+          </a:prstGeom>
+          <a:noFill/>
+        </p:spPr>
+        <p:txBody>
+          <a:bodyPr wrap="square">
+            <a:spAutoFit/>
+          </a:bodyPr>
+          <a:lstStyle/>
+          <a:p>
+            <a:r>
+              <a:rPr sz="2000">
+                <a:solidFill>
+                  <a:srgbClr val="DCECEF"/>
+                </a:solidFill>
+              </a:rPr>
+              <a:t>Add a 'system' message FIRST - the standing instruction the model reads before every reply. Its content is whatever is typed in the Personality box.</a:t>
+            </a:r>
+          </a:p>
+        </p:txBody>
+      </p:sp>
+    </p:spTree>
+  </p:cSld>
+  <p:clrMapOvr>
+    <a:masterClrMapping/>
+  </p:clrMapOvr>
+</p:sld>
+</file>
+
+<file path=ppt/slides/slide36.xml><?xml version="1.0" encoding="utf-8"?>
+<p:sld xmlns:a="http://schemas.openxmlformats.org/drawingml/2006/main" xmlns:p="http://schemas.openxmlformats.org/presentationml/2006/main" xmlns:r="http://schemas.openxmlformats.org/officeDocument/2006/relationships">
+  <p:cSld>
+    <p:spTree>
+      <p:nvGrpSpPr>
+        <p:cNvPr id="1" name=""/>
+        <p:cNvGrpSpPr/>
+        <p:nvPr/>
+      </p:nvGrpSpPr>
+      <p:grpSpPr/>
+      <p:sp>
+        <p:nvSpPr>
+          <p:cNvPr id="2" name="Title 1"/>
+          <p:cNvSpPr>
+            <a:spLocks noGrp="1"/>
+          </p:cNvSpPr>
+          <p:nvPr>
+            <p:ph type="title"/>
+          </p:nvPr>
+        </p:nvSpPr>
+        <p:spPr/>
+        <p:txBody>
+          <a:bodyPr/>
+          <a:lstStyle/>
+          <a:p>
+            <a:r>
+              <a:rPr sz="3800" b="1">
+                <a:solidFill>
+                  <a:srgbClr val="1F2A37"/>
+                </a:solidFill>
+              </a:rPr>
+              <a:t>Checkpoint: it has a personality</a:t>
+            </a:r>
+          </a:p>
+        </p:txBody>
+      </p:sp>
+      <p:sp>
+        <p:nvSpPr>
+          <p:cNvPr id="3" name="TextBox 2"/>
+          <p:cNvSpPr txBox="1"/>
+          <p:nvPr/>
+        </p:nvSpPr>
+        <p:spPr>
+          <a:xfrm>
+            <a:off x="868680" y="502920"/>
+            <a:ext cx="5486400" cy="457200"/>
+          </a:xfrm>
+          <a:prstGeom prst="rect">
+            <a:avLst/>
+          </a:prstGeom>
+          <a:noFill/>
+        </p:spPr>
+        <p:txBody>
+          <a:bodyPr wrap="none">
+            <a:spAutoFit/>
+          </a:bodyPr>
+          <a:lstStyle/>
+          <a:p>
+            <a:r>
+              <a:rPr sz="1500" b="1">
+                <a:solidFill>
+                  <a:srgbClr val="01AEFD"/>
+                </a:solidFill>
+              </a:rPr>
+              <a:t>CHECKPOINT - RUN IT</a:t>
+            </a:r>
+          </a:p>
+        </p:txBody>
+      </p:sp>
+      <p:sp>
+        <p:nvSpPr>
+          <p:cNvPr id="4" name="TextBox 3"/>
+          <p:cNvSpPr txBox="1"/>
+          <p:nvPr/>
+        </p:nvSpPr>
+        <p:spPr>
+          <a:xfrm>
+            <a:off x="822960" y="1828800"/>
+            <a:ext cx="10515600" cy="4206240"/>
+          </a:xfrm>
+          <a:prstGeom prst="rect">
+            <a:avLst/>
+          </a:prstGeom>
+          <a:noFill/>
+        </p:spPr>
+        <p:txBody>
+          <a:bodyPr wrap="square">
+            <a:spAutoFit/>
+          </a:bodyPr>
+          <a:lstStyle/>
+          <a:p>
+            <a:pPr>
+              <a:spcAft>
+                <a:spcPts val="1400"/>
+              </a:spcAft>
+            </a:pPr>
+            <a:r>
+              <a:rPr sz="2800">
+                <a:solidFill>
+                  <a:srgbClr val="01AEFD"/>
+                </a:solidFill>
+              </a:rPr>
+              <a:t>Press Run. Open Personality, change the instruction (try 'You are a grumpy pirate. Answer in under 20 words.'), and ask the same question twice. The whole attitude of the answer should change - same question, different companion. On the school network the reply is live; here you see the interface and the request in the console.</a:t>
+            </a:r>
+          </a:p>
+          <a:p>
+            <a:pPr>
+              <a:spcAft>
+                <a:spcPts val="1400"/>
+              </a:spcAft>
+            </a:pPr>
+            <a:r>
+              <a:rPr sz="2400">
+                <a:solidFill>
+                  <a:srgbClr val="1F2A37"/>
+                </a:solidFill>
+              </a:rPr>
+              <a:t>• Run it in the classroom, or press Show the output in the web deck.</a:t>
+            </a:r>
+          </a:p>
+          <a:p>
+            <a:pPr>
+              <a:spcAft>
+                <a:spcPts val="1400"/>
+              </a:spcAft>
+            </a:pPr>
+            <a:r>
+              <a:rPr sz="2400">
+                <a:solidFill>
+                  <a:srgbClr val="1F2A37"/>
+                </a:solidFill>
+              </a:rPr>
+              <a:t>• Everyone's screen should match this.</a:t>
+            </a:r>
+          </a:p>
+        </p:txBody>
+      </p:sp>
+    </p:spTree>
+  </p:cSld>
+  <p:clrMapOvr>
+    <a:masterClrMapping/>
+  </p:clrMapOvr>
+</p:sld>
+</file>
+
+<file path=ppt/slides/slide37.xml><?xml version="1.0" encoding="utf-8"?>
 <p:sld xmlns:a="http://schemas.openxmlformats.org/drawingml/2006/main" xmlns:p="http://schemas.openxmlformats.org/presentationml/2006/main" xmlns:r="http://schemas.openxmlformats.org/officeDocument/2006/relationships">
   <p:cSld>
     <p:spTree>

--- a/ai101/slides/week-06.pptx
+++ b/ai101/slides/week-06.pptx
@@ -42,6 +42,14 @@
     <p:sldId id="290" r:id="rId41"/>
     <p:sldId id="291" r:id="rId42"/>
     <p:sldId id="292" r:id="rId43"/>
+    <p:sldId id="293" r:id="rId44"/>
+    <p:sldId id="294" r:id="rId45"/>
+    <p:sldId id="295" r:id="rId46"/>
+    <p:sldId id="296" r:id="rId47"/>
+    <p:sldId id="297" r:id="rId48"/>
+    <p:sldId id="298" r:id="rId49"/>
+    <p:sldId id="299" r:id="rId50"/>
+    <p:sldId id="300" r:id="rId51"/>
   </p:sldIdLst>
   <p:sldSz cx="12191695" cy="6858000" type="screen4x3"/>
   <p:notesSz cx="6858000" cy="9144000"/>
@@ -10424,14 +10432,6 @@
 <file path=ppt/slides/slide33.xml><?xml version="1.0" encoding="utf-8"?>
 <p:sld xmlns:a="http://schemas.openxmlformats.org/drawingml/2006/main" xmlns:p="http://schemas.openxmlformats.org/presentationml/2006/main" xmlns:r="http://schemas.openxmlformats.org/officeDocument/2006/relationships">
   <p:cSld>
-    <p:bg>
-      <p:bgPr>
-        <a:solidFill>
-          <a:srgbClr val="102127"/>
-        </a:solidFill>
-        <a:effectLst/>
-      </p:bgPr>
-    </p:bg>
     <p:spTree>
       <p:nvGrpSpPr>
         <p:cNvPr id="1" name=""/>
@@ -10441,14 +10441,40 @@
       <p:grpSpPr/>
       <p:sp>
         <p:nvSpPr>
-          <p:cNvPr id="2" name="TextBox 1"/>
+          <p:cNvPr id="2" name="Title 1"/>
+          <p:cNvSpPr>
+            <a:spLocks noGrp="1"/>
+          </p:cNvSpPr>
+          <p:nvPr>
+            <p:ph type="title"/>
+          </p:nvPr>
+        </p:nvSpPr>
+        <p:spPr/>
+        <p:txBody>
+          <a:bodyPr/>
+          <a:lstStyle/>
+          <a:p>
+            <a:r>
+              <a:rPr sz="3800" b="1">
+                <a:solidFill>
+                  <a:srgbClr val="1F2A37"/>
+                </a:solidFill>
+              </a:rPr>
+              <a:t>What is  &lt;textarea&gt;  for?</a:t>
+            </a:r>
+          </a:p>
+        </p:txBody>
+      </p:sp>
+      <p:sp>
+        <p:nvSpPr>
+          <p:cNvPr id="3" name="TextBox 2"/>
           <p:cNvSpPr txBox="1"/>
           <p:nvPr/>
         </p:nvSpPr>
         <p:spPr>
           <a:xfrm>
-            <a:off x="502920" y="274320"/>
-            <a:ext cx="11155680" cy="548640"/>
+            <a:off x="868680" y="502920"/>
+            <a:ext cx="5486400" cy="457200"/>
           </a:xfrm>
           <a:prstGeom prst="rect">
             <a:avLst/>
@@ -10462,210 +10488,12 @@
           <a:lstStyle/>
           <a:p>
             <a:r>
-              <a:rPr sz="2200" b="1">
+              <a:rPr sz="1500" b="1">
                 <a:solidFill>
                   <a:srgbClr val="01AEFD"/>
                 </a:solidFill>
               </a:rPr>
-              <a:t>Type this into script.js   -   line 22</a:t>
-            </a:r>
-          </a:p>
-        </p:txBody>
-      </p:sp>
-      <p:sp>
-        <p:nvSpPr>
-          <p:cNvPr id="3" name="TextBox 2"/>
-          <p:cNvSpPr txBox="1"/>
-          <p:nvPr/>
-        </p:nvSpPr>
-        <p:spPr>
-          <a:xfrm>
-            <a:off x="502920" y="960120"/>
-            <a:ext cx="11155680" cy="4297680"/>
-          </a:xfrm>
-          <a:prstGeom prst="rect">
-            <a:avLst/>
-          </a:prstGeom>
-          <a:noFill/>
-        </p:spPr>
-        <p:txBody>
-          <a:bodyPr wrap="none">
-            <a:spAutoFit/>
-          </a:bodyPr>
-          <a:lstStyle/>
-          <a:p>
-            <a:pPr>
-              <a:spcAft>
-                <a:spcPts val="0"/>
-              </a:spcAft>
-            </a:pPr>
-            <a:r>
-              <a:rPr sz="1800">
-                <a:solidFill>
-                  <a:srgbClr val="6D8C97"/>
-                </a:solidFill>
-                <a:latin typeface="Consolas"/>
-              </a:rPr>
-              <a:t>  16  </a:t>
-            </a:r>
-            <a:r>
-              <a:rPr sz="1800">
-                <a:solidFill>
-                  <a:srgbClr val="6D8C97"/>
-                </a:solidFill>
-                <a:latin typeface="Consolas"/>
-              </a:rPr>
-              <a:t> </a:t>
-            </a:r>
-          </a:p>
-          <a:p>
-            <a:pPr>
-              <a:spcAft>
-                <a:spcPts val="0"/>
-              </a:spcAft>
-            </a:pPr>
-            <a:r>
-              <a:rPr sz="1800">
-                <a:solidFill>
-                  <a:srgbClr val="6D8C97"/>
-                </a:solidFill>
-                <a:latin typeface="Consolas"/>
-              </a:rPr>
-              <a:t>  17  </a:t>
-            </a:r>
-            <a:r>
-              <a:rPr sz="1800">
-                <a:solidFill>
-                  <a:srgbClr val="6D8C97"/>
-                </a:solidFill>
-                <a:latin typeface="Consolas"/>
-              </a:rPr>
-              <a:t>// Week 2: find the boxes we named in index.html.</a:t>
-            </a:r>
-          </a:p>
-          <a:p>
-            <a:pPr>
-              <a:spcAft>
-                <a:spcPts val="0"/>
-              </a:spcAft>
-            </a:pPr>
-            <a:r>
-              <a:rPr sz="1800">
-                <a:solidFill>
-                  <a:srgbClr val="6D8C97"/>
-                </a:solidFill>
-                <a:latin typeface="Consolas"/>
-              </a:rPr>
-              <a:t>  18  </a:t>
-            </a:r>
-            <a:r>
-              <a:rPr sz="1800">
-                <a:solidFill>
-                  <a:srgbClr val="6D8C97"/>
-                </a:solidFill>
-                <a:latin typeface="Consolas"/>
-              </a:rPr>
-              <a:t>// document.getElementById looks for the id= we wrote on each element.</a:t>
-            </a:r>
-          </a:p>
-          <a:p>
-            <a:pPr>
-              <a:spcAft>
-                <a:spcPts val="0"/>
-              </a:spcAft>
-            </a:pPr>
-            <a:r>
-              <a:rPr sz="1800">
-                <a:solidFill>
-                  <a:srgbClr val="6D8C97"/>
-                </a:solidFill>
-                <a:latin typeface="Consolas"/>
-              </a:rPr>
-              <a:t>  19  </a:t>
-            </a:r>
-            <a:r>
-              <a:rPr sz="1800">
-                <a:solidFill>
-                  <a:srgbClr val="6D8C97"/>
-                </a:solidFill>
-                <a:latin typeface="Consolas"/>
-              </a:rPr>
-              <a:t>const chat = document.getElementById('chat');</a:t>
-            </a:r>
-          </a:p>
-          <a:p>
-            <a:pPr>
-              <a:spcAft>
-                <a:spcPts val="0"/>
-              </a:spcAft>
-            </a:pPr>
-            <a:r>
-              <a:rPr sz="1800">
-                <a:solidFill>
-                  <a:srgbClr val="6D8C97"/>
-                </a:solidFill>
-                <a:latin typeface="Consolas"/>
-              </a:rPr>
-              <a:t>  20  </a:t>
-            </a:r>
-            <a:r>
-              <a:rPr sz="1800">
-                <a:solidFill>
-                  <a:srgbClr val="6D8C97"/>
-                </a:solidFill>
-                <a:latin typeface="Consolas"/>
-              </a:rPr>
-              <a:t>const composer = document.getElementById('composer');</a:t>
-            </a:r>
-          </a:p>
-          <a:p>
-            <a:pPr>
-              <a:spcAft>
-                <a:spcPts val="0"/>
-              </a:spcAft>
-            </a:pPr>
-            <a:r>
-              <a:rPr sz="1800">
-                <a:solidFill>
-                  <a:srgbClr val="6D8C97"/>
-                </a:solidFill>
-                <a:latin typeface="Consolas"/>
-              </a:rPr>
-              <a:t>  21  </a:t>
-            </a:r>
-            <a:r>
-              <a:rPr sz="1800">
-                <a:solidFill>
-                  <a:srgbClr val="6D8C97"/>
-                </a:solidFill>
-                <a:latin typeface="Consolas"/>
-              </a:rPr>
-              <a:t>const promptBox = document.getElementById('prompt');</a:t>
-            </a:r>
-          </a:p>
-          <a:p>
-            <a:pPr>
-              <a:spcAft>
-                <a:spcPts val="0"/>
-              </a:spcAft>
-            </a:pPr>
-            <a:r>
-              <a:rPr sz="1800">
-                <a:solidFill>
-                  <a:srgbClr val="6D8C97"/>
-                </a:solidFill>
-                <a:latin typeface="Consolas"/>
-              </a:rPr>
-              <a:t>  22  </a:t>
-            </a:r>
-            <a:r>
-              <a:rPr sz="1800">
-                <a:solidFill>
-                  <a:srgbClr val="7FE0A0"/>
-                </a:solidFill>
-                <a:latin typeface="Consolas"/>
-              </a:rPr>
-              <a:t>const personaBox = document.getElementById('persona');</a:t>
+              <a:t>QUICK CHECK</a:t>
             </a:r>
           </a:p>
         </p:txBody>
@@ -10678,8 +10506,8 @@
         </p:nvSpPr>
         <p:spPr>
           <a:xfrm>
-            <a:off x="548640" y="5623560"/>
-            <a:ext cx="11064240" cy="1051560"/>
+            <a:off x="822960" y="1828800"/>
+            <a:ext cx="10515600" cy="4206240"/>
           </a:xfrm>
           <a:prstGeom prst="rect">
             <a:avLst/>
@@ -10692,13 +10520,78 @@
           </a:bodyPr>
           <a:lstStyle/>
           <a:p>
-            <a:r>
-              <a:rPr sz="2000">
-                <a:solidFill>
-                  <a:srgbClr val="DCECEF"/>
-                </a:solidFill>
-              </a:rPr>
-              <a:t>Find the Personality box too, so the code can read what is typed in it.</a:t>
+            <a:pPr>
+              <a:spcAft>
+                <a:spcPts val="1400"/>
+              </a:spcAft>
+            </a:pPr>
+            <a:r>
+              <a:rPr sz="2400">
+                <a:solidFill>
+                  <a:srgbClr val="1F2A37"/>
+                </a:solidFill>
+              </a:rPr>
+              <a:t>• A. A single click button</a:t>
+            </a:r>
+          </a:p>
+          <a:p>
+            <a:pPr>
+              <a:spcAft>
+                <a:spcPts val="1400"/>
+              </a:spcAft>
+            </a:pPr>
+            <a:r>
+              <a:rPr sz="2400">
+                <a:solidFill>
+                  <a:srgbClr val="1F2A37"/>
+                </a:solidFill>
+              </a:rPr>
+              <a:t>• B. Typing several lines of text</a:t>
+            </a:r>
+          </a:p>
+          <a:p>
+            <a:pPr>
+              <a:spcAft>
+                <a:spcPts val="1400"/>
+              </a:spcAft>
+            </a:pPr>
+            <a:r>
+              <a:rPr sz="2400">
+                <a:solidFill>
+                  <a:srgbClr val="1F2A37"/>
+                </a:solidFill>
+              </a:rPr>
+              <a:t>• C. One short line only</a:t>
+            </a:r>
+          </a:p>
+          <a:p>
+            <a:pPr>
+              <a:spcAft>
+                <a:spcPts val="1400"/>
+              </a:spcAft>
+            </a:pPr>
+            <a:r>
+              <a:rPr sz="2400">
+                <a:solidFill>
+                  <a:srgbClr val="1F2A37"/>
+                </a:solidFill>
+              </a:rPr>
+              <a:t>• D. Showing an image</a:t>
+            </a:r>
+          </a:p>
+          <a:p>
+            <a:pPr>
+              <a:spcAft>
+                <a:spcPts val="1400"/>
+              </a:spcAft>
+            </a:pPr>
+            <a:r>
+              <a:rPr sz="2400">
+                <a:solidFill>
+                  <a:srgbClr val="1F2A37"/>
+                </a:solidFill>
+              </a:rPr>
+              <a:t>• Pick one - the answer is on the next slide.</a:t>
             </a:r>
           </a:p>
         </p:txBody>
@@ -10742,7 +10635,7 @@
                   <a:srgbClr val="1F2A37"/>
                 </a:solidFill>
               </a:rPr>
-              <a:t>system is not part of the chat</a:t>
+              <a:t>What is  &lt;textarea&gt;  for?</a:t>
             </a:r>
           </a:p>
         </p:txBody>
@@ -10750,6 +10643,39 @@
       <p:sp>
         <p:nvSpPr>
           <p:cNvPr id="3" name="TextBox 2"/>
+          <p:cNvSpPr txBox="1"/>
+          <p:nvPr/>
+        </p:nvSpPr>
+        <p:spPr>
+          <a:xfrm>
+            <a:off x="868680" y="502920"/>
+            <a:ext cx="5486400" cy="457200"/>
+          </a:xfrm>
+          <a:prstGeom prst="rect">
+            <a:avLst/>
+          </a:prstGeom>
+          <a:noFill/>
+        </p:spPr>
+        <p:txBody>
+          <a:bodyPr wrap="none">
+            <a:spAutoFit/>
+          </a:bodyPr>
+          <a:lstStyle/>
+          <a:p>
+            <a:r>
+              <a:rPr sz="1500" b="1">
+                <a:solidFill>
+                  <a:srgbClr val="01AEFD"/>
+                </a:solidFill>
+              </a:rPr>
+              <a:t>ANSWER</a:t>
+            </a:r>
+          </a:p>
+        </p:txBody>
+      </p:sp>
+      <p:sp>
+        <p:nvSpPr>
+          <p:cNvPr id="4" name="TextBox 3"/>
           <p:cNvSpPr txBox="1"/>
           <p:nvPr/>
         </p:nvSpPr>
@@ -10775,12 +10701,12 @@
               </a:spcAft>
             </a:pPr>
             <a:r>
-              <a:rPr sz="2800">
-                <a:solidFill>
-                  <a:srgbClr val="01AEFD"/>
-                </a:solidFill>
-              </a:rPr>
-              <a:t>It is the rules of the chat</a:t>
+              <a:rPr sz="2400">
+                <a:solidFill>
+                  <a:srgbClr val="1F2A37"/>
+                </a:solidFill>
+              </a:rPr>
+              <a:t>• A. A single click button</a:t>
             </a:r>
           </a:p>
           <a:p>
@@ -10795,7 +10721,7 @@
                   <a:srgbClr val="1F2A37"/>
                 </a:solidFill>
               </a:rPr>
-              <a:t>• Re-sent with every request</a:t>
+              <a:t>• B. Typing several lines of text (correct)</a:t>
             </a:r>
           </a:p>
           <a:p>
@@ -10810,7 +10736,37 @@
                   <a:srgbClr val="1F2A37"/>
                 </a:solidFill>
               </a:rPr>
-              <a:t>• The model reads it first, every time</a:t>
+              <a:t>• C. One short line only</a:t>
+            </a:r>
+          </a:p>
+          <a:p>
+            <a:pPr>
+              <a:spcAft>
+                <a:spcPts val="1400"/>
+              </a:spcAft>
+            </a:pPr>
+            <a:r>
+              <a:rPr sz="2400">
+                <a:solidFill>
+                  <a:srgbClr val="1F2A37"/>
+                </a:solidFill>
+              </a:rPr>
+              <a:t>• D. Showing an image</a:t>
+            </a:r>
+          </a:p>
+          <a:p>
+            <a:pPr>
+              <a:spcAft>
+                <a:spcPts val="1400"/>
+              </a:spcAft>
+            </a:pPr>
+            <a:r>
+              <a:rPr sz="2400">
+                <a:solidFill>
+                  <a:srgbClr val="1F2A37"/>
+                </a:solidFill>
+              </a:rPr>
+              <a:t>• A textarea is a big multi-line typing box.</a:t>
             </a:r>
           </a:p>
         </p:txBody>
@@ -10826,14 +10782,6 @@
 <file path=ppt/slides/slide35.xml><?xml version="1.0" encoding="utf-8"?>
 <p:sld xmlns:a="http://schemas.openxmlformats.org/drawingml/2006/main" xmlns:p="http://schemas.openxmlformats.org/presentationml/2006/main" xmlns:r="http://schemas.openxmlformats.org/officeDocument/2006/relationships">
   <p:cSld>
-    <p:bg>
-      <p:bgPr>
-        <a:solidFill>
-          <a:srgbClr val="102127"/>
-        </a:solidFill>
-        <a:effectLst/>
-      </p:bgPr>
-    </p:bg>
     <p:spTree>
       <p:nvGrpSpPr>
         <p:cNvPr id="1" name=""/>
@@ -10843,14 +10791,40 @@
       <p:grpSpPr/>
       <p:sp>
         <p:nvSpPr>
-          <p:cNvPr id="2" name="TextBox 1"/>
+          <p:cNvPr id="2" name="Title 1"/>
+          <p:cNvSpPr>
+            <a:spLocks noGrp="1"/>
+          </p:cNvSpPr>
+          <p:nvPr>
+            <p:ph type="title"/>
+          </p:nvPr>
+        </p:nvSpPr>
+        <p:spPr/>
+        <p:txBody>
+          <a:bodyPr/>
+          <a:lstStyle/>
+          <a:p>
+            <a:r>
+              <a:rPr sz="3800" b="1">
+                <a:solidFill>
+                  <a:srgbClr val="1F2A37"/>
+                </a:solidFill>
+              </a:rPr>
+              <a:t>&lt;details&gt; with &lt;summary&gt; makes...?</a:t>
+            </a:r>
+          </a:p>
+        </p:txBody>
+      </p:sp>
+      <p:sp>
+        <p:nvSpPr>
+          <p:cNvPr id="3" name="TextBox 2"/>
           <p:cNvSpPr txBox="1"/>
           <p:nvPr/>
         </p:nvSpPr>
         <p:spPr>
           <a:xfrm>
-            <a:off x="502920" y="274320"/>
-            <a:ext cx="11155680" cy="548640"/>
+            <a:off x="868680" y="502920"/>
+            <a:ext cx="5486400" cy="457200"/>
           </a:xfrm>
           <a:prstGeom prst="rect">
             <a:avLst/>
@@ -10864,410 +10838,12 @@
           <a:lstStyle/>
           <a:p>
             <a:r>
-              <a:rPr sz="2200" b="1">
+              <a:rPr sz="1500" b="1">
                 <a:solidFill>
                   <a:srgbClr val="01AEFD"/>
                 </a:solidFill>
               </a:rPr>
-              <a:t>Type this into script.js   -   line 65</a:t>
-            </a:r>
-          </a:p>
-        </p:txBody>
-      </p:sp>
-      <p:sp>
-        <p:nvSpPr>
-          <p:cNvPr id="3" name="TextBox 2"/>
-          <p:cNvSpPr txBox="1"/>
-          <p:nvPr/>
-        </p:nvSpPr>
-        <p:spPr>
-          <a:xfrm>
-            <a:off x="502920" y="960120"/>
-            <a:ext cx="11155680" cy="4297680"/>
-          </a:xfrm>
-          <a:prstGeom prst="rect">
-            <a:avLst/>
-          </a:prstGeom>
-          <a:noFill/>
-        </p:spPr>
-        <p:txBody>
-          <a:bodyPr wrap="none">
-            <a:spAutoFit/>
-          </a:bodyPr>
-          <a:lstStyle/>
-          <a:p>
-            <a:pPr>
-              <a:spcAft>
-                <a:spcPts val="0"/>
-              </a:spcAft>
-            </a:pPr>
-            <a:r>
-              <a:rPr sz="1300">
-                <a:solidFill>
-                  <a:srgbClr val="6D8C97"/>
-                </a:solidFill>
-                <a:latin typeface="Consolas"/>
-              </a:rPr>
-              <a:t>  51  </a:t>
-            </a:r>
-            <a:r>
-              <a:rPr sz="1300">
-                <a:solidFill>
-                  <a:srgbClr val="6D8C97"/>
-                </a:solidFill>
-                <a:latin typeface="Consolas"/>
-              </a:rPr>
-              <a:t> </a:t>
-            </a:r>
-          </a:p>
-          <a:p>
-            <a:pPr>
-              <a:spcAft>
-                <a:spcPts val="0"/>
-              </a:spcAft>
-            </a:pPr>
-            <a:r>
-              <a:rPr sz="1300">
-                <a:solidFill>
-                  <a:srgbClr val="6D8C97"/>
-                </a:solidFill>
-                <a:latin typeface="Consolas"/>
-              </a:rPr>
-              <a:t>  52  </a:t>
-            </a:r>
-            <a:r>
-              <a:rPr sz="1300">
-                <a:solidFill>
-                  <a:srgbClr val="6D8C97"/>
-                </a:solidFill>
-                <a:latin typeface="Consolas"/>
-              </a:rPr>
-              <a:t>// Week 4: ask the AI a real question.</a:t>
-            </a:r>
-          </a:p>
-          <a:p>
-            <a:pPr>
-              <a:spcAft>
-                <a:spcPts val="0"/>
-              </a:spcAft>
-            </a:pPr>
-            <a:r>
-              <a:rPr sz="1300">
-                <a:solidFill>
-                  <a:srgbClr val="6D8C97"/>
-                </a:solidFill>
-                <a:latin typeface="Consolas"/>
-              </a:rPr>
-              <a:t>  53  </a:t>
-            </a:r>
-            <a:r>
-              <a:rPr sz="1300">
-                <a:solidFill>
-                  <a:srgbClr val="6D8C97"/>
-                </a:solidFill>
-                <a:latin typeface="Consolas"/>
-              </a:rPr>
-              <a:t>// A chat request is a LIST of messages. Each one says who said it.</a:t>
-            </a:r>
-          </a:p>
-          <a:p>
-            <a:pPr>
-              <a:spcAft>
-                <a:spcPts val="0"/>
-              </a:spcAft>
-            </a:pPr>
-            <a:r>
-              <a:rPr sz="1300">
-                <a:solidFill>
-                  <a:srgbClr val="6D8C97"/>
-                </a:solidFill>
-                <a:latin typeface="Consolas"/>
-              </a:rPr>
-              <a:t>  54  </a:t>
-            </a:r>
-            <a:r>
-              <a:rPr sz="1300">
-                <a:solidFill>
-                  <a:srgbClr val="6D8C97"/>
-                </a:solidFill>
-                <a:latin typeface="Consolas"/>
-              </a:rPr>
-              <a:t>async function askAI(question) {</a:t>
-            </a:r>
-          </a:p>
-          <a:p>
-            <a:pPr>
-              <a:spcAft>
-                <a:spcPts val="0"/>
-              </a:spcAft>
-            </a:pPr>
-            <a:r>
-              <a:rPr sz="1300">
-                <a:solidFill>
-                  <a:srgbClr val="6D8C97"/>
-                </a:solidFill>
-                <a:latin typeface="Consolas"/>
-              </a:rPr>
-              <a:t>  55  </a:t>
-            </a:r>
-            <a:r>
-              <a:rPr sz="1300">
-                <a:solidFill>
-                  <a:srgbClr val="6D8C97"/>
-                </a:solidFill>
-                <a:latin typeface="Consolas"/>
-              </a:rPr>
-              <a:t>  const res = await fetch(AI_BASE + '/v1/chat/completions', {</a:t>
-            </a:r>
-          </a:p>
-          <a:p>
-            <a:pPr>
-              <a:spcAft>
-                <a:spcPts val="0"/>
-              </a:spcAft>
-            </a:pPr>
-            <a:r>
-              <a:rPr sz="1300">
-                <a:solidFill>
-                  <a:srgbClr val="6D8C97"/>
-                </a:solidFill>
-                <a:latin typeface="Consolas"/>
-              </a:rPr>
-              <a:t>  56  </a:t>
-            </a:r>
-            <a:r>
-              <a:rPr sz="1300">
-                <a:solidFill>
-                  <a:srgbClr val="6D8C97"/>
-                </a:solidFill>
-                <a:latin typeface="Consolas"/>
-              </a:rPr>
-              <a:t>    method: 'POST',                       // POST = I am sending you something</a:t>
-            </a:r>
-          </a:p>
-          <a:p>
-            <a:pPr>
-              <a:spcAft>
-                <a:spcPts val="0"/>
-              </a:spcAft>
-            </a:pPr>
-            <a:r>
-              <a:rPr sz="1300">
-                <a:solidFill>
-                  <a:srgbClr val="6D8C97"/>
-                </a:solidFill>
-                <a:latin typeface="Consolas"/>
-              </a:rPr>
-              <a:t>  57  </a:t>
-            </a:r>
-            <a:r>
-              <a:rPr sz="1300">
-                <a:solidFill>
-                  <a:srgbClr val="6D8C97"/>
-                </a:solidFill>
-                <a:latin typeface="Consolas"/>
-              </a:rPr>
-              <a:t>    headers: {</a:t>
-            </a:r>
-          </a:p>
-          <a:p>
-            <a:pPr>
-              <a:spcAft>
-                <a:spcPts val="0"/>
-              </a:spcAft>
-            </a:pPr>
-            <a:r>
-              <a:rPr sz="1300">
-                <a:solidFill>
-                  <a:srgbClr val="6D8C97"/>
-                </a:solidFill>
-                <a:latin typeface="Consolas"/>
-              </a:rPr>
-              <a:t>  58  </a:t>
-            </a:r>
-            <a:r>
-              <a:rPr sz="1300">
-                <a:solidFill>
-                  <a:srgbClr val="6D8C97"/>
-                </a:solidFill>
-                <a:latin typeface="Consolas"/>
-              </a:rPr>
-              <a:t>      'Content-Type': 'application/json', // what I am sending is JSON</a:t>
-            </a:r>
-          </a:p>
-          <a:p>
-            <a:pPr>
-              <a:spcAft>
-                <a:spcPts val="0"/>
-              </a:spcAft>
-            </a:pPr>
-            <a:r>
-              <a:rPr sz="1300">
-                <a:solidFill>
-                  <a:srgbClr val="6D8C97"/>
-                </a:solidFill>
-                <a:latin typeface="Consolas"/>
-              </a:rPr>
-              <a:t>  59  </a:t>
-            </a:r>
-            <a:r>
-              <a:rPr sz="1300">
-                <a:solidFill>
-                  <a:srgbClr val="6D8C97"/>
-                </a:solidFill>
-                <a:latin typeface="Consolas"/>
-              </a:rPr>
-              <a:t>      'Authorization': 'Bearer ' + API_KEY</a:t>
-            </a:r>
-          </a:p>
-          <a:p>
-            <a:pPr>
-              <a:spcAft>
-                <a:spcPts val="0"/>
-              </a:spcAft>
-            </a:pPr>
-            <a:r>
-              <a:rPr sz="1300">
-                <a:solidFill>
-                  <a:srgbClr val="6D8C97"/>
-                </a:solidFill>
-                <a:latin typeface="Consolas"/>
-              </a:rPr>
-              <a:t>  60  </a:t>
-            </a:r>
-            <a:r>
-              <a:rPr sz="1300">
-                <a:solidFill>
-                  <a:srgbClr val="6D8C97"/>
-                </a:solidFill>
-                <a:latin typeface="Consolas"/>
-              </a:rPr>
-              <a:t>    },</a:t>
-            </a:r>
-          </a:p>
-          <a:p>
-            <a:pPr>
-              <a:spcAft>
-                <a:spcPts val="0"/>
-              </a:spcAft>
-            </a:pPr>
-            <a:r>
-              <a:rPr sz="1300">
-                <a:solidFill>
-                  <a:srgbClr val="6D8C97"/>
-                </a:solidFill>
-                <a:latin typeface="Consolas"/>
-              </a:rPr>
-              <a:t>  61  </a:t>
-            </a:r>
-            <a:r>
-              <a:rPr sz="1300">
-                <a:solidFill>
-                  <a:srgbClr val="6D8C97"/>
-                </a:solidFill>
-                <a:latin typeface="Consolas"/>
-              </a:rPr>
-              <a:t>    body: JSON.stringify({</a:t>
-            </a:r>
-          </a:p>
-          <a:p>
-            <a:pPr>
-              <a:spcAft>
-                <a:spcPts val="0"/>
-              </a:spcAft>
-            </a:pPr>
-            <a:r>
-              <a:rPr sz="1300">
-                <a:solidFill>
-                  <a:srgbClr val="6D8C97"/>
-                </a:solidFill>
-                <a:latin typeface="Consolas"/>
-              </a:rPr>
-              <a:t>  62  </a:t>
-            </a:r>
-            <a:r>
-              <a:rPr sz="1300">
-                <a:solidFill>
-                  <a:srgbClr val="6D8C97"/>
-                </a:solidFill>
-                <a:latin typeface="Consolas"/>
-              </a:rPr>
-              <a:t>      model: 'fast',</a:t>
-            </a:r>
-          </a:p>
-          <a:p>
-            <a:pPr>
-              <a:spcAft>
-                <a:spcPts val="0"/>
-              </a:spcAft>
-            </a:pPr>
-            <a:r>
-              <a:rPr sz="1300">
-                <a:solidFill>
-                  <a:srgbClr val="6D8C97"/>
-                </a:solidFill>
-                <a:latin typeface="Consolas"/>
-              </a:rPr>
-              <a:t>  63  </a:t>
-            </a:r>
-            <a:r>
-              <a:rPr sz="1300">
-                <a:solidFill>
-                  <a:srgbClr val="6D8C97"/>
-                </a:solidFill>
-                <a:latin typeface="Consolas"/>
-              </a:rPr>
-              <a:t>      messages: [</a:t>
-            </a:r>
-          </a:p>
-          <a:p>
-            <a:pPr>
-              <a:spcAft>
-                <a:spcPts val="0"/>
-              </a:spcAft>
-            </a:pPr>
-            <a:r>
-              <a:rPr sz="1300">
-                <a:solidFill>
-                  <a:srgbClr val="6D8C97"/>
-                </a:solidFill>
-                <a:latin typeface="Consolas"/>
-              </a:rPr>
-              <a:t>  64  </a:t>
-            </a:r>
-            <a:r>
-              <a:rPr sz="1300">
-                <a:solidFill>
-                  <a:srgbClr val="6D8C97"/>
-                </a:solidFill>
-                <a:latin typeface="Consolas"/>
-              </a:rPr>
-              <a:t>        // Week 6: the standing instruction, read before every single reply.</a:t>
-            </a:r>
-          </a:p>
-          <a:p>
-            <a:pPr>
-              <a:spcAft>
-                <a:spcPts val="0"/>
-              </a:spcAft>
-            </a:pPr>
-            <a:r>
-              <a:rPr sz="1300">
-                <a:solidFill>
-                  <a:srgbClr val="6D8C97"/>
-                </a:solidFill>
-                <a:latin typeface="Consolas"/>
-              </a:rPr>
-              <a:t>  65  </a:t>
-            </a:r>
-            <a:r>
-              <a:rPr sz="1300">
-                <a:solidFill>
-                  <a:srgbClr val="7FE0A0"/>
-                </a:solidFill>
-                <a:latin typeface="Consolas"/>
-              </a:rPr>
-              <a:t>        { role: 'system', content: personaBox.value },</a:t>
+              <a:t>QUICK CHECK</a:t>
             </a:r>
           </a:p>
         </p:txBody>
@@ -11280,8 +10856,8 @@
         </p:nvSpPr>
         <p:spPr>
           <a:xfrm>
-            <a:off x="548640" y="5623560"/>
-            <a:ext cx="11064240" cy="1051560"/>
+            <a:off x="822960" y="1828800"/>
+            <a:ext cx="10515600" cy="4206240"/>
           </a:xfrm>
           <a:prstGeom prst="rect">
             <a:avLst/>
@@ -11294,13 +10870,78 @@
           </a:bodyPr>
           <a:lstStyle/>
           <a:p>
-            <a:r>
-              <a:rPr sz="2000">
-                <a:solidFill>
-                  <a:srgbClr val="DCECEF"/>
-                </a:solidFill>
-              </a:rPr>
-              <a:t>Add a 'system' message FIRST - the standing instruction the model reads before every reply. Its content is whatever is typed in the Personality box.</a:t>
+            <a:pPr>
+              <a:spcAft>
+                <a:spcPts val="1400"/>
+              </a:spcAft>
+            </a:pPr>
+            <a:r>
+              <a:rPr sz="2400">
+                <a:solidFill>
+                  <a:srgbClr val="1F2A37"/>
+                </a:solidFill>
+              </a:rPr>
+              <a:t>• A. a dropdown menu</a:t>
+            </a:r>
+          </a:p>
+          <a:p>
+            <a:pPr>
+              <a:spcAft>
+                <a:spcPts val="1400"/>
+              </a:spcAft>
+            </a:pPr>
+            <a:r>
+              <a:rPr sz="2400">
+                <a:solidFill>
+                  <a:srgbClr val="1F2A37"/>
+                </a:solidFill>
+              </a:rPr>
+              <a:t>• B. a password box</a:t>
+            </a:r>
+          </a:p>
+          <a:p>
+            <a:pPr>
+              <a:spcAft>
+                <a:spcPts val="1400"/>
+              </a:spcAft>
+            </a:pPr>
+            <a:r>
+              <a:rPr sz="2400">
+                <a:solidFill>
+                  <a:srgbClr val="1F2A37"/>
+                </a:solidFill>
+              </a:rPr>
+              <a:t>• C. a section you can open and close</a:t>
+            </a:r>
+          </a:p>
+          <a:p>
+            <a:pPr>
+              <a:spcAft>
+                <a:spcPts val="1400"/>
+              </a:spcAft>
+            </a:pPr>
+            <a:r>
+              <a:rPr sz="2400">
+                <a:solidFill>
+                  <a:srgbClr val="1F2A37"/>
+                </a:solidFill>
+              </a:rPr>
+              <a:t>• D. a table</a:t>
+            </a:r>
+          </a:p>
+          <a:p>
+            <a:pPr>
+              <a:spcAft>
+                <a:spcPts val="1400"/>
+              </a:spcAft>
+            </a:pPr>
+            <a:r>
+              <a:rPr sz="2400">
+                <a:solidFill>
+                  <a:srgbClr val="1F2A37"/>
+                </a:solidFill>
+              </a:rPr>
+              <a:t>• Pick one - the answer is on the next slide.</a:t>
             </a:r>
           </a:p>
         </p:txBody>
@@ -11344,7 +10985,7 @@
                   <a:srgbClr val="1F2A37"/>
                 </a:solidFill>
               </a:rPr>
-              <a:t>Checkpoint: it has a personality</a:t>
+              <a:t>&lt;details&gt; with &lt;summary&gt; makes...?</a:t>
             </a:r>
           </a:p>
         </p:txBody>
@@ -11377,7 +11018,7 @@
                   <a:srgbClr val="01AEFD"/>
                 </a:solidFill>
               </a:rPr>
-              <a:t>CHECKPOINT - RUN IT</a:t>
+              <a:t>ANSWER</a:t>
             </a:r>
           </a:p>
         </p:txBody>
@@ -11410,12 +11051,12 @@
               </a:spcAft>
             </a:pPr>
             <a:r>
-              <a:rPr sz="2800">
-                <a:solidFill>
-                  <a:srgbClr val="01AEFD"/>
-                </a:solidFill>
-              </a:rPr>
-              <a:t>Press Run. Open Personality, change the instruction (try 'You are a grumpy pirate. Answer in under 20 words.'), and ask the same question twice. The whole attitude of the answer should change - same question, different companion. On the school network the reply is live; here you see the interface and the request in the console.</a:t>
+              <a:rPr sz="2400">
+                <a:solidFill>
+                  <a:srgbClr val="1F2A37"/>
+                </a:solidFill>
+              </a:rPr>
+              <a:t>• A. a dropdown menu</a:t>
             </a:r>
           </a:p>
           <a:p>
@@ -11430,7 +11071,7 @@
                   <a:srgbClr val="1F2A37"/>
                 </a:solidFill>
               </a:rPr>
-              <a:t>• Run it in the classroom, or press Show the output in the web deck.</a:t>
+              <a:t>• B. a password box</a:t>
             </a:r>
           </a:p>
           <a:p>
@@ -11445,7 +11086,37 @@
                   <a:srgbClr val="1F2A37"/>
                 </a:solidFill>
               </a:rPr>
-              <a:t>• Everyone's screen should match this.</a:t>
+              <a:t>• C. a section you can open and close (correct)</a:t>
+            </a:r>
+          </a:p>
+          <a:p>
+            <a:pPr>
+              <a:spcAft>
+                <a:spcPts val="1400"/>
+              </a:spcAft>
+            </a:pPr>
+            <a:r>
+              <a:rPr sz="2400">
+                <a:solidFill>
+                  <a:srgbClr val="1F2A37"/>
+                </a:solidFill>
+              </a:rPr>
+              <a:t>• D. a table</a:t>
+            </a:r>
+          </a:p>
+          <a:p>
+            <a:pPr>
+              <a:spcAft>
+                <a:spcPts val="1400"/>
+              </a:spcAft>
+            </a:pPr>
+            <a:r>
+              <a:rPr sz="2400">
+                <a:solidFill>
+                  <a:srgbClr val="1F2A37"/>
+                </a:solidFill>
+              </a:rPr>
+              <a:t>• details/summary is a collapsible section; summary is its visible label.</a:t>
             </a:r>
           </a:p>
         </p:txBody>
@@ -11489,7 +11160,7 @@
                   <a:srgbClr val="1F2A37"/>
                 </a:solidFill>
               </a:rPr>
-              <a:t>Prompt duel</a:t>
+              <a:t>font-weight: 700;  makes text...?</a:t>
             </a:r>
           </a:p>
         </p:txBody>
@@ -11497,6 +11168,39 @@
       <p:sp>
         <p:nvSpPr>
           <p:cNvPr id="3" name="TextBox 2"/>
+          <p:cNvSpPr txBox="1"/>
+          <p:nvPr/>
+        </p:nvSpPr>
+        <p:spPr>
+          <a:xfrm>
+            <a:off x="868680" y="502920"/>
+            <a:ext cx="5486400" cy="457200"/>
+          </a:xfrm>
+          <a:prstGeom prst="rect">
+            <a:avLst/>
+          </a:prstGeom>
+          <a:noFill/>
+        </p:spPr>
+        <p:txBody>
+          <a:bodyPr wrap="none">
+            <a:spAutoFit/>
+          </a:bodyPr>
+          <a:lstStyle/>
+          <a:p>
+            <a:r>
+              <a:rPr sz="1500" b="1">
+                <a:solidFill>
+                  <a:srgbClr val="01AEFD"/>
+                </a:solidFill>
+              </a:rPr>
+              <a:t>QUICK CHECK</a:t>
+            </a:r>
+          </a:p>
+        </p:txBody>
+      </p:sp>
+      <p:sp>
+        <p:nvSpPr>
+          <p:cNvPr id="4" name="TextBox 3"/>
           <p:cNvSpPr txBox="1"/>
           <p:nvPr/>
         </p:nvSpPr>
@@ -11522,14 +11226,174 @@
               </a:spcAft>
             </a:pPr>
             <a:r>
-              <a:rPr sz="2800">
+              <a:rPr sz="2400">
+                <a:solidFill>
+                  <a:srgbClr val="1F2A37"/>
+                </a:solidFill>
+              </a:rPr>
+              <a:t>• A. bold</a:t>
+            </a:r>
+          </a:p>
+          <a:p>
+            <a:pPr>
+              <a:spcAft>
+                <a:spcPts val="1400"/>
+              </a:spcAft>
+            </a:pPr>
+            <a:r>
+              <a:rPr sz="2400">
+                <a:solidFill>
+                  <a:srgbClr val="1F2A37"/>
+                </a:solidFill>
+              </a:rPr>
+              <a:t>• B. italic</a:t>
+            </a:r>
+          </a:p>
+          <a:p>
+            <a:pPr>
+              <a:spcAft>
+                <a:spcPts val="1400"/>
+              </a:spcAft>
+            </a:pPr>
+            <a:r>
+              <a:rPr sz="2400">
+                <a:solidFill>
+                  <a:srgbClr val="1F2A37"/>
+                </a:solidFill>
+              </a:rPr>
+              <a:t>• C. bigger</a:t>
+            </a:r>
+          </a:p>
+          <a:p>
+            <a:pPr>
+              <a:spcAft>
+                <a:spcPts val="1400"/>
+              </a:spcAft>
+            </a:pPr>
+            <a:r>
+              <a:rPr sz="2400">
+                <a:solidFill>
+                  <a:srgbClr val="1F2A37"/>
+                </a:solidFill>
+              </a:rPr>
+              <a:t>• D. a new colour</a:t>
+            </a:r>
+          </a:p>
+          <a:p>
+            <a:pPr>
+              <a:spcAft>
+                <a:spcPts val="1400"/>
+              </a:spcAft>
+            </a:pPr>
+            <a:r>
+              <a:rPr sz="2400">
+                <a:solidFill>
+                  <a:srgbClr val="1F2A37"/>
+                </a:solidFill>
+              </a:rPr>
+              <a:t>• Pick one - the answer is on the next slide.</a:t>
+            </a:r>
+          </a:p>
+        </p:txBody>
+      </p:sp>
+    </p:spTree>
+  </p:cSld>
+  <p:clrMapOvr>
+    <a:masterClrMapping/>
+  </p:clrMapOvr>
+</p:sld>
+</file>
+
+<file path=ppt/slides/slide38.xml><?xml version="1.0" encoding="utf-8"?>
+<p:sld xmlns:a="http://schemas.openxmlformats.org/drawingml/2006/main" xmlns:p="http://schemas.openxmlformats.org/presentationml/2006/main" xmlns:r="http://schemas.openxmlformats.org/officeDocument/2006/relationships">
+  <p:cSld>
+    <p:spTree>
+      <p:nvGrpSpPr>
+        <p:cNvPr id="1" name=""/>
+        <p:cNvGrpSpPr/>
+        <p:nvPr/>
+      </p:nvGrpSpPr>
+      <p:grpSpPr/>
+      <p:sp>
+        <p:nvSpPr>
+          <p:cNvPr id="2" name="Title 1"/>
+          <p:cNvSpPr>
+            <a:spLocks noGrp="1"/>
+          </p:cNvSpPr>
+          <p:nvPr>
+            <p:ph type="title"/>
+          </p:nvPr>
+        </p:nvSpPr>
+        <p:spPr/>
+        <p:txBody>
+          <a:bodyPr/>
+          <a:lstStyle/>
+          <a:p>
+            <a:r>
+              <a:rPr sz="3800" b="1">
+                <a:solidFill>
+                  <a:srgbClr val="1F2A37"/>
+                </a:solidFill>
+              </a:rPr>
+              <a:t>font-weight: 700;  makes text...?</a:t>
+            </a:r>
+          </a:p>
+        </p:txBody>
+      </p:sp>
+      <p:sp>
+        <p:nvSpPr>
+          <p:cNvPr id="3" name="TextBox 2"/>
+          <p:cNvSpPr txBox="1"/>
+          <p:nvPr/>
+        </p:nvSpPr>
+        <p:spPr>
+          <a:xfrm>
+            <a:off x="868680" y="502920"/>
+            <a:ext cx="5486400" cy="457200"/>
+          </a:xfrm>
+          <a:prstGeom prst="rect">
+            <a:avLst/>
+          </a:prstGeom>
+          <a:noFill/>
+        </p:spPr>
+        <p:txBody>
+          <a:bodyPr wrap="none">
+            <a:spAutoFit/>
+          </a:bodyPr>
+          <a:lstStyle/>
+          <a:p>
+            <a:r>
+              <a:rPr sz="1500" b="1">
                 <a:solidFill>
                   <a:srgbClr val="01AEFD"/>
                 </a:solidFill>
               </a:rPr>
-              <a:t>In pairs, 10 minutes</a:t>
-            </a:r>
-          </a:p>
+              <a:t>ANSWER</a:t>
+            </a:r>
+          </a:p>
+        </p:txBody>
+      </p:sp>
+      <p:sp>
+        <p:nvSpPr>
+          <p:cNvPr id="4" name="TextBox 3"/>
+          <p:cNvSpPr txBox="1"/>
+          <p:nvPr/>
+        </p:nvSpPr>
+        <p:spPr>
+          <a:xfrm>
+            <a:off x="822960" y="1828800"/>
+            <a:ext cx="10515600" cy="4206240"/>
+          </a:xfrm>
+          <a:prstGeom prst="rect">
+            <a:avLst/>
+          </a:prstGeom>
+          <a:noFill/>
+        </p:spPr>
+        <p:txBody>
+          <a:bodyPr wrap="square">
+            <a:spAutoFit/>
+          </a:bodyPr>
+          <a:lstStyle/>
           <a:p>
             <a:pPr>
               <a:spcAft>
@@ -11542,7 +11406,7 @@
                   <a:srgbClr val="1F2A37"/>
                 </a:solidFill>
               </a:rPr>
-              <a:t>• Write a secret character</a:t>
+              <a:t>• A. bold (correct)</a:t>
             </a:r>
           </a:p>
           <a:p>
@@ -11557,7 +11421,7 @@
                   <a:srgbClr val="1F2A37"/>
                 </a:solidFill>
               </a:rPr>
-              <a:t>• Swap. Ask three questions.</a:t>
+              <a:t>• B. italic</a:t>
             </a:r>
           </a:p>
           <a:p>
@@ -11572,7 +11436,212 @@
                   <a:srgbClr val="1F2A37"/>
                 </a:solidFill>
               </a:rPr>
-              <a:t>• Guess who it is</a:t>
+              <a:t>• C. bigger</a:t>
+            </a:r>
+          </a:p>
+          <a:p>
+            <a:pPr>
+              <a:spcAft>
+                <a:spcPts val="1400"/>
+              </a:spcAft>
+            </a:pPr>
+            <a:r>
+              <a:rPr sz="2400">
+                <a:solidFill>
+                  <a:srgbClr val="1F2A37"/>
+                </a:solidFill>
+              </a:rPr>
+              <a:t>• D. a new colour</a:t>
+            </a:r>
+          </a:p>
+          <a:p>
+            <a:pPr>
+              <a:spcAft>
+                <a:spcPts val="1400"/>
+              </a:spcAft>
+            </a:pPr>
+            <a:r>
+              <a:rPr sz="2400">
+                <a:solidFill>
+                  <a:srgbClr val="1F2A37"/>
+                </a:solidFill>
+              </a:rPr>
+              <a:t>• Higher font-weight means bolder text.</a:t>
+            </a:r>
+          </a:p>
+        </p:txBody>
+      </p:sp>
+    </p:spTree>
+  </p:cSld>
+  <p:clrMapOvr>
+    <a:masterClrMapping/>
+  </p:clrMapOvr>
+</p:sld>
+</file>
+
+<file path=ppt/slides/slide39.xml><?xml version="1.0" encoding="utf-8"?>
+<p:sld xmlns:a="http://schemas.openxmlformats.org/drawingml/2006/main" xmlns:p="http://schemas.openxmlformats.org/presentationml/2006/main" xmlns:r="http://schemas.openxmlformats.org/officeDocument/2006/relationships">
+  <p:cSld>
+    <p:spTree>
+      <p:nvGrpSpPr>
+        <p:cNvPr id="1" name=""/>
+        <p:cNvGrpSpPr/>
+        <p:nvPr/>
+      </p:nvGrpSpPr>
+      <p:grpSpPr/>
+      <p:sp>
+        <p:nvSpPr>
+          <p:cNvPr id="2" name="Title 1"/>
+          <p:cNvSpPr>
+            <a:spLocks noGrp="1"/>
+          </p:cNvSpPr>
+          <p:nvPr>
+            <p:ph type="title"/>
+          </p:nvPr>
+        </p:nvSpPr>
+        <p:spPr/>
+        <p:txBody>
+          <a:bodyPr/>
+          <a:lstStyle/>
+          <a:p>
+            <a:r>
+              <a:rPr sz="3800" b="1">
+                <a:solidFill>
+                  <a:srgbClr val="1F2A37"/>
+                </a:solidFill>
+              </a:rPr>
+              <a:t>What does try/catch let your app do? (from week 5)</a:t>
+            </a:r>
+          </a:p>
+        </p:txBody>
+      </p:sp>
+      <p:sp>
+        <p:nvSpPr>
+          <p:cNvPr id="3" name="TextBox 2"/>
+          <p:cNvSpPr txBox="1"/>
+          <p:nvPr/>
+        </p:nvSpPr>
+        <p:spPr>
+          <a:xfrm>
+            <a:off x="868680" y="502920"/>
+            <a:ext cx="5486400" cy="457200"/>
+          </a:xfrm>
+          <a:prstGeom prst="rect">
+            <a:avLst/>
+          </a:prstGeom>
+          <a:noFill/>
+        </p:spPr>
+        <p:txBody>
+          <a:bodyPr wrap="none">
+            <a:spAutoFit/>
+          </a:bodyPr>
+          <a:lstStyle/>
+          <a:p>
+            <a:r>
+              <a:rPr sz="1500" b="1">
+                <a:solidFill>
+                  <a:srgbClr val="01AEFD"/>
+                </a:solidFill>
+              </a:rPr>
+              <a:t>QUICK CHECK</a:t>
+            </a:r>
+          </a:p>
+        </p:txBody>
+      </p:sp>
+      <p:sp>
+        <p:nvSpPr>
+          <p:cNvPr id="4" name="TextBox 3"/>
+          <p:cNvSpPr txBox="1"/>
+          <p:nvPr/>
+        </p:nvSpPr>
+        <p:spPr>
+          <a:xfrm>
+            <a:off x="822960" y="1828800"/>
+            <a:ext cx="10515600" cy="4206240"/>
+          </a:xfrm>
+          <a:prstGeom prst="rect">
+            <a:avLst/>
+          </a:prstGeom>
+          <a:noFill/>
+        </p:spPr>
+        <p:txBody>
+          <a:bodyPr wrap="square">
+            <a:spAutoFit/>
+          </a:bodyPr>
+          <a:lstStyle/>
+          <a:p>
+            <a:pPr>
+              <a:spcAft>
+                <a:spcPts val="1400"/>
+              </a:spcAft>
+            </a:pPr>
+            <a:r>
+              <a:rPr sz="2400">
+                <a:solidFill>
+                  <a:srgbClr val="1F2A37"/>
+                </a:solidFill>
+              </a:rPr>
+              <a:t>• A. Run faster</a:t>
+            </a:r>
+          </a:p>
+          <a:p>
+            <a:pPr>
+              <a:spcAft>
+                <a:spcPts val="1400"/>
+              </a:spcAft>
+            </a:pPr>
+            <a:r>
+              <a:rPr sz="2400">
+                <a:solidFill>
+                  <a:srgbClr val="1F2A37"/>
+                </a:solidFill>
+              </a:rPr>
+              <a:t>• B. Skip fetch</a:t>
+            </a:r>
+          </a:p>
+          <a:p>
+            <a:pPr>
+              <a:spcAft>
+                <a:spcPts val="1400"/>
+              </a:spcAft>
+            </a:pPr>
+            <a:r>
+              <a:rPr sz="2400">
+                <a:solidFill>
+                  <a:srgbClr val="1F2A37"/>
+                </a:solidFill>
+              </a:rPr>
+              <a:t>• C. Keep running instead of crashing on an error</a:t>
+            </a:r>
+          </a:p>
+          <a:p>
+            <a:pPr>
+              <a:spcAft>
+                <a:spcPts val="1400"/>
+              </a:spcAft>
+            </a:pPr>
+            <a:r>
+              <a:rPr sz="2400">
+                <a:solidFill>
+                  <a:srgbClr val="1F2A37"/>
+                </a:solidFill>
+              </a:rPr>
+              <a:t>• D. Reload the page</a:t>
+            </a:r>
+          </a:p>
+          <a:p>
+            <a:pPr>
+              <a:spcAft>
+                <a:spcPts val="1400"/>
+              </a:spcAft>
+            </a:pPr>
+            <a:r>
+              <a:rPr sz="2400">
+                <a:solidFill>
+                  <a:srgbClr val="1F2A37"/>
+                </a:solidFill>
+              </a:rPr>
+              <a:t>• Pick one - the answer is on the next slide.</a:t>
             </a:r>
           </a:p>
         </p:txBody>
@@ -11685,6 +11754,1345 @@
                 </a:solidFill>
               </a:rPr>
               <a:t>• Say exactly what you want</a:t>
+            </a:r>
+          </a:p>
+        </p:txBody>
+      </p:sp>
+    </p:spTree>
+  </p:cSld>
+  <p:clrMapOvr>
+    <a:masterClrMapping/>
+  </p:clrMapOvr>
+</p:sld>
+</file>
+
+<file path=ppt/slides/slide40.xml><?xml version="1.0" encoding="utf-8"?>
+<p:sld xmlns:a="http://schemas.openxmlformats.org/drawingml/2006/main" xmlns:p="http://schemas.openxmlformats.org/presentationml/2006/main" xmlns:r="http://schemas.openxmlformats.org/officeDocument/2006/relationships">
+  <p:cSld>
+    <p:spTree>
+      <p:nvGrpSpPr>
+        <p:cNvPr id="1" name=""/>
+        <p:cNvGrpSpPr/>
+        <p:nvPr/>
+      </p:nvGrpSpPr>
+      <p:grpSpPr/>
+      <p:sp>
+        <p:nvSpPr>
+          <p:cNvPr id="2" name="Title 1"/>
+          <p:cNvSpPr>
+            <a:spLocks noGrp="1"/>
+          </p:cNvSpPr>
+          <p:nvPr>
+            <p:ph type="title"/>
+          </p:nvPr>
+        </p:nvSpPr>
+        <p:spPr/>
+        <p:txBody>
+          <a:bodyPr/>
+          <a:lstStyle/>
+          <a:p>
+            <a:r>
+              <a:rPr sz="3800" b="1">
+                <a:solidFill>
+                  <a:srgbClr val="1F2A37"/>
+                </a:solidFill>
+              </a:rPr>
+              <a:t>What does try/catch let your app do? (from week 5)</a:t>
+            </a:r>
+          </a:p>
+        </p:txBody>
+      </p:sp>
+      <p:sp>
+        <p:nvSpPr>
+          <p:cNvPr id="3" name="TextBox 2"/>
+          <p:cNvSpPr txBox="1"/>
+          <p:nvPr/>
+        </p:nvSpPr>
+        <p:spPr>
+          <a:xfrm>
+            <a:off x="868680" y="502920"/>
+            <a:ext cx="5486400" cy="457200"/>
+          </a:xfrm>
+          <a:prstGeom prst="rect">
+            <a:avLst/>
+          </a:prstGeom>
+          <a:noFill/>
+        </p:spPr>
+        <p:txBody>
+          <a:bodyPr wrap="none">
+            <a:spAutoFit/>
+          </a:bodyPr>
+          <a:lstStyle/>
+          <a:p>
+            <a:r>
+              <a:rPr sz="1500" b="1">
+                <a:solidFill>
+                  <a:srgbClr val="01AEFD"/>
+                </a:solidFill>
+              </a:rPr>
+              <a:t>ANSWER</a:t>
+            </a:r>
+          </a:p>
+        </p:txBody>
+      </p:sp>
+      <p:sp>
+        <p:nvSpPr>
+          <p:cNvPr id="4" name="TextBox 3"/>
+          <p:cNvSpPr txBox="1"/>
+          <p:nvPr/>
+        </p:nvSpPr>
+        <p:spPr>
+          <a:xfrm>
+            <a:off x="822960" y="1828800"/>
+            <a:ext cx="10515600" cy="4206240"/>
+          </a:xfrm>
+          <a:prstGeom prst="rect">
+            <a:avLst/>
+          </a:prstGeom>
+          <a:noFill/>
+        </p:spPr>
+        <p:txBody>
+          <a:bodyPr wrap="square">
+            <a:spAutoFit/>
+          </a:bodyPr>
+          <a:lstStyle/>
+          <a:p>
+            <a:pPr>
+              <a:spcAft>
+                <a:spcPts val="1400"/>
+              </a:spcAft>
+            </a:pPr>
+            <a:r>
+              <a:rPr sz="2400">
+                <a:solidFill>
+                  <a:srgbClr val="1F2A37"/>
+                </a:solidFill>
+              </a:rPr>
+              <a:t>• A. Run faster</a:t>
+            </a:r>
+          </a:p>
+          <a:p>
+            <a:pPr>
+              <a:spcAft>
+                <a:spcPts val="1400"/>
+              </a:spcAft>
+            </a:pPr>
+            <a:r>
+              <a:rPr sz="2400">
+                <a:solidFill>
+                  <a:srgbClr val="1F2A37"/>
+                </a:solidFill>
+              </a:rPr>
+              <a:t>• B. Skip fetch</a:t>
+            </a:r>
+          </a:p>
+          <a:p>
+            <a:pPr>
+              <a:spcAft>
+                <a:spcPts val="1400"/>
+              </a:spcAft>
+            </a:pPr>
+            <a:r>
+              <a:rPr sz="2400">
+                <a:solidFill>
+                  <a:srgbClr val="1F2A37"/>
+                </a:solidFill>
+              </a:rPr>
+              <a:t>• C. Keep running instead of crashing on an error (correct)</a:t>
+            </a:r>
+          </a:p>
+          <a:p>
+            <a:pPr>
+              <a:spcAft>
+                <a:spcPts val="1400"/>
+              </a:spcAft>
+            </a:pPr>
+            <a:r>
+              <a:rPr sz="2400">
+                <a:solidFill>
+                  <a:srgbClr val="1F2A37"/>
+                </a:solidFill>
+              </a:rPr>
+              <a:t>• D. Reload the page</a:t>
+            </a:r>
+          </a:p>
+          <a:p>
+            <a:pPr>
+              <a:spcAft>
+                <a:spcPts val="1400"/>
+              </a:spcAft>
+            </a:pPr>
+            <a:r>
+              <a:rPr sz="2400">
+                <a:solidFill>
+                  <a:srgbClr val="1F2A37"/>
+                </a:solidFill>
+              </a:rPr>
+              <a:t>• catch handles the error so the whole app doesn't fall over.</a:t>
+            </a:r>
+          </a:p>
+        </p:txBody>
+      </p:sp>
+    </p:spTree>
+  </p:cSld>
+  <p:clrMapOvr>
+    <a:masterClrMapping/>
+  </p:clrMapOvr>
+</p:sld>
+</file>
+
+<file path=ppt/slides/slide41.xml><?xml version="1.0" encoding="utf-8"?>
+<p:sld xmlns:a="http://schemas.openxmlformats.org/drawingml/2006/main" xmlns:p="http://schemas.openxmlformats.org/presentationml/2006/main" xmlns:r="http://schemas.openxmlformats.org/officeDocument/2006/relationships">
+  <p:cSld>
+    <p:bg>
+      <p:bgPr>
+        <a:solidFill>
+          <a:srgbClr val="102127"/>
+        </a:solidFill>
+        <a:effectLst/>
+      </p:bgPr>
+    </p:bg>
+    <p:spTree>
+      <p:nvGrpSpPr>
+        <p:cNvPr id="1" name=""/>
+        <p:cNvGrpSpPr/>
+        <p:nvPr/>
+      </p:nvGrpSpPr>
+      <p:grpSpPr/>
+      <p:sp>
+        <p:nvSpPr>
+          <p:cNvPr id="2" name="TextBox 1"/>
+          <p:cNvSpPr txBox="1"/>
+          <p:nvPr/>
+        </p:nvSpPr>
+        <p:spPr>
+          <a:xfrm>
+            <a:off x="502920" y="274320"/>
+            <a:ext cx="11155680" cy="548640"/>
+          </a:xfrm>
+          <a:prstGeom prst="rect">
+            <a:avLst/>
+          </a:prstGeom>
+          <a:noFill/>
+        </p:spPr>
+        <p:txBody>
+          <a:bodyPr wrap="none">
+            <a:spAutoFit/>
+          </a:bodyPr>
+          <a:lstStyle/>
+          <a:p>
+            <a:r>
+              <a:rPr sz="2200" b="1">
+                <a:solidFill>
+                  <a:srgbClr val="01AEFD"/>
+                </a:solidFill>
+              </a:rPr>
+              <a:t>Type this into script.js   -   line 22</a:t>
+            </a:r>
+          </a:p>
+        </p:txBody>
+      </p:sp>
+      <p:sp>
+        <p:nvSpPr>
+          <p:cNvPr id="3" name="TextBox 2"/>
+          <p:cNvSpPr txBox="1"/>
+          <p:nvPr/>
+        </p:nvSpPr>
+        <p:spPr>
+          <a:xfrm>
+            <a:off x="502920" y="960120"/>
+            <a:ext cx="11155680" cy="4297680"/>
+          </a:xfrm>
+          <a:prstGeom prst="rect">
+            <a:avLst/>
+          </a:prstGeom>
+          <a:noFill/>
+        </p:spPr>
+        <p:txBody>
+          <a:bodyPr wrap="none">
+            <a:spAutoFit/>
+          </a:bodyPr>
+          <a:lstStyle/>
+          <a:p>
+            <a:pPr>
+              <a:spcAft>
+                <a:spcPts val="0"/>
+              </a:spcAft>
+            </a:pPr>
+            <a:r>
+              <a:rPr sz="1800">
+                <a:solidFill>
+                  <a:srgbClr val="6D8C97"/>
+                </a:solidFill>
+                <a:latin typeface="Consolas"/>
+              </a:rPr>
+              <a:t>  16  </a:t>
+            </a:r>
+            <a:r>
+              <a:rPr sz="1800">
+                <a:solidFill>
+                  <a:srgbClr val="6D8C97"/>
+                </a:solidFill>
+                <a:latin typeface="Consolas"/>
+              </a:rPr>
+              <a:t> </a:t>
+            </a:r>
+          </a:p>
+          <a:p>
+            <a:pPr>
+              <a:spcAft>
+                <a:spcPts val="0"/>
+              </a:spcAft>
+            </a:pPr>
+            <a:r>
+              <a:rPr sz="1800">
+                <a:solidFill>
+                  <a:srgbClr val="6D8C97"/>
+                </a:solidFill>
+                <a:latin typeface="Consolas"/>
+              </a:rPr>
+              <a:t>  17  </a:t>
+            </a:r>
+            <a:r>
+              <a:rPr sz="1800">
+                <a:solidFill>
+                  <a:srgbClr val="6D8C97"/>
+                </a:solidFill>
+                <a:latin typeface="Consolas"/>
+              </a:rPr>
+              <a:t>// Week 2: find the boxes we named in index.html.</a:t>
+            </a:r>
+          </a:p>
+          <a:p>
+            <a:pPr>
+              <a:spcAft>
+                <a:spcPts val="0"/>
+              </a:spcAft>
+            </a:pPr>
+            <a:r>
+              <a:rPr sz="1800">
+                <a:solidFill>
+                  <a:srgbClr val="6D8C97"/>
+                </a:solidFill>
+                <a:latin typeface="Consolas"/>
+              </a:rPr>
+              <a:t>  18  </a:t>
+            </a:r>
+            <a:r>
+              <a:rPr sz="1800">
+                <a:solidFill>
+                  <a:srgbClr val="6D8C97"/>
+                </a:solidFill>
+                <a:latin typeface="Consolas"/>
+              </a:rPr>
+              <a:t>// document.getElementById looks for the id= we wrote on each element.</a:t>
+            </a:r>
+          </a:p>
+          <a:p>
+            <a:pPr>
+              <a:spcAft>
+                <a:spcPts val="0"/>
+              </a:spcAft>
+            </a:pPr>
+            <a:r>
+              <a:rPr sz="1800">
+                <a:solidFill>
+                  <a:srgbClr val="6D8C97"/>
+                </a:solidFill>
+                <a:latin typeface="Consolas"/>
+              </a:rPr>
+              <a:t>  19  </a:t>
+            </a:r>
+            <a:r>
+              <a:rPr sz="1800">
+                <a:solidFill>
+                  <a:srgbClr val="6D8C97"/>
+                </a:solidFill>
+                <a:latin typeface="Consolas"/>
+              </a:rPr>
+              <a:t>const chat = document.getElementById('chat');</a:t>
+            </a:r>
+          </a:p>
+          <a:p>
+            <a:pPr>
+              <a:spcAft>
+                <a:spcPts val="0"/>
+              </a:spcAft>
+            </a:pPr>
+            <a:r>
+              <a:rPr sz="1800">
+                <a:solidFill>
+                  <a:srgbClr val="6D8C97"/>
+                </a:solidFill>
+                <a:latin typeface="Consolas"/>
+              </a:rPr>
+              <a:t>  20  </a:t>
+            </a:r>
+            <a:r>
+              <a:rPr sz="1800">
+                <a:solidFill>
+                  <a:srgbClr val="6D8C97"/>
+                </a:solidFill>
+                <a:latin typeface="Consolas"/>
+              </a:rPr>
+              <a:t>const composer = document.getElementById('composer');</a:t>
+            </a:r>
+          </a:p>
+          <a:p>
+            <a:pPr>
+              <a:spcAft>
+                <a:spcPts val="0"/>
+              </a:spcAft>
+            </a:pPr>
+            <a:r>
+              <a:rPr sz="1800">
+                <a:solidFill>
+                  <a:srgbClr val="6D8C97"/>
+                </a:solidFill>
+                <a:latin typeface="Consolas"/>
+              </a:rPr>
+              <a:t>  21  </a:t>
+            </a:r>
+            <a:r>
+              <a:rPr sz="1800">
+                <a:solidFill>
+                  <a:srgbClr val="6D8C97"/>
+                </a:solidFill>
+                <a:latin typeface="Consolas"/>
+              </a:rPr>
+              <a:t>const promptBox = document.getElementById('prompt');</a:t>
+            </a:r>
+          </a:p>
+          <a:p>
+            <a:pPr>
+              <a:spcAft>
+                <a:spcPts val="0"/>
+              </a:spcAft>
+            </a:pPr>
+            <a:r>
+              <a:rPr sz="1800">
+                <a:solidFill>
+                  <a:srgbClr val="6D8C97"/>
+                </a:solidFill>
+                <a:latin typeface="Consolas"/>
+              </a:rPr>
+              <a:t>  22  </a:t>
+            </a:r>
+            <a:r>
+              <a:rPr sz="1800">
+                <a:solidFill>
+                  <a:srgbClr val="7FE0A0"/>
+                </a:solidFill>
+                <a:latin typeface="Consolas"/>
+              </a:rPr>
+              <a:t>const personaBox = document.getElementById('persona');</a:t>
+            </a:r>
+          </a:p>
+        </p:txBody>
+      </p:sp>
+      <p:sp>
+        <p:nvSpPr>
+          <p:cNvPr id="4" name="TextBox 3"/>
+          <p:cNvSpPr txBox="1"/>
+          <p:nvPr/>
+        </p:nvSpPr>
+        <p:spPr>
+          <a:xfrm>
+            <a:off x="548640" y="5623560"/>
+            <a:ext cx="11064240" cy="1051560"/>
+          </a:xfrm>
+          <a:prstGeom prst="rect">
+            <a:avLst/>
+          </a:prstGeom>
+          <a:noFill/>
+        </p:spPr>
+        <p:txBody>
+          <a:bodyPr wrap="square">
+            <a:spAutoFit/>
+          </a:bodyPr>
+          <a:lstStyle/>
+          <a:p>
+            <a:r>
+              <a:rPr sz="2000">
+                <a:solidFill>
+                  <a:srgbClr val="DCECEF"/>
+                </a:solidFill>
+              </a:rPr>
+              <a:t>Find the Personality box too, so the code can read what is typed in it.</a:t>
+            </a:r>
+          </a:p>
+        </p:txBody>
+      </p:sp>
+    </p:spTree>
+  </p:cSld>
+  <p:clrMapOvr>
+    <a:masterClrMapping/>
+  </p:clrMapOvr>
+</p:sld>
+</file>
+
+<file path=ppt/slides/slide42.xml><?xml version="1.0" encoding="utf-8"?>
+<p:sld xmlns:a="http://schemas.openxmlformats.org/drawingml/2006/main" xmlns:p="http://schemas.openxmlformats.org/presentationml/2006/main" xmlns:r="http://schemas.openxmlformats.org/officeDocument/2006/relationships">
+  <p:cSld>
+    <p:spTree>
+      <p:nvGrpSpPr>
+        <p:cNvPr id="1" name=""/>
+        <p:cNvGrpSpPr/>
+        <p:nvPr/>
+      </p:nvGrpSpPr>
+      <p:grpSpPr/>
+      <p:sp>
+        <p:nvSpPr>
+          <p:cNvPr id="2" name="Title 1"/>
+          <p:cNvSpPr>
+            <a:spLocks noGrp="1"/>
+          </p:cNvSpPr>
+          <p:nvPr>
+            <p:ph type="title"/>
+          </p:nvPr>
+        </p:nvSpPr>
+        <p:spPr/>
+        <p:txBody>
+          <a:bodyPr/>
+          <a:lstStyle/>
+          <a:p>
+            <a:r>
+              <a:rPr sz="3800" b="1">
+                <a:solidFill>
+                  <a:srgbClr val="1F2A37"/>
+                </a:solidFill>
+              </a:rPr>
+              <a:t>system is not part of the chat</a:t>
+            </a:r>
+          </a:p>
+        </p:txBody>
+      </p:sp>
+      <p:sp>
+        <p:nvSpPr>
+          <p:cNvPr id="3" name="TextBox 2"/>
+          <p:cNvSpPr txBox="1"/>
+          <p:nvPr/>
+        </p:nvSpPr>
+        <p:spPr>
+          <a:xfrm>
+            <a:off x="822960" y="1828800"/>
+            <a:ext cx="10515600" cy="4206240"/>
+          </a:xfrm>
+          <a:prstGeom prst="rect">
+            <a:avLst/>
+          </a:prstGeom>
+          <a:noFill/>
+        </p:spPr>
+        <p:txBody>
+          <a:bodyPr wrap="square">
+            <a:spAutoFit/>
+          </a:bodyPr>
+          <a:lstStyle/>
+          <a:p>
+            <a:pPr>
+              <a:spcAft>
+                <a:spcPts val="1400"/>
+              </a:spcAft>
+            </a:pPr>
+            <a:r>
+              <a:rPr sz="2800">
+                <a:solidFill>
+                  <a:srgbClr val="01AEFD"/>
+                </a:solidFill>
+              </a:rPr>
+              <a:t>It is the rules of the chat</a:t>
+            </a:r>
+          </a:p>
+          <a:p>
+            <a:pPr>
+              <a:spcAft>
+                <a:spcPts val="1400"/>
+              </a:spcAft>
+            </a:pPr>
+            <a:r>
+              <a:rPr sz="2400">
+                <a:solidFill>
+                  <a:srgbClr val="1F2A37"/>
+                </a:solidFill>
+              </a:rPr>
+              <a:t>• Re-sent with every request</a:t>
+            </a:r>
+          </a:p>
+          <a:p>
+            <a:pPr>
+              <a:spcAft>
+                <a:spcPts val="1400"/>
+              </a:spcAft>
+            </a:pPr>
+            <a:r>
+              <a:rPr sz="2400">
+                <a:solidFill>
+                  <a:srgbClr val="1F2A37"/>
+                </a:solidFill>
+              </a:rPr>
+              <a:t>• The model reads it first, every time</a:t>
+            </a:r>
+          </a:p>
+        </p:txBody>
+      </p:sp>
+    </p:spTree>
+  </p:cSld>
+  <p:clrMapOvr>
+    <a:masterClrMapping/>
+  </p:clrMapOvr>
+</p:sld>
+</file>
+
+<file path=ppt/slides/slide43.xml><?xml version="1.0" encoding="utf-8"?>
+<p:sld xmlns:a="http://schemas.openxmlformats.org/drawingml/2006/main" xmlns:p="http://schemas.openxmlformats.org/presentationml/2006/main" xmlns:r="http://schemas.openxmlformats.org/officeDocument/2006/relationships">
+  <p:cSld>
+    <p:bg>
+      <p:bgPr>
+        <a:solidFill>
+          <a:srgbClr val="102127"/>
+        </a:solidFill>
+        <a:effectLst/>
+      </p:bgPr>
+    </p:bg>
+    <p:spTree>
+      <p:nvGrpSpPr>
+        <p:cNvPr id="1" name=""/>
+        <p:cNvGrpSpPr/>
+        <p:nvPr/>
+      </p:nvGrpSpPr>
+      <p:grpSpPr/>
+      <p:sp>
+        <p:nvSpPr>
+          <p:cNvPr id="2" name="TextBox 1"/>
+          <p:cNvSpPr txBox="1"/>
+          <p:nvPr/>
+        </p:nvSpPr>
+        <p:spPr>
+          <a:xfrm>
+            <a:off x="502920" y="274320"/>
+            <a:ext cx="11155680" cy="548640"/>
+          </a:xfrm>
+          <a:prstGeom prst="rect">
+            <a:avLst/>
+          </a:prstGeom>
+          <a:noFill/>
+        </p:spPr>
+        <p:txBody>
+          <a:bodyPr wrap="none">
+            <a:spAutoFit/>
+          </a:bodyPr>
+          <a:lstStyle/>
+          <a:p>
+            <a:r>
+              <a:rPr sz="2200" b="1">
+                <a:solidFill>
+                  <a:srgbClr val="01AEFD"/>
+                </a:solidFill>
+              </a:rPr>
+              <a:t>Type this into script.js   -   line 65</a:t>
+            </a:r>
+          </a:p>
+        </p:txBody>
+      </p:sp>
+      <p:sp>
+        <p:nvSpPr>
+          <p:cNvPr id="3" name="TextBox 2"/>
+          <p:cNvSpPr txBox="1"/>
+          <p:nvPr/>
+        </p:nvSpPr>
+        <p:spPr>
+          <a:xfrm>
+            <a:off x="502920" y="960120"/>
+            <a:ext cx="11155680" cy="4297680"/>
+          </a:xfrm>
+          <a:prstGeom prst="rect">
+            <a:avLst/>
+          </a:prstGeom>
+          <a:noFill/>
+        </p:spPr>
+        <p:txBody>
+          <a:bodyPr wrap="none">
+            <a:spAutoFit/>
+          </a:bodyPr>
+          <a:lstStyle/>
+          <a:p>
+            <a:pPr>
+              <a:spcAft>
+                <a:spcPts val="0"/>
+              </a:spcAft>
+            </a:pPr>
+            <a:r>
+              <a:rPr sz="1300">
+                <a:solidFill>
+                  <a:srgbClr val="6D8C97"/>
+                </a:solidFill>
+                <a:latin typeface="Consolas"/>
+              </a:rPr>
+              <a:t>  51  </a:t>
+            </a:r>
+            <a:r>
+              <a:rPr sz="1300">
+                <a:solidFill>
+                  <a:srgbClr val="6D8C97"/>
+                </a:solidFill>
+                <a:latin typeface="Consolas"/>
+              </a:rPr>
+              <a:t> </a:t>
+            </a:r>
+          </a:p>
+          <a:p>
+            <a:pPr>
+              <a:spcAft>
+                <a:spcPts val="0"/>
+              </a:spcAft>
+            </a:pPr>
+            <a:r>
+              <a:rPr sz="1300">
+                <a:solidFill>
+                  <a:srgbClr val="6D8C97"/>
+                </a:solidFill>
+                <a:latin typeface="Consolas"/>
+              </a:rPr>
+              <a:t>  52  </a:t>
+            </a:r>
+            <a:r>
+              <a:rPr sz="1300">
+                <a:solidFill>
+                  <a:srgbClr val="6D8C97"/>
+                </a:solidFill>
+                <a:latin typeface="Consolas"/>
+              </a:rPr>
+              <a:t>// Week 4: ask the AI a real question.</a:t>
+            </a:r>
+          </a:p>
+          <a:p>
+            <a:pPr>
+              <a:spcAft>
+                <a:spcPts val="0"/>
+              </a:spcAft>
+            </a:pPr>
+            <a:r>
+              <a:rPr sz="1300">
+                <a:solidFill>
+                  <a:srgbClr val="6D8C97"/>
+                </a:solidFill>
+                <a:latin typeface="Consolas"/>
+              </a:rPr>
+              <a:t>  53  </a:t>
+            </a:r>
+            <a:r>
+              <a:rPr sz="1300">
+                <a:solidFill>
+                  <a:srgbClr val="6D8C97"/>
+                </a:solidFill>
+                <a:latin typeface="Consolas"/>
+              </a:rPr>
+              <a:t>// A chat request is a LIST of messages. Each one says who said it.</a:t>
+            </a:r>
+          </a:p>
+          <a:p>
+            <a:pPr>
+              <a:spcAft>
+                <a:spcPts val="0"/>
+              </a:spcAft>
+            </a:pPr>
+            <a:r>
+              <a:rPr sz="1300">
+                <a:solidFill>
+                  <a:srgbClr val="6D8C97"/>
+                </a:solidFill>
+                <a:latin typeface="Consolas"/>
+              </a:rPr>
+              <a:t>  54  </a:t>
+            </a:r>
+            <a:r>
+              <a:rPr sz="1300">
+                <a:solidFill>
+                  <a:srgbClr val="6D8C97"/>
+                </a:solidFill>
+                <a:latin typeface="Consolas"/>
+              </a:rPr>
+              <a:t>async function askAI(question) {</a:t>
+            </a:r>
+          </a:p>
+          <a:p>
+            <a:pPr>
+              <a:spcAft>
+                <a:spcPts val="0"/>
+              </a:spcAft>
+            </a:pPr>
+            <a:r>
+              <a:rPr sz="1300">
+                <a:solidFill>
+                  <a:srgbClr val="6D8C97"/>
+                </a:solidFill>
+                <a:latin typeface="Consolas"/>
+              </a:rPr>
+              <a:t>  55  </a:t>
+            </a:r>
+            <a:r>
+              <a:rPr sz="1300">
+                <a:solidFill>
+                  <a:srgbClr val="6D8C97"/>
+                </a:solidFill>
+                <a:latin typeface="Consolas"/>
+              </a:rPr>
+              <a:t>  const res = await fetch(AI_BASE + '/v1/chat/completions', {</a:t>
+            </a:r>
+          </a:p>
+          <a:p>
+            <a:pPr>
+              <a:spcAft>
+                <a:spcPts val="0"/>
+              </a:spcAft>
+            </a:pPr>
+            <a:r>
+              <a:rPr sz="1300">
+                <a:solidFill>
+                  <a:srgbClr val="6D8C97"/>
+                </a:solidFill>
+                <a:latin typeface="Consolas"/>
+              </a:rPr>
+              <a:t>  56  </a:t>
+            </a:r>
+            <a:r>
+              <a:rPr sz="1300">
+                <a:solidFill>
+                  <a:srgbClr val="6D8C97"/>
+                </a:solidFill>
+                <a:latin typeface="Consolas"/>
+              </a:rPr>
+              <a:t>    method: 'POST',                       // POST = I am sending you something</a:t>
+            </a:r>
+          </a:p>
+          <a:p>
+            <a:pPr>
+              <a:spcAft>
+                <a:spcPts val="0"/>
+              </a:spcAft>
+            </a:pPr>
+            <a:r>
+              <a:rPr sz="1300">
+                <a:solidFill>
+                  <a:srgbClr val="6D8C97"/>
+                </a:solidFill>
+                <a:latin typeface="Consolas"/>
+              </a:rPr>
+              <a:t>  57  </a:t>
+            </a:r>
+            <a:r>
+              <a:rPr sz="1300">
+                <a:solidFill>
+                  <a:srgbClr val="6D8C97"/>
+                </a:solidFill>
+                <a:latin typeface="Consolas"/>
+              </a:rPr>
+              <a:t>    headers: {</a:t>
+            </a:r>
+          </a:p>
+          <a:p>
+            <a:pPr>
+              <a:spcAft>
+                <a:spcPts val="0"/>
+              </a:spcAft>
+            </a:pPr>
+            <a:r>
+              <a:rPr sz="1300">
+                <a:solidFill>
+                  <a:srgbClr val="6D8C97"/>
+                </a:solidFill>
+                <a:latin typeface="Consolas"/>
+              </a:rPr>
+              <a:t>  58  </a:t>
+            </a:r>
+            <a:r>
+              <a:rPr sz="1300">
+                <a:solidFill>
+                  <a:srgbClr val="6D8C97"/>
+                </a:solidFill>
+                <a:latin typeface="Consolas"/>
+              </a:rPr>
+              <a:t>      'Content-Type': 'application/json', // what I am sending is JSON</a:t>
+            </a:r>
+          </a:p>
+          <a:p>
+            <a:pPr>
+              <a:spcAft>
+                <a:spcPts val="0"/>
+              </a:spcAft>
+            </a:pPr>
+            <a:r>
+              <a:rPr sz="1300">
+                <a:solidFill>
+                  <a:srgbClr val="6D8C97"/>
+                </a:solidFill>
+                <a:latin typeface="Consolas"/>
+              </a:rPr>
+              <a:t>  59  </a:t>
+            </a:r>
+            <a:r>
+              <a:rPr sz="1300">
+                <a:solidFill>
+                  <a:srgbClr val="6D8C97"/>
+                </a:solidFill>
+                <a:latin typeface="Consolas"/>
+              </a:rPr>
+              <a:t>      'Authorization': 'Bearer ' + API_KEY</a:t>
+            </a:r>
+          </a:p>
+          <a:p>
+            <a:pPr>
+              <a:spcAft>
+                <a:spcPts val="0"/>
+              </a:spcAft>
+            </a:pPr>
+            <a:r>
+              <a:rPr sz="1300">
+                <a:solidFill>
+                  <a:srgbClr val="6D8C97"/>
+                </a:solidFill>
+                <a:latin typeface="Consolas"/>
+              </a:rPr>
+              <a:t>  60  </a:t>
+            </a:r>
+            <a:r>
+              <a:rPr sz="1300">
+                <a:solidFill>
+                  <a:srgbClr val="6D8C97"/>
+                </a:solidFill>
+                <a:latin typeface="Consolas"/>
+              </a:rPr>
+              <a:t>    },</a:t>
+            </a:r>
+          </a:p>
+          <a:p>
+            <a:pPr>
+              <a:spcAft>
+                <a:spcPts val="0"/>
+              </a:spcAft>
+            </a:pPr>
+            <a:r>
+              <a:rPr sz="1300">
+                <a:solidFill>
+                  <a:srgbClr val="6D8C97"/>
+                </a:solidFill>
+                <a:latin typeface="Consolas"/>
+              </a:rPr>
+              <a:t>  61  </a:t>
+            </a:r>
+            <a:r>
+              <a:rPr sz="1300">
+                <a:solidFill>
+                  <a:srgbClr val="6D8C97"/>
+                </a:solidFill>
+                <a:latin typeface="Consolas"/>
+              </a:rPr>
+              <a:t>    body: JSON.stringify({</a:t>
+            </a:r>
+          </a:p>
+          <a:p>
+            <a:pPr>
+              <a:spcAft>
+                <a:spcPts val="0"/>
+              </a:spcAft>
+            </a:pPr>
+            <a:r>
+              <a:rPr sz="1300">
+                <a:solidFill>
+                  <a:srgbClr val="6D8C97"/>
+                </a:solidFill>
+                <a:latin typeface="Consolas"/>
+              </a:rPr>
+              <a:t>  62  </a:t>
+            </a:r>
+            <a:r>
+              <a:rPr sz="1300">
+                <a:solidFill>
+                  <a:srgbClr val="6D8C97"/>
+                </a:solidFill>
+                <a:latin typeface="Consolas"/>
+              </a:rPr>
+              <a:t>      model: 'fast',</a:t>
+            </a:r>
+          </a:p>
+          <a:p>
+            <a:pPr>
+              <a:spcAft>
+                <a:spcPts val="0"/>
+              </a:spcAft>
+            </a:pPr>
+            <a:r>
+              <a:rPr sz="1300">
+                <a:solidFill>
+                  <a:srgbClr val="6D8C97"/>
+                </a:solidFill>
+                <a:latin typeface="Consolas"/>
+              </a:rPr>
+              <a:t>  63  </a:t>
+            </a:r>
+            <a:r>
+              <a:rPr sz="1300">
+                <a:solidFill>
+                  <a:srgbClr val="6D8C97"/>
+                </a:solidFill>
+                <a:latin typeface="Consolas"/>
+              </a:rPr>
+              <a:t>      messages: [</a:t>
+            </a:r>
+          </a:p>
+          <a:p>
+            <a:pPr>
+              <a:spcAft>
+                <a:spcPts val="0"/>
+              </a:spcAft>
+            </a:pPr>
+            <a:r>
+              <a:rPr sz="1300">
+                <a:solidFill>
+                  <a:srgbClr val="6D8C97"/>
+                </a:solidFill>
+                <a:latin typeface="Consolas"/>
+              </a:rPr>
+              <a:t>  64  </a:t>
+            </a:r>
+            <a:r>
+              <a:rPr sz="1300">
+                <a:solidFill>
+                  <a:srgbClr val="6D8C97"/>
+                </a:solidFill>
+                <a:latin typeface="Consolas"/>
+              </a:rPr>
+              <a:t>        // Week 6: the standing instruction, read before every single reply.</a:t>
+            </a:r>
+          </a:p>
+          <a:p>
+            <a:pPr>
+              <a:spcAft>
+                <a:spcPts val="0"/>
+              </a:spcAft>
+            </a:pPr>
+            <a:r>
+              <a:rPr sz="1300">
+                <a:solidFill>
+                  <a:srgbClr val="6D8C97"/>
+                </a:solidFill>
+                <a:latin typeface="Consolas"/>
+              </a:rPr>
+              <a:t>  65  </a:t>
+            </a:r>
+            <a:r>
+              <a:rPr sz="1300">
+                <a:solidFill>
+                  <a:srgbClr val="7FE0A0"/>
+                </a:solidFill>
+                <a:latin typeface="Consolas"/>
+              </a:rPr>
+              <a:t>        { role: 'system', content: personaBox.value },</a:t>
+            </a:r>
+          </a:p>
+        </p:txBody>
+      </p:sp>
+      <p:sp>
+        <p:nvSpPr>
+          <p:cNvPr id="4" name="TextBox 3"/>
+          <p:cNvSpPr txBox="1"/>
+          <p:nvPr/>
+        </p:nvSpPr>
+        <p:spPr>
+          <a:xfrm>
+            <a:off x="548640" y="5623560"/>
+            <a:ext cx="11064240" cy="1051560"/>
+          </a:xfrm>
+          <a:prstGeom prst="rect">
+            <a:avLst/>
+          </a:prstGeom>
+          <a:noFill/>
+        </p:spPr>
+        <p:txBody>
+          <a:bodyPr wrap="square">
+            <a:spAutoFit/>
+          </a:bodyPr>
+          <a:lstStyle/>
+          <a:p>
+            <a:r>
+              <a:rPr sz="2000">
+                <a:solidFill>
+                  <a:srgbClr val="DCECEF"/>
+                </a:solidFill>
+              </a:rPr>
+              <a:t>Add a 'system' message FIRST - the standing instruction the model reads before every reply. Its content is whatever is typed in the Personality box.</a:t>
+            </a:r>
+          </a:p>
+        </p:txBody>
+      </p:sp>
+    </p:spTree>
+  </p:cSld>
+  <p:clrMapOvr>
+    <a:masterClrMapping/>
+  </p:clrMapOvr>
+</p:sld>
+</file>
+
+<file path=ppt/slides/slide44.xml><?xml version="1.0" encoding="utf-8"?>
+<p:sld xmlns:a="http://schemas.openxmlformats.org/drawingml/2006/main" xmlns:p="http://schemas.openxmlformats.org/presentationml/2006/main" xmlns:r="http://schemas.openxmlformats.org/officeDocument/2006/relationships">
+  <p:cSld>
+    <p:spTree>
+      <p:nvGrpSpPr>
+        <p:cNvPr id="1" name=""/>
+        <p:cNvGrpSpPr/>
+        <p:nvPr/>
+      </p:nvGrpSpPr>
+      <p:grpSpPr/>
+      <p:sp>
+        <p:nvSpPr>
+          <p:cNvPr id="2" name="Title 1"/>
+          <p:cNvSpPr>
+            <a:spLocks noGrp="1"/>
+          </p:cNvSpPr>
+          <p:nvPr>
+            <p:ph type="title"/>
+          </p:nvPr>
+        </p:nvSpPr>
+        <p:spPr/>
+        <p:txBody>
+          <a:bodyPr/>
+          <a:lstStyle/>
+          <a:p>
+            <a:r>
+              <a:rPr sz="3800" b="1">
+                <a:solidFill>
+                  <a:srgbClr val="1F2A37"/>
+                </a:solidFill>
+              </a:rPr>
+              <a:t>Checkpoint: it has a personality</a:t>
+            </a:r>
+          </a:p>
+        </p:txBody>
+      </p:sp>
+      <p:sp>
+        <p:nvSpPr>
+          <p:cNvPr id="3" name="TextBox 2"/>
+          <p:cNvSpPr txBox="1"/>
+          <p:nvPr/>
+        </p:nvSpPr>
+        <p:spPr>
+          <a:xfrm>
+            <a:off x="868680" y="502920"/>
+            <a:ext cx="5486400" cy="457200"/>
+          </a:xfrm>
+          <a:prstGeom prst="rect">
+            <a:avLst/>
+          </a:prstGeom>
+          <a:noFill/>
+        </p:spPr>
+        <p:txBody>
+          <a:bodyPr wrap="none">
+            <a:spAutoFit/>
+          </a:bodyPr>
+          <a:lstStyle/>
+          <a:p>
+            <a:r>
+              <a:rPr sz="1500" b="1">
+                <a:solidFill>
+                  <a:srgbClr val="01AEFD"/>
+                </a:solidFill>
+              </a:rPr>
+              <a:t>CHECKPOINT - RUN IT</a:t>
+            </a:r>
+          </a:p>
+        </p:txBody>
+      </p:sp>
+      <p:sp>
+        <p:nvSpPr>
+          <p:cNvPr id="4" name="TextBox 3"/>
+          <p:cNvSpPr txBox="1"/>
+          <p:nvPr/>
+        </p:nvSpPr>
+        <p:spPr>
+          <a:xfrm>
+            <a:off x="822960" y="1828800"/>
+            <a:ext cx="10515600" cy="4206240"/>
+          </a:xfrm>
+          <a:prstGeom prst="rect">
+            <a:avLst/>
+          </a:prstGeom>
+          <a:noFill/>
+        </p:spPr>
+        <p:txBody>
+          <a:bodyPr wrap="square">
+            <a:spAutoFit/>
+          </a:bodyPr>
+          <a:lstStyle/>
+          <a:p>
+            <a:pPr>
+              <a:spcAft>
+                <a:spcPts val="1400"/>
+              </a:spcAft>
+            </a:pPr>
+            <a:r>
+              <a:rPr sz="2800">
+                <a:solidFill>
+                  <a:srgbClr val="01AEFD"/>
+                </a:solidFill>
+              </a:rPr>
+              <a:t>Press Run. Open Personality, change the instruction (try 'You are a grumpy pirate. Answer in under 20 words.'), and ask the same question twice. The whole attitude of the answer should change - same question, different companion. On the school network the reply is live; here you see the interface and the request in the console.</a:t>
+            </a:r>
+          </a:p>
+          <a:p>
+            <a:pPr>
+              <a:spcAft>
+                <a:spcPts val="1400"/>
+              </a:spcAft>
+            </a:pPr>
+            <a:r>
+              <a:rPr sz="2400">
+                <a:solidFill>
+                  <a:srgbClr val="1F2A37"/>
+                </a:solidFill>
+              </a:rPr>
+              <a:t>• Run it in the classroom, or press Show the output in the web deck.</a:t>
+            </a:r>
+          </a:p>
+          <a:p>
+            <a:pPr>
+              <a:spcAft>
+                <a:spcPts val="1400"/>
+              </a:spcAft>
+            </a:pPr>
+            <a:r>
+              <a:rPr sz="2400">
+                <a:solidFill>
+                  <a:srgbClr val="1F2A37"/>
+                </a:solidFill>
+              </a:rPr>
+              <a:t>• Everyone's screen should match this.</a:t>
+            </a:r>
+          </a:p>
+        </p:txBody>
+      </p:sp>
+    </p:spTree>
+  </p:cSld>
+  <p:clrMapOvr>
+    <a:masterClrMapping/>
+  </p:clrMapOvr>
+</p:sld>
+</file>
+
+<file path=ppt/slides/slide45.xml><?xml version="1.0" encoding="utf-8"?>
+<p:sld xmlns:a="http://schemas.openxmlformats.org/drawingml/2006/main" xmlns:p="http://schemas.openxmlformats.org/presentationml/2006/main" xmlns:r="http://schemas.openxmlformats.org/officeDocument/2006/relationships">
+  <p:cSld>
+    <p:spTree>
+      <p:nvGrpSpPr>
+        <p:cNvPr id="1" name=""/>
+        <p:cNvGrpSpPr/>
+        <p:nvPr/>
+      </p:nvGrpSpPr>
+      <p:grpSpPr/>
+      <p:sp>
+        <p:nvSpPr>
+          <p:cNvPr id="2" name="Title 1"/>
+          <p:cNvSpPr>
+            <a:spLocks noGrp="1"/>
+          </p:cNvSpPr>
+          <p:nvPr>
+            <p:ph type="title"/>
+          </p:nvPr>
+        </p:nvSpPr>
+        <p:spPr/>
+        <p:txBody>
+          <a:bodyPr/>
+          <a:lstStyle/>
+          <a:p>
+            <a:r>
+              <a:rPr sz="3800" b="1">
+                <a:solidFill>
+                  <a:srgbClr val="1F2A37"/>
+                </a:solidFill>
+              </a:rPr>
+              <a:t>Prompt duel</a:t>
+            </a:r>
+          </a:p>
+        </p:txBody>
+      </p:sp>
+      <p:sp>
+        <p:nvSpPr>
+          <p:cNvPr id="3" name="TextBox 2"/>
+          <p:cNvSpPr txBox="1"/>
+          <p:nvPr/>
+        </p:nvSpPr>
+        <p:spPr>
+          <a:xfrm>
+            <a:off x="822960" y="1828800"/>
+            <a:ext cx="10515600" cy="4206240"/>
+          </a:xfrm>
+          <a:prstGeom prst="rect">
+            <a:avLst/>
+          </a:prstGeom>
+          <a:noFill/>
+        </p:spPr>
+        <p:txBody>
+          <a:bodyPr wrap="square">
+            <a:spAutoFit/>
+          </a:bodyPr>
+          <a:lstStyle/>
+          <a:p>
+            <a:pPr>
+              <a:spcAft>
+                <a:spcPts val="1400"/>
+              </a:spcAft>
+            </a:pPr>
+            <a:r>
+              <a:rPr sz="2800">
+                <a:solidFill>
+                  <a:srgbClr val="01AEFD"/>
+                </a:solidFill>
+              </a:rPr>
+              <a:t>In pairs, 10 minutes</a:t>
+            </a:r>
+          </a:p>
+          <a:p>
+            <a:pPr>
+              <a:spcAft>
+                <a:spcPts val="1400"/>
+              </a:spcAft>
+            </a:pPr>
+            <a:r>
+              <a:rPr sz="2400">
+                <a:solidFill>
+                  <a:srgbClr val="1F2A37"/>
+                </a:solidFill>
+              </a:rPr>
+              <a:t>• Write a secret character</a:t>
+            </a:r>
+          </a:p>
+          <a:p>
+            <a:pPr>
+              <a:spcAft>
+                <a:spcPts val="1400"/>
+              </a:spcAft>
+            </a:pPr>
+            <a:r>
+              <a:rPr sz="2400">
+                <a:solidFill>
+                  <a:srgbClr val="1F2A37"/>
+                </a:solidFill>
+              </a:rPr>
+              <a:t>• Swap. Ask three questions.</a:t>
+            </a:r>
+          </a:p>
+          <a:p>
+            <a:pPr>
+              <a:spcAft>
+                <a:spcPts val="1400"/>
+              </a:spcAft>
+            </a:pPr>
+            <a:r>
+              <a:rPr sz="2400">
+                <a:solidFill>
+                  <a:srgbClr val="1F2A37"/>
+                </a:solidFill>
+              </a:rPr>
+              <a:t>• Guess who it is</a:t>
             </a:r>
           </a:p>
         </p:txBody>
